--- a/slides/datasets-in-10-minutes-twitter-aae.pptx
+++ b/slides/datasets-in-10-minutes-twitter-aae.pptx
@@ -49,7 +49,6 @@
     <p:sldId id="297" r:id="rId47"/>
     <p:sldId id="298" r:id="rId48"/>
     <p:sldId id="299" r:id="rId49"/>
-    <p:sldId id="300" r:id="rId50"/>
     <p:sldId id="301" r:id="rId51"/>
     <p:sldId id="302" r:id="rId52"/>
     <p:sldId id="303" r:id="rId53"/>
@@ -7407,7 +7406,7 @@
                 <a:ea typeface="Noto Sans CJK JP"/>
                 <a:cs typeface="Noto Sans"/>
               </a:rPr>
-              <a:t>実例3：white側にもくだけた会話がある</a:t>
+              <a:t>実例3：white側にも語りかけの表現がある</a:t>
             </a:r>
           </a:p>
         </p:txBody>
@@ -7522,8 +7521,8 @@
         </p:nvSpPr>
         <p:spPr>
           <a:xfrm>
-            <a:off x="548640" y="1673352"/>
-            <a:ext cx="8046720" cy="601598"/>
+            <a:off x="548640" y="1756833"/>
+            <a:ext cx="8046720" cy="465667"/>
           </a:xfrm>
           <a:prstGeom prst="rect">
             <a:avLst/>
@@ -7551,7 +7550,7 @@
           </a:fontRef>
         </p:style>
         <p:txBody>
-          <a:bodyPr rtlCol="0" anchor="t" wrap="square" lIns="177800" rIns="177800" tIns="101600" bIns="127000">
+          <a:bodyPr rtlCol="0" anchor="t" wrap="square" lIns="177800" rIns="177800" tIns="18119" bIns="127000">
             <a:noAutofit/>
           </a:bodyPr>
           <a:lstStyle/>
@@ -7596,7 +7595,7 @@
         </p:nvSpPr>
         <p:spPr>
           <a:xfrm>
-            <a:off x="594360" y="2476119"/>
+            <a:off x="594360" y="2423670"/>
             <a:ext cx="7955279" cy="228600"/>
           </a:xfrm>
           <a:prstGeom prst="rect">
@@ -7650,7 +7649,7 @@
         </p:nvSpPr>
         <p:spPr>
           <a:xfrm>
-            <a:off x="594360" y="2777871"/>
+            <a:off x="594360" y="2725422"/>
             <a:ext cx="7955279" cy="378206"/>
           </a:xfrm>
           <a:prstGeom prst="rect">
@@ -7704,7 +7703,7 @@
         </p:nvSpPr>
         <p:spPr>
           <a:xfrm>
-            <a:off x="594360" y="3338957"/>
+            <a:off x="594360" y="3286508"/>
             <a:ext cx="7955279" cy="594360"/>
           </a:xfrm>
           <a:prstGeom prst="rect">
@@ -7799,22 +7798,8 @@
                 <a:ea typeface="Noto Sans CJK JP"/>
                 <a:cs typeface="Noto Sans"/>
               </a:rPr>
-              <a:t>[1] Stanford CRFM, HELM Classic v0.4.0, TwitterAAE. 公開実行suite v0.3.0。 instance: white/id12363（HELM内ID）</a:t>
-            </a:r>
-          </a:p>
-          <a:p>
-            <a:pPr>
-              <a:lnSpc>
-                <a:spcPts val="940"/>
-              </a:lnSpc>
-              <a:buNone/>
-              <a:defRPr sz="810" b="0">
-                <a:solidFill>
-                  <a:srgbClr val="303437"/>
-                </a:solidFill>
-                <a:latin typeface="Noto Sans"/>
-              </a:defRPr>
-            </a:pPr>
+              <a:t>[1] Stanford CRFM. HELM Classic v0.4.0 — TwitterAAE.  </a:t>
+            </a:r>
             <a:r>
               <a:rPr sz="810" b="0" lang="ja-JP" altLang="en-US">
                 <a:solidFill>
@@ -8161,7 +8146,7 @@
                 <a:ea typeface="Noto Sans CJK JP"/>
                 <a:cs typeface="Noto Sans"/>
               </a:rPr>
-              <a:t>フォロワー1,000人以上の著者、3個以上のハッシュタグ、http・follow・mentionを含む投稿、リツイートなどを除いた。</a:t>
+              <a:t>フォロワーの多いアカウントや、ハッシュタグの多い投稿、リンク・宣伝語を含む投稿、リツイートなどを除いた。</a:t>
             </a:r>
           </a:p>
         </p:txBody>
@@ -8571,7 +8556,7 @@
                 <a:ea typeface="Noto Sans CJK JP"/>
                 <a:cs typeface="Noto Sans"/>
               </a:rPr>
-              <a:t>これは近隣地域の人口構成を介した遠隔教師信号。個人に人種を尋ねた注釈は付けていない。</a:t>
+              <a:t>近隣地域の人口構成を、投稿の言語的特徴を推定する手掛かりにする。</a:t>
             </a:r>
           </a:p>
         </p:txBody>
@@ -8873,7 +8858,7 @@
                 <a:ea typeface="Noto Sans CJK JP"/>
                 <a:cs typeface="Noto Sans"/>
               </a:rPr>
-              <a:t>同じ人が投稿ごとに異なる表現を使える設計。特定のキーワードを一度使っただけで、その人の全投稿を同じ言語に固定しない。</a:t>
+              <a:t>同じ人でも、投稿によって使う表現は変わる。ユーザー単位と投稿単位の混合比で、その変化を表現する。</a:t>
             </a:r>
           </a:p>
         </p:txBody>
@@ -9019,7 +9004,7 @@
                 <a:ea typeface="Noto Sans CJK JP"/>
                 <a:cs typeface="Noto Sans"/>
               </a:rPr>
-              <a:t>言語的特徴との対応を確かめた</a:t>
+              <a:t>AAEに特徴的な文法が多く現れる</a:t>
             </a:r>
           </a:p>
         </p:txBody>
@@ -9936,7 +9921,7 @@
                 <a:ea typeface="Noto Sans CJK JP"/>
                 <a:cs typeface="Noto Sans"/>
               </a:rPr>
-              <a:t>2016年の集合とHELMの集合は作り方が違う</a:t>
+              <a:t>HELMは、投稿ごとの言語的特徴で集合を作る</a:t>
             </a:r>
           </a:p>
         </p:txBody>
@@ -9999,7 +9984,7 @@
         </p:nvGraphicFramePr>
         <p:xfrm>
           <a:off x="548640" y="1508760"/>
-          <a:ext cx="8046720" cy="1729994"/>
+          <a:ext cx="8046720" cy="2176272"/>
         </p:xfrm>
         <a:graphic>
           <a:graphicData uri="http://schemas.openxmlformats.org/drawingml/2006/table">
@@ -10009,7 +9994,7 @@
                 <a:gridCol w="2331720"/>
                 <a:gridCol w="5715000"/>
               </a:tblGrid>
-              <a:tr h="420624">
+              <a:tr h="438912">
                 <a:tc>
                   <a:txBody>
                     <a:bodyPr wrap="square">
@@ -10123,7 +10108,7 @@
                   </a:tcPr>
                 </a:tc>
               </a:tr>
-              <a:tr h="654685">
+              <a:tr h="868680">
                 <a:tc>
                   <a:txBody>
                     <a:bodyPr wrap="square">
@@ -10205,7 +10190,7 @@
                           <a:ea typeface="Noto Sans CJK JP"/>
                           <a:cs typeface="Noto Sans"/>
                         </a:rPr>
-                        <a:t>ユーザーの対応言語比率80%以上、他2成分の合計5%未満。AA約83万／white約730万投稿。</a:t>
+                        <a:t>ユーザーの対応言語成分80%以上、ヒスパニック系・アジア系は計5%未満。AA約83万／white約730万投稿。</a:t>
                       </a:r>
                     </a:p>
                   </a:txBody>
@@ -10231,7 +10216,7 @@
                   </a:tcPr>
                 </a:tc>
               </a:tr>
-              <a:tr h="654685">
+              <a:tr h="868680">
                 <a:tc>
                   <a:txBody>
                     <a:bodyPr wrap="square">
@@ -10351,8 +10336,8 @@
         </p:nvSpPr>
         <p:spPr>
           <a:xfrm>
-            <a:off x="594360" y="3439922"/>
-            <a:ext cx="7955279" cy="658368"/>
+            <a:off x="594360" y="3886200"/>
+            <a:ext cx="7955279" cy="548640"/>
           </a:xfrm>
           <a:prstGeom prst="rect">
             <a:avLst/>
@@ -10392,7 +10377,7 @@
                 <a:ea typeface="Noto Sans CJK JP"/>
                 <a:cs typeface="Noto Sans"/>
               </a:rPr>
-              <a:t>HELMの公開コードが記載する二段階の抽出。2016年の解析集合をそのまま5万件にしたものではない。</a:t>
+              <a:t>2016年の分析はユーザーごとに選び、HELMは投稿ごとの混合比で選ぶ。</a:t>
             </a:r>
           </a:p>
         </p:txBody>
@@ -10446,7 +10431,7 @@
                 <a:ea typeface="Noto Sans CJK JP"/>
                 <a:cs typeface="Noto Sans"/>
               </a:rPr>
-              <a:t>[1] Stanford CRFM, HELM TwitterAAEScenario. AA／whiteの抽出とtestインスタンス。2026-10-18確認。</a:t>
+              <a:t>[1] Stanford CRFM, HELM TwitterAAEScenario. </a:t>
             </a:r>
           </a:p>
           <a:p>
@@ -10462,6 +10447,17 @@
                 <a:latin typeface="Noto Sans"/>
               </a:defRPr>
             </a:pPr>
+            <a:r>
+              <a:rPr sz="810" b="0" lang="ja-JP" altLang="en-US">
+                <a:solidFill>
+                  <a:srgbClr val="626669"/>
+                </a:solidFill>
+                <a:latin typeface="Noto Sans"/>
+                <a:ea typeface="Noto Sans CJK JP"/>
+                <a:cs typeface="Noto Sans"/>
+              </a:rPr>
+              <a:t/>
+            </a:r>
             <a:r>
               <a:rPr sz="810" b="0" lang="ja-JP" altLang="en-US">
                 <a:solidFill>
@@ -10652,7 +10648,7 @@
                 <a:ea typeface="Noto Sans CJK JP"/>
                 <a:cs typeface="Noto Sans"/>
               </a:rPr>
-              <a:t>低いbits per byteほど投稿を予測できる</a:t>
+              <a:t>BPBが低いほど、投稿を予測しやすい</a:t>
             </a:r>
           </a:p>
         </p:txBody>
@@ -10754,7 +10750,7 @@
                 <a:ea typeface="Noto Sans CJK JP"/>
                 <a:cs typeface="Noto Sans"/>
               </a:rPr>
-              <a:t>言語モデルは、先行する文字列を条件に各トークンの確率を付ける。予測対象の対数確率を合計し、そのbyte数で割ってbitsへ換算する。</a:t>
+              <a:t>言語モデルは、先行する文字列を条件に各トークンの確率を付ける。予測対象の負の対数確率を合計し、そのbyte数で割ってbitsへ換算する。</a:t>
             </a:r>
           </a:p>
         </p:txBody>
@@ -10916,7 +10912,7 @@
                 <a:ea typeface="Noto Sans CJK JP"/>
                 <a:cs typeface="Noto Sans"/>
               </a:rPr>
-              <a:t>[1] Stanford CRFM, HELM BasicMetrics. 対数確率・byte数からの集約。2026-10-18確認。</a:t>
+              <a:t>[1] Stanford CRFM, HELM BasicMetrics. </a:t>
             </a:r>
           </a:p>
           <a:p>
@@ -10932,6 +10928,17 @@
                 <a:latin typeface="Noto Sans"/>
               </a:defRPr>
             </a:pPr>
+            <a:r>
+              <a:rPr sz="810" b="0" lang="ja-JP" altLang="en-US">
+                <a:solidFill>
+                  <a:srgbClr val="626669"/>
+                </a:solidFill>
+                <a:latin typeface="Noto Sans"/>
+                <a:ea typeface="Noto Sans CJK JP"/>
+                <a:cs typeface="Noto Sans"/>
+              </a:rPr>
+              <a:t/>
+            </a:r>
             <a:r>
               <a:rPr sz="810" b="0" lang="ja-JP" altLang="en-US">
                 <a:solidFill>
@@ -11790,7 +11797,7 @@
                 <a:ea typeface="Noto Sans CJK JP"/>
                 <a:cs typeface="Noto Sans"/>
               </a:rPr>
-              <a:t>BPB、低いほど良い。Classic v0.4.0収録・suite v0.3.0、各条件1,000投稿、提示例0、各1試行。</a:t>
+              <a:t>BPB（低いほど良い）。2022年公開の2モデルを、AA・white各1,000投稿で比較。提示例なし。</a:t>
             </a:r>
           </a:p>
         </p:txBody>
@@ -11844,18 +11851,7 @@
                 <a:ea typeface="Noto Sans CJK JP"/>
                 <a:cs typeface="Noto Sans"/>
               </a:rPr>
-              <a:t>[1] Stanford CRFM, HELM Classic v0.4.0, TwitterAAE. 公開実行suite v0.3.0。</a:t>
-            </a:r>
-            <a:r>
-              <a:rPr sz="810" b="0" lang="ja-JP" altLang="en-US">
-                <a:solidFill>
-                  <a:srgbClr val="626669"/>
-                </a:solidFill>
-                <a:latin typeface="Noto Sans"/>
-                <a:ea typeface="Noto Sans CJK JP"/>
-                <a:cs typeface="Noto Sans"/>
-              </a:rPr>
-              <a:t>  </a:t>
+              <a:t>[1] Stanford CRFM. HELM Classic v0.4.0 — TwitterAAE.  </a:t>
             </a:r>
             <a:r>
               <a:rPr sz="810" b="0" lang="ja-JP" altLang="en-US">
@@ -12059,18 +12055,7 @@
                 <a:ea typeface="Noto Sans CJK JP"/>
                 <a:cs typeface="Noto Sans"/>
               </a:rPr>
-              <a:t>[1] UMass SLANG Lab (n.d.), TwitterAAE: Research on African-American English on Twitter. 2026-10-18参照。</a:t>
-            </a:r>
-            <a:r>
-              <a:rPr sz="810" b="0" lang="ja-JP" altLang="en-US">
-                <a:solidFill>
-                  <a:srgbClr val="626669"/>
-                </a:solidFill>
-                <a:latin typeface="Noto Sans"/>
-                <a:ea typeface="Noto Sans CJK JP"/>
-                <a:cs typeface="Noto Sans"/>
-              </a:rPr>
-              <a:t>  </a:t>
+              <a:t>[1] UMass SLANG Lab (n.d.), TwitterAAE: Research on African-American English on Twitter. </a:t>
             </a:r>
             <a:r>
               <a:rPr sz="810" b="0" lang="ja-JP" altLang="en-US">
@@ -12148,7 +12133,7 @@
                 <a:ea typeface="Noto Sans CJK JP"/>
                 <a:cs typeface="Noto Sans"/>
               </a:rPr>
-              <a:t>得点差は、二つの抽出集合での予測の差</a:t>
+              <a:t>AA側の投稿では、両モデルとも予測が難しい</a:t>
             </a:r>
           </a:p>
         </p:txBody>
@@ -12304,21 +12289,21 @@
                 <a:ea typeface="Noto Sans CJK JP"/>
                 <a:cs typeface="Noto Sans"/>
               </a:rPr>
-              <a:t>集合にはつづり、話題、長さ、会話の形式などの違いも含まれる。同じ内容だけを方言で書き換えた対訳実験ではない。</a:t>
-            </a:r>
-          </a:p>
-        </p:txBody>
-      </p:sp>
-      <p:sp>
-        <p:nvSpPr>
-          <p:cNvPr id="6" name="TextBox 5"/>
+              <a:t>二つの集合には、つづり・話題・長さ・会話の形式などの違いがある。得点差には、こうした内容や表現の違いが含まれる。</a:t>
+            </a:r>
+          </a:p>
+        </p:txBody>
+      </p:sp>
+      <p:sp>
+        <p:nvSpPr>
+          <p:cNvPr id="7" name="sources"/>
           <p:cNvSpPr txBox="1"/>
           <p:nvPr/>
         </p:nvSpPr>
         <p:spPr>
           <a:xfrm>
-            <a:off x="594360" y="3153156"/>
-            <a:ext cx="7955279" cy="680466"/>
+            <a:off x="502920" y="4700016"/>
+            <a:ext cx="8183879" cy="530352"/>
           </a:xfrm>
           <a:prstGeom prst="rect">
             <a:avLst/>
@@ -12333,60 +12318,6 @@
           <a:p>
             <a:pPr algn="l">
               <a:lnSpc>
-                <a:spcPts val="2499"/>
-              </a:lnSpc>
-              <a:spcBef>
-                <a:spcPts val="0"/>
-              </a:spcBef>
-              <a:spcAft>
-                <a:spcPts val="0"/>
-              </a:spcAft>
-              <a:buNone/>
-              <a:defRPr sz="2100" b="0">
-                <a:solidFill>
-                  <a:srgbClr val="303437"/>
-                </a:solidFill>
-                <a:latin typeface="Noto Sans"/>
-              </a:defRPr>
-            </a:pPr>
-            <a:r>
-              <a:rPr sz="2100" b="0" lang="ja-JP" altLang="en-US">
-                <a:solidFill>
-                  <a:srgbClr val="303437"/>
-                </a:solidFill>
-                <a:latin typeface="Noto Sans"/>
-                <a:ea typeface="Noto Sans CJK JP"/>
-                <a:cs typeface="Noto Sans"/>
-              </a:rPr>
-              <a:t>この値が示すのは公開実行時の投稿集合での差であり、2026年のモデルの順位ではない。</a:t>
-            </a:r>
-          </a:p>
-        </p:txBody>
-      </p:sp>
-      <p:sp>
-        <p:nvSpPr>
-          <p:cNvPr id="7" name="sources"/>
-          <p:cNvSpPr txBox="1"/>
-          <p:nvPr/>
-        </p:nvSpPr>
-        <p:spPr>
-          <a:xfrm>
-            <a:off x="502920" y="4700016"/>
-            <a:ext cx="8183879" cy="530352"/>
-          </a:xfrm>
-          <a:prstGeom prst="rect">
-            <a:avLst/>
-          </a:prstGeom>
-          <a:noFill/>
-        </p:spPr>
-        <p:txBody>
-          <a:bodyPr wrap="square" lIns="0" rIns="0" tIns="0" bIns="0">
-            <a:noAutofit/>
-          </a:bodyPr>
-          <a:lstStyle/>
-          <a:p>
-            <a:pPr algn="l">
-              <a:lnSpc>
                 <a:spcPts val="940"/>
               </a:lnSpc>
               <a:spcBef>
@@ -12412,18 +12343,7 @@
                 <a:ea typeface="Noto Sans CJK JP"/>
                 <a:cs typeface="Noto Sans"/>
               </a:rPr>
-              <a:t>[1] Stanford CRFM, HELM Classic v0.4.0, TwitterAAE. 公開実行suite v0.3.0。</a:t>
-            </a:r>
-            <a:r>
-              <a:rPr sz="810" b="0" lang="ja-JP" altLang="en-US">
-                <a:solidFill>
-                  <a:srgbClr val="626669"/>
-                </a:solidFill>
-                <a:latin typeface="Noto Sans"/>
-                <a:ea typeface="Noto Sans CJK JP"/>
-                <a:cs typeface="Noto Sans"/>
-              </a:rPr>
-              <a:t>  </a:t>
+              <a:t>[1] Stanford CRFM. HELM Classic v0.4.0 — TwitterAAE.  </a:t>
             </a:r>
             <a:r>
               <a:rPr sz="810" b="0" lang="ja-JP" altLang="en-US">
@@ -13181,7 +13101,7 @@
                 <a:ea typeface="Noto Sans CJK JP"/>
                 <a:cs typeface="Noto Sans"/>
               </a:rPr>
-              <a:t>HELM Classicは別途抽出した投稿を言語モデリングに用いる。2026-10-18確認の公開実装にもAA／whiteの両条件が残る。</a:t>
+              <a:t>HELM Classicでは、同じ元コーパスから投稿を別途抽出し、言語モデルの予測しやすさを比べる評価へ広がった。</a:t>
             </a:r>
           </a:p>
         </p:txBody>
@@ -13259,6 +13179,17 @@
                 <a:latin typeface="Noto Sans"/>
                 <a:ea typeface="Noto Sans CJK JP"/>
                 <a:cs typeface="Noto Sans"/>
+              </a:rPr>
+              <a:t/>
+            </a:r>
+            <a:r>
+              <a:rPr sz="810" b="0" lang="ja-JP" altLang="en-US">
+                <a:solidFill>
+                  <a:srgbClr val="626669"/>
+                </a:solidFill>
+                <a:latin typeface="Noto Sans"/>
+                <a:ea typeface="Noto Sans CJK JP"/>
+                <a:cs typeface="Noto Sans"/>
                 <a:hlinkClick r:id="rId2"/>
               </a:rPr>
               <a:t>https://aclanthology.org/P18-1131/</a:t>
@@ -13289,7 +13220,7 @@
                 <a:ea typeface="Noto Sans CJK JP"/>
                 <a:cs typeface="Noto Sans"/>
               </a:rPr>
-              <a:t>[2] Stanford CRFM, HELM TwitterAAEScenario. AA／whiteの抽出とtestインスタンス。2026-10-18確認。</a:t>
+              <a:t>[2] Stanford CRFM, HELM TwitterAAEScenario. </a:t>
             </a:r>
           </a:p>
           <a:p>
@@ -13305,6 +13236,17 @@
                 <a:latin typeface="Noto Sans"/>
               </a:defRPr>
             </a:pPr>
+            <a:r>
+              <a:rPr sz="810" b="0" lang="ja-JP" altLang="en-US">
+                <a:solidFill>
+                  <a:srgbClr val="626669"/>
+                </a:solidFill>
+                <a:latin typeface="Noto Sans"/>
+                <a:ea typeface="Noto Sans CJK JP"/>
+                <a:cs typeface="Noto Sans"/>
+              </a:rPr>
+              <a:t/>
+            </a:r>
             <a:r>
               <a:rPr sz="810" b="0" lang="ja-JP" altLang="en-US">
                 <a:solidFill>
@@ -13381,7 +13323,7 @@
                 <a:ea typeface="Noto Sans CJK JP"/>
                 <a:cs typeface="Noto Sans"/>
               </a:rPr>
-              <a:t>公式配布とHELMの公開記録を使い分ける</a:t>
+              <a:t>研究用コーパスと評価結果を公式サイトで入手する</a:t>
             </a:r>
           </a:p>
         </p:txBody>
@@ -13537,7 +13479,7 @@
                 <a:ea typeface="Noto Sans CJK JP"/>
                 <a:cs typeface="Noto Sans"/>
               </a:rPr>
-              <a:t>HELMの5万件CSVはCodaLabのURLを参照する。今回の取得では双方503となったが、公開実行の1,000投稿ずつと得点は取得できた。</a:t>
+              <a:t>HELMはAA・white各5万投稿のCSVを案内し、Classicの評価ページで、実際に使った投稿とモデルの得点を公開している。</a:t>
             </a:r>
           </a:p>
         </p:txBody>
@@ -13591,7 +13533,7 @@
                 <a:ea typeface="Noto Sans CJK JP"/>
                 <a:cs typeface="Noto Sans"/>
               </a:rPr>
-              <a:t>推定モデルのコードにはMITライセンスがある。投稿本文の権利や再配布範囲は、コードのMITライセンスとは別に扱う。</a:t>
+              <a:t>推定モデルのコードはMITライセンス。投稿本文の利用は、公式サイトの研究目的という条件と、元投稿の権利を確認する。</a:t>
             </a:r>
           </a:p>
         </p:txBody>
@@ -13645,18 +13587,7 @@
                 <a:ea typeface="Noto Sans CJK JP"/>
                 <a:cs typeface="Noto Sans"/>
               </a:rPr>
-              <a:t>[1] UMass SLANG Lab (n.d.), TwitterAAE: Research on African-American English on Twitter. 2026-10-18参照。</a:t>
-            </a:r>
-            <a:r>
-              <a:rPr sz="810" b="0" lang="ja-JP" altLang="en-US">
-                <a:solidFill>
-                  <a:srgbClr val="626669"/>
-                </a:solidFill>
-                <a:latin typeface="Noto Sans"/>
-                <a:ea typeface="Noto Sans CJK JP"/>
-                <a:cs typeface="Noto Sans"/>
-              </a:rPr>
-              <a:t>  </a:t>
+              <a:t>[1] UMass SLANG Lab (n.d.), TwitterAAE: Research on African-American English on Twitter. </a:t>
             </a:r>
             <a:r>
               <a:rPr sz="810" b="0" lang="ja-JP" altLang="en-US">
@@ -13890,7 +13821,7 @@
                 <a:ea typeface="Noto Sans CJK JP"/>
                 <a:cs typeface="Noto Sans"/>
               </a:rPr>
-              <a:t>HELMは、同じコーパスから二つの言語抽出集合を作り、それぞれの投稿に対するBPBを比べる。</a:t>
+              <a:t>HELMは、同じコーパスから言語的特徴で選んだ二つの投稿集合を作り、それぞれの投稿に対するBPBを比べる。</a:t>
             </a:r>
           </a:p>
         </p:txBody>
@@ -13944,7 +13875,7 @@
                 <a:ea typeface="Noto Sans CJK JP"/>
                 <a:cs typeface="Noto Sans"/>
               </a:rPr>
-              <a:t>元の集合の作り方と公開実行の範囲を押さえると、投稿の予測しにくさと、既存NLP処理の取りこぼしを具体的に捉えられる。</a:t>
+              <a:t>言語モデルの予測しやすさと、言語同定による取りこぼしを調べることで、NLPが扱える会話の範囲を見直せる。</a:t>
             </a:r>
           </a:p>
         </p:txBody>
@@ -14284,7 +14215,7 @@
                 <a:ea typeface="Noto Sans CJK JP"/>
                 <a:cs typeface="Noto Sans"/>
               </a:rPr>
-              <a:t>版・実行条件の補足</a:t>
+              <a:t>入力と指標の補足</a:t>
             </a:r>
           </a:p>
           <a:p>
@@ -14657,8 +14588,8 @@
         </p:nvSpPr>
         <p:spPr>
           <a:xfrm>
-            <a:off x="548640" y="1673352"/>
-            <a:ext cx="8046720" cy="601598"/>
+            <a:off x="548640" y="1756833"/>
+            <a:ext cx="8046720" cy="465667"/>
           </a:xfrm>
           <a:prstGeom prst="rect">
             <a:avLst/>
@@ -14686,7 +14617,7 @@
           </a:fontRef>
         </p:style>
         <p:txBody>
-          <a:bodyPr rtlCol="0" anchor="t" wrap="square" lIns="177800" rIns="177800" tIns="101600" bIns="127000">
+          <a:bodyPr rtlCol="0" anchor="t" wrap="square" lIns="177800" rIns="177800" tIns="18119" bIns="127000">
             <a:noAutofit/>
           </a:bodyPr>
           <a:lstStyle/>
@@ -14731,7 +14662,7 @@
         </p:nvSpPr>
         <p:spPr>
           <a:xfrm>
-            <a:off x="594360" y="2476119"/>
+            <a:off x="594360" y="2423670"/>
             <a:ext cx="7955279" cy="228600"/>
           </a:xfrm>
           <a:prstGeom prst="rect">
@@ -14785,7 +14716,7 @@
         </p:nvSpPr>
         <p:spPr>
           <a:xfrm>
-            <a:off x="594360" y="2777871"/>
+            <a:off x="594360" y="2725422"/>
             <a:ext cx="7955279" cy="378206"/>
           </a:xfrm>
           <a:prstGeom prst="rect">
@@ -14839,7 +14770,7 @@
         </p:nvSpPr>
         <p:spPr>
           <a:xfrm>
-            <a:off x="594360" y="3338957"/>
+            <a:off x="594360" y="3286508"/>
             <a:ext cx="7955279" cy="594360"/>
           </a:xfrm>
           <a:prstGeom prst="rect">
@@ -14880,7 +14811,7 @@
                 <a:ea typeface="Noto Sans CJK JP"/>
                 <a:cs typeface="Noto Sans"/>
               </a:rPr>
-              <a:t>何を数えているかは、この投稿だけでは分からない。</a:t>
+              <a:t>終わった数と残りの数を、短い対比で伝える。</a:t>
             </a:r>
           </a:p>
         </p:txBody>
@@ -14934,22 +14865,8 @@
                 <a:ea typeface="Noto Sans CJK JP"/>
                 <a:cs typeface="Noto Sans"/>
               </a:rPr>
-              <a:t>[1] Stanford CRFM, HELM Classic v0.4.0, TwitterAAE. 公開実行suite v0.3.0。 instance: aa/id42642（HELM内ID）</a:t>
-            </a:r>
-          </a:p>
-          <a:p>
-            <a:pPr>
-              <a:lnSpc>
-                <a:spcPts val="940"/>
-              </a:lnSpc>
-              <a:buNone/>
-              <a:defRPr sz="810" b="0">
-                <a:solidFill>
-                  <a:srgbClr val="303437"/>
-                </a:solidFill>
-                <a:latin typeface="Noto Sans"/>
-              </a:defRPr>
-            </a:pPr>
+              <a:t>[1] Stanford CRFM. HELM Classic v0.4.0 — TwitterAAE.  </a:t>
+            </a:r>
             <a:r>
               <a:rPr sz="810" b="0" lang="ja-JP" altLang="en-US">
                 <a:solidFill>
@@ -15398,8 +15315,8 @@
         </p:nvSpPr>
         <p:spPr>
           <a:xfrm>
-            <a:off x="548640" y="1673352"/>
-            <a:ext cx="8046720" cy="601598"/>
+            <a:off x="548640" y="1756833"/>
+            <a:ext cx="8046720" cy="465667"/>
           </a:xfrm>
           <a:prstGeom prst="rect">
             <a:avLst/>
@@ -15427,7 +15344,7 @@
           </a:fontRef>
         </p:style>
         <p:txBody>
-          <a:bodyPr rtlCol="0" anchor="t" wrap="square" lIns="177800" rIns="177800" tIns="101600" bIns="127000">
+          <a:bodyPr rtlCol="0" anchor="t" wrap="square" lIns="177800" rIns="177800" tIns="18119" bIns="127000">
             <a:noAutofit/>
           </a:bodyPr>
           <a:lstStyle/>
@@ -15472,7 +15389,7 @@
         </p:nvSpPr>
         <p:spPr>
           <a:xfrm>
-            <a:off x="594360" y="2476119"/>
+            <a:off x="594360" y="2423670"/>
             <a:ext cx="7955279" cy="228600"/>
           </a:xfrm>
           <a:prstGeom prst="rect">
@@ -15526,7 +15443,7 @@
         </p:nvSpPr>
         <p:spPr>
           <a:xfrm>
-            <a:off x="594360" y="2777871"/>
+            <a:off x="594360" y="2725422"/>
             <a:ext cx="7955279" cy="378206"/>
           </a:xfrm>
           <a:prstGeom prst="rect">
@@ -15580,7 +15497,7 @@
         </p:nvSpPr>
         <p:spPr>
           <a:xfrm>
-            <a:off x="594360" y="3338957"/>
+            <a:off x="594360" y="3286508"/>
             <a:ext cx="7955279" cy="594360"/>
           </a:xfrm>
           <a:prstGeom prst="rect">
@@ -15621,7 +15538,7 @@
                 <a:ea typeface="Noto Sans CJK JP"/>
                 <a:cs typeface="Noto Sans"/>
               </a:rPr>
-              <a:t>afの強調を、日本語でも強い話し言葉で表した。</a:t>
+              <a:t>afは強い強調を加える俗語。hungryと組み合わせ、空腹の強さを伝える。</a:t>
             </a:r>
           </a:p>
         </p:txBody>
@@ -15675,22 +15592,8 @@
                 <a:ea typeface="Noto Sans CJK JP"/>
                 <a:cs typeface="Noto Sans"/>
               </a:rPr>
-              <a:t>[1] Stanford CRFM, HELM Classic v0.4.0, TwitterAAE. 公開実行suite v0.3.0。 instance: aa/id8369（HELM内ID）</a:t>
-            </a:r>
-          </a:p>
-          <a:p>
-            <a:pPr>
-              <a:lnSpc>
-                <a:spcPts val="940"/>
-              </a:lnSpc>
-              <a:buNone/>
-              <a:defRPr sz="810" b="0">
-                <a:solidFill>
-                  <a:srgbClr val="303437"/>
-                </a:solidFill>
-                <a:latin typeface="Noto Sans"/>
-              </a:defRPr>
-            </a:pPr>
+              <a:t>[1] Stanford CRFM. HELM Classic v0.4.0 — TwitterAAE.  </a:t>
+            </a:r>
             <a:r>
               <a:rPr sz="810" b="0" lang="ja-JP" altLang="en-US">
                 <a:solidFill>
@@ -15882,8 +15785,8 @@
         </p:nvSpPr>
         <p:spPr>
           <a:xfrm>
-            <a:off x="548640" y="1673352"/>
-            <a:ext cx="8046720" cy="601598"/>
+            <a:off x="548640" y="1756833"/>
+            <a:ext cx="8046720" cy="397934"/>
           </a:xfrm>
           <a:prstGeom prst="rect">
             <a:avLst/>
@@ -15911,7 +15814,7 @@
           </a:fontRef>
         </p:style>
         <p:txBody>
-          <a:bodyPr rtlCol="0" anchor="t" wrap="square" lIns="177800" rIns="177800" tIns="101600" bIns="127000">
+          <a:bodyPr rtlCol="0" anchor="t" wrap="square" lIns="177800" rIns="177800" tIns="18119" bIns="127000">
             <a:noAutofit/>
           </a:bodyPr>
           <a:lstStyle/>
@@ -15956,7 +15859,7 @@
         </p:nvSpPr>
         <p:spPr>
           <a:xfrm>
-            <a:off x="594360" y="2476119"/>
+            <a:off x="594360" y="2355936"/>
             <a:ext cx="7955279" cy="228600"/>
           </a:xfrm>
           <a:prstGeom prst="rect">
@@ -16010,7 +15913,7 @@
         </p:nvSpPr>
         <p:spPr>
           <a:xfrm>
-            <a:off x="594360" y="2777871"/>
+            <a:off x="594360" y="2657688"/>
             <a:ext cx="7955279" cy="378206"/>
           </a:xfrm>
           <a:prstGeom prst="rect">
@@ -16064,7 +15967,7 @@
         </p:nvSpPr>
         <p:spPr>
           <a:xfrm>
-            <a:off x="594360" y="3338957"/>
+            <a:off x="594360" y="3218774"/>
             <a:ext cx="7955279" cy="594360"/>
           </a:xfrm>
           <a:prstGeom prst="rect">
@@ -16159,22 +16062,8 @@
                 <a:ea typeface="Noto Sans CJK JP"/>
                 <a:cs typeface="Noto Sans"/>
               </a:rPr>
-              <a:t>[1] Stanford CRFM, HELM Classic v0.4.0, TwitterAAE. 公開実行suite v0.3.0。 instance: aa/id46250（HELM内ID）</a:t>
-            </a:r>
-          </a:p>
-          <a:p>
-            <a:pPr>
-              <a:lnSpc>
-                <a:spcPts val="940"/>
-              </a:lnSpc>
-              <a:buNone/>
-              <a:defRPr sz="810" b="0">
-                <a:solidFill>
-                  <a:srgbClr val="303437"/>
-                </a:solidFill>
-                <a:latin typeface="Noto Sans"/>
-              </a:defRPr>
-            </a:pPr>
+              <a:t>[1] Stanford CRFM. HELM Classic v0.4.0 — TwitterAAE.  </a:t>
+            </a:r>
             <a:r>
               <a:rPr sz="810" b="0" lang="ja-JP" altLang="en-US">
                 <a:solidFill>
@@ -16366,8 +16255,8 @@
         </p:nvSpPr>
         <p:spPr>
           <a:xfrm>
-            <a:off x="548640" y="1673352"/>
-            <a:ext cx="8046720" cy="601598"/>
+            <a:off x="548640" y="1756833"/>
+            <a:ext cx="8046720" cy="465667"/>
           </a:xfrm>
           <a:prstGeom prst="rect">
             <a:avLst/>
@@ -16395,7 +16284,7 @@
           </a:fontRef>
         </p:style>
         <p:txBody>
-          <a:bodyPr rtlCol="0" anchor="t" wrap="square" lIns="177800" rIns="177800" tIns="101600" bIns="127000">
+          <a:bodyPr rtlCol="0" anchor="t" wrap="square" lIns="177800" rIns="177800" tIns="18119" bIns="127000">
             <a:noAutofit/>
           </a:bodyPr>
           <a:lstStyle/>
@@ -16440,7 +16329,7 @@
         </p:nvSpPr>
         <p:spPr>
           <a:xfrm>
-            <a:off x="594360" y="2476119"/>
+            <a:off x="594360" y="2423670"/>
             <a:ext cx="7955279" cy="228600"/>
           </a:xfrm>
           <a:prstGeom prst="rect">
@@ -16494,7 +16383,7 @@
         </p:nvSpPr>
         <p:spPr>
           <a:xfrm>
-            <a:off x="594360" y="2777871"/>
+            <a:off x="594360" y="2725422"/>
             <a:ext cx="7955279" cy="378206"/>
           </a:xfrm>
           <a:prstGeom prst="rect">
@@ -16548,7 +16437,7 @@
         </p:nvSpPr>
         <p:spPr>
           <a:xfrm>
-            <a:off x="594360" y="3338957"/>
+            <a:off x="594360" y="3286508"/>
             <a:ext cx="7955279" cy="594360"/>
           </a:xfrm>
           <a:prstGeom prst="rect">
@@ -16589,7 +16478,7 @@
                 <a:ea typeface="Noto Sans CJK JP"/>
                 <a:cs typeface="Noto Sans"/>
               </a:rPr>
-              <a:t>ndはandに相当する。反復と感嘆符も表現の一部。</a:t>
+              <a:t>ndはandの略。writenの反復と感嘆符が、書き続ける調子を作る。</a:t>
             </a:r>
           </a:p>
         </p:txBody>
@@ -16643,22 +16532,8 @@
                 <a:ea typeface="Noto Sans CJK JP"/>
                 <a:cs typeface="Noto Sans"/>
               </a:rPr>
-              <a:t>[1] Stanford CRFM, HELM Classic v0.4.0, TwitterAAE. 公開実行suite v0.3.0。 instance: aa/id24647（HELM内ID）</a:t>
-            </a:r>
-          </a:p>
-          <a:p>
-            <a:pPr>
-              <a:lnSpc>
-                <a:spcPts val="940"/>
-              </a:lnSpc>
-              <a:buNone/>
-              <a:defRPr sz="810" b="0">
-                <a:solidFill>
-                  <a:srgbClr val="303437"/>
-                </a:solidFill>
-                <a:latin typeface="Noto Sans"/>
-              </a:defRPr>
-            </a:pPr>
+              <a:t>[1] Stanford CRFM. HELM Classic v0.4.0 — TwitterAAE.  </a:t>
+            </a:r>
             <a:r>
               <a:rPr sz="810" b="0" lang="ja-JP" altLang="en-US">
                 <a:solidFill>
@@ -16850,8 +16725,8 @@
         </p:nvSpPr>
         <p:spPr>
           <a:xfrm>
-            <a:off x="548640" y="1673352"/>
-            <a:ext cx="8046720" cy="601598"/>
+            <a:off x="548640" y="1756833"/>
+            <a:ext cx="8046720" cy="465667"/>
           </a:xfrm>
           <a:prstGeom prst="rect">
             <a:avLst/>
@@ -16879,7 +16754,7 @@
           </a:fontRef>
         </p:style>
         <p:txBody>
-          <a:bodyPr rtlCol="0" anchor="t" wrap="square" lIns="177800" rIns="177800" tIns="101600" bIns="127000">
+          <a:bodyPr rtlCol="0" anchor="t" wrap="square" lIns="177800" rIns="177800" tIns="18119" bIns="127000">
             <a:noAutofit/>
           </a:bodyPr>
           <a:lstStyle/>
@@ -16924,7 +16799,7 @@
         </p:nvSpPr>
         <p:spPr>
           <a:xfrm>
-            <a:off x="594360" y="2476119"/>
+            <a:off x="594360" y="2423670"/>
             <a:ext cx="7955279" cy="228600"/>
           </a:xfrm>
           <a:prstGeom prst="rect">
@@ -16978,7 +16853,7 @@
         </p:nvSpPr>
         <p:spPr>
           <a:xfrm>
-            <a:off x="594360" y="2777871"/>
+            <a:off x="594360" y="2725422"/>
             <a:ext cx="7955279" cy="378206"/>
           </a:xfrm>
           <a:prstGeom prst="rect">
@@ -17032,7 +16907,7 @@
         </p:nvSpPr>
         <p:spPr>
           <a:xfrm>
-            <a:off x="594360" y="3338957"/>
+            <a:off x="594360" y="3286508"/>
             <a:ext cx="7955279" cy="594360"/>
           </a:xfrm>
           <a:prstGeom prst="rect">
@@ -17127,22 +17002,8 @@
                 <a:ea typeface="Noto Sans CJK JP"/>
                 <a:cs typeface="Noto Sans"/>
               </a:rPr>
-              <a:t>[1] Stanford CRFM, HELM Classic v0.4.0, TwitterAAE. 公開実行suite v0.3.0。 instance: aa/id29079（HELM内ID）</a:t>
-            </a:r>
-          </a:p>
-          <a:p>
-            <a:pPr>
-              <a:lnSpc>
-                <a:spcPts val="940"/>
-              </a:lnSpc>
-              <a:buNone/>
-              <a:defRPr sz="810" b="0">
-                <a:solidFill>
-                  <a:srgbClr val="303437"/>
-                </a:solidFill>
-                <a:latin typeface="Noto Sans"/>
-              </a:defRPr>
-            </a:pPr>
+              <a:t>[1] Stanford CRFM. HELM Classic v0.4.0 — TwitterAAE.  </a:t>
+            </a:r>
             <a:r>
               <a:rPr sz="810" b="0" lang="ja-JP" altLang="en-US">
                 <a:solidFill>
@@ -17334,8 +17195,8 @@
         </p:nvSpPr>
         <p:spPr>
           <a:xfrm>
-            <a:off x="548640" y="1673352"/>
-            <a:ext cx="8046720" cy="601598"/>
+            <a:off x="548640" y="1756833"/>
+            <a:ext cx="8046720" cy="397934"/>
           </a:xfrm>
           <a:prstGeom prst="rect">
             <a:avLst/>
@@ -17363,7 +17224,7 @@
           </a:fontRef>
         </p:style>
         <p:txBody>
-          <a:bodyPr rtlCol="0" anchor="t" wrap="square" lIns="177800" rIns="177800" tIns="101600" bIns="127000">
+          <a:bodyPr rtlCol="0" anchor="t" wrap="square" lIns="177800" rIns="177800" tIns="18119" bIns="127000">
             <a:noAutofit/>
           </a:bodyPr>
           <a:lstStyle/>
@@ -17408,7 +17269,7 @@
         </p:nvSpPr>
         <p:spPr>
           <a:xfrm>
-            <a:off x="594360" y="2476119"/>
+            <a:off x="594360" y="2355936"/>
             <a:ext cx="7955279" cy="228600"/>
           </a:xfrm>
           <a:prstGeom prst="rect">
@@ -17462,7 +17323,7 @@
         </p:nvSpPr>
         <p:spPr>
           <a:xfrm>
-            <a:off x="594360" y="2777871"/>
+            <a:off x="594360" y="2657688"/>
             <a:ext cx="7955279" cy="378206"/>
           </a:xfrm>
           <a:prstGeom prst="rect">
@@ -17516,7 +17377,7 @@
         </p:nvSpPr>
         <p:spPr>
           <a:xfrm>
-            <a:off x="594360" y="3338957"/>
+            <a:off x="594360" y="3218774"/>
             <a:ext cx="7955279" cy="594360"/>
           </a:xfrm>
           <a:prstGeom prst="rect">
@@ -17611,22 +17472,8 @@
                 <a:ea typeface="Noto Sans CJK JP"/>
                 <a:cs typeface="Noto Sans"/>
               </a:rPr>
-              <a:t>[1] Stanford CRFM, HELM Classic v0.4.0, TwitterAAE. 公開実行suite v0.3.0。 instance: white/id32104（HELM内ID）</a:t>
-            </a:r>
-          </a:p>
-          <a:p>
-            <a:pPr>
-              <a:lnSpc>
-                <a:spcPts val="940"/>
-              </a:lnSpc>
-              <a:buNone/>
-              <a:defRPr sz="810" b="0">
-                <a:solidFill>
-                  <a:srgbClr val="303437"/>
-                </a:solidFill>
-                <a:latin typeface="Noto Sans"/>
-              </a:defRPr>
-            </a:pPr>
+              <a:t>[1] Stanford CRFM. HELM Classic v0.4.0 — TwitterAAE.  </a:t>
+            </a:r>
             <a:r>
               <a:rPr sz="810" b="0" lang="ja-JP" altLang="en-US">
                 <a:solidFill>
@@ -17818,8 +17665,8 @@
         </p:nvSpPr>
         <p:spPr>
           <a:xfrm>
-            <a:off x="548640" y="1673352"/>
-            <a:ext cx="8046720" cy="601598"/>
+            <a:off x="548640" y="1756833"/>
+            <a:ext cx="8046720" cy="465667"/>
           </a:xfrm>
           <a:prstGeom prst="rect">
             <a:avLst/>
@@ -17847,7 +17694,7 @@
           </a:fontRef>
         </p:style>
         <p:txBody>
-          <a:bodyPr rtlCol="0" anchor="t" wrap="square" lIns="177800" rIns="177800" tIns="101600" bIns="127000">
+          <a:bodyPr rtlCol="0" anchor="t" wrap="square" lIns="177800" rIns="177800" tIns="18119" bIns="127000">
             <a:noAutofit/>
           </a:bodyPr>
           <a:lstStyle/>
@@ -17892,7 +17739,7 @@
         </p:nvSpPr>
         <p:spPr>
           <a:xfrm>
-            <a:off x="594360" y="2476119"/>
+            <a:off x="594360" y="2423670"/>
             <a:ext cx="7955279" cy="228600"/>
           </a:xfrm>
           <a:prstGeom prst="rect">
@@ -17946,7 +17793,7 @@
         </p:nvSpPr>
         <p:spPr>
           <a:xfrm>
-            <a:off x="594360" y="2777871"/>
+            <a:off x="594360" y="2725422"/>
             <a:ext cx="7955279" cy="378206"/>
           </a:xfrm>
           <a:prstGeom prst="rect">
@@ -18000,7 +17847,7 @@
         </p:nvSpPr>
         <p:spPr>
           <a:xfrm>
-            <a:off x="594360" y="3338957"/>
+            <a:off x="594360" y="3286508"/>
             <a:ext cx="7955279" cy="594360"/>
           </a:xfrm>
           <a:prstGeom prst="rect">
@@ -18095,22 +17942,8 @@
                 <a:ea typeface="Noto Sans CJK JP"/>
                 <a:cs typeface="Noto Sans"/>
               </a:rPr>
-              <a:t>[1] Stanford CRFM, HELM Classic v0.4.0, TwitterAAE. 公開実行suite v0.3.0。 instance: white/id46712（HELM内ID）</a:t>
-            </a:r>
-          </a:p>
-          <a:p>
-            <a:pPr>
-              <a:lnSpc>
-                <a:spcPts val="940"/>
-              </a:lnSpc>
-              <a:buNone/>
-              <a:defRPr sz="810" b="0">
-                <a:solidFill>
-                  <a:srgbClr val="303437"/>
-                </a:solidFill>
-                <a:latin typeface="Noto Sans"/>
-              </a:defRPr>
-            </a:pPr>
+              <a:t>[1] Stanford CRFM. HELM Classic v0.4.0 — TwitterAAE.  </a:t>
+            </a:r>
             <a:r>
               <a:rPr sz="810" b="0" lang="ja-JP" altLang="en-US">
                 <a:solidFill>
@@ -18302,8 +18135,8 @@
         </p:nvSpPr>
         <p:spPr>
           <a:xfrm>
-            <a:off x="548640" y="1673352"/>
-            <a:ext cx="8046720" cy="601598"/>
+            <a:off x="548640" y="1756833"/>
+            <a:ext cx="8046720" cy="465667"/>
           </a:xfrm>
           <a:prstGeom prst="rect">
             <a:avLst/>
@@ -18331,7 +18164,7 @@
           </a:fontRef>
         </p:style>
         <p:txBody>
-          <a:bodyPr rtlCol="0" anchor="t" wrap="square" lIns="177800" rIns="177800" tIns="101600" bIns="127000">
+          <a:bodyPr rtlCol="0" anchor="t" wrap="square" lIns="177800" rIns="177800" tIns="18119" bIns="127000">
             <a:noAutofit/>
           </a:bodyPr>
           <a:lstStyle/>
@@ -18376,7 +18209,7 @@
         </p:nvSpPr>
         <p:spPr>
           <a:xfrm>
-            <a:off x="594360" y="2476119"/>
+            <a:off x="594360" y="2423670"/>
             <a:ext cx="7955279" cy="228600"/>
           </a:xfrm>
           <a:prstGeom prst="rect">
@@ -18430,7 +18263,7 @@
         </p:nvSpPr>
         <p:spPr>
           <a:xfrm>
-            <a:off x="594360" y="2777871"/>
+            <a:off x="594360" y="2725422"/>
             <a:ext cx="7955279" cy="378206"/>
           </a:xfrm>
           <a:prstGeom prst="rect">
@@ -18484,7 +18317,7 @@
         </p:nvSpPr>
         <p:spPr>
           <a:xfrm>
-            <a:off x="594360" y="3338957"/>
+            <a:off x="594360" y="3286508"/>
             <a:ext cx="7955279" cy="594360"/>
           </a:xfrm>
           <a:prstGeom prst="rect">
@@ -18525,7 +18358,7 @@
                 <a:ea typeface="Noto Sans CJK JP"/>
                 <a:cs typeface="Noto Sans"/>
               </a:rPr>
-              <a:t>thisの指す内容は公開された一文からは特定できない。</a:t>
+              <a:t>thisの具体的な内容は省かれ、続けることへの迷いを短く伝える。</a:t>
             </a:r>
           </a:p>
         </p:txBody>
@@ -18579,22 +18412,8 @@
                 <a:ea typeface="Noto Sans CJK JP"/>
                 <a:cs typeface="Noto Sans"/>
               </a:rPr>
-              <a:t>[1] Stanford CRFM, HELM Classic v0.4.0, TwitterAAE. 公開実行suite v0.3.0。 instance: white/id42460（HELM内ID）</a:t>
-            </a:r>
-          </a:p>
-          <a:p>
-            <a:pPr>
-              <a:lnSpc>
-                <a:spcPts val="940"/>
-              </a:lnSpc>
-              <a:buNone/>
-              <a:defRPr sz="810" b="0">
-                <a:solidFill>
-                  <a:srgbClr val="303437"/>
-                </a:solidFill>
-                <a:latin typeface="Noto Sans"/>
-              </a:defRPr>
-            </a:pPr>
+              <a:t>[1] Stanford CRFM. HELM Classic v0.4.0 — TwitterAAE.  </a:t>
+            </a:r>
             <a:r>
               <a:rPr sz="810" b="0" lang="ja-JP" altLang="en-US">
                 <a:solidFill>
@@ -18786,8 +18605,8 @@
         </p:nvSpPr>
         <p:spPr>
           <a:xfrm>
-            <a:off x="548640" y="1673352"/>
-            <a:ext cx="8046720" cy="601598"/>
+            <a:off x="548640" y="1773766"/>
+            <a:ext cx="8046720" cy="381000"/>
           </a:xfrm>
           <a:prstGeom prst="rect">
             <a:avLst/>
@@ -18815,7 +18634,7 @@
           </a:fontRef>
         </p:style>
         <p:txBody>
-          <a:bodyPr rtlCol="0" anchor="t" wrap="square" lIns="177800" rIns="177800" tIns="101600" bIns="127000">
+          <a:bodyPr rtlCol="0" anchor="t" wrap="square" lIns="177800" rIns="177800" tIns="1186" bIns="127000">
             <a:noAutofit/>
           </a:bodyPr>
           <a:lstStyle/>
@@ -18860,7 +18679,7 @@
         </p:nvSpPr>
         <p:spPr>
           <a:xfrm>
-            <a:off x="594360" y="2476119"/>
+            <a:off x="594360" y="2355936"/>
             <a:ext cx="7955279" cy="228600"/>
           </a:xfrm>
           <a:prstGeom prst="rect">
@@ -18914,7 +18733,7 @@
         </p:nvSpPr>
         <p:spPr>
           <a:xfrm>
-            <a:off x="594360" y="2777871"/>
+            <a:off x="594360" y="2657688"/>
             <a:ext cx="7955279" cy="378206"/>
           </a:xfrm>
           <a:prstGeom prst="rect">
@@ -18968,7 +18787,7 @@
         </p:nvSpPr>
         <p:spPr>
           <a:xfrm>
-            <a:off x="594360" y="3338957"/>
+            <a:off x="594360" y="3218774"/>
             <a:ext cx="7955279" cy="594360"/>
           </a:xfrm>
           <a:prstGeom prst="rect">
@@ -19009,7 +18828,7 @@
                 <a:ea typeface="Noto Sans CJK JP"/>
                 <a:cs typeface="Noto Sans"/>
               </a:rPr>
-              <a:t>I cannot even.は文脈に依存する口語表現として訳した。</a:t>
+              <a:t>I cannot even.は、驚きやあきれなどで言葉が続かないことを表す口語表現。</a:t>
             </a:r>
           </a:p>
         </p:txBody>
@@ -19063,22 +18882,8 @@
                 <a:ea typeface="Noto Sans CJK JP"/>
                 <a:cs typeface="Noto Sans"/>
               </a:rPr>
-              <a:t>[1] Stanford CRFM, HELM Classic v0.4.0, TwitterAAE. 公開実行suite v0.3.0。 instance: white/id19412（HELM内ID）</a:t>
-            </a:r>
-          </a:p>
-          <a:p>
-            <a:pPr>
-              <a:lnSpc>
-                <a:spcPts val="940"/>
-              </a:lnSpc>
-              <a:buNone/>
-              <a:defRPr sz="810" b="0">
-                <a:solidFill>
-                  <a:srgbClr val="303437"/>
-                </a:solidFill>
-                <a:latin typeface="Noto Sans"/>
-              </a:defRPr>
-            </a:pPr>
+              <a:t>[1] Stanford CRFM. HELM Classic v0.4.0 — TwitterAAE.  </a:t>
+            </a:r>
             <a:r>
               <a:rPr sz="810" b="0" lang="ja-JP" altLang="en-US">
                 <a:solidFill>
@@ -19270,8 +19075,8 @@
         </p:nvSpPr>
         <p:spPr>
           <a:xfrm>
-            <a:off x="548640" y="1673352"/>
-            <a:ext cx="8046720" cy="601598"/>
+            <a:off x="548640" y="1756833"/>
+            <a:ext cx="8046720" cy="465667"/>
           </a:xfrm>
           <a:prstGeom prst="rect">
             <a:avLst/>
@@ -19299,7 +19104,7 @@
           </a:fontRef>
         </p:style>
         <p:txBody>
-          <a:bodyPr rtlCol="0" anchor="t" wrap="square" lIns="177800" rIns="177800" tIns="101600" bIns="127000">
+          <a:bodyPr rtlCol="0" anchor="t" wrap="square" lIns="177800" rIns="177800" tIns="18119" bIns="127000">
             <a:noAutofit/>
           </a:bodyPr>
           <a:lstStyle/>
@@ -19344,7 +19149,7 @@
         </p:nvSpPr>
         <p:spPr>
           <a:xfrm>
-            <a:off x="594360" y="2476119"/>
+            <a:off x="594360" y="2423670"/>
             <a:ext cx="7955279" cy="228600"/>
           </a:xfrm>
           <a:prstGeom prst="rect">
@@ -19398,7 +19203,7 @@
         </p:nvSpPr>
         <p:spPr>
           <a:xfrm>
-            <a:off x="594360" y="2777871"/>
+            <a:off x="594360" y="2725422"/>
             <a:ext cx="7955279" cy="710692"/>
           </a:xfrm>
           <a:prstGeom prst="rect">
@@ -19452,7 +19257,7 @@
         </p:nvSpPr>
         <p:spPr>
           <a:xfrm>
-            <a:off x="594360" y="3671443"/>
+            <a:off x="594360" y="3618994"/>
             <a:ext cx="7955279" cy="594360"/>
           </a:xfrm>
           <a:prstGeom prst="rect">
@@ -19493,7 +19298,7 @@
                 <a:ea typeface="Noto Sans CJK JP"/>
                 <a:cs typeface="Noto Sans"/>
               </a:rPr>
-              <a:t>時間の数値と疑問の調子を保った。</a:t>
+              <a:t>3時間という長さと、まだ疲れているという疑問を一息に伝える。</a:t>
             </a:r>
           </a:p>
         </p:txBody>
@@ -19547,22 +19352,8 @@
                 <a:ea typeface="Noto Sans CJK JP"/>
                 <a:cs typeface="Noto Sans"/>
               </a:rPr>
-              <a:t>[1] Stanford CRFM, HELM Classic v0.4.0, TwitterAAE. 公開実行suite v0.3.0。 instance: white/id5140（HELM内ID）</a:t>
-            </a:r>
-          </a:p>
-          <a:p>
-            <a:pPr>
-              <a:lnSpc>
-                <a:spcPts val="940"/>
-              </a:lnSpc>
-              <a:buNone/>
-              <a:defRPr sz="810" b="0">
-                <a:solidFill>
-                  <a:srgbClr val="303437"/>
-                </a:solidFill>
-                <a:latin typeface="Noto Sans"/>
-              </a:defRPr>
-            </a:pPr>
+              <a:t>[1] Stanford CRFM. HELM Classic v0.4.0 — TwitterAAE.  </a:t>
+            </a:r>
             <a:r>
               <a:rPr sz="810" b="0" lang="ja-JP" altLang="en-US">
                 <a:solidFill>
@@ -19639,7 +19430,7 @@
                 <a:ea typeface="Noto Sans CJK JP"/>
                 <a:cs typeface="Noto Sans"/>
               </a:rPr>
-              <a:t>版・実行条件の補足</a:t>
+              <a:t>入力と指標の補足</a:t>
             </a:r>
           </a:p>
         </p:txBody>
@@ -19687,7 +19478,7 @@
                 <a:ea typeface="Noto Sans CJK JP"/>
                 <a:cs typeface="Noto Sans"/>
               </a:rPr>
-              <a:t>Appendix: 2. 版・実行条件の補足</a:t>
+              <a:t>Appendix: 2. 入力と指標の補足</a:t>
             </a:r>
           </a:p>
         </p:txBody>
@@ -19867,7 +19658,7 @@
                 <a:ea typeface="Noto Sans CJK JP"/>
                 <a:cs typeface="Noto Sans"/>
               </a:rPr>
-              <a:t>公開実行入力の長さを確かめた</a:t>
+              <a:t>HELMの投稿は、AA側が平均約40文字</a:t>
             </a:r>
           </a:p>
         </p:txBody>
@@ -19915,7 +19706,7 @@
                 <a:ea typeface="Noto Sans CJK JP"/>
                 <a:cs typeface="Noto Sans"/>
               </a:rPr>
-              <a:t>Appendix: 2. 版・実行条件の補足</a:t>
+              <a:t>Appendix: 2. 入力と指標の補足</a:t>
             </a:r>
           </a:p>
         </p:txBody>
@@ -20638,7 +20429,7 @@
                 <a:ea typeface="Noto Sans CJK JP"/>
                 <a:cs typeface="Noto Sans"/>
               </a:rPr>
-              <a:t>Unicodeコードポイント数。エスケープ文字列は入力のまま数えた。元の2013年ツイート表示上の文字数ではない。</a:t>
+              <a:t>HELMで使われた各1,000投稿の文字数。Unicodeの文字単位で、エスケープ表現も入力のつづりどおり数えた。</a:t>
             </a:r>
           </a:p>
         </p:txBody>
@@ -20692,18 +20483,7 @@
                 <a:ea typeface="Noto Sans CJK JP"/>
                 <a:cs typeface="Noto Sans"/>
               </a:rPr>
-              <a:t>[1] Stanford CRFM, HELM Classic v0.4.0, TwitterAAE. 公開実行suite v0.3.0。</a:t>
-            </a:r>
-            <a:r>
-              <a:rPr sz="810" b="0" lang="ja-JP" altLang="en-US">
-                <a:solidFill>
-                  <a:srgbClr val="626669"/>
-                </a:solidFill>
-                <a:latin typeface="Noto Sans"/>
-                <a:ea typeface="Noto Sans CJK JP"/>
-                <a:cs typeface="Noto Sans"/>
-              </a:rPr>
-              <a:t>  </a:t>
+              <a:t>[1] Stanford CRFM. HELM Classic v0.4.0 — TwitterAAE.  </a:t>
             </a:r>
             <a:r>
               <a:rPr sz="810" b="0" lang="ja-JP" altLang="en-US">
@@ -20781,7 +20561,7 @@
                 <a:ea typeface="Noto Sans CJK JP"/>
                 <a:cs typeface="Noto Sans"/>
               </a:rPr>
-              <a:t>文字の表現も、評価入力の一部になる</a:t>
+              <a:t>絵文字のエスケープ表現も入力に含む</a:t>
             </a:r>
           </a:p>
         </p:txBody>
@@ -20829,7 +20609,7 @@
                 <a:ea typeface="Noto Sans CJK JP"/>
                 <a:cs typeface="Noto Sans"/>
               </a:rPr>
-              <a:t>Appendix: 2. 版・実行条件の補足</a:t>
+              <a:t>Appendix: 2. 入力と指標の補足</a:t>
             </a:r>
           </a:p>
         </p:txBody>
@@ -20883,7 +20663,7 @@
                 <a:ea typeface="Noto Sans CJK JP"/>
                 <a:cs typeface="Noto Sans"/>
               </a:rPr>
-              <a:t>公開入力には、絵文字を文字列のまま表した「\ud83d\ude02」のようなエスケープ表現もある。</a:t>
+              <a:t>HELMの入力には、絵文字を「\ud83d\ude02」のようなエスケープ表現にした投稿もある。</a:t>
             </a:r>
           </a:p>
         </p:txBody>
@@ -20937,21 +20717,21 @@
                 <a:ea typeface="Noto Sans CJK JP"/>
                 <a:cs typeface="Noto Sans"/>
               </a:rPr>
-              <a:t>本資料の実例はそれらを復号・訂正せず、公開実行で使われたinput.textを保存する。短い自然文だけを選び、本文の実例で表記を追いやすくした。</a:t>
-            </a:r>
-          </a:p>
-        </p:txBody>
-      </p:sp>
-      <p:sp>
-        <p:nvSpPr>
-          <p:cNvPr id="6" name="TextBox 5"/>
+              <a:t>モデルは、この表現を含む文字列に確率を付ける。画面で絵文字として表示した場合とは、入力の長さやトークンの分割が変わる。</a:t>
+            </a:r>
+          </a:p>
+        </p:txBody>
+      </p:sp>
+      <p:sp>
+        <p:nvSpPr>
+          <p:cNvPr id="7" name="sources"/>
           <p:cNvSpPr txBox="1"/>
           <p:nvPr/>
         </p:nvSpPr>
         <p:spPr>
           <a:xfrm>
-            <a:off x="594360" y="3470529"/>
-            <a:ext cx="7955279" cy="680466"/>
+            <a:off x="502920" y="4700016"/>
+            <a:ext cx="8183879" cy="530352"/>
           </a:xfrm>
           <a:prstGeom prst="rect">
             <a:avLst/>
@@ -20966,60 +20746,6 @@
           <a:p>
             <a:pPr algn="l">
               <a:lnSpc>
-                <a:spcPts val="2499"/>
-              </a:lnSpc>
-              <a:spcBef>
-                <a:spcPts val="0"/>
-              </a:spcBef>
-              <a:spcAft>
-                <a:spcPts val="0"/>
-              </a:spcAft>
-              <a:buNone/>
-              <a:defRPr sz="2100" b="0">
-                <a:solidFill>
-                  <a:srgbClr val="303437"/>
-                </a:solidFill>
-                <a:latin typeface="Noto Sans"/>
-              </a:defRPr>
-            </a:pPr>
-            <a:r>
-              <a:rPr sz="2100" b="0" lang="ja-JP" altLang="en-US">
-                <a:solidFill>
-                  <a:srgbClr val="303437"/>
-                </a:solidFill>
-                <a:latin typeface="Noto Sans"/>
-                <a:ea typeface="Noto Sans CJK JP"/>
-                <a:cs typeface="Noto Sans"/>
-              </a:rPr>
-              <a:t>HELM内のid11841などは投稿のTwitter IDではなく、条件内のインスタンスID。同じ番号でもAAとwhiteで本文が異なる。</a:t>
-            </a:r>
-          </a:p>
-        </p:txBody>
-      </p:sp>
-      <p:sp>
-        <p:nvSpPr>
-          <p:cNvPr id="7" name="sources"/>
-          <p:cNvSpPr txBox="1"/>
-          <p:nvPr/>
-        </p:nvSpPr>
-        <p:spPr>
-          <a:xfrm>
-            <a:off x="502920" y="4700016"/>
-            <a:ext cx="8183879" cy="530352"/>
-          </a:xfrm>
-          <a:prstGeom prst="rect">
-            <a:avLst/>
-          </a:prstGeom>
-          <a:noFill/>
-        </p:spPr>
-        <p:txBody>
-          <a:bodyPr wrap="square" lIns="0" rIns="0" tIns="0" bIns="0">
-            <a:noAutofit/>
-          </a:bodyPr>
-          <a:lstStyle/>
-          <a:p>
-            <a:pPr algn="l">
-              <a:lnSpc>
                 <a:spcPts val="940"/>
               </a:lnSpc>
               <a:spcBef>
@@ -21045,18 +20771,7 @@
                 <a:ea typeface="Noto Sans CJK JP"/>
                 <a:cs typeface="Noto Sans"/>
               </a:rPr>
-              <a:t>[1] Stanford CRFM, HELM Classic v0.4.0, TwitterAAE. 公開実行suite v0.3.0。</a:t>
-            </a:r>
-            <a:r>
-              <a:rPr sz="810" b="0" lang="ja-JP" altLang="en-US">
-                <a:solidFill>
-                  <a:srgbClr val="626669"/>
-                </a:solidFill>
-                <a:latin typeface="Noto Sans"/>
-                <a:ea typeface="Noto Sans CJK JP"/>
-                <a:cs typeface="Noto Sans"/>
-              </a:rPr>
-              <a:t>  </a:t>
+              <a:t>[1] Stanford CRFM. HELM Classic v0.4.0 — TwitterAAE.  </a:t>
             </a:r>
             <a:r>
               <a:rPr sz="810" b="0" lang="ja-JP" altLang="en-US">
@@ -21134,7 +20849,7 @@
                 <a:ea typeface="Noto Sans CJK JP"/>
                 <a:cs typeface="Noto Sans"/>
               </a:rPr>
-              <a:t>公開実行の設定は両モデルで共通</a:t>
+              <a:t>公開実行のJSONから、投稿全文を読み出す</a:t>
             </a:r>
           </a:p>
         </p:txBody>
@@ -21182,671 +20897,11 @@
                 <a:ea typeface="Noto Sans CJK JP"/>
                 <a:cs typeface="Noto Sans"/>
               </a:rPr>
-              <a:t>Appendix: 2. 版・実行条件の補足</a:t>
-            </a:r>
-          </a:p>
-        </p:txBody>
-      </p:sp>
-      <p:graphicFrame>
-        <p:nvGraphicFramePr>
-          <p:cNvPr id="4" name="Table 3"/>
-          <p:cNvGraphicFramePr>
-            <a:graphicFrameLocks noGrp="1"/>
-          </p:cNvGraphicFramePr>
-          <p:nvPr/>
-        </p:nvGraphicFramePr>
-        <p:xfrm>
-          <a:off x="548640" y="1508760"/>
-          <a:ext cx="8046720" cy="2523744"/>
-        </p:xfrm>
-        <a:graphic>
-          <a:graphicData uri="http://schemas.openxmlformats.org/drawingml/2006/table">
-            <a:tbl>
-              <a:tblPr firstRow="0" bandRow="0"/>
-              <a:tblGrid>
-                <a:gridCol w="4937760"/>
-                <a:gridCol w="3108960"/>
-              </a:tblGrid>
-              <a:tr h="420624">
-                <a:tc>
-                  <a:txBody>
-                    <a:bodyPr wrap="square">
-                      <a:noAutofit/>
-                    </a:bodyPr>
-                    <a:lstStyle/>
-                    <a:p>
-                      <a:pPr algn="l">
-                        <a:lnSpc>
-                          <a:spcPts val="2127"/>
-                        </a:lnSpc>
-                        <a:buNone/>
-                        <a:defRPr sz="1850" b="0">
-                          <a:solidFill>
-                            <a:srgbClr val="303437"/>
-                          </a:solidFill>
-                          <a:latin typeface="Noto Sans"/>
-                        </a:defRPr>
-                      </a:pPr>
-                      <a:r>
-                        <a:rPr sz="1850" b="0" lang="ja-JP" altLang="en-US">
-                          <a:solidFill>
-                            <a:srgbClr val="303437"/>
-                          </a:solidFill>
-                          <a:latin typeface="Noto Sans"/>
-                          <a:ea typeface="Noto Sans CJK JP"/>
-                          <a:cs typeface="Noto Sans"/>
-                        </a:rPr>
-                        <a:t>設定</a:t>
-                      </a:r>
-                    </a:p>
-                  </a:txBody>
-                  <a:tcPr marL="63500" marR="63500" marT="38100" marB="38100" anchor="ctr">
-                    <a:lnL w="7620">
-                      <a:noFill/>
-                    </a:lnL>
-                    <a:lnR w="7620">
-                      <a:noFill/>
-                    </a:lnR>
-                    <a:lnT w="15240">
-                      <a:solidFill>
-                        <a:srgbClr val="626669"/>
-                      </a:solidFill>
-                      <a:prstDash val="solid"/>
-                    </a:lnT>
-                    <a:lnB w="7620">
-                      <a:solidFill>
-                        <a:srgbClr val="626669"/>
-                      </a:solidFill>
-                      <a:prstDash val="solid"/>
-                    </a:lnB>
-                    <a:solidFill>
-                      <a:srgbClr val="FFFEF8"/>
-                    </a:solidFill>
-                  </a:tcPr>
-                </a:tc>
-                <a:tc>
-                  <a:txBody>
-                    <a:bodyPr wrap="square">
-                      <a:noAutofit/>
-                    </a:bodyPr>
-                    <a:lstStyle/>
-                    <a:p>
-                      <a:pPr algn="l">
-                        <a:lnSpc>
-                          <a:spcPts val="2127"/>
-                        </a:lnSpc>
-                        <a:buNone/>
-                        <a:defRPr sz="1850" b="0">
-                          <a:solidFill>
-                            <a:srgbClr val="303437"/>
-                          </a:solidFill>
-                          <a:latin typeface="Noto Sans"/>
-                        </a:defRPr>
-                      </a:pPr>
-                      <a:r>
-                        <a:rPr sz="1850" b="0" lang="ja-JP" altLang="en-US">
-                          <a:solidFill>
-                            <a:srgbClr val="303437"/>
-                          </a:solidFill>
-                          <a:latin typeface="Noto Sans"/>
-                          <a:ea typeface="Noto Sans CJK JP"/>
-                          <a:cs typeface="Noto Sans"/>
-                        </a:rPr>
-                        <a:t>値</a:t>
-                      </a:r>
-                    </a:p>
-                  </a:txBody>
-                  <a:tcPr marL="63500" marR="63500" marT="38100" marB="38100" anchor="ctr">
-                    <a:lnL w="7620">
-                      <a:noFill/>
-                    </a:lnL>
-                    <a:lnR w="7620">
-                      <a:noFill/>
-                    </a:lnR>
-                    <a:lnT w="15240">
-                      <a:solidFill>
-                        <a:srgbClr val="626669"/>
-                      </a:solidFill>
-                      <a:prstDash val="solid"/>
-                    </a:lnT>
-                    <a:lnB w="7620">
-                      <a:solidFill>
-                        <a:srgbClr val="626669"/>
-                      </a:solidFill>
-                      <a:prstDash val="solid"/>
-                    </a:lnB>
-                    <a:solidFill>
-                      <a:srgbClr val="FFFEF8"/>
-                    </a:solidFill>
-                  </a:tcPr>
-                </a:tc>
-              </a:tr>
-              <a:tr h="420624">
-                <a:tc>
-                  <a:txBody>
-                    <a:bodyPr wrap="square">
-                      <a:noAutofit/>
-                    </a:bodyPr>
-                    <a:lstStyle/>
-                    <a:p>
-                      <a:pPr algn="l">
-                        <a:lnSpc>
-                          <a:spcPts val="2127"/>
-                        </a:lnSpc>
-                        <a:buNone/>
-                        <a:defRPr sz="1850" b="0">
-                          <a:solidFill>
-                            <a:srgbClr val="303437"/>
-                          </a:solidFill>
-                          <a:latin typeface="Noto Sans"/>
-                        </a:defRPr>
-                      </a:pPr>
-                      <a:r>
-                        <a:rPr sz="1850" b="0" lang="ja-JP" altLang="en-US">
-                          <a:solidFill>
-                            <a:srgbClr val="303437"/>
-                          </a:solidFill>
-                          <a:latin typeface="Noto Sans"/>
-                          <a:ea typeface="Noto Sans CJK JP"/>
-                          <a:cs typeface="Noto Sans"/>
-                        </a:rPr>
-                        <a:t>method</a:t>
-                      </a:r>
-                    </a:p>
-                  </a:txBody>
-                  <a:tcPr marL="63500" marR="63500" marT="38100" marB="38100" anchor="ctr">
-                    <a:lnL w="7620">
-                      <a:noFill/>
-                    </a:lnL>
-                    <a:lnR w="7620">
-                      <a:noFill/>
-                    </a:lnR>
-                    <a:lnT w="7620">
-                      <a:solidFill>
-                        <a:srgbClr val="626669"/>
-                      </a:solidFill>
-                      <a:prstDash val="solid"/>
-                    </a:lnT>
-                    <a:lnB w="7620">
-                      <a:noFill/>
-                    </a:lnB>
-                    <a:solidFill>
-                      <a:srgbClr val="FFFEF8"/>
-                    </a:solidFill>
-                  </a:tcPr>
-                </a:tc>
-                <a:tc>
-                  <a:txBody>
-                    <a:bodyPr wrap="square">
-                      <a:noAutofit/>
-                    </a:bodyPr>
-                    <a:lstStyle/>
-                    <a:p>
-                      <a:pPr algn="l">
-                        <a:lnSpc>
-                          <a:spcPts val="2127"/>
-                        </a:lnSpc>
-                        <a:buNone/>
-                        <a:defRPr sz="1850" b="0">
-                          <a:solidFill>
-                            <a:srgbClr val="303437"/>
-                          </a:solidFill>
-                          <a:latin typeface="Noto Sans"/>
-                        </a:defRPr>
-                      </a:pPr>
-                      <a:r>
-                        <a:rPr sz="1850" b="0" lang="ja-JP" altLang="en-US">
-                          <a:solidFill>
-                            <a:srgbClr val="303437"/>
-                          </a:solidFill>
-                          <a:latin typeface="Noto Sans"/>
-                          <a:ea typeface="Noto Sans CJK JP"/>
-                          <a:cs typeface="Noto Sans"/>
-                        </a:rPr>
-                        <a:t>language_modeling</a:t>
-                      </a:r>
-                    </a:p>
-                  </a:txBody>
-                  <a:tcPr marL="63500" marR="63500" marT="38100" marB="38100" anchor="ctr">
-                    <a:lnL w="7620">
-                      <a:noFill/>
-                    </a:lnL>
-                    <a:lnR w="7620">
-                      <a:noFill/>
-                    </a:lnR>
-                    <a:lnT w="7620">
-                      <a:solidFill>
-                        <a:srgbClr val="626669"/>
-                      </a:solidFill>
-                      <a:prstDash val="solid"/>
-                    </a:lnT>
-                    <a:lnB w="7620">
-                      <a:noFill/>
-                    </a:lnB>
-                    <a:solidFill>
-                      <a:srgbClr val="FFFEF8"/>
-                    </a:solidFill>
-                  </a:tcPr>
-                </a:tc>
-              </a:tr>
-              <a:tr h="420624">
-                <a:tc>
-                  <a:txBody>
-                    <a:bodyPr wrap="square">
-                      <a:noAutofit/>
-                    </a:bodyPr>
-                    <a:lstStyle/>
-                    <a:p>
-                      <a:pPr algn="l">
-                        <a:lnSpc>
-                          <a:spcPts val="2127"/>
-                        </a:lnSpc>
-                        <a:buNone/>
-                        <a:defRPr sz="1850" b="0">
-                          <a:solidFill>
-                            <a:srgbClr val="303437"/>
-                          </a:solidFill>
-                          <a:latin typeface="Noto Sans"/>
-                        </a:defRPr>
-                      </a:pPr>
-                      <a:r>
-                        <a:rPr sz="1850" b="0" lang="ja-JP" altLang="en-US">
-                          <a:solidFill>
-                            <a:srgbClr val="303437"/>
-                          </a:solidFill>
-                          <a:latin typeface="Noto Sans"/>
-                          <a:ea typeface="Noto Sans CJK JP"/>
-                          <a:cs typeface="Noto Sans"/>
-                        </a:rPr>
-                        <a:t>max_eval_instances</a:t>
-                      </a:r>
-                    </a:p>
-                  </a:txBody>
-                  <a:tcPr marL="63500" marR="63500" marT="38100" marB="38100" anchor="ctr">
-                    <a:lnL w="7620">
-                      <a:noFill/>
-                    </a:lnL>
-                    <a:lnR w="7620">
-                      <a:noFill/>
-                    </a:lnR>
-                    <a:lnT w="7620">
-                      <a:noFill/>
-                    </a:lnT>
-                    <a:lnB w="7620">
-                      <a:noFill/>
-                    </a:lnB>
-                    <a:solidFill>
-                      <a:srgbClr val="FFFEF8"/>
-                    </a:solidFill>
-                  </a:tcPr>
-                </a:tc>
-                <a:tc>
-                  <a:txBody>
-                    <a:bodyPr wrap="square">
-                      <a:noAutofit/>
-                    </a:bodyPr>
-                    <a:lstStyle/>
-                    <a:p>
-                      <a:pPr algn="l">
-                        <a:lnSpc>
-                          <a:spcPts val="2127"/>
-                        </a:lnSpc>
-                        <a:buNone/>
-                        <a:defRPr sz="1850" b="0">
-                          <a:solidFill>
-                            <a:srgbClr val="303437"/>
-                          </a:solidFill>
-                          <a:latin typeface="Noto Sans"/>
-                        </a:defRPr>
-                      </a:pPr>
-                      <a:r>
-                        <a:rPr sz="1850" b="0" lang="ja-JP" altLang="en-US">
-                          <a:solidFill>
-                            <a:srgbClr val="303437"/>
-                          </a:solidFill>
-                          <a:latin typeface="Noto Sans"/>
-                          <a:ea typeface="Noto Sans CJK JP"/>
-                          <a:cs typeface="Noto Sans"/>
-                        </a:rPr>
-                        <a:t>1,000（test）</a:t>
-                      </a:r>
-                    </a:p>
-                  </a:txBody>
-                  <a:tcPr marL="63500" marR="63500" marT="38100" marB="38100" anchor="ctr">
-                    <a:lnL w="7620">
-                      <a:noFill/>
-                    </a:lnL>
-                    <a:lnR w="7620">
-                      <a:noFill/>
-                    </a:lnR>
-                    <a:lnT w="7620">
-                      <a:noFill/>
-                    </a:lnT>
-                    <a:lnB w="7620">
-                      <a:noFill/>
-                    </a:lnB>
-                    <a:solidFill>
-                      <a:srgbClr val="FFFEF8"/>
-                    </a:solidFill>
-                  </a:tcPr>
-                </a:tc>
-              </a:tr>
-              <a:tr h="420624">
-                <a:tc>
-                  <a:txBody>
-                    <a:bodyPr wrap="square">
-                      <a:noAutofit/>
-                    </a:bodyPr>
-                    <a:lstStyle/>
-                    <a:p>
-                      <a:pPr algn="l">
-                        <a:lnSpc>
-                          <a:spcPts val="2127"/>
-                        </a:lnSpc>
-                        <a:buNone/>
-                        <a:defRPr sz="1850" b="0">
-                          <a:solidFill>
-                            <a:srgbClr val="303437"/>
-                          </a:solidFill>
-                          <a:latin typeface="Noto Sans"/>
-                        </a:defRPr>
-                      </a:pPr>
-                      <a:r>
-                        <a:rPr sz="1850" b="0" lang="ja-JP" altLang="en-US">
-                          <a:solidFill>
-                            <a:srgbClr val="303437"/>
-                          </a:solidFill>
-                          <a:latin typeface="Noto Sans"/>
-                          <a:ea typeface="Noto Sans CJK JP"/>
-                          <a:cs typeface="Noto Sans"/>
-                        </a:rPr>
-                        <a:t>max_train_instances / 試行数</a:t>
-                      </a:r>
-                    </a:p>
-                  </a:txBody>
-                  <a:tcPr marL="63500" marR="63500" marT="38100" marB="38100" anchor="ctr">
-                    <a:lnL w="7620">
-                      <a:noFill/>
-                    </a:lnL>
-                    <a:lnR w="7620">
-                      <a:noFill/>
-                    </a:lnR>
-                    <a:lnT w="7620">
-                      <a:noFill/>
-                    </a:lnT>
-                    <a:lnB w="7620">
-                      <a:noFill/>
-                    </a:lnB>
-                    <a:solidFill>
-                      <a:srgbClr val="FFFEF8"/>
-                    </a:solidFill>
-                  </a:tcPr>
-                </a:tc>
-                <a:tc>
-                  <a:txBody>
-                    <a:bodyPr wrap="square">
-                      <a:noAutofit/>
-                    </a:bodyPr>
-                    <a:lstStyle/>
-                    <a:p>
-                      <a:pPr algn="l">
-                        <a:lnSpc>
-                          <a:spcPts val="2127"/>
-                        </a:lnSpc>
-                        <a:buNone/>
-                        <a:defRPr sz="1850" b="0">
-                          <a:solidFill>
-                            <a:srgbClr val="303437"/>
-                          </a:solidFill>
-                          <a:latin typeface="Noto Sans"/>
-                        </a:defRPr>
-                      </a:pPr>
-                      <a:r>
-                        <a:rPr sz="1850" b="0" lang="ja-JP" altLang="en-US">
-                          <a:solidFill>
-                            <a:srgbClr val="303437"/>
-                          </a:solidFill>
-                          <a:latin typeface="Noto Sans"/>
-                          <a:ea typeface="Noto Sans CJK JP"/>
-                          <a:cs typeface="Noto Sans"/>
-                        </a:rPr>
-                        <a:t>0 / 1</a:t>
-                      </a:r>
-                    </a:p>
-                  </a:txBody>
-                  <a:tcPr marL="63500" marR="63500" marT="38100" marB="38100" anchor="ctr">
-                    <a:lnL w="7620">
-                      <a:noFill/>
-                    </a:lnL>
-                    <a:lnR w="7620">
-                      <a:noFill/>
-                    </a:lnR>
-                    <a:lnT w="7620">
-                      <a:noFill/>
-                    </a:lnT>
-                    <a:lnB w="7620">
-                      <a:noFill/>
-                    </a:lnB>
-                    <a:solidFill>
-                      <a:srgbClr val="FFFEF8"/>
-                    </a:solidFill>
-                  </a:tcPr>
-                </a:tc>
-              </a:tr>
-              <a:tr h="420624">
-                <a:tc>
-                  <a:txBody>
-                    <a:bodyPr wrap="square">
-                      <a:noAutofit/>
-                    </a:bodyPr>
-                    <a:lstStyle/>
-                    <a:p>
-                      <a:pPr algn="l">
-                        <a:lnSpc>
-                          <a:spcPts val="2127"/>
-                        </a:lnSpc>
-                        <a:buNone/>
-                        <a:defRPr sz="1850" b="0">
-                          <a:solidFill>
-                            <a:srgbClr val="303437"/>
-                          </a:solidFill>
-                          <a:latin typeface="Noto Sans"/>
-                        </a:defRPr>
-                      </a:pPr>
-                      <a:r>
-                        <a:rPr sz="1850" b="0" lang="ja-JP" altLang="en-US">
-                          <a:solidFill>
-                            <a:srgbClr val="303437"/>
-                          </a:solidFill>
-                          <a:latin typeface="Noto Sans"/>
-                          <a:ea typeface="Noto Sans CJK JP"/>
-                          <a:cs typeface="Noto Sans"/>
-                        </a:rPr>
-                        <a:t>temperature / max_tokens</a:t>
-                      </a:r>
-                    </a:p>
-                  </a:txBody>
-                  <a:tcPr marL="63500" marR="63500" marT="38100" marB="38100" anchor="ctr">
-                    <a:lnL w="7620">
-                      <a:noFill/>
-                    </a:lnL>
-                    <a:lnR w="7620">
-                      <a:noFill/>
-                    </a:lnR>
-                    <a:lnT w="7620">
-                      <a:noFill/>
-                    </a:lnT>
-                    <a:lnB w="7620">
-                      <a:noFill/>
-                    </a:lnB>
-                    <a:solidFill>
-                      <a:srgbClr val="FFFEF8"/>
-                    </a:solidFill>
-                  </a:tcPr>
-                </a:tc>
-                <a:tc>
-                  <a:txBody>
-                    <a:bodyPr wrap="square">
-                      <a:noAutofit/>
-                    </a:bodyPr>
-                    <a:lstStyle/>
-                    <a:p>
-                      <a:pPr algn="l">
-                        <a:lnSpc>
-                          <a:spcPts val="2127"/>
-                        </a:lnSpc>
-                        <a:buNone/>
-                        <a:defRPr sz="1850" b="0">
-                          <a:solidFill>
-                            <a:srgbClr val="303437"/>
-                          </a:solidFill>
-                          <a:latin typeface="Noto Sans"/>
-                        </a:defRPr>
-                      </a:pPr>
-                      <a:r>
-                        <a:rPr sz="1850" b="0" lang="ja-JP" altLang="en-US">
-                          <a:solidFill>
-                            <a:srgbClr val="303437"/>
-                          </a:solidFill>
-                          <a:latin typeface="Noto Sans"/>
-                          <a:ea typeface="Noto Sans CJK JP"/>
-                          <a:cs typeface="Noto Sans"/>
-                        </a:rPr>
-                        <a:t>0 / 0</a:t>
-                      </a:r>
-                    </a:p>
-                  </a:txBody>
-                  <a:tcPr marL="63500" marR="63500" marT="38100" marB="38100" anchor="ctr">
-                    <a:lnL w="7620">
-                      <a:noFill/>
-                    </a:lnL>
-                    <a:lnR w="7620">
-                      <a:noFill/>
-                    </a:lnR>
-                    <a:lnT w="7620">
-                      <a:noFill/>
-                    </a:lnT>
-                    <a:lnB w="7620">
-                      <a:noFill/>
-                    </a:lnB>
-                    <a:solidFill>
-                      <a:srgbClr val="FFFEF8"/>
-                    </a:solidFill>
-                  </a:tcPr>
-                </a:tc>
-              </a:tr>
-              <a:tr h="420624">
-                <a:tc>
-                  <a:txBody>
-                    <a:bodyPr wrap="square">
-                      <a:noAutofit/>
-                    </a:bodyPr>
-                    <a:lstStyle/>
-                    <a:p>
-                      <a:pPr algn="l">
-                        <a:lnSpc>
-                          <a:spcPts val="2127"/>
-                        </a:lnSpc>
-                        <a:buNone/>
-                        <a:defRPr sz="1850" b="0">
-                          <a:solidFill>
-                            <a:srgbClr val="303437"/>
-                          </a:solidFill>
-                          <a:latin typeface="Noto Sans"/>
-                        </a:defRPr>
-                      </a:pPr>
-                      <a:r>
-                        <a:rPr sz="1850" b="0" lang="ja-JP" altLang="en-US">
-                          <a:solidFill>
-                            <a:srgbClr val="303437"/>
-                          </a:solidFill>
-                          <a:latin typeface="Noto Sans"/>
-                          <a:ea typeface="Noto Sans CJK JP"/>
-                          <a:cs typeface="Noto Sans"/>
-                        </a:rPr>
-                        <a:t>prompt_truncated</a:t>
-                      </a:r>
-                    </a:p>
-                  </a:txBody>
-                  <a:tcPr marL="63500" marR="63500" marT="38100" marB="38100" anchor="ctr">
-                    <a:lnL w="7620">
-                      <a:noFill/>
-                    </a:lnL>
-                    <a:lnR w="7620">
-                      <a:noFill/>
-                    </a:lnR>
-                    <a:lnT w="7620">
-                      <a:noFill/>
-                    </a:lnT>
-                    <a:lnB w="15240">
-                      <a:solidFill>
-                        <a:srgbClr val="626669"/>
-                      </a:solidFill>
-                      <a:prstDash val="solid"/>
-                    </a:lnB>
-                    <a:solidFill>
-                      <a:srgbClr val="FFFEF8"/>
-                    </a:solidFill>
-                  </a:tcPr>
-                </a:tc>
-                <a:tc>
-                  <a:txBody>
-                    <a:bodyPr wrap="square">
-                      <a:noAutofit/>
-                    </a:bodyPr>
-                    <a:lstStyle/>
-                    <a:p>
-                      <a:pPr algn="l">
-                        <a:lnSpc>
-                          <a:spcPts val="2127"/>
-                        </a:lnSpc>
-                        <a:buNone/>
-                        <a:defRPr sz="1850" b="0">
-                          <a:solidFill>
-                            <a:srgbClr val="303437"/>
-                          </a:solidFill>
-                          <a:latin typeface="Noto Sans"/>
-                        </a:defRPr>
-                      </a:pPr>
-                      <a:r>
-                        <a:rPr sz="1850" b="0" lang="ja-JP" altLang="en-US">
-                          <a:solidFill>
-                            <a:srgbClr val="303437"/>
-                          </a:solidFill>
-                          <a:latin typeface="Noto Sans"/>
-                          <a:ea typeface="Noto Sans CJK JP"/>
-                          <a:cs typeface="Noto Sans"/>
-                        </a:rPr>
-                        <a:t>0（両モデル・両条件）</a:t>
-                      </a:r>
-                    </a:p>
-                  </a:txBody>
-                  <a:tcPr marL="63500" marR="63500" marT="38100" marB="38100" anchor="ctr">
-                    <a:lnL w="7620">
-                      <a:noFill/>
-                    </a:lnL>
-                    <a:lnR w="7620">
-                      <a:noFill/>
-                    </a:lnR>
-                    <a:lnT w="7620">
-                      <a:noFill/>
-                    </a:lnT>
-                    <a:lnB w="15240">
-                      <a:solidFill>
-                        <a:srgbClr val="626669"/>
-                      </a:solidFill>
-                      <a:prstDash val="solid"/>
-                    </a:lnB>
-                    <a:solidFill>
-                      <a:srgbClr val="FFFEF8"/>
-                    </a:solidFill>
-                  </a:tcPr>
-                </a:tc>
-              </a:tr>
-            </a:tbl>
-          </a:graphicData>
-        </a:graphic>
-      </p:graphicFrame>
+              <a:t>Appendix: 2. 入力と指標の補足</a:t>
+            </a:r>
+          </a:p>
+        </p:txBody>
+      </p:sp>
       <p:sp>
         <p:nvSpPr>
           <p:cNvPr id="5" name="TextBox 4"/>
@@ -21855,8 +20910,8 @@
         </p:nvSpPr>
         <p:spPr>
           <a:xfrm>
-            <a:off x="594360" y="4233672"/>
-            <a:ext cx="7955279" cy="658368"/>
+            <a:off x="594360" y="3429000"/>
+            <a:ext cx="7955279" cy="822960"/>
           </a:xfrm>
           <a:prstGeom prst="rect">
             <a:avLst/>
@@ -21896,7 +20951,7 @@
                 <a:ea typeface="Noto Sans CJK JP"/>
                 <a:cs typeface="Noto Sans"/>
               </a:rPr>
-              <a:t>生成した回答の採点ではなく、echo_promptで既存の投稿の確率を取得する。</a:t>
+              <a:t>公開されたscenario_state.jsonには、評価に使った投稿とリクエストを収める。最初の投稿のinput.textを取り出す。</a:t>
             </a:r>
           </a:p>
         </p:txBody>
@@ -21950,7 +21005,7 @@
                 <a:ea typeface="Noto Sans CJK JP"/>
                 <a:cs typeface="Noto Sans"/>
               </a:rPr>
-              <a:t>[1] Stanford CRFM, HELM Classic v0.4.0, TwitterAAE. 公開実行suite v0.3.0。</a:t>
+              <a:t>[1] Stanford CRFM. HELM Classic v0.4.0 — TwitterAAE.  </a:t>
             </a:r>
             <a:r>
               <a:rPr sz="810" b="0" lang="ja-JP" altLang="en-US">
@@ -21960,20 +21015,132 @@
                 <a:latin typeface="Noto Sans"/>
                 <a:ea typeface="Noto Sans CJK JP"/>
                 <a:cs typeface="Noto Sans"/>
-              </a:rPr>
-              <a:t>  </a:t>
-            </a:r>
-            <a:r>
-              <a:rPr sz="810" b="0" lang="ja-JP" altLang="en-US">
-                <a:solidFill>
-                  <a:srgbClr val="626669"/>
-                </a:solidFill>
-                <a:latin typeface="Noto Sans"/>
-                <a:ea typeface="Noto Sans CJK JP"/>
-                <a:cs typeface="Noto Sans"/>
                 <a:hlinkClick r:id="rId2"/>
               </a:rPr>
               <a:t>https://crfm.stanford.edu/helm/classic/v0.4.0/#/groups/twitter_aae</a:t>
+            </a:r>
+          </a:p>
+        </p:txBody>
+      </p:sp>
+      <p:sp>
+        <p:nvSpPr>
+          <p:cNvPr id="7" name="code-frame"/>
+          <p:cNvSpPr txBox="1"/>
+          <p:nvPr/>
+        </p:nvSpPr>
+        <p:spPr>
+          <a:xfrm>
+            <a:off x="594360" y="1651000"/>
+            <a:ext cx="7955279" cy="1414018"/>
+          </a:xfrm>
+          <a:prstGeom prst="rect">
+            <a:avLst/>
+          </a:prstGeom>
+          <a:solidFill>
+            <a:srgbClr val="EBEDEB"/>
+          </a:solidFill>
+          <a:ln>
+            <a:noFill/>
+          </a:ln>
+        </p:spPr>
+        <p:txBody>
+          <a:bodyPr wrap="none" lIns="152400" rIns="152400" tIns="76200" bIns="127000">
+            <a:spAutoFit/>
+          </a:bodyPr>
+          <a:lstStyle/>
+          <a:p>
+            <a:pPr>
+              <a:lnSpc>
+                <a:spcPts val="1900"/>
+              </a:lnSpc>
+              <a:spcAft>
+                <a:spcPts val="0"/>
+              </a:spcAft>
+              <a:defRPr sz="1550">
+                <a:solidFill>
+                  <a:srgbClr val="303437"/>
+                </a:solidFill>
+                <a:latin typeface="DejaVu Sans Mono"/>
+              </a:defRPr>
+            </a:pPr>
+            <a:r>
+              <a:t>import json</a:t>
+            </a:r>
+          </a:p>
+          <a:p>
+            <a:pPr>
+              <a:lnSpc>
+                <a:spcPts val="1900"/>
+              </a:lnSpc>
+              <a:spcAft>
+                <a:spcPts val="0"/>
+              </a:spcAft>
+              <a:defRPr sz="1550">
+                <a:solidFill>
+                  <a:srgbClr val="303437"/>
+                </a:solidFill>
+                <a:latin typeface="DejaVu Sans Mono"/>
+              </a:defRPr>
+            </a:pPr>
+            <a:r>
+              <a:t>with open("scenario_state.json", encoding="utf-8") as f:</a:t>
+            </a:r>
+          </a:p>
+          <a:p>
+            <a:pPr>
+              <a:lnSpc>
+                <a:spcPts val="1900"/>
+              </a:lnSpc>
+              <a:spcAft>
+                <a:spcPts val="0"/>
+              </a:spcAft>
+              <a:defRPr sz="1550">
+                <a:solidFill>
+                  <a:srgbClr val="303437"/>
+                </a:solidFill>
+                <a:latin typeface="DejaVu Sans Mono"/>
+              </a:defRPr>
+            </a:pPr>
+            <a:r>
+              <a:t>    state = json.load(f)</a:t>
+            </a:r>
+          </a:p>
+          <a:p>
+            <a:pPr>
+              <a:lnSpc>
+                <a:spcPts val="1900"/>
+              </a:lnSpc>
+              <a:spcAft>
+                <a:spcPts val="0"/>
+              </a:spcAft>
+              <a:defRPr sz="1550">
+                <a:solidFill>
+                  <a:srgbClr val="303437"/>
+                </a:solidFill>
+                <a:latin typeface="DejaVu Sans Mono"/>
+              </a:defRPr>
+            </a:pPr>
+            <a:r>
+              <a:t>post = state["request_states"][0]["instance"]</a:t>
+            </a:r>
+          </a:p>
+          <a:p>
+            <a:pPr>
+              <a:lnSpc>
+                <a:spcPts val="1900"/>
+              </a:lnSpc>
+              <a:spcAft>
+                <a:spcPts val="0"/>
+              </a:spcAft>
+              <a:defRPr sz="1550">
+                <a:solidFill>
+                  <a:srgbClr val="303437"/>
+                </a:solidFill>
+                <a:latin typeface="DejaVu Sans Mono"/>
+              </a:defRPr>
+            </a:pPr>
+            <a:r>
+              <a:t>print(post["input"]["text"])</a:t>
             </a:r>
           </a:p>
         </p:txBody>
@@ -22039,7 +21206,7 @@
                 <a:ea typeface="Noto Sans CJK JP"/>
                 <a:cs typeface="Noto Sans"/>
               </a:rPr>
-              <a:t>BPBは投稿ごとの比を単純平均しない</a:t>
+              <a:t>BPBは、全投稿の総byte数で割って求める</a:t>
             </a:r>
           </a:p>
         </p:txBody>
@@ -22087,7 +21254,7 @@
                 <a:ea typeface="Noto Sans CJK JP"/>
                 <a:cs typeface="Noto Sans"/>
               </a:rPr>
-              <a:t>Appendix: 2. 版・実行条件の補足</a:t>
+              <a:t>Appendix: 2. 入力と指標の補足</a:t>
             </a:r>
           </a:p>
         </p:txBody>
@@ -22195,7 +21362,7 @@
                 <a:ea typeface="Noto Sans CJK JP"/>
                 <a:cs typeface="Noto Sans"/>
               </a:rPr>
-              <a:t>投稿ごとの長さで重みが変わる、総byte数による集約。トークン単位のperplexityとは分母が異なる。</a:t>
+              <a:t>すべての投稿の対数確率とbyte数を合計してから計算するため、長い投稿ほど大きな重みを持つ。</a:t>
             </a:r>
           </a:p>
         </p:txBody>
@@ -22303,7 +21470,19 @@
                 <a:ea typeface="Noto Sans CJK JP"/>
                 <a:cs typeface="Noto Sans"/>
               </a:rPr>
-              <a:t>[1] Stanford CRFM, HELM BasicMetrics. 対数確率・byte数からの集約。2026-10-18確認。</a:t>
+              <a:t>[1] Stanford CRFM. HELM BasicMetrics.  </a:t>
+            </a:r>
+            <a:r>
+              <a:rPr sz="810" b="0" lang="ja-JP" altLang="en-US">
+                <a:solidFill>
+                  <a:srgbClr val="626669"/>
+                </a:solidFill>
+                <a:latin typeface="Noto Sans"/>
+                <a:ea typeface="Noto Sans CJK JP"/>
+                <a:cs typeface="Noto Sans"/>
+                <a:hlinkClick r:id="rId2"/>
+              </a:rPr>
+              <a:t>https://github.com/stanford-crfm/helm/blob/main/src/helm/benchmark/metrics/basic_metrics.py</a:t>
             </a:r>
           </a:p>
           <a:p>
@@ -22327,48 +21506,8 @@
                 <a:latin typeface="Noto Sans"/>
                 <a:ea typeface="Noto Sans CJK JP"/>
                 <a:cs typeface="Noto Sans"/>
-                <a:hlinkClick r:id="rId2"/>
-              </a:rPr>
-              <a:t>https://github.com/stanford-crfm/helm/blob/main/src/helm/benchmark/metrics/basic_metrics.py</a:t>
-            </a:r>
-          </a:p>
-          <a:p>
-            <a:pPr>
-              <a:lnSpc>
-                <a:spcPts val="1150"/>
-              </a:lnSpc>
-              <a:spcAft>
-                <a:spcPts val="140"/>
-              </a:spcAft>
-              <a:buNone/>
-              <a:defRPr sz="810" b="0">
-                <a:solidFill>
-                  <a:srgbClr val="303437"/>
-                </a:solidFill>
-                <a:latin typeface="Noto Sans"/>
-              </a:defRPr>
-            </a:pPr>
-            <a:r>
-              <a:rPr sz="810" b="0" lang="ja-JP" altLang="en-US">
-                <a:solidFill>
-                  <a:srgbClr val="626669"/>
-                </a:solidFill>
-                <a:latin typeface="Noto Sans"/>
-                <a:ea typeface="Noto Sans CJK JP"/>
-                <a:cs typeface="Noto Sans"/>
-              </a:rPr>
-              <a:t>[2] Stanford CRFM, HELM Classic v0.4.0, TwitterAAE. 公開実行suite v0.3.0。</a:t>
-            </a:r>
-            <a:r>
-              <a:rPr sz="810" b="0" lang="ja-JP" altLang="en-US">
-                <a:solidFill>
-                  <a:srgbClr val="626669"/>
-                </a:solidFill>
-                <a:latin typeface="Noto Sans"/>
-                <a:ea typeface="Noto Sans CJK JP"/>
-                <a:cs typeface="Noto Sans"/>
-              </a:rPr>
-              <a:t>  </a:t>
+              </a:rPr>
+              <a:t>[2] Stanford CRFM. HELM Classic v0.4.0 — TwitterAAE.  </a:t>
             </a:r>
             <a:r>
               <a:rPr sz="810" b="0" lang="ja-JP" altLang="en-US">
@@ -22494,7 +21633,7 @@
                 <a:ea typeface="Noto Sans CJK JP"/>
                 <a:cs typeface="Noto Sans"/>
               </a:rPr>
-              <a:t>Appendix: 2. 版・実行条件の補足</a:t>
+              <a:t>Appendix: 2. 入力と指標の補足</a:t>
             </a:r>
           </a:p>
         </p:txBody>
@@ -23119,7 +22258,7 @@
                 <a:ea typeface="Noto Sans CJK JP"/>
                 <a:cs typeface="Noto Sans"/>
               </a:rPr>
-              <a:t>[1] Stanford CRFM, HELM Classic v0.4.0, TwitterAAE. 公開実行suite v0.3.0。</a:t>
+              <a:t>[1] Stanford CRFM. HELM Classic v0.4.0 — TwitterAAE.  </a:t>
             </a:r>
             <a:r>
               <a:rPr sz="810" b="0" lang="ja-JP" altLang="en-US">
@@ -23129,373 +22268,9 @@
                 <a:latin typeface="Noto Sans"/>
                 <a:ea typeface="Noto Sans CJK JP"/>
                 <a:cs typeface="Noto Sans"/>
-              </a:rPr>
-              <a:t>  </a:t>
-            </a:r>
-            <a:r>
-              <a:rPr sz="810" b="0" lang="ja-JP" altLang="en-US">
-                <a:solidFill>
-                  <a:srgbClr val="626669"/>
-                </a:solidFill>
-                <a:latin typeface="Noto Sans"/>
-                <a:ea typeface="Noto Sans CJK JP"/>
-                <a:cs typeface="Noto Sans"/>
                 <a:hlinkClick r:id="rId2"/>
               </a:rPr>
               <a:t>https://crfm.stanford.edu/helm/classic/v0.4.0/#/groups/twitter_aae</a:t>
-            </a:r>
-          </a:p>
-        </p:txBody>
-      </p:sp>
-    </p:spTree>
-  </p:cSld>
-  <p:clrMapOvr>
-    <a:masterClrMapping/>
-  </p:clrMapOvr>
-</p:sld>
-</file>
-
-<file path=ppt/slides/slide45.xml><?xml version="1.0" encoding="utf-8"?>
-<p:sld xmlns:a="http://schemas.openxmlformats.org/drawingml/2006/main" xmlns:p="http://schemas.openxmlformats.org/presentationml/2006/main" xmlns:r="http://schemas.openxmlformats.org/officeDocument/2006/relationships">
-  <p:cSld>
-    <p:spTree>
-      <p:nvGrpSpPr>
-        <p:cNvPr id="1" name=""/>
-        <p:cNvGrpSpPr/>
-        <p:nvPr/>
-      </p:nvGrpSpPr>
-      <p:grpSpPr/>
-      <p:sp>
-        <p:nvSpPr>
-          <p:cNvPr id="2" name="Title 1"/>
-          <p:cNvSpPr>
-            <a:spLocks noGrp="1"/>
-          </p:cNvSpPr>
-          <p:nvPr>
-            <p:ph type="title"/>
-          </p:nvPr>
-        </p:nvSpPr>
-        <p:spPr>
-          <a:xfrm>
-            <a:off x="468172" y="650138"/>
-            <a:ext cx="8206740" cy="616305"/>
-          </a:xfrm>
-        </p:spPr>
-        <p:txBody>
-          <a:bodyPr wrap="square" lIns="0" rIns="0" tIns="0" bIns="0">
-            <a:noAutofit/>
-          </a:bodyPr>
-          <a:lstStyle/>
-          <a:p>
-            <a:pPr algn="l">
-              <a:lnSpc>
-                <a:spcPct val="110000"/>
-              </a:lnSpc>
-              <a:buNone/>
-              <a:defRPr sz="2800" b="0">
-                <a:solidFill>
-                  <a:srgbClr val="303437"/>
-                </a:solidFill>
-                <a:latin typeface="Noto Sans"/>
-              </a:defRPr>
-            </a:pPr>
-            <a:r>
-              <a:rPr sz="2800" b="1" lang="ja-JP" altLang="en-US">
-                <a:solidFill>
-                  <a:srgbClr val="303437"/>
-                </a:solidFill>
-                <a:latin typeface="Noto Sans"/>
-                <a:ea typeface="Noto Sans CJK JP"/>
-                <a:cs typeface="Noto Sans"/>
-              </a:rPr>
-              <a:t>公開範囲と取得できた範囲</a:t>
-            </a:r>
-          </a:p>
-        </p:txBody>
-      </p:sp>
-      <p:sp>
-        <p:nvSpPr>
-          <p:cNvPr id="3" name="Title 2"/>
-          <p:cNvSpPr>
-            <a:spLocks noGrp="1"/>
-          </p:cNvSpPr>
-          <p:nvPr>
-            <p:ph type="title" idx="2"/>
-          </p:nvPr>
-        </p:nvSpPr>
-        <p:spPr>
-          <a:xfrm>
-            <a:off x="75895" y="0"/>
-            <a:ext cx="8115300" cy="480060"/>
-          </a:xfrm>
-        </p:spPr>
-        <p:txBody>
-          <a:bodyPr wrap="square" lIns="0" rIns="0" tIns="0" bIns="0" anchor="ctr">
-            <a:noAutofit/>
-          </a:bodyPr>
-          <a:lstStyle/>
-          <a:p>
-            <a:pPr algn="l">
-              <a:lnSpc>
-                <a:spcPct val="110000"/>
-              </a:lnSpc>
-              <a:buNone/>
-              <a:defRPr sz="1400" b="0">
-                <a:solidFill>
-                  <a:srgbClr val="303437"/>
-                </a:solidFill>
-                <a:latin typeface="Noto Sans"/>
-              </a:defRPr>
-            </a:pPr>
-            <a:r>
-              <a:rPr sz="1400" b="1" lang="ja-JP" altLang="en-US">
-                <a:solidFill>
-                  <a:srgbClr val="FFFEF8"/>
-                </a:solidFill>
-                <a:latin typeface="Noto Sans"/>
-                <a:ea typeface="Noto Sans CJK JP"/>
-                <a:cs typeface="Noto Sans"/>
-              </a:rPr>
-              <a:t>Appendix: 2. 版・実行条件の補足</a:t>
-            </a:r>
-          </a:p>
-        </p:txBody>
-      </p:sp>
-      <p:sp>
-        <p:nvSpPr>
-          <p:cNvPr id="4" name="TextBox 3"/>
-          <p:cNvSpPr txBox="1"/>
-          <p:nvPr/>
-        </p:nvSpPr>
-        <p:spPr>
-          <a:xfrm>
-            <a:off x="594360" y="1463040"/>
-            <a:ext cx="7955279" cy="680466"/>
-          </a:xfrm>
-          <a:prstGeom prst="rect">
-            <a:avLst/>
-          </a:prstGeom>
-          <a:noFill/>
-        </p:spPr>
-        <p:txBody>
-          <a:bodyPr wrap="square" lIns="0" rIns="0" tIns="0" bIns="0">
-            <a:noAutofit/>
-          </a:bodyPr>
-          <a:lstStyle/>
-          <a:p>
-            <a:pPr algn="l">
-              <a:lnSpc>
-                <a:spcPts val="2499"/>
-              </a:lnSpc>
-              <a:spcBef>
-                <a:spcPts val="0"/>
-              </a:spcBef>
-              <a:spcAft>
-                <a:spcPts val="0"/>
-              </a:spcAft>
-              <a:buNone/>
-              <a:defRPr sz="2100" b="0">
-                <a:solidFill>
-                  <a:srgbClr val="303437"/>
-                </a:solidFill>
-                <a:latin typeface="Noto Sans"/>
-              </a:defRPr>
-            </a:pPr>
-            <a:r>
-              <a:rPr sz="2100" b="0" lang="ja-JP" altLang="en-US">
-                <a:solidFill>
-                  <a:srgbClr val="303437"/>
-                </a:solidFill>
-                <a:latin typeface="Noto Sans"/>
-                <a:ea typeface="Noto Sans CJK JP"/>
-                <a:cs typeface="Noto Sans"/>
-              </a:rPr>
-              <a:t>公式の全体ZIP（5.5 GB）は未取得。公式UD配布ZIPと公開HELM入力2,000件を取得し、13実例は後者から選定した。</a:t>
-            </a:r>
-          </a:p>
-        </p:txBody>
-      </p:sp>
-      <p:sp>
-        <p:nvSpPr>
-          <p:cNvPr id="5" name="TextBox 4"/>
-          <p:cNvSpPr txBox="1"/>
-          <p:nvPr/>
-        </p:nvSpPr>
-        <p:spPr>
-          <a:xfrm>
-            <a:off x="594360" y="2308098"/>
-            <a:ext cx="7955279" cy="680466"/>
-          </a:xfrm>
-          <a:prstGeom prst="rect">
-            <a:avLst/>
-          </a:prstGeom>
-          <a:noFill/>
-        </p:spPr>
-        <p:txBody>
-          <a:bodyPr wrap="square" lIns="0" rIns="0" tIns="0" bIns="0">
-            <a:noAutofit/>
-          </a:bodyPr>
-          <a:lstStyle/>
-          <a:p>
-            <a:pPr algn="l">
-              <a:lnSpc>
-                <a:spcPts val="2499"/>
-              </a:lnSpc>
-              <a:spcBef>
-                <a:spcPts val="0"/>
-              </a:spcBef>
-              <a:spcAft>
-                <a:spcPts val="0"/>
-              </a:spcAft>
-              <a:buNone/>
-              <a:defRPr sz="2100" b="0">
-                <a:solidFill>
-                  <a:srgbClr val="303437"/>
-                </a:solidFill>
-                <a:latin typeface="Noto Sans"/>
-              </a:defRPr>
-            </a:pPr>
-            <a:r>
-              <a:rPr sz="2100" b="0" lang="ja-JP" altLang="en-US">
-                <a:solidFill>
-                  <a:srgbClr val="303437"/>
-                </a:solidFill>
-                <a:latin typeface="Noto Sans"/>
-                <a:ea typeface="Noto Sans CJK JP"/>
-                <a:cs typeface="Noto Sans"/>
-              </a:rPr>
-              <a:t>公式サイトは研究目的での利用と論文の引用を求めている。投稿本文についての包括的な再配布許諾は確認できなかった。</a:t>
-            </a:r>
-          </a:p>
-        </p:txBody>
-      </p:sp>
-      <p:sp>
-        <p:nvSpPr>
-          <p:cNvPr id="6" name="TextBox 5"/>
-          <p:cNvSpPr txBox="1"/>
-          <p:nvPr/>
-        </p:nvSpPr>
-        <p:spPr>
-          <a:xfrm>
-            <a:off x="594360" y="3153156"/>
-            <a:ext cx="7955279" cy="680466"/>
-          </a:xfrm>
-          <a:prstGeom prst="rect">
-            <a:avLst/>
-          </a:prstGeom>
-          <a:noFill/>
-        </p:spPr>
-        <p:txBody>
-          <a:bodyPr wrap="square" lIns="0" rIns="0" tIns="0" bIns="0">
-            <a:noAutofit/>
-          </a:bodyPr>
-          <a:lstStyle/>
-          <a:p>
-            <a:pPr algn="l">
-              <a:lnSpc>
-                <a:spcPts val="2499"/>
-              </a:lnSpc>
-              <a:spcBef>
-                <a:spcPts val="0"/>
-              </a:spcBef>
-              <a:spcAft>
-                <a:spcPts val="0"/>
-              </a:spcAft>
-              <a:buNone/>
-              <a:defRPr sz="2100" b="0">
-                <a:solidFill>
-                  <a:srgbClr val="303437"/>
-                </a:solidFill>
-                <a:latin typeface="Noto Sans"/>
-              </a:defRPr>
-            </a:pPr>
-            <a:r>
-              <a:rPr sz="2100" b="0" lang="ja-JP" altLang="en-US">
-                <a:solidFill>
-                  <a:srgbClr val="303437"/>
-                </a:solidFill>
-                <a:latin typeface="Noto Sans"/>
-                <a:ea typeface="Noto Sans CJK JP"/>
-                <a:cs typeface="Noto Sans"/>
-              </a:rPr>
-              <a:t>原文、訳、条件内ID、固定実行URL、原レコード、取得ファイルのSHA-256を制作記録へ保存した。</a:t>
-            </a:r>
-          </a:p>
-        </p:txBody>
-      </p:sp>
-      <p:sp>
-        <p:nvSpPr>
-          <p:cNvPr id="7" name="sources"/>
-          <p:cNvSpPr txBox="1"/>
-          <p:nvPr/>
-        </p:nvSpPr>
-        <p:spPr>
-          <a:xfrm>
-            <a:off x="502920" y="4700016"/>
-            <a:ext cx="8183879" cy="530352"/>
-          </a:xfrm>
-          <a:prstGeom prst="rect">
-            <a:avLst/>
-          </a:prstGeom>
-          <a:noFill/>
-        </p:spPr>
-        <p:txBody>
-          <a:bodyPr wrap="square" lIns="0" rIns="0" tIns="0" bIns="0">
-            <a:noAutofit/>
-          </a:bodyPr>
-          <a:lstStyle/>
-          <a:p>
-            <a:pPr algn="l">
-              <a:lnSpc>
-                <a:spcPts val="940"/>
-              </a:lnSpc>
-              <a:spcBef>
-                <a:spcPts val="0"/>
-              </a:spcBef>
-              <a:spcAft>
-                <a:spcPts val="140"/>
-              </a:spcAft>
-              <a:buNone/>
-              <a:defRPr sz="810" b="0">
-                <a:solidFill>
-                  <a:srgbClr val="303437"/>
-                </a:solidFill>
-                <a:latin typeface="Noto Sans"/>
-              </a:defRPr>
-            </a:pPr>
-            <a:r>
-              <a:rPr sz="810" b="0" lang="ja-JP" altLang="en-US">
-                <a:solidFill>
-                  <a:srgbClr val="626669"/>
-                </a:solidFill>
-                <a:latin typeface="Noto Sans"/>
-                <a:ea typeface="Noto Sans CJK JP"/>
-                <a:cs typeface="Noto Sans"/>
-              </a:rPr>
-              <a:t>[1] UMass SLANG Lab (n.d.), TwitterAAE: Research on African-American English on Twitter. 2026-10-18参照。</a:t>
-            </a:r>
-            <a:r>
-              <a:rPr sz="810" b="0" lang="ja-JP" altLang="en-US">
-                <a:solidFill>
-                  <a:srgbClr val="626669"/>
-                </a:solidFill>
-                <a:latin typeface="Noto Sans"/>
-                <a:ea typeface="Noto Sans CJK JP"/>
-                <a:cs typeface="Noto Sans"/>
-              </a:rPr>
-              <a:t>  </a:t>
-            </a:r>
-            <a:r>
-              <a:rPr sz="810" b="0" lang="ja-JP" altLang="en-US">
-                <a:solidFill>
-                  <a:srgbClr val="626669"/>
-                </a:solidFill>
-                <a:latin typeface="Noto Sans"/>
-                <a:ea typeface="Noto Sans CJK JP"/>
-                <a:cs typeface="Noto Sans"/>
-                <a:hlinkClick r:id="rId2"/>
-              </a:rPr>
-              <a:t>https://slanglab.cs.umass.edu/TwitterAAE/</a:t>
             </a:r>
           </a:p>
         </p:txBody>
@@ -24147,7 +22922,7 @@
         <p:spPr>
           <a:xfrm>
             <a:off x="548640" y="1463040"/>
-            <a:ext cx="8046720" cy="1628140"/>
+            <a:ext cx="8046720" cy="1856740"/>
           </a:xfrm>
           <a:prstGeom prst="rect">
             <a:avLst/>
@@ -24295,7 +23070,7 @@
         <p:spPr>
           <a:xfrm>
             <a:off x="548640" y="3322828"/>
-            <a:ext cx="8046720" cy="1374775"/>
+            <a:ext cx="8046720" cy="1603375"/>
           </a:xfrm>
           <a:prstGeom prst="rect">
             <a:avLst/>
@@ -24557,7 +23332,7 @@
         <p:spPr>
           <a:xfrm>
             <a:off x="548640" y="1463040"/>
-            <a:ext cx="8046720" cy="1360297"/>
+            <a:ext cx="8046720" cy="1588897"/>
           </a:xfrm>
           <a:prstGeom prst="rect">
             <a:avLst/>
@@ -24705,7 +23480,7 @@
         <p:spPr>
           <a:xfrm>
             <a:off x="548640" y="3054985"/>
-            <a:ext cx="8046720" cy="1106932"/>
+            <a:ext cx="8046720" cy="1335532"/>
           </a:xfrm>
           <a:prstGeom prst="rect">
             <a:avLst/>
@@ -25007,7 +23782,7 @@
                 <a:ea typeface="Noto Sans CJK JP"/>
                 <a:cs typeface="Noto Sans"/>
               </a:rPr>
-              <a:t>TwitterAAEは、Twitter上のAfrican-American English（AAE）に関連する言語を、地域の人口統計と言葉の共起から分析する資源。</a:t>
+              <a:t>TwitterAAEは、Twitter上のアフリカ系米国人英語（AAE）に関連する表現を調べる言語資源。投稿の位置に対応する地域の人口構成と、使われる言葉の関係から分析する。</a:t>
             </a:r>
           </a:p>
         </p:txBody>
@@ -25309,7 +24084,7 @@
                 <a:ea typeface="Noto Sans CJK JP"/>
                 <a:cs typeface="Noto Sans"/>
               </a:rPr>
-              <a:t>HELMは、AA寄り・white寄りの言語混合比で抽出した二つの投稿集合に、言語モデルが付ける確率を測る。</a:t>
+              <a:t>HELMでは、AA系・white系の言語的特徴が多い投稿をそれぞれ集め、言語モデルがどれだけ予測できるかを比べる。</a:t>
             </a:r>
           </a:p>
         </p:txBody>
@@ -25417,7 +24192,7 @@
                 <a:ea typeface="Noto Sans CJK JP"/>
                 <a:cs typeface="Noto Sans"/>
               </a:rPr>
-              <a:t>[1] Stanford CRFM, HELM TwitterAAEScenario. AA／whiteの抽出とtestインスタンス。2026-10-18確認。</a:t>
+              <a:t>[1] Stanford CRFM, HELM TwitterAAEScenario. </a:t>
             </a:r>
           </a:p>
           <a:p>
@@ -25433,6 +24208,17 @@
                 <a:latin typeface="Noto Sans"/>
               </a:defRPr>
             </a:pPr>
+            <a:r>
+              <a:rPr sz="810" b="0" lang="ja-JP" altLang="en-US">
+                <a:solidFill>
+                  <a:srgbClr val="626669"/>
+                </a:solidFill>
+                <a:latin typeface="Noto Sans"/>
+                <a:ea typeface="Noto Sans CJK JP"/>
+                <a:cs typeface="Noto Sans"/>
+              </a:rPr>
+              <a:t/>
+            </a:r>
             <a:r>
               <a:rPr sz="810" b="0" lang="ja-JP" altLang="en-US">
                 <a:solidFill>
@@ -25509,7 +24295,7 @@
                 <a:ea typeface="Noto Sans CJK JP"/>
                 <a:cs typeface="Noto Sans"/>
               </a:rPr>
-              <a:t>実例はHELMの公開実行入力から示す</a:t>
+              <a:t>AA・whiteは、言語の特徴に基づく抽出条件</a:t>
             </a:r>
           </a:p>
         </p:txBody>
@@ -25611,7 +24397,7 @@
                 <a:ea typeface="Noto Sans CJK JP"/>
                 <a:cs typeface="Noto Sans"/>
               </a:rPr>
-              <a:t>以下の3例とAppendixの10例は、公開されたscenario_stateから選んだ別々の投稿。元の大文字・つづり・句読点を保って全文を示す。</a:t>
+              <a:t>本編3例と追加10例は、HELMの公開評価に使われた13件の投稿全文。大文字や独自のつづり、句読点にも会話の特徴が現れる。</a:t>
             </a:r>
           </a:p>
         </p:txBody>
@@ -25665,7 +24451,7 @@
                 <a:ea typeface="Noto Sans CJK JP"/>
                 <a:cs typeface="Noto Sans"/>
               </a:rPr>
-              <a:t>aa／whiteはデータの抽出条件名。元の推定値は、人口統計に関連付けられた言語が文中で占める割合であり、話者の自己申告人種ではない。</a:t>
+              <a:t>aa／whiteは抽出条件の名前。地域の人口構成に関連する言語の混合比を使っており、投稿者の自己申告による人種を表すラベルではない。</a:t>
             </a:r>
           </a:p>
         </p:txBody>
@@ -25719,18 +24505,7 @@
                 <a:ea typeface="Noto Sans CJK JP"/>
                 <a:cs typeface="Noto Sans"/>
               </a:rPr>
-              <a:t>[1] Blodgett et al. (n.d.), twitteraae. 人口統計と言語を結ぶ混合モデルのREADME。2026-10-18参照。</a:t>
-            </a:r>
-            <a:r>
-              <a:rPr sz="810" b="0" lang="ja-JP" altLang="en-US">
-                <a:solidFill>
-                  <a:srgbClr val="626669"/>
-                </a:solidFill>
-                <a:latin typeface="Noto Sans"/>
-                <a:ea typeface="Noto Sans CJK JP"/>
-                <a:cs typeface="Noto Sans"/>
-              </a:rPr>
-              <a:t>  </a:t>
+              <a:t>[1] Blodgett et al. (n.d.), twitteraae. 人口統計と言語を結ぶ混合モデルのREADME。</a:t>
             </a:r>
             <a:r>
               <a:rPr sz="810" b="0" lang="ja-JP" altLang="en-US">
@@ -25923,8 +24698,8 @@
         </p:nvSpPr>
         <p:spPr>
           <a:xfrm>
-            <a:off x="548640" y="1673352"/>
-            <a:ext cx="8046720" cy="949198"/>
+            <a:off x="548640" y="1765300"/>
+            <a:ext cx="8046720" cy="736600"/>
           </a:xfrm>
           <a:prstGeom prst="rect">
             <a:avLst/>
@@ -25952,7 +24727,7 @@
           </a:fontRef>
         </p:style>
         <p:txBody>
-          <a:bodyPr rtlCol="0" anchor="t" wrap="square" lIns="177800" rIns="177800" tIns="101600" bIns="127000">
+          <a:bodyPr rtlCol="0" anchor="t" wrap="square" lIns="177800" rIns="177800" tIns="9652" bIns="127000">
             <a:noAutofit/>
           </a:bodyPr>
           <a:lstStyle/>
@@ -25997,7 +24772,7 @@
         </p:nvSpPr>
         <p:spPr>
           <a:xfrm>
-            <a:off x="594360" y="2823718"/>
+            <a:off x="594360" y="2703068"/>
             <a:ext cx="7955279" cy="228600"/>
           </a:xfrm>
           <a:prstGeom prst="rect">
@@ -26051,7 +24826,7 @@
         </p:nvSpPr>
         <p:spPr>
           <a:xfrm>
-            <a:off x="594360" y="3125470"/>
+            <a:off x="594360" y="3004820"/>
             <a:ext cx="7955279" cy="710692"/>
           </a:xfrm>
           <a:prstGeom prst="rect">
@@ -26105,7 +24880,7 @@
         </p:nvSpPr>
         <p:spPr>
           <a:xfrm>
-            <a:off x="594360" y="4019042"/>
+            <a:off x="594360" y="3898392"/>
             <a:ext cx="7955279" cy="594360"/>
           </a:xfrm>
           <a:prstGeom prst="rect">
@@ -26146,7 +24921,7 @@
                 <a:ea typeface="Noto Sans CJK JP"/>
                 <a:cs typeface="Noto Sans"/>
               </a:rPr>
-              <a:t>OOMFはone of my followersの略。大文字やつづりの工夫も、実際に採点された文字列の一部。</a:t>
+              <a:t>OOMFはone of my followers（フォロワーの一人）の略。FONEやJUSなど、発音に近づけたつづりも使う。</a:t>
             </a:r>
           </a:p>
         </p:txBody>
@@ -26200,22 +24975,8 @@
                 <a:ea typeface="Noto Sans CJK JP"/>
                 <a:cs typeface="Noto Sans"/>
               </a:rPr>
-              <a:t>[1] Stanford CRFM, HELM Classic v0.4.0, TwitterAAE. 公開実行suite v0.3.0。 instance: aa/id19602（HELM内ID）</a:t>
-            </a:r>
-          </a:p>
-          <a:p>
-            <a:pPr>
-              <a:lnSpc>
-                <a:spcPts val="940"/>
-              </a:lnSpc>
-              <a:buNone/>
-              <a:defRPr sz="810" b="0">
-                <a:solidFill>
-                  <a:srgbClr val="303437"/>
-                </a:solidFill>
-                <a:latin typeface="Noto Sans"/>
-              </a:defRPr>
-            </a:pPr>
+              <a:t>[1] Stanford CRFM. HELM Classic v0.4.0 — TwitterAAE.  </a:t>
+            </a:r>
             <a:r>
               <a:rPr sz="810" b="0" lang="ja-JP" altLang="en-US">
                 <a:solidFill>
@@ -26407,8 +25168,8 @@
         </p:nvSpPr>
         <p:spPr>
           <a:xfrm>
-            <a:off x="548640" y="1673352"/>
-            <a:ext cx="8046720" cy="601598"/>
+            <a:off x="548640" y="1756833"/>
+            <a:ext cx="8046720" cy="465667"/>
           </a:xfrm>
           <a:prstGeom prst="rect">
             <a:avLst/>
@@ -26436,7 +25197,7 @@
           </a:fontRef>
         </p:style>
         <p:txBody>
-          <a:bodyPr rtlCol="0" anchor="t" wrap="square" lIns="177800" rIns="177800" tIns="101600" bIns="127000">
+          <a:bodyPr rtlCol="0" anchor="t" wrap="square" lIns="177800" rIns="177800" tIns="18119" bIns="127000">
             <a:noAutofit/>
           </a:bodyPr>
           <a:lstStyle/>
@@ -26481,7 +25242,7 @@
         </p:nvSpPr>
         <p:spPr>
           <a:xfrm>
-            <a:off x="594360" y="2476119"/>
+            <a:off x="594360" y="2423670"/>
             <a:ext cx="7955279" cy="228600"/>
           </a:xfrm>
           <a:prstGeom prst="rect">
@@ -26535,7 +25296,7 @@
         </p:nvSpPr>
         <p:spPr>
           <a:xfrm>
-            <a:off x="594360" y="2777871"/>
+            <a:off x="594360" y="2725422"/>
             <a:ext cx="7955279" cy="378206"/>
           </a:xfrm>
           <a:prstGeom prst="rect">
@@ -26589,7 +25350,7 @@
         </p:nvSpPr>
         <p:spPr>
           <a:xfrm>
-            <a:off x="594360" y="3338957"/>
+            <a:off x="594360" y="3286508"/>
             <a:ext cx="7955279" cy="594360"/>
           </a:xfrm>
           <a:prstGeom prst="rect">
@@ -26630,7 +25391,7 @@
                 <a:ea typeface="Noto Sans CJK JP"/>
                 <a:cs typeface="Noto Sans"/>
               </a:rPr>
-              <a:t>bruhという呼びかけとwannaの縮約を含む。語りかけの調子を保って訳した。</a:t>
+              <a:t>bruhはくだけた呼びかけ。wannaはwant toの縮約で、短い投稿でも会話の調子が伝わる。</a:t>
             </a:r>
           </a:p>
         </p:txBody>
@@ -26684,22 +25445,8 @@
                 <a:ea typeface="Noto Sans CJK JP"/>
                 <a:cs typeface="Noto Sans"/>
               </a:rPr>
-              <a:t>[1] Stanford CRFM, HELM Classic v0.4.0, TwitterAAE. 公開実行suite v0.3.0。 instance: aa/id15055（HELM内ID）</a:t>
-            </a:r>
-          </a:p>
-          <a:p>
-            <a:pPr>
-              <a:lnSpc>
-                <a:spcPts val="940"/>
-              </a:lnSpc>
-              <a:buNone/>
-              <a:defRPr sz="810" b="0">
-                <a:solidFill>
-                  <a:srgbClr val="303437"/>
-                </a:solidFill>
-                <a:latin typeface="Noto Sans"/>
-              </a:defRPr>
-            </a:pPr>
+              <a:t>[1] Stanford CRFM. HELM Classic v0.4.0 — TwitterAAE.  </a:t>
+            </a:r>
             <a:r>
               <a:rPr sz="810" b="0" lang="ja-JP" altLang="en-US">
                 <a:solidFill>

--- a/slides/datasets-in-10-minutes-twitter-aae.pptx
+++ b/slides/datasets-in-10-minutes-twitter-aae.pptx
@@ -10,7 +10,6 @@
     <p:sldId id="258" r:id="rId8"/>
     <p:sldId id="259" r:id="rId9"/>
     <p:sldId id="260" r:id="rId10"/>
-    <p:sldId id="261" r:id="rId5"/>
     <p:sldId id="262" r:id="rId4"/>
     <p:sldId id="263" r:id="rId3"/>
     <p:sldId id="264" r:id="rId2"/>
@@ -20,11 +19,6 @@
     <p:sldId id="268" r:id="rId18"/>
     <p:sldId id="269" r:id="rId19"/>
     <p:sldId id="270" r:id="rId20"/>
-    <p:sldId id="271" r:id="rId21"/>
-    <p:sldId id="272" r:id="rId22"/>
-    <p:sldId id="273" r:id="rId23"/>
-    <p:sldId id="274" r:id="rId24"/>
-    <p:sldId id="275" r:id="rId25"/>
     <p:sldId id="276" r:id="rId26"/>
     <p:sldId id="277" r:id="rId27"/>
     <p:sldId id="278" r:id="rId28"/>
@@ -43,12 +37,6 @@
     <p:sldId id="291" r:id="rId41"/>
     <p:sldId id="292" r:id="rId42"/>
     <p:sldId id="293" r:id="rId43"/>
-    <p:sldId id="294" r:id="rId44"/>
-    <p:sldId id="295" r:id="rId45"/>
-    <p:sldId id="296" r:id="rId46"/>
-    <p:sldId id="297" r:id="rId47"/>
-    <p:sldId id="298" r:id="rId48"/>
-    <p:sldId id="299" r:id="rId49"/>
     <p:sldId id="301" r:id="rId51"/>
     <p:sldId id="302" r:id="rId52"/>
     <p:sldId id="303" r:id="rId53"/>
@@ -7244,7 +7232,7 @@
                 <a:ea typeface="Noto Sans CJK JP"/>
                 <a:cs typeface="Noto Sans"/>
               </a:rPr>
-              <a:t>会話の言語的多様性と言語モデルの評価</a:t>
+              <a:t>会話の言語的多様性を捉えるコーパス</a:t>
             </a:r>
           </a:p>
         </p:txBody>
@@ -7454,7 +7442,7 @@
                 <a:ea typeface="Noto Sans CJK JP"/>
                 <a:cs typeface="Noto Sans"/>
               </a:rPr>
-              <a:t>1. 投稿の実例と言語モデルの課題</a:t>
+              <a:t>1. 投稿の実例と言語的特徴</a:t>
             </a:r>
           </a:p>
         </p:txBody>
@@ -7508,7 +7496,7 @@
                 <a:ea typeface="Noto Sans CJK JP"/>
                 <a:cs typeface="Noto Sans"/>
               </a:rPr>
-              <a:t>HELM test / white抽出条件・投稿全文</a:t>
+              <a:t>投稿全文 / white群（言語的特徴で抽出）</a:t>
             </a:r>
           </a:p>
         </p:txBody>
@@ -9868,2014 +9856,6 @@
 </p:sld>
 </file>
 
-<file path=ppt/slides/slide16.xml><?xml version="1.0" encoding="utf-8"?>
-<p:sld xmlns:a="http://schemas.openxmlformats.org/drawingml/2006/main" xmlns:p="http://schemas.openxmlformats.org/presentationml/2006/main" xmlns:r="http://schemas.openxmlformats.org/officeDocument/2006/relationships">
-  <p:cSld>
-    <p:spTree>
-      <p:nvGrpSpPr>
-        <p:cNvPr id="1" name=""/>
-        <p:cNvGrpSpPr/>
-        <p:nvPr/>
-      </p:nvGrpSpPr>
-      <p:grpSpPr/>
-      <p:sp>
-        <p:nvSpPr>
-          <p:cNvPr id="2" name="Title 1"/>
-          <p:cNvSpPr>
-            <a:spLocks noGrp="1"/>
-          </p:cNvSpPr>
-          <p:nvPr>
-            <p:ph type="title"/>
-          </p:nvPr>
-        </p:nvSpPr>
-        <p:spPr>
-          <a:xfrm>
-            <a:off x="468172" y="650138"/>
-            <a:ext cx="8206740" cy="616305"/>
-          </a:xfrm>
-        </p:spPr>
-        <p:txBody>
-          <a:bodyPr wrap="square" lIns="0" rIns="0" tIns="0" bIns="0">
-            <a:noAutofit/>
-          </a:bodyPr>
-          <a:lstStyle/>
-          <a:p>
-            <a:pPr algn="l">
-              <a:lnSpc>
-                <a:spcPct val="110000"/>
-              </a:lnSpc>
-              <a:buNone/>
-              <a:defRPr sz="2800" b="0">
-                <a:solidFill>
-                  <a:srgbClr val="303437"/>
-                </a:solidFill>
-                <a:latin typeface="Noto Sans"/>
-              </a:defRPr>
-            </a:pPr>
-            <a:r>
-              <a:rPr sz="2800" b="1" lang="ja-JP" altLang="en-US">
-                <a:solidFill>
-                  <a:srgbClr val="303437"/>
-                </a:solidFill>
-                <a:latin typeface="Noto Sans"/>
-                <a:ea typeface="Noto Sans CJK JP"/>
-                <a:cs typeface="Noto Sans"/>
-              </a:rPr>
-              <a:t>HELMは、投稿ごとの言語的特徴で集合を作る</a:t>
-            </a:r>
-          </a:p>
-        </p:txBody>
-      </p:sp>
-      <p:sp>
-        <p:nvSpPr>
-          <p:cNvPr id="3" name="Title 2"/>
-          <p:cNvSpPr>
-            <a:spLocks noGrp="1"/>
-          </p:cNvSpPr>
-          <p:nvPr>
-            <p:ph type="title" idx="2"/>
-          </p:nvPr>
-        </p:nvSpPr>
-        <p:spPr>
-          <a:xfrm>
-            <a:off x="75895" y="0"/>
-            <a:ext cx="8115300" cy="480060"/>
-          </a:xfrm>
-        </p:spPr>
-        <p:txBody>
-          <a:bodyPr wrap="square" lIns="0" rIns="0" tIns="0" bIns="0" anchor="ctr">
-            <a:noAutofit/>
-          </a:bodyPr>
-          <a:lstStyle/>
-          <a:p>
-            <a:pPr algn="l">
-              <a:lnSpc>
-                <a:spcPct val="110000"/>
-              </a:lnSpc>
-              <a:buNone/>
-              <a:defRPr sz="1400" b="0">
-                <a:solidFill>
-                  <a:srgbClr val="303437"/>
-                </a:solidFill>
-                <a:latin typeface="Noto Sans"/>
-              </a:defRPr>
-            </a:pPr>
-            <a:r>
-              <a:rPr sz="1400" b="1" lang="ja-JP" altLang="en-US">
-                <a:solidFill>
-                  <a:srgbClr val="FFFEF8"/>
-                </a:solidFill>
-                <a:latin typeface="Noto Sans"/>
-                <a:ea typeface="Noto Sans CJK JP"/>
-                <a:cs typeface="Noto Sans"/>
-              </a:rPr>
-              <a:t>2. 人口統計と言語を結ぶ構築方法</a:t>
-            </a:r>
-          </a:p>
-        </p:txBody>
-      </p:sp>
-      <p:graphicFrame>
-        <p:nvGraphicFramePr>
-          <p:cNvPr id="4" name="Table 3"/>
-          <p:cNvGraphicFramePr>
-            <a:graphicFrameLocks noGrp="1"/>
-          </p:cNvGraphicFramePr>
-          <p:nvPr/>
-        </p:nvGraphicFramePr>
-        <p:xfrm>
-          <a:off x="548640" y="1508760"/>
-          <a:ext cx="8046720" cy="2176272"/>
-        </p:xfrm>
-        <a:graphic>
-          <a:graphicData uri="http://schemas.openxmlformats.org/drawingml/2006/table">
-            <a:tbl>
-              <a:tblPr firstRow="0" bandRow="0"/>
-              <a:tblGrid>
-                <a:gridCol w="2331720"/>
-                <a:gridCol w="5715000"/>
-              </a:tblGrid>
-              <a:tr h="438912">
-                <a:tc>
-                  <a:txBody>
-                    <a:bodyPr wrap="square">
-                      <a:noAutofit/>
-                    </a:bodyPr>
-                    <a:lstStyle/>
-                    <a:p>
-                      <a:pPr algn="l">
-                        <a:lnSpc>
-                          <a:spcPts val="2127"/>
-                        </a:lnSpc>
-                        <a:buNone/>
-                        <a:defRPr sz="1850" b="0">
-                          <a:solidFill>
-                            <a:srgbClr val="303437"/>
-                          </a:solidFill>
-                          <a:latin typeface="Noto Sans"/>
-                        </a:defRPr>
-                      </a:pPr>
-                      <a:r>
-                        <a:rPr sz="1850" b="0" lang="ja-JP" altLang="en-US">
-                          <a:solidFill>
-                            <a:srgbClr val="303437"/>
-                          </a:solidFill>
-                          <a:latin typeface="Noto Sans"/>
-                          <a:ea typeface="Noto Sans CJK JP"/>
-                          <a:cs typeface="Noto Sans"/>
-                        </a:rPr>
-                        <a:t>対象</a:t>
-                      </a:r>
-                    </a:p>
-                  </a:txBody>
-                  <a:tcPr marL="63500" marR="63500" marT="38100" marB="38100" anchor="ctr">
-                    <a:lnL w="7620">
-                      <a:noFill/>
-                    </a:lnL>
-                    <a:lnR w="7620">
-                      <a:noFill/>
-                    </a:lnR>
-                    <a:lnT w="15240">
-                      <a:solidFill>
-                        <a:srgbClr val="626669"/>
-                      </a:solidFill>
-                      <a:prstDash val="solid"/>
-                    </a:lnT>
-                    <a:lnB w="7620">
-                      <a:solidFill>
-                        <a:srgbClr val="626669"/>
-                      </a:solidFill>
-                      <a:prstDash val="solid"/>
-                    </a:lnB>
-                    <a:solidFill>
-                      <a:srgbClr val="FFFEF8"/>
-                    </a:solidFill>
-                  </a:tcPr>
-                </a:tc>
-                <a:tc>
-                  <a:txBody>
-                    <a:bodyPr wrap="square">
-                      <a:noAutofit/>
-                    </a:bodyPr>
-                    <a:lstStyle/>
-                    <a:p>
-                      <a:pPr algn="l">
-                        <a:lnSpc>
-                          <a:spcPts val="2127"/>
-                        </a:lnSpc>
-                        <a:buNone/>
-                        <a:defRPr sz="1850" b="0">
-                          <a:solidFill>
-                            <a:srgbClr val="303437"/>
-                          </a:solidFill>
-                          <a:latin typeface="Noto Sans"/>
-                        </a:defRPr>
-                      </a:pPr>
-                      <a:r>
-                        <a:rPr sz="1850" b="0" lang="ja-JP" altLang="en-US">
-                          <a:solidFill>
-                            <a:srgbClr val="303437"/>
-                          </a:solidFill>
-                          <a:latin typeface="Noto Sans"/>
-                          <a:ea typeface="Noto Sans CJK JP"/>
-                          <a:cs typeface="Noto Sans"/>
-                        </a:rPr>
-                        <a:t>選び方と件数</a:t>
-                      </a:r>
-                    </a:p>
-                  </a:txBody>
-                  <a:tcPr marL="63500" marR="63500" marT="38100" marB="38100" anchor="ctr">
-                    <a:lnL w="7620">
-                      <a:noFill/>
-                    </a:lnL>
-                    <a:lnR w="7620">
-                      <a:noFill/>
-                    </a:lnR>
-                    <a:lnT w="15240">
-                      <a:solidFill>
-                        <a:srgbClr val="626669"/>
-                      </a:solidFill>
-                      <a:prstDash val="solid"/>
-                    </a:lnT>
-                    <a:lnB w="7620">
-                      <a:solidFill>
-                        <a:srgbClr val="626669"/>
-                      </a:solidFill>
-                      <a:prstDash val="solid"/>
-                    </a:lnB>
-                    <a:solidFill>
-                      <a:srgbClr val="FFFEF8"/>
-                    </a:solidFill>
-                  </a:tcPr>
-                </a:tc>
-              </a:tr>
-              <a:tr h="868680">
-                <a:tc>
-                  <a:txBody>
-                    <a:bodyPr wrap="square">
-                      <a:noAutofit/>
-                    </a:bodyPr>
-                    <a:lstStyle/>
-                    <a:p>
-                      <a:pPr algn="l">
-                        <a:lnSpc>
-                          <a:spcPts val="2127"/>
-                        </a:lnSpc>
-                        <a:buNone/>
-                        <a:defRPr sz="1850" b="0">
-                          <a:solidFill>
-                            <a:srgbClr val="303437"/>
-                          </a:solidFill>
-                          <a:latin typeface="Noto Sans"/>
-                        </a:defRPr>
-                      </a:pPr>
-                      <a:r>
-                        <a:rPr sz="1850" b="0" lang="ja-JP" altLang="en-US">
-                          <a:solidFill>
-                            <a:srgbClr val="303437"/>
-                          </a:solidFill>
-                          <a:latin typeface="Noto Sans"/>
-                          <a:ea typeface="Noto Sans CJK JP"/>
-                          <a:cs typeface="Noto Sans"/>
-                        </a:rPr>
-                        <a:t>2016年の解析集合</a:t>
-                      </a:r>
-                    </a:p>
-                  </a:txBody>
-                  <a:tcPr marL="63500" marR="63500" marT="38100" marB="38100" anchor="ctr">
-                    <a:lnL w="7620">
-                      <a:noFill/>
-                    </a:lnL>
-                    <a:lnR w="7620">
-                      <a:noFill/>
-                    </a:lnR>
-                    <a:lnT w="7620">
-                      <a:solidFill>
-                        <a:srgbClr val="626669"/>
-                      </a:solidFill>
-                      <a:prstDash val="solid"/>
-                    </a:lnT>
-                    <a:lnB w="7620">
-                      <a:noFill/>
-                    </a:lnB>
-                    <a:solidFill>
-                      <a:srgbClr val="FFFEF8"/>
-                    </a:solidFill>
-                  </a:tcPr>
-                </a:tc>
-                <a:tc>
-                  <a:txBody>
-                    <a:bodyPr wrap="square">
-                      <a:noAutofit/>
-                    </a:bodyPr>
-                    <a:lstStyle/>
-                    <a:p>
-                      <a:pPr algn="l">
-                        <a:lnSpc>
-                          <a:spcPts val="2127"/>
-                        </a:lnSpc>
-                        <a:buNone/>
-                        <a:defRPr sz="1850" b="0">
-                          <a:solidFill>
-                            <a:srgbClr val="303437"/>
-                          </a:solidFill>
-                          <a:latin typeface="Noto Sans"/>
-                        </a:defRPr>
-                      </a:pPr>
-                      <a:r>
-                        <a:rPr sz="1850" b="0" lang="ja-JP" altLang="en-US">
-                          <a:solidFill>
-                            <a:srgbClr val="303437"/>
-                          </a:solidFill>
-                          <a:latin typeface="Noto Sans"/>
-                          <a:ea typeface="Noto Sans CJK JP"/>
-                          <a:cs typeface="Noto Sans"/>
-                        </a:rPr>
-                        <a:t>ユーザーの対応言語成分80%以上、ヒスパニック系・アジア系は計5%未満。AA約83万／white約730万投稿。</a:t>
-                      </a:r>
-                    </a:p>
-                  </a:txBody>
-                  <a:tcPr marL="63500" marR="63500" marT="38100" marB="38100" anchor="ctr">
-                    <a:lnL w="7620">
-                      <a:noFill/>
-                    </a:lnL>
-                    <a:lnR w="7620">
-                      <a:noFill/>
-                    </a:lnR>
-                    <a:lnT w="7620">
-                      <a:solidFill>
-                        <a:srgbClr val="626669"/>
-                      </a:solidFill>
-                      <a:prstDash val="solid"/>
-                    </a:lnT>
-                    <a:lnB w="7620">
-                      <a:noFill/>
-                    </a:lnB>
-                    <a:solidFill>
-                      <a:srgbClr val="FFFEF8"/>
-                    </a:solidFill>
-                  </a:tcPr>
-                </a:tc>
-              </a:tr>
-              <a:tr h="868680">
-                <a:tc>
-                  <a:txBody>
-                    <a:bodyPr wrap="square">
-                      <a:noAutofit/>
-                    </a:bodyPr>
-                    <a:lstStyle/>
-                    <a:p>
-                      <a:pPr algn="l">
-                        <a:lnSpc>
-                          <a:spcPts val="2127"/>
-                        </a:lnSpc>
-                        <a:buNone/>
-                        <a:defRPr sz="1850" b="0">
-                          <a:solidFill>
-                            <a:srgbClr val="303437"/>
-                          </a:solidFill>
-                          <a:latin typeface="Noto Sans"/>
-                        </a:defRPr>
-                      </a:pPr>
-                      <a:r>
-                        <a:rPr sz="1850" b="0" lang="ja-JP" altLang="en-US">
-                          <a:solidFill>
-                            <a:srgbClr val="303437"/>
-                          </a:solidFill>
-                          <a:latin typeface="Noto Sans"/>
-                          <a:ea typeface="Noto Sans CJK JP"/>
-                          <a:cs typeface="Noto Sans"/>
-                        </a:rPr>
-                        <a:t>HELMの抽出集合</a:t>
-                      </a:r>
-                    </a:p>
-                  </a:txBody>
-                  <a:tcPr marL="63500" marR="63500" marT="38100" marB="38100" anchor="ctr">
-                    <a:lnL w="7620">
-                      <a:noFill/>
-                    </a:lnL>
-                    <a:lnR w="7620">
-                      <a:noFill/>
-                    </a:lnR>
-                    <a:lnT w="7620">
-                      <a:noFill/>
-                    </a:lnT>
-                    <a:lnB w="15240">
-                      <a:solidFill>
-                        <a:srgbClr val="626669"/>
-                      </a:solidFill>
-                      <a:prstDash val="solid"/>
-                    </a:lnB>
-                    <a:solidFill>
-                      <a:srgbClr val="FFFEF8"/>
-                    </a:solidFill>
-                  </a:tcPr>
-                </a:tc>
-                <a:tc>
-                  <a:txBody>
-                    <a:bodyPr wrap="square">
-                      <a:noAutofit/>
-                    </a:bodyPr>
-                    <a:lstStyle/>
-                    <a:p>
-                      <a:pPr algn="l">
-                        <a:lnSpc>
-                          <a:spcPts val="2127"/>
-                        </a:lnSpc>
-                        <a:buNone/>
-                        <a:defRPr sz="1850" b="0">
-                          <a:solidFill>
-                            <a:srgbClr val="303437"/>
-                          </a:solidFill>
-                          <a:latin typeface="Noto Sans"/>
-                        </a:defRPr>
-                      </a:pPr>
-                      <a:r>
-                        <a:rPr sz="1850" b="0" lang="ja-JP" altLang="en-US">
-                          <a:solidFill>
-                            <a:srgbClr val="303437"/>
-                          </a:solidFill>
-                          <a:latin typeface="Noto Sans"/>
-                          <a:ea typeface="Noto Sans CJK JP"/>
-                          <a:cs typeface="Noto Sans"/>
-                        </a:rPr>
-                        <a:t>投稿のAA比率上位83万／white比率上位730万から、それぞれ5万投稿を無作為抽出。</a:t>
-                      </a:r>
-                    </a:p>
-                  </a:txBody>
-                  <a:tcPr marL="63500" marR="63500" marT="38100" marB="38100" anchor="ctr">
-                    <a:lnL w="7620">
-                      <a:noFill/>
-                    </a:lnL>
-                    <a:lnR w="7620">
-                      <a:noFill/>
-                    </a:lnR>
-                    <a:lnT w="7620">
-                      <a:noFill/>
-                    </a:lnT>
-                    <a:lnB w="15240">
-                      <a:solidFill>
-                        <a:srgbClr val="626669"/>
-                      </a:solidFill>
-                      <a:prstDash val="solid"/>
-                    </a:lnB>
-                    <a:solidFill>
-                      <a:srgbClr val="FFFEF8"/>
-                    </a:solidFill>
-                  </a:tcPr>
-                </a:tc>
-              </a:tr>
-            </a:tbl>
-          </a:graphicData>
-        </a:graphic>
-      </p:graphicFrame>
-      <p:sp>
-        <p:nvSpPr>
-          <p:cNvPr id="5" name="TextBox 4"/>
-          <p:cNvSpPr txBox="1"/>
-          <p:nvPr/>
-        </p:nvSpPr>
-        <p:spPr>
-          <a:xfrm>
-            <a:off x="594360" y="3886200"/>
-            <a:ext cx="7955279" cy="548640"/>
-          </a:xfrm>
-          <a:prstGeom prst="rect">
-            <a:avLst/>
-          </a:prstGeom>
-          <a:noFill/>
-        </p:spPr>
-        <p:txBody>
-          <a:bodyPr wrap="square" lIns="0" rIns="0" tIns="0" bIns="0">
-            <a:noAutofit/>
-          </a:bodyPr>
-          <a:lstStyle/>
-          <a:p>
-            <a:pPr algn="l">
-              <a:lnSpc>
-                <a:spcPts val="2047"/>
-              </a:lnSpc>
-              <a:spcBef>
-                <a:spcPts val="0"/>
-              </a:spcBef>
-              <a:spcAft>
-                <a:spcPts val="0"/>
-              </a:spcAft>
-              <a:buNone/>
-              <a:defRPr sz="1750" b="0">
-                <a:solidFill>
-                  <a:srgbClr val="303437"/>
-                </a:solidFill>
-                <a:latin typeface="Noto Sans"/>
-              </a:defRPr>
-            </a:pPr>
-            <a:r>
-              <a:rPr sz="1750" b="0" lang="ja-JP" altLang="en-US">
-                <a:solidFill>
-                  <a:srgbClr val="303437"/>
-                </a:solidFill>
-                <a:latin typeface="Noto Sans"/>
-                <a:ea typeface="Noto Sans CJK JP"/>
-                <a:cs typeface="Noto Sans"/>
-              </a:rPr>
-              <a:t>2016年の分析はユーザーごとに選び、HELMは投稿ごとの混合比で選ぶ。</a:t>
-            </a:r>
-          </a:p>
-        </p:txBody>
-      </p:sp>
-      <p:sp>
-        <p:nvSpPr>
-          <p:cNvPr id="6" name="sources"/>
-          <p:cNvSpPr txBox="1"/>
-          <p:nvPr/>
-        </p:nvSpPr>
-        <p:spPr>
-          <a:xfrm>
-            <a:off x="502920" y="4700016"/>
-            <a:ext cx="8183879" cy="530352"/>
-          </a:xfrm>
-          <a:prstGeom prst="rect">
-            <a:avLst/>
-          </a:prstGeom>
-          <a:noFill/>
-        </p:spPr>
-        <p:txBody>
-          <a:bodyPr wrap="square" lIns="0" rIns="0" tIns="0" bIns="0">
-            <a:noAutofit/>
-          </a:bodyPr>
-          <a:lstStyle/>
-          <a:p>
-            <a:pPr algn="l">
-              <a:lnSpc>
-                <a:spcPts val="940"/>
-              </a:lnSpc>
-              <a:spcBef>
-                <a:spcPts val="0"/>
-              </a:spcBef>
-              <a:spcAft>
-                <a:spcPts val="140"/>
-              </a:spcAft>
-              <a:buNone/>
-              <a:defRPr sz="810" b="0">
-                <a:solidFill>
-                  <a:srgbClr val="303437"/>
-                </a:solidFill>
-                <a:latin typeface="Noto Sans"/>
-              </a:defRPr>
-            </a:pPr>
-            <a:r>
-              <a:rPr sz="810" b="0" lang="ja-JP" altLang="en-US">
-                <a:solidFill>
-                  <a:srgbClr val="626669"/>
-                </a:solidFill>
-                <a:latin typeface="Noto Sans"/>
-                <a:ea typeface="Noto Sans CJK JP"/>
-                <a:cs typeface="Noto Sans"/>
-              </a:rPr>
-              <a:t>[1] Stanford CRFM, HELM TwitterAAEScenario. </a:t>
-            </a:r>
-          </a:p>
-          <a:p>
-            <a:pPr>
-              <a:lnSpc>
-                <a:spcPts val="940"/>
-              </a:lnSpc>
-              <a:buNone/>
-              <a:defRPr sz="810" b="0">
-                <a:solidFill>
-                  <a:srgbClr val="303437"/>
-                </a:solidFill>
-                <a:latin typeface="Noto Sans"/>
-              </a:defRPr>
-            </a:pPr>
-            <a:r>
-              <a:rPr sz="810" b="0" lang="ja-JP" altLang="en-US">
-                <a:solidFill>
-                  <a:srgbClr val="626669"/>
-                </a:solidFill>
-                <a:latin typeface="Noto Sans"/>
-                <a:ea typeface="Noto Sans CJK JP"/>
-                <a:cs typeface="Noto Sans"/>
-              </a:rPr>
-              <a:t/>
-            </a:r>
-            <a:r>
-              <a:rPr sz="810" b="0" lang="ja-JP" altLang="en-US">
-                <a:solidFill>
-                  <a:srgbClr val="626669"/>
-                </a:solidFill>
-                <a:latin typeface="Noto Sans"/>
-                <a:ea typeface="Noto Sans CJK JP"/>
-                <a:cs typeface="Noto Sans"/>
-                <a:hlinkClick r:id="rId2"/>
-              </a:rPr>
-              <a:t>https://github.com/stanford-crfm/helm/blob/main/src/helm/benchmark/scenarios/twitter_aae_scenario.py</a:t>
-            </a:r>
-          </a:p>
-        </p:txBody>
-      </p:sp>
-    </p:spTree>
-  </p:cSld>
-  <p:clrMapOvr>
-    <a:masterClrMapping/>
-  </p:clrMapOvr>
-</p:sld>
-</file>
-
-<file path=ppt/slides/slide17.xml><?xml version="1.0" encoding="utf-8"?>
-<p:sld xmlns:a="http://schemas.openxmlformats.org/drawingml/2006/main" xmlns:p="http://schemas.openxmlformats.org/presentationml/2006/main" xmlns:r="http://schemas.openxmlformats.org/officeDocument/2006/relationships">
-  <p:cSld>
-    <p:spTree>
-      <p:nvGrpSpPr>
-        <p:cNvPr id="1" name=""/>
-        <p:cNvGrpSpPr/>
-        <p:nvPr/>
-      </p:nvGrpSpPr>
-      <p:grpSpPr/>
-      <p:sp>
-        <p:nvSpPr>
-          <p:cNvPr id="2" name="Title 1"/>
-          <p:cNvSpPr>
-            <a:spLocks noGrp="1"/>
-          </p:cNvSpPr>
-          <p:nvPr>
-            <p:ph type="title"/>
-          </p:nvPr>
-        </p:nvSpPr>
-        <p:spPr>
-          <a:xfrm>
-            <a:off x="548640" y="2506875"/>
-            <a:ext cx="8046720" cy="585216"/>
-          </a:xfrm>
-        </p:spPr>
-        <p:txBody>
-          <a:bodyPr wrap="square" lIns="0" rIns="0" tIns="0" bIns="0" anchor="ctr">
-            <a:noAutofit/>
-          </a:bodyPr>
-          <a:lstStyle/>
-          <a:p>
-            <a:pPr algn="ctr">
-              <a:lnSpc>
-                <a:spcPct val="110000"/>
-              </a:lnSpc>
-              <a:buNone/>
-              <a:defRPr sz="3600" b="0">
-                <a:solidFill>
-                  <a:srgbClr val="303437"/>
-                </a:solidFill>
-                <a:latin typeface="Noto Sans"/>
-              </a:defRPr>
-            </a:pPr>
-            <a:r>
-              <a:rPr sz="3600" b="1" lang="ja-JP" altLang="en-US">
-                <a:solidFill>
-                  <a:srgbClr val="303437"/>
-                </a:solidFill>
-                <a:latin typeface="Noto Sans"/>
-                <a:ea typeface="Noto Sans CJK JP"/>
-                <a:cs typeface="Noto Sans"/>
-              </a:rPr>
-              <a:t>HELMの評価条件と結果</a:t>
-            </a:r>
-          </a:p>
-        </p:txBody>
-      </p:sp>
-      <p:sp>
-        <p:nvSpPr>
-          <p:cNvPr id="3" name="Title 2"/>
-          <p:cNvSpPr>
-            <a:spLocks noGrp="1"/>
-          </p:cNvSpPr>
-          <p:nvPr>
-            <p:ph type="title" idx="2"/>
-          </p:nvPr>
-        </p:nvSpPr>
-        <p:spPr>
-          <a:xfrm>
-            <a:off x="75895" y="0"/>
-            <a:ext cx="8115300" cy="480060"/>
-          </a:xfrm>
-        </p:spPr>
-        <p:txBody>
-          <a:bodyPr wrap="square" lIns="0" rIns="0" tIns="0" bIns="0" anchor="ctr">
-            <a:noAutofit/>
-          </a:bodyPr>
-          <a:lstStyle/>
-          <a:p>
-            <a:pPr algn="l">
-              <a:lnSpc>
-                <a:spcPct val="110000"/>
-              </a:lnSpc>
-              <a:buNone/>
-              <a:defRPr sz="1400" b="0">
-                <a:solidFill>
-                  <a:srgbClr val="303437"/>
-                </a:solidFill>
-                <a:latin typeface="Noto Sans"/>
-              </a:defRPr>
-            </a:pPr>
-            <a:r>
-              <a:rPr sz="1400" b="1" lang="ja-JP" altLang="en-US">
-                <a:solidFill>
-                  <a:srgbClr val="FFFEF8"/>
-                </a:solidFill>
-                <a:latin typeface="Noto Sans"/>
-                <a:ea typeface="Noto Sans CJK JP"/>
-                <a:cs typeface="Noto Sans"/>
-              </a:rPr>
-              <a:t>3. HELMの評価条件と結果</a:t>
-            </a:r>
-          </a:p>
-        </p:txBody>
-      </p:sp>
-    </p:spTree>
-  </p:cSld>
-  <p:clrMapOvr>
-    <a:masterClrMapping/>
-  </p:clrMapOvr>
-</p:sld>
-</file>
-
-<file path=ppt/slides/slide18.xml><?xml version="1.0" encoding="utf-8"?>
-<p:sld xmlns:a="http://schemas.openxmlformats.org/drawingml/2006/main" xmlns:p="http://schemas.openxmlformats.org/presentationml/2006/main" xmlns:r="http://schemas.openxmlformats.org/officeDocument/2006/relationships">
-  <p:cSld>
-    <p:spTree>
-      <p:nvGrpSpPr>
-        <p:cNvPr id="1" name=""/>
-        <p:cNvGrpSpPr/>
-        <p:nvPr/>
-      </p:nvGrpSpPr>
-      <p:grpSpPr/>
-      <p:sp>
-        <p:nvSpPr>
-          <p:cNvPr id="2" name="Title 1"/>
-          <p:cNvSpPr>
-            <a:spLocks noGrp="1"/>
-          </p:cNvSpPr>
-          <p:nvPr>
-            <p:ph type="title"/>
-          </p:nvPr>
-        </p:nvSpPr>
-        <p:spPr>
-          <a:xfrm>
-            <a:off x="468172" y="650138"/>
-            <a:ext cx="8206740" cy="616305"/>
-          </a:xfrm>
-        </p:spPr>
-        <p:txBody>
-          <a:bodyPr wrap="square" lIns="0" rIns="0" tIns="0" bIns="0">
-            <a:noAutofit/>
-          </a:bodyPr>
-          <a:lstStyle/>
-          <a:p>
-            <a:pPr algn="l">
-              <a:lnSpc>
-                <a:spcPct val="110000"/>
-              </a:lnSpc>
-              <a:buNone/>
-              <a:defRPr sz="2800" b="0">
-                <a:solidFill>
-                  <a:srgbClr val="303437"/>
-                </a:solidFill>
-                <a:latin typeface="Noto Sans"/>
-              </a:defRPr>
-            </a:pPr>
-            <a:r>
-              <a:rPr sz="2800" b="1" lang="ja-JP" altLang="en-US">
-                <a:solidFill>
-                  <a:srgbClr val="303437"/>
-                </a:solidFill>
-                <a:latin typeface="Noto Sans"/>
-                <a:ea typeface="Noto Sans CJK JP"/>
-                <a:cs typeface="Noto Sans"/>
-              </a:rPr>
-              <a:t>BPBが低いほど、投稿を予測しやすい</a:t>
-            </a:r>
-          </a:p>
-        </p:txBody>
-      </p:sp>
-      <p:sp>
-        <p:nvSpPr>
-          <p:cNvPr id="3" name="Title 2"/>
-          <p:cNvSpPr>
-            <a:spLocks noGrp="1"/>
-          </p:cNvSpPr>
-          <p:nvPr>
-            <p:ph type="title" idx="2"/>
-          </p:nvPr>
-        </p:nvSpPr>
-        <p:spPr>
-          <a:xfrm>
-            <a:off x="75895" y="0"/>
-            <a:ext cx="8115300" cy="480060"/>
-          </a:xfrm>
-        </p:spPr>
-        <p:txBody>
-          <a:bodyPr wrap="square" lIns="0" rIns="0" tIns="0" bIns="0" anchor="ctr">
-            <a:noAutofit/>
-          </a:bodyPr>
-          <a:lstStyle/>
-          <a:p>
-            <a:pPr algn="l">
-              <a:lnSpc>
-                <a:spcPct val="110000"/>
-              </a:lnSpc>
-              <a:buNone/>
-              <a:defRPr sz="1400" b="0">
-                <a:solidFill>
-                  <a:srgbClr val="303437"/>
-                </a:solidFill>
-                <a:latin typeface="Noto Sans"/>
-              </a:defRPr>
-            </a:pPr>
-            <a:r>
-              <a:rPr sz="1400" b="1" lang="ja-JP" altLang="en-US">
-                <a:solidFill>
-                  <a:srgbClr val="FFFEF8"/>
-                </a:solidFill>
-                <a:latin typeface="Noto Sans"/>
-                <a:ea typeface="Noto Sans CJK JP"/>
-                <a:cs typeface="Noto Sans"/>
-              </a:rPr>
-              <a:t>3. HELMの評価条件と結果</a:t>
-            </a:r>
-          </a:p>
-        </p:txBody>
-      </p:sp>
-      <p:sp>
-        <p:nvSpPr>
-          <p:cNvPr id="4" name="TextBox 3"/>
-          <p:cNvSpPr txBox="1"/>
-          <p:nvPr/>
-        </p:nvSpPr>
-        <p:spPr>
-          <a:xfrm>
-            <a:off x="594360" y="1463040"/>
-            <a:ext cx="7955279" cy="997839"/>
-          </a:xfrm>
-          <a:prstGeom prst="rect">
-            <a:avLst/>
-          </a:prstGeom>
-          <a:noFill/>
-        </p:spPr>
-        <p:txBody>
-          <a:bodyPr wrap="square" lIns="0" rIns="0" tIns="0" bIns="0">
-            <a:noAutofit/>
-          </a:bodyPr>
-          <a:lstStyle/>
-          <a:p>
-            <a:pPr algn="l">
-              <a:lnSpc>
-                <a:spcPts val="2499"/>
-              </a:lnSpc>
-              <a:spcBef>
-                <a:spcPts val="0"/>
-              </a:spcBef>
-              <a:spcAft>
-                <a:spcPts val="0"/>
-              </a:spcAft>
-              <a:buNone/>
-              <a:defRPr sz="2100" b="0">
-                <a:solidFill>
-                  <a:srgbClr val="303437"/>
-                </a:solidFill>
-                <a:latin typeface="Noto Sans"/>
-              </a:defRPr>
-            </a:pPr>
-            <a:r>
-              <a:rPr sz="2100" b="0" lang="ja-JP" altLang="en-US">
-                <a:solidFill>
-                  <a:srgbClr val="303437"/>
-                </a:solidFill>
-                <a:latin typeface="Noto Sans"/>
-                <a:ea typeface="Noto Sans CJK JP"/>
-                <a:cs typeface="Noto Sans"/>
-              </a:rPr>
-              <a:t>言語モデルは、先行する文字列を条件に各トークンの確率を付ける。予測対象の負の対数確率を合計し、そのbyte数で割ってbitsへ換算する。</a:t>
-            </a:r>
-          </a:p>
-        </p:txBody>
-      </p:sp>
-      <p:sp>
-        <p:nvSpPr>
-          <p:cNvPr id="5" name="TextBox 4"/>
-          <p:cNvSpPr txBox="1"/>
-          <p:nvPr/>
-        </p:nvSpPr>
-        <p:spPr>
-          <a:xfrm>
-            <a:off x="594360" y="2625471"/>
-            <a:ext cx="7955279" cy="680466"/>
-          </a:xfrm>
-          <a:prstGeom prst="rect">
-            <a:avLst/>
-          </a:prstGeom>
-          <a:noFill/>
-        </p:spPr>
-        <p:txBody>
-          <a:bodyPr wrap="square" lIns="0" rIns="0" tIns="0" bIns="0">
-            <a:noAutofit/>
-          </a:bodyPr>
-          <a:lstStyle/>
-          <a:p>
-            <a:pPr algn="l">
-              <a:lnSpc>
-                <a:spcPts val="2499"/>
-              </a:lnSpc>
-              <a:spcBef>
-                <a:spcPts val="0"/>
-              </a:spcBef>
-              <a:spcAft>
-                <a:spcPts val="0"/>
-              </a:spcAft>
-              <a:buNone/>
-              <a:defRPr sz="2100" b="0">
-                <a:solidFill>
-                  <a:srgbClr val="303437"/>
-                </a:solidFill>
-                <a:latin typeface="Noto Sans"/>
-              </a:defRPr>
-            </a:pPr>
-            <a:r>
-              <a:rPr sz="2100" b="0" lang="ja-JP" altLang="en-US">
-                <a:solidFill>
-                  <a:srgbClr val="303437"/>
-                </a:solidFill>
-                <a:latin typeface="Noto Sans"/>
-                <a:ea typeface="Noto Sans CJK JP"/>
-                <a:cs typeface="Noto Sans"/>
-              </a:rPr>
-              <a:t>bits per byte（BPB）は、1 byteを表すために必要な平均情報量。低いほど、その文字列に高い確率を与えている。</a:t>
-            </a:r>
-          </a:p>
-        </p:txBody>
-      </p:sp>
-      <p:sp>
-        <p:nvSpPr>
-          <p:cNvPr id="6" name="TextBox 5"/>
-          <p:cNvSpPr txBox="1"/>
-          <p:nvPr/>
-        </p:nvSpPr>
-        <p:spPr>
-          <a:xfrm>
-            <a:off x="594360" y="3470528"/>
-            <a:ext cx="7955279" cy="680466"/>
-          </a:xfrm>
-          <a:prstGeom prst="rect">
-            <a:avLst/>
-          </a:prstGeom>
-          <a:noFill/>
-        </p:spPr>
-        <p:txBody>
-          <a:bodyPr wrap="square" lIns="0" rIns="0" tIns="0" bIns="0">
-            <a:noAutofit/>
-          </a:bodyPr>
-          <a:lstStyle/>
-          <a:p>
-            <a:pPr algn="l">
-              <a:lnSpc>
-                <a:spcPts val="2499"/>
-              </a:lnSpc>
-              <a:spcBef>
-                <a:spcPts val="0"/>
-              </a:spcBef>
-              <a:spcAft>
-                <a:spcPts val="0"/>
-              </a:spcAft>
-              <a:buNone/>
-              <a:defRPr sz="2100" b="0">
-                <a:solidFill>
-                  <a:srgbClr val="303437"/>
-                </a:solidFill>
-                <a:latin typeface="Noto Sans"/>
-              </a:defRPr>
-            </a:pPr>
-            <a:r>
-              <a:rPr sz="2100" b="0" lang="ja-JP" altLang="en-US">
-                <a:solidFill>
-                  <a:srgbClr val="303437"/>
-                </a:solidFill>
-                <a:latin typeface="Noto Sans"/>
-                <a:ea typeface="Noto Sans CJK JP"/>
-                <a:cs typeface="Noto Sans"/>
-              </a:rPr>
-              <a:t>トークンの区切りがモデル間で異なるため、HELMの主要指標にはbyteで正規化したBPBを使う。</a:t>
-            </a:r>
-          </a:p>
-        </p:txBody>
-      </p:sp>
-      <p:sp>
-        <p:nvSpPr>
-          <p:cNvPr id="7" name="sources"/>
-          <p:cNvSpPr txBox="1"/>
-          <p:nvPr/>
-        </p:nvSpPr>
-        <p:spPr>
-          <a:xfrm>
-            <a:off x="502920" y="4700016"/>
-            <a:ext cx="8183879" cy="530352"/>
-          </a:xfrm>
-          <a:prstGeom prst="rect">
-            <a:avLst/>
-          </a:prstGeom>
-          <a:noFill/>
-        </p:spPr>
-        <p:txBody>
-          <a:bodyPr wrap="square" lIns="0" rIns="0" tIns="0" bIns="0">
-            <a:noAutofit/>
-          </a:bodyPr>
-          <a:lstStyle/>
-          <a:p>
-            <a:pPr algn="l">
-              <a:lnSpc>
-                <a:spcPts val="940"/>
-              </a:lnSpc>
-              <a:spcBef>
-                <a:spcPts val="0"/>
-              </a:spcBef>
-              <a:spcAft>
-                <a:spcPts val="140"/>
-              </a:spcAft>
-              <a:buNone/>
-              <a:defRPr sz="810" b="0">
-                <a:solidFill>
-                  <a:srgbClr val="303437"/>
-                </a:solidFill>
-                <a:latin typeface="Noto Sans"/>
-              </a:defRPr>
-            </a:pPr>
-            <a:r>
-              <a:rPr sz="810" b="0" lang="ja-JP" altLang="en-US">
-                <a:solidFill>
-                  <a:srgbClr val="626669"/>
-                </a:solidFill>
-                <a:latin typeface="Noto Sans"/>
-                <a:ea typeface="Noto Sans CJK JP"/>
-                <a:cs typeface="Noto Sans"/>
-              </a:rPr>
-              <a:t>[1] Stanford CRFM, HELM BasicMetrics. </a:t>
-            </a:r>
-          </a:p>
-          <a:p>
-            <a:pPr>
-              <a:lnSpc>
-                <a:spcPts val="940"/>
-              </a:lnSpc>
-              <a:buNone/>
-              <a:defRPr sz="810" b="0">
-                <a:solidFill>
-                  <a:srgbClr val="303437"/>
-                </a:solidFill>
-                <a:latin typeface="Noto Sans"/>
-              </a:defRPr>
-            </a:pPr>
-            <a:r>
-              <a:rPr sz="810" b="0" lang="ja-JP" altLang="en-US">
-                <a:solidFill>
-                  <a:srgbClr val="626669"/>
-                </a:solidFill>
-                <a:latin typeface="Noto Sans"/>
-                <a:ea typeface="Noto Sans CJK JP"/>
-                <a:cs typeface="Noto Sans"/>
-              </a:rPr>
-              <a:t/>
-            </a:r>
-            <a:r>
-              <a:rPr sz="810" b="0" lang="ja-JP" altLang="en-US">
-                <a:solidFill>
-                  <a:srgbClr val="626669"/>
-                </a:solidFill>
-                <a:latin typeface="Noto Sans"/>
-                <a:ea typeface="Noto Sans CJK JP"/>
-                <a:cs typeface="Noto Sans"/>
-                <a:hlinkClick r:id="rId2"/>
-              </a:rPr>
-              <a:t>https://github.com/stanford-crfm/helm/blob/main/src/helm/benchmark/metrics/basic_metrics.py</a:t>
-            </a:r>
-          </a:p>
-        </p:txBody>
-      </p:sp>
-    </p:spTree>
-  </p:cSld>
-  <p:clrMapOvr>
-    <a:masterClrMapping/>
-  </p:clrMapOvr>
-</p:sld>
-</file>
-
-<file path=ppt/slides/slide19.xml><?xml version="1.0" encoding="utf-8"?>
-<p:sld xmlns:a="http://schemas.openxmlformats.org/drawingml/2006/main" xmlns:p="http://schemas.openxmlformats.org/presentationml/2006/main" xmlns:r="http://schemas.openxmlformats.org/officeDocument/2006/relationships">
-  <p:cSld>
-    <p:spTree>
-      <p:nvGrpSpPr>
-        <p:cNvPr id="1" name=""/>
-        <p:cNvGrpSpPr/>
-        <p:nvPr/>
-      </p:nvGrpSpPr>
-      <p:grpSpPr/>
-      <p:sp>
-        <p:nvSpPr>
-          <p:cNvPr id="2" name="Title 1"/>
-          <p:cNvSpPr>
-            <a:spLocks noGrp="1"/>
-          </p:cNvSpPr>
-          <p:nvPr>
-            <p:ph type="title"/>
-          </p:nvPr>
-        </p:nvSpPr>
-        <p:spPr>
-          <a:xfrm>
-            <a:off x="468172" y="650138"/>
-            <a:ext cx="8206740" cy="616305"/>
-          </a:xfrm>
-        </p:spPr>
-        <p:txBody>
-          <a:bodyPr wrap="square" lIns="0" rIns="0" tIns="0" bIns="0">
-            <a:noAutofit/>
-          </a:bodyPr>
-          <a:lstStyle/>
-          <a:p>
-            <a:pPr algn="l">
-              <a:lnSpc>
-                <a:spcPct val="110000"/>
-              </a:lnSpc>
-              <a:buNone/>
-              <a:defRPr sz="2800" b="0">
-                <a:solidFill>
-                  <a:srgbClr val="303437"/>
-                </a:solidFill>
-                <a:latin typeface="Noto Sans"/>
-              </a:defRPr>
-            </a:pPr>
-            <a:r>
-              <a:rPr sz="2800" b="1" lang="ja-JP" altLang="en-US">
-                <a:solidFill>
-                  <a:srgbClr val="303437"/>
-                </a:solidFill>
-                <a:latin typeface="Noto Sans"/>
-                <a:ea typeface="Noto Sans CJK JP"/>
-                <a:cs typeface="Noto Sans"/>
-              </a:rPr>
-              <a:t>HELMではAA側のBPBが高かった</a:t>
-            </a:r>
-          </a:p>
-        </p:txBody>
-      </p:sp>
-      <p:sp>
-        <p:nvSpPr>
-          <p:cNvPr id="3" name="Title 2"/>
-          <p:cNvSpPr>
-            <a:spLocks noGrp="1"/>
-          </p:cNvSpPr>
-          <p:nvPr>
-            <p:ph type="title" idx="2"/>
-          </p:nvPr>
-        </p:nvSpPr>
-        <p:spPr>
-          <a:xfrm>
-            <a:off x="75895" y="0"/>
-            <a:ext cx="8115300" cy="480060"/>
-          </a:xfrm>
-        </p:spPr>
-        <p:txBody>
-          <a:bodyPr wrap="square" lIns="0" rIns="0" tIns="0" bIns="0" anchor="ctr">
-            <a:noAutofit/>
-          </a:bodyPr>
-          <a:lstStyle/>
-          <a:p>
-            <a:pPr algn="l">
-              <a:lnSpc>
-                <a:spcPct val="110000"/>
-              </a:lnSpc>
-              <a:buNone/>
-              <a:defRPr sz="1400" b="0">
-                <a:solidFill>
-                  <a:srgbClr val="303437"/>
-                </a:solidFill>
-                <a:latin typeface="Noto Sans"/>
-              </a:defRPr>
-            </a:pPr>
-            <a:r>
-              <a:rPr sz="1400" b="1" lang="ja-JP" altLang="en-US">
-                <a:solidFill>
-                  <a:srgbClr val="FFFEF8"/>
-                </a:solidFill>
-                <a:latin typeface="Noto Sans"/>
-                <a:ea typeface="Noto Sans CJK JP"/>
-                <a:cs typeface="Noto Sans"/>
-              </a:rPr>
-              <a:t>3. HELMの評価条件と結果</a:t>
-            </a:r>
-          </a:p>
-        </p:txBody>
-      </p:sp>
-      <p:graphicFrame>
-        <p:nvGraphicFramePr>
-          <p:cNvPr id="4" name="Table 3"/>
-          <p:cNvGraphicFramePr>
-            <a:graphicFrameLocks noGrp="1"/>
-          </p:cNvGraphicFramePr>
-          <p:nvPr/>
-        </p:nvGraphicFramePr>
-        <p:xfrm>
-          <a:off x="548640" y="1508760"/>
-          <a:ext cx="8046720" cy="1642110"/>
-        </p:xfrm>
-        <a:graphic>
-          <a:graphicData uri="http://schemas.openxmlformats.org/drawingml/2006/table">
-            <a:tbl>
-              <a:tblPr firstRow="0" bandRow="0"/>
-              <a:tblGrid>
-                <a:gridCol w="3200400"/>
-                <a:gridCol w="1463040"/>
-                <a:gridCol w="1463040"/>
-                <a:gridCol w="1920240"/>
-              </a:tblGrid>
-              <a:tr h="457200">
-                <a:tc>
-                  <a:txBody>
-                    <a:bodyPr wrap="square">
-                      <a:noAutofit/>
-                    </a:bodyPr>
-                    <a:lstStyle/>
-                    <a:p>
-                      <a:pPr algn="l">
-                        <a:lnSpc>
-                          <a:spcPts val="2415"/>
-                        </a:lnSpc>
-                        <a:buNone/>
-                        <a:defRPr sz="2100" b="0">
-                          <a:solidFill>
-                            <a:srgbClr val="303437"/>
-                          </a:solidFill>
-                          <a:latin typeface="Noto Sans"/>
-                        </a:defRPr>
-                      </a:pPr>
-                      <a:r>
-                        <a:rPr sz="2100" b="0" lang="ja-JP" altLang="en-US">
-                          <a:solidFill>
-                            <a:srgbClr val="303437"/>
-                          </a:solidFill>
-                          <a:latin typeface="Noto Sans"/>
-                          <a:ea typeface="Noto Sans CJK JP"/>
-                          <a:cs typeface="Noto Sans"/>
-                        </a:rPr>
-                        <a:t>モデル（公開年）</a:t>
-                      </a:r>
-                    </a:p>
-                  </a:txBody>
-                  <a:tcPr marL="63500" marR="63500" marT="38100" marB="38100" anchor="ctr">
-                    <a:lnL w="7620">
-                      <a:noFill/>
-                    </a:lnL>
-                    <a:lnR w="7620">
-                      <a:noFill/>
-                    </a:lnR>
-                    <a:lnT w="15240">
-                      <a:solidFill>
-                        <a:srgbClr val="626669"/>
-                      </a:solidFill>
-                      <a:prstDash val="solid"/>
-                    </a:lnT>
-                    <a:lnB w="7620">
-                      <a:solidFill>
-                        <a:srgbClr val="626669"/>
-                      </a:solidFill>
-                      <a:prstDash val="solid"/>
-                    </a:lnB>
-                    <a:solidFill>
-                      <a:srgbClr val="FFFEF8"/>
-                    </a:solidFill>
-                  </a:tcPr>
-                </a:tc>
-                <a:tc>
-                  <a:txBody>
-                    <a:bodyPr wrap="square">
-                      <a:noAutofit/>
-                    </a:bodyPr>
-                    <a:lstStyle/>
-                    <a:p>
-                      <a:pPr algn="r">
-                        <a:lnSpc>
-                          <a:spcPts val="2415"/>
-                        </a:lnSpc>
-                        <a:buNone/>
-                        <a:defRPr sz="2100" b="0">
-                          <a:solidFill>
-                            <a:srgbClr val="303437"/>
-                          </a:solidFill>
-                          <a:latin typeface="Noto Sans"/>
-                        </a:defRPr>
-                      </a:pPr>
-                      <a:r>
-                        <a:rPr sz="2100" b="0" lang="ja-JP" altLang="en-US">
-                          <a:solidFill>
-                            <a:srgbClr val="303437"/>
-                          </a:solidFill>
-                          <a:latin typeface="Noto Sans"/>
-                          <a:ea typeface="Noto Sans CJK JP"/>
-                          <a:cs typeface="Noto Sans"/>
-                        </a:rPr>
-                        <a:t>AA</a:t>
-                      </a:r>
-                    </a:p>
-                  </a:txBody>
-                  <a:tcPr marL="63500" marR="63500" marT="38100" marB="38100" anchor="ctr">
-                    <a:lnL w="7620">
-                      <a:noFill/>
-                    </a:lnL>
-                    <a:lnR w="7620">
-                      <a:noFill/>
-                    </a:lnR>
-                    <a:lnT w="15240">
-                      <a:solidFill>
-                        <a:srgbClr val="626669"/>
-                      </a:solidFill>
-                      <a:prstDash val="solid"/>
-                    </a:lnT>
-                    <a:lnB w="7620">
-                      <a:solidFill>
-                        <a:srgbClr val="626669"/>
-                      </a:solidFill>
-                      <a:prstDash val="solid"/>
-                    </a:lnB>
-                    <a:solidFill>
-                      <a:srgbClr val="FFFEF8"/>
-                    </a:solidFill>
-                  </a:tcPr>
-                </a:tc>
-                <a:tc>
-                  <a:txBody>
-                    <a:bodyPr wrap="square">
-                      <a:noAutofit/>
-                    </a:bodyPr>
-                    <a:lstStyle/>
-                    <a:p>
-                      <a:pPr algn="r">
-                        <a:lnSpc>
-                          <a:spcPts val="2415"/>
-                        </a:lnSpc>
-                        <a:buNone/>
-                        <a:defRPr sz="2100" b="0">
-                          <a:solidFill>
-                            <a:srgbClr val="303437"/>
-                          </a:solidFill>
-                          <a:latin typeface="Noto Sans"/>
-                        </a:defRPr>
-                      </a:pPr>
-                      <a:r>
-                        <a:rPr sz="2100" b="0" lang="ja-JP" altLang="en-US">
-                          <a:solidFill>
-                            <a:srgbClr val="303437"/>
-                          </a:solidFill>
-                          <a:latin typeface="Noto Sans"/>
-                          <a:ea typeface="Noto Sans CJK JP"/>
-                          <a:cs typeface="Noto Sans"/>
-                        </a:rPr>
-                        <a:t>white</a:t>
-                      </a:r>
-                    </a:p>
-                  </a:txBody>
-                  <a:tcPr marL="63500" marR="63500" marT="38100" marB="38100" anchor="ctr">
-                    <a:lnL w="7620">
-                      <a:noFill/>
-                    </a:lnL>
-                    <a:lnR w="7620">
-                      <a:noFill/>
-                    </a:lnR>
-                    <a:lnT w="15240">
-                      <a:solidFill>
-                        <a:srgbClr val="626669"/>
-                      </a:solidFill>
-                      <a:prstDash val="solid"/>
-                    </a:lnT>
-                    <a:lnB w="7620">
-                      <a:solidFill>
-                        <a:srgbClr val="626669"/>
-                      </a:solidFill>
-                      <a:prstDash val="solid"/>
-                    </a:lnB>
-                    <a:solidFill>
-                      <a:srgbClr val="FFFEF8"/>
-                    </a:solidFill>
-                  </a:tcPr>
-                </a:tc>
-                <a:tc>
-                  <a:txBody>
-                    <a:bodyPr wrap="square">
-                      <a:noAutofit/>
-                    </a:bodyPr>
-                    <a:lstStyle/>
-                    <a:p>
-                      <a:pPr algn="r">
-                        <a:lnSpc>
-                          <a:spcPts val="2415"/>
-                        </a:lnSpc>
-                        <a:buNone/>
-                        <a:defRPr sz="2100" b="0">
-                          <a:solidFill>
-                            <a:srgbClr val="303437"/>
-                          </a:solidFill>
-                          <a:latin typeface="Noto Sans"/>
-                        </a:defRPr>
-                      </a:pPr>
-                      <a:r>
-                        <a:rPr sz="2100" b="0" lang="ja-JP" altLang="en-US">
-                          <a:solidFill>
-                            <a:srgbClr val="303437"/>
-                          </a:solidFill>
-                          <a:latin typeface="Noto Sans"/>
-                          <a:ea typeface="Noto Sans CJK JP"/>
-                          <a:cs typeface="Noto Sans"/>
-                        </a:rPr>
-                        <a:t>差 AA−white</a:t>
-                      </a:r>
-                    </a:p>
-                  </a:txBody>
-                  <a:tcPr marL="63500" marR="63500" marT="38100" marB="38100" anchor="ctr">
-                    <a:lnL w="7620">
-                      <a:noFill/>
-                    </a:lnL>
-                    <a:lnR w="7620">
-                      <a:noFill/>
-                    </a:lnR>
-                    <a:lnT w="15240">
-                      <a:solidFill>
-                        <a:srgbClr val="626669"/>
-                      </a:solidFill>
-                      <a:prstDash val="solid"/>
-                    </a:lnT>
-                    <a:lnB w="7620">
-                      <a:solidFill>
-                        <a:srgbClr val="626669"/>
-                      </a:solidFill>
-                      <a:prstDash val="solid"/>
-                    </a:lnB>
-                    <a:solidFill>
-                      <a:srgbClr val="FFFEF8"/>
-                    </a:solidFill>
-                  </a:tcPr>
-                </a:tc>
-              </a:tr>
-              <a:tr h="457200">
-                <a:tc>
-                  <a:txBody>
-                    <a:bodyPr wrap="square">
-                      <a:noAutofit/>
-                    </a:bodyPr>
-                    <a:lstStyle/>
-                    <a:p>
-                      <a:pPr algn="l">
-                        <a:lnSpc>
-                          <a:spcPts val="2415"/>
-                        </a:lnSpc>
-                        <a:buNone/>
-                        <a:defRPr sz="2100" b="0">
-                          <a:solidFill>
-                            <a:srgbClr val="303437"/>
-                          </a:solidFill>
-                          <a:latin typeface="Noto Sans"/>
-                        </a:defRPr>
-                      </a:pPr>
-                      <a:r>
-                        <a:rPr sz="2100" b="0" lang="ja-JP" altLang="en-US">
-                          <a:solidFill>
-                            <a:srgbClr val="303437"/>
-                          </a:solidFill>
-                          <a:latin typeface="Noto Sans"/>
-                          <a:ea typeface="Noto Sans CJK JP"/>
-                          <a:cs typeface="Noto Sans"/>
-                        </a:rPr>
-                        <a:t>OPT-175B（2022）</a:t>
-                      </a:r>
-                    </a:p>
-                  </a:txBody>
-                  <a:tcPr marL="63500" marR="63500" marT="38100" marB="38100" anchor="ctr">
-                    <a:lnL w="7620">
-                      <a:noFill/>
-                    </a:lnL>
-                    <a:lnR w="7620">
-                      <a:noFill/>
-                    </a:lnR>
-                    <a:lnT w="7620">
-                      <a:solidFill>
-                        <a:srgbClr val="626669"/>
-                      </a:solidFill>
-                      <a:prstDash val="solid"/>
-                    </a:lnT>
-                    <a:lnB w="7620">
-                      <a:noFill/>
-                    </a:lnB>
-                    <a:solidFill>
-                      <a:srgbClr val="FFFEF8"/>
-                    </a:solidFill>
-                  </a:tcPr>
-                </a:tc>
-                <a:tc>
-                  <a:txBody>
-                    <a:bodyPr wrap="square">
-                      <a:noAutofit/>
-                    </a:bodyPr>
-                    <a:lstStyle/>
-                    <a:p>
-                      <a:pPr algn="r">
-                        <a:lnSpc>
-                          <a:spcPts val="2415"/>
-                        </a:lnSpc>
-                        <a:buNone/>
-                        <a:defRPr sz="2100" b="0">
-                          <a:solidFill>
-                            <a:srgbClr val="303437"/>
-                          </a:solidFill>
-                          <a:latin typeface="Noto Sans"/>
-                        </a:defRPr>
-                      </a:pPr>
-                      <a:r>
-                        <a:rPr sz="2100" b="0" lang="ja-JP" altLang="en-US">
-                          <a:solidFill>
-                            <a:srgbClr val="303437"/>
-                          </a:solidFill>
-                          <a:latin typeface="Noto Sans"/>
-                          <a:ea typeface="Noto Sans CJK JP"/>
-                          <a:cs typeface="Noto Sans"/>
-                        </a:rPr>
-                        <a:t>2.114</a:t>
-                      </a:r>
-                    </a:p>
-                  </a:txBody>
-                  <a:tcPr marL="63500" marR="63500" marT="38100" marB="38100" anchor="ctr">
-                    <a:lnL w="7620">
-                      <a:noFill/>
-                    </a:lnL>
-                    <a:lnR w="7620">
-                      <a:noFill/>
-                    </a:lnR>
-                    <a:lnT w="7620">
-                      <a:solidFill>
-                        <a:srgbClr val="626669"/>
-                      </a:solidFill>
-                      <a:prstDash val="solid"/>
-                    </a:lnT>
-                    <a:lnB w="7620">
-                      <a:noFill/>
-                    </a:lnB>
-                    <a:solidFill>
-                      <a:srgbClr val="FFFEF8"/>
-                    </a:solidFill>
-                  </a:tcPr>
-                </a:tc>
-                <a:tc>
-                  <a:txBody>
-                    <a:bodyPr wrap="square">
-                      <a:noAutofit/>
-                    </a:bodyPr>
-                    <a:lstStyle/>
-                    <a:p>
-                      <a:pPr algn="r">
-                        <a:lnSpc>
-                          <a:spcPts val="2415"/>
-                        </a:lnSpc>
-                        <a:buNone/>
-                        <a:defRPr sz="2100" b="0">
-                          <a:solidFill>
-                            <a:srgbClr val="303437"/>
-                          </a:solidFill>
-                          <a:latin typeface="Noto Sans"/>
-                        </a:defRPr>
-                      </a:pPr>
-                      <a:r>
-                        <a:rPr sz="2100" b="0" lang="ja-JP" altLang="en-US">
-                          <a:solidFill>
-                            <a:srgbClr val="303437"/>
-                          </a:solidFill>
-                          <a:latin typeface="Noto Sans"/>
-                          <a:ea typeface="Noto Sans CJK JP"/>
-                          <a:cs typeface="Noto Sans"/>
-                        </a:rPr>
-                        <a:t>1.506</a:t>
-                      </a:r>
-                    </a:p>
-                  </a:txBody>
-                  <a:tcPr marL="63500" marR="63500" marT="38100" marB="38100" anchor="ctr">
-                    <a:lnL w="7620">
-                      <a:noFill/>
-                    </a:lnL>
-                    <a:lnR w="7620">
-                      <a:noFill/>
-                    </a:lnR>
-                    <a:lnT w="7620">
-                      <a:solidFill>
-                        <a:srgbClr val="626669"/>
-                      </a:solidFill>
-                      <a:prstDash val="solid"/>
-                    </a:lnT>
-                    <a:lnB w="7620">
-                      <a:noFill/>
-                    </a:lnB>
-                    <a:solidFill>
-                      <a:srgbClr val="FFFEF8"/>
-                    </a:solidFill>
-                  </a:tcPr>
-                </a:tc>
-                <a:tc>
-                  <a:txBody>
-                    <a:bodyPr wrap="square">
-                      <a:noAutofit/>
-                    </a:bodyPr>
-                    <a:lstStyle/>
-                    <a:p>
-                      <a:pPr algn="r">
-                        <a:lnSpc>
-                          <a:spcPts val="2415"/>
-                        </a:lnSpc>
-                        <a:buNone/>
-                        <a:defRPr sz="2100" b="0">
-                          <a:solidFill>
-                            <a:srgbClr val="303437"/>
-                          </a:solidFill>
-                          <a:latin typeface="Noto Sans"/>
-                        </a:defRPr>
-                      </a:pPr>
-                      <a:r>
-                        <a:rPr sz="2100" b="0" lang="ja-JP" altLang="en-US">
-                          <a:solidFill>
-                            <a:srgbClr val="303437"/>
-                          </a:solidFill>
-                          <a:latin typeface="Noto Sans"/>
-                          <a:ea typeface="Noto Sans CJK JP"/>
-                          <a:cs typeface="Noto Sans"/>
-                        </a:rPr>
-                        <a:t>0.608</a:t>
-                      </a:r>
-                    </a:p>
-                  </a:txBody>
-                  <a:tcPr marL="63500" marR="63500" marT="38100" marB="38100" anchor="ctr">
-                    <a:lnL w="7620">
-                      <a:noFill/>
-                    </a:lnL>
-                    <a:lnR w="7620">
-                      <a:noFill/>
-                    </a:lnR>
-                    <a:lnT w="7620">
-                      <a:solidFill>
-                        <a:srgbClr val="626669"/>
-                      </a:solidFill>
-                      <a:prstDash val="solid"/>
-                    </a:lnT>
-                    <a:lnB w="7620">
-                      <a:noFill/>
-                    </a:lnB>
-                    <a:solidFill>
-                      <a:srgbClr val="FFFEF8"/>
-                    </a:solidFill>
-                  </a:tcPr>
-                </a:tc>
-              </a:tr>
-              <a:tr h="727710">
-                <a:tc>
-                  <a:txBody>
-                    <a:bodyPr wrap="square">
-                      <a:noAutofit/>
-                    </a:bodyPr>
-                    <a:lstStyle/>
-                    <a:p>
-                      <a:pPr algn="l">
-                        <a:lnSpc>
-                          <a:spcPts val="2415"/>
-                        </a:lnSpc>
-                        <a:buNone/>
-                        <a:defRPr sz="2100" b="0">
-                          <a:solidFill>
-                            <a:srgbClr val="303437"/>
-                          </a:solidFill>
-                          <a:latin typeface="Noto Sans"/>
-                        </a:defRPr>
-                      </a:pPr>
-                      <a:r>
-                        <a:rPr sz="2100" b="0" lang="ja-JP" altLang="en-US">
-                          <a:solidFill>
-                            <a:srgbClr val="303437"/>
-                          </a:solidFill>
-                          <a:latin typeface="Noto Sans"/>
-                          <a:ea typeface="Noto Sans CJK JP"/>
-                          <a:cs typeface="Noto Sans"/>
-                        </a:rPr>
-                        <a:t>text-davinci-003（2022）</a:t>
-                      </a:r>
-                    </a:p>
-                  </a:txBody>
-                  <a:tcPr marL="63500" marR="63500" marT="38100" marB="38100" anchor="ctr">
-                    <a:lnL w="7620">
-                      <a:noFill/>
-                    </a:lnL>
-                    <a:lnR w="7620">
-                      <a:noFill/>
-                    </a:lnR>
-                    <a:lnT w="7620">
-                      <a:noFill/>
-                    </a:lnT>
-                    <a:lnB w="15240">
-                      <a:solidFill>
-                        <a:srgbClr val="626669"/>
-                      </a:solidFill>
-                      <a:prstDash val="solid"/>
-                    </a:lnB>
-                    <a:solidFill>
-                      <a:srgbClr val="FFFEF8"/>
-                    </a:solidFill>
-                  </a:tcPr>
-                </a:tc>
-                <a:tc>
-                  <a:txBody>
-                    <a:bodyPr wrap="square">
-                      <a:noAutofit/>
-                    </a:bodyPr>
-                    <a:lstStyle/>
-                    <a:p>
-                      <a:pPr algn="r">
-                        <a:lnSpc>
-                          <a:spcPts val="2415"/>
-                        </a:lnSpc>
-                        <a:buNone/>
-                        <a:defRPr sz="2100" b="0">
-                          <a:solidFill>
-                            <a:srgbClr val="303437"/>
-                          </a:solidFill>
-                          <a:latin typeface="Noto Sans"/>
-                        </a:defRPr>
-                      </a:pPr>
-                      <a:r>
-                        <a:rPr sz="2100" b="0" lang="ja-JP" altLang="en-US">
-                          <a:solidFill>
-                            <a:srgbClr val="303437"/>
-                          </a:solidFill>
-                          <a:latin typeface="Noto Sans"/>
-                          <a:ea typeface="Noto Sans CJK JP"/>
-                          <a:cs typeface="Noto Sans"/>
-                        </a:rPr>
-                        <a:t>2.522</a:t>
-                      </a:r>
-                    </a:p>
-                  </a:txBody>
-                  <a:tcPr marL="63500" marR="63500" marT="38100" marB="38100" anchor="ctr">
-                    <a:lnL w="7620">
-                      <a:noFill/>
-                    </a:lnL>
-                    <a:lnR w="7620">
-                      <a:noFill/>
-                    </a:lnR>
-                    <a:lnT w="7620">
-                      <a:noFill/>
-                    </a:lnT>
-                    <a:lnB w="15240">
-                      <a:solidFill>
-                        <a:srgbClr val="626669"/>
-                      </a:solidFill>
-                      <a:prstDash val="solid"/>
-                    </a:lnB>
-                    <a:solidFill>
-                      <a:srgbClr val="FFFEF8"/>
-                    </a:solidFill>
-                  </a:tcPr>
-                </a:tc>
-                <a:tc>
-                  <a:txBody>
-                    <a:bodyPr wrap="square">
-                      <a:noAutofit/>
-                    </a:bodyPr>
-                    <a:lstStyle/>
-                    <a:p>
-                      <a:pPr algn="r">
-                        <a:lnSpc>
-                          <a:spcPts val="2415"/>
-                        </a:lnSpc>
-                        <a:buNone/>
-                        <a:defRPr sz="2100" b="0">
-                          <a:solidFill>
-                            <a:srgbClr val="303437"/>
-                          </a:solidFill>
-                          <a:latin typeface="Noto Sans"/>
-                        </a:defRPr>
-                      </a:pPr>
-                      <a:r>
-                        <a:rPr sz="2100" b="0" lang="ja-JP" altLang="en-US">
-                          <a:solidFill>
-                            <a:srgbClr val="303437"/>
-                          </a:solidFill>
-                          <a:latin typeface="Noto Sans"/>
-                          <a:ea typeface="Noto Sans CJK JP"/>
-                          <a:cs typeface="Noto Sans"/>
-                        </a:rPr>
-                        <a:t>1.862</a:t>
-                      </a:r>
-                    </a:p>
-                  </a:txBody>
-                  <a:tcPr marL="63500" marR="63500" marT="38100" marB="38100" anchor="ctr">
-                    <a:lnL w="7620">
-                      <a:noFill/>
-                    </a:lnL>
-                    <a:lnR w="7620">
-                      <a:noFill/>
-                    </a:lnR>
-                    <a:lnT w="7620">
-                      <a:noFill/>
-                    </a:lnT>
-                    <a:lnB w="15240">
-                      <a:solidFill>
-                        <a:srgbClr val="626669"/>
-                      </a:solidFill>
-                      <a:prstDash val="solid"/>
-                    </a:lnB>
-                    <a:solidFill>
-                      <a:srgbClr val="FFFEF8"/>
-                    </a:solidFill>
-                  </a:tcPr>
-                </a:tc>
-                <a:tc>
-                  <a:txBody>
-                    <a:bodyPr wrap="square">
-                      <a:noAutofit/>
-                    </a:bodyPr>
-                    <a:lstStyle/>
-                    <a:p>
-                      <a:pPr algn="r">
-                        <a:lnSpc>
-                          <a:spcPts val="2415"/>
-                        </a:lnSpc>
-                        <a:buNone/>
-                        <a:defRPr sz="2100" b="0">
-                          <a:solidFill>
-                            <a:srgbClr val="303437"/>
-                          </a:solidFill>
-                          <a:latin typeface="Noto Sans"/>
-                        </a:defRPr>
-                      </a:pPr>
-                      <a:r>
-                        <a:rPr sz="2100" b="0" lang="ja-JP" altLang="en-US">
-                          <a:solidFill>
-                            <a:srgbClr val="303437"/>
-                          </a:solidFill>
-                          <a:latin typeface="Noto Sans"/>
-                          <a:ea typeface="Noto Sans CJK JP"/>
-                          <a:cs typeface="Noto Sans"/>
-                        </a:rPr>
-                        <a:t>0.660</a:t>
-                      </a:r>
-                    </a:p>
-                  </a:txBody>
-                  <a:tcPr marL="63500" marR="63500" marT="38100" marB="38100" anchor="ctr">
-                    <a:lnL w="7620">
-                      <a:noFill/>
-                    </a:lnL>
-                    <a:lnR w="7620">
-                      <a:noFill/>
-                    </a:lnR>
-                    <a:lnT w="7620">
-                      <a:noFill/>
-                    </a:lnT>
-                    <a:lnB w="15240">
-                      <a:solidFill>
-                        <a:srgbClr val="626669"/>
-                      </a:solidFill>
-                      <a:prstDash val="solid"/>
-                    </a:lnB>
-                    <a:solidFill>
-                      <a:srgbClr val="FFFEF8"/>
-                    </a:solidFill>
-                  </a:tcPr>
-                </a:tc>
-              </a:tr>
-            </a:tbl>
-          </a:graphicData>
-        </a:graphic>
-      </p:graphicFrame>
-      <p:sp>
-        <p:nvSpPr>
-          <p:cNvPr id="5" name="TextBox 4"/>
-          <p:cNvSpPr txBox="1"/>
-          <p:nvPr/>
-        </p:nvSpPr>
-        <p:spPr>
-          <a:xfrm>
-            <a:off x="594360" y="3352038"/>
-            <a:ext cx="7955279" cy="658368"/>
-          </a:xfrm>
-          <a:prstGeom prst="rect">
-            <a:avLst/>
-          </a:prstGeom>
-          <a:noFill/>
-        </p:spPr>
-        <p:txBody>
-          <a:bodyPr wrap="square" lIns="0" rIns="0" tIns="0" bIns="0">
-            <a:noAutofit/>
-          </a:bodyPr>
-          <a:lstStyle/>
-          <a:p>
-            <a:pPr algn="l">
-              <a:lnSpc>
-                <a:spcPts val="2047"/>
-              </a:lnSpc>
-              <a:spcBef>
-                <a:spcPts val="0"/>
-              </a:spcBef>
-              <a:spcAft>
-                <a:spcPts val="0"/>
-              </a:spcAft>
-              <a:buNone/>
-              <a:defRPr sz="1750" b="0">
-                <a:solidFill>
-                  <a:srgbClr val="303437"/>
-                </a:solidFill>
-                <a:latin typeface="Noto Sans"/>
-              </a:defRPr>
-            </a:pPr>
-            <a:r>
-              <a:rPr sz="1750" b="0" lang="ja-JP" altLang="en-US">
-                <a:solidFill>
-                  <a:srgbClr val="303437"/>
-                </a:solidFill>
-                <a:latin typeface="Noto Sans"/>
-                <a:ea typeface="Noto Sans CJK JP"/>
-                <a:cs typeface="Noto Sans"/>
-              </a:rPr>
-              <a:t>BPB（低いほど良い）。2022年公開の2モデルを、AA・white各1,000投稿で比較。提示例なし。</a:t>
-            </a:r>
-          </a:p>
-        </p:txBody>
-      </p:sp>
-      <p:sp>
-        <p:nvSpPr>
-          <p:cNvPr id="6" name="sources"/>
-          <p:cNvSpPr txBox="1"/>
-          <p:nvPr/>
-        </p:nvSpPr>
-        <p:spPr>
-          <a:xfrm>
-            <a:off x="502920" y="4700016"/>
-            <a:ext cx="8183879" cy="530352"/>
-          </a:xfrm>
-          <a:prstGeom prst="rect">
-            <a:avLst/>
-          </a:prstGeom>
-          <a:noFill/>
-        </p:spPr>
-        <p:txBody>
-          <a:bodyPr wrap="square" lIns="0" rIns="0" tIns="0" bIns="0">
-            <a:noAutofit/>
-          </a:bodyPr>
-          <a:lstStyle/>
-          <a:p>
-            <a:pPr algn="l">
-              <a:lnSpc>
-                <a:spcPts val="940"/>
-              </a:lnSpc>
-              <a:spcBef>
-                <a:spcPts val="0"/>
-              </a:spcBef>
-              <a:spcAft>
-                <a:spcPts val="140"/>
-              </a:spcAft>
-              <a:buNone/>
-              <a:defRPr sz="810" b="0">
-                <a:solidFill>
-                  <a:srgbClr val="303437"/>
-                </a:solidFill>
-                <a:latin typeface="Noto Sans"/>
-              </a:defRPr>
-            </a:pPr>
-            <a:r>
-              <a:rPr sz="810" b="0" lang="ja-JP" altLang="en-US">
-                <a:solidFill>
-                  <a:srgbClr val="626669"/>
-                </a:solidFill>
-                <a:latin typeface="Noto Sans"/>
-                <a:ea typeface="Noto Sans CJK JP"/>
-                <a:cs typeface="Noto Sans"/>
-              </a:rPr>
-              <a:t>[1] Stanford CRFM. HELM Classic v0.4.0 — TwitterAAE.  </a:t>
-            </a:r>
-            <a:r>
-              <a:rPr sz="810" b="0" lang="ja-JP" altLang="en-US">
-                <a:solidFill>
-                  <a:srgbClr val="626669"/>
-                </a:solidFill>
-                <a:latin typeface="Noto Sans"/>
-                <a:ea typeface="Noto Sans CJK JP"/>
-                <a:cs typeface="Noto Sans"/>
-                <a:hlinkClick r:id="rId2"/>
-              </a:rPr>
-              <a:t>https://crfm.stanford.edu/helm/classic/v0.4.0/#/groups/twitter_aae</a:t>
-            </a:r>
-          </a:p>
-        </p:txBody>
-      </p:sp>
-    </p:spTree>
-  </p:cSld>
-  <p:clrMapOvr>
-    <a:masterClrMapping/>
-  </p:clrMapOvr>
-</p:sld>
-</file>
-
 <file path=ppt/slides/slide2.xml><?xml version="1.0" encoding="utf-8"?>
 <p:sld xmlns:a="http://schemas.openxmlformats.org/drawingml/2006/main" xmlns:p="http://schemas.openxmlformats.org/presentationml/2006/main" xmlns:r="http://schemas.openxmlformats.org/officeDocument/2006/relationships">
   <p:cSld>
@@ -12068,294 +10048,6 @@
                 <a:hlinkClick r:id="rId3"/>
               </a:rPr>
               <a:t>https://slanglab.cs.umass.edu/TwitterAAE/</a:t>
-            </a:r>
-          </a:p>
-        </p:txBody>
-      </p:sp>
-    </p:spTree>
-  </p:cSld>
-  <p:clrMapOvr>
-    <a:masterClrMapping/>
-  </p:clrMapOvr>
-</p:sld>
-</file>
-
-<file path=ppt/slides/slide20.xml><?xml version="1.0" encoding="utf-8"?>
-<p:sld xmlns:a="http://schemas.openxmlformats.org/drawingml/2006/main" xmlns:p="http://schemas.openxmlformats.org/presentationml/2006/main" xmlns:r="http://schemas.openxmlformats.org/officeDocument/2006/relationships">
-  <p:cSld>
-    <p:spTree>
-      <p:nvGrpSpPr>
-        <p:cNvPr id="1" name=""/>
-        <p:cNvGrpSpPr/>
-        <p:nvPr/>
-      </p:nvGrpSpPr>
-      <p:grpSpPr/>
-      <p:sp>
-        <p:nvSpPr>
-          <p:cNvPr id="2" name="Title 1"/>
-          <p:cNvSpPr>
-            <a:spLocks noGrp="1"/>
-          </p:cNvSpPr>
-          <p:nvPr>
-            <p:ph type="title"/>
-          </p:nvPr>
-        </p:nvSpPr>
-        <p:spPr>
-          <a:xfrm>
-            <a:off x="468172" y="650138"/>
-            <a:ext cx="8206740" cy="616305"/>
-          </a:xfrm>
-        </p:spPr>
-        <p:txBody>
-          <a:bodyPr wrap="square" lIns="0" rIns="0" tIns="0" bIns="0">
-            <a:noAutofit/>
-          </a:bodyPr>
-          <a:lstStyle/>
-          <a:p>
-            <a:pPr algn="l">
-              <a:lnSpc>
-                <a:spcPct val="110000"/>
-              </a:lnSpc>
-              <a:buNone/>
-              <a:defRPr sz="2800" b="0">
-                <a:solidFill>
-                  <a:srgbClr val="303437"/>
-                </a:solidFill>
-                <a:latin typeface="Noto Sans"/>
-              </a:defRPr>
-            </a:pPr>
-            <a:r>
-              <a:rPr sz="2800" b="1" lang="ja-JP" altLang="en-US">
-                <a:solidFill>
-                  <a:srgbClr val="303437"/>
-                </a:solidFill>
-                <a:latin typeface="Noto Sans"/>
-                <a:ea typeface="Noto Sans CJK JP"/>
-                <a:cs typeface="Noto Sans"/>
-              </a:rPr>
-              <a:t>AA側の投稿では、両モデルとも予測が難しい</a:t>
-            </a:r>
-          </a:p>
-        </p:txBody>
-      </p:sp>
-      <p:sp>
-        <p:nvSpPr>
-          <p:cNvPr id="3" name="Title 2"/>
-          <p:cNvSpPr>
-            <a:spLocks noGrp="1"/>
-          </p:cNvSpPr>
-          <p:nvPr>
-            <p:ph type="title" idx="2"/>
-          </p:nvPr>
-        </p:nvSpPr>
-        <p:spPr>
-          <a:xfrm>
-            <a:off x="75895" y="0"/>
-            <a:ext cx="8115300" cy="480060"/>
-          </a:xfrm>
-        </p:spPr>
-        <p:txBody>
-          <a:bodyPr wrap="square" lIns="0" rIns="0" tIns="0" bIns="0" anchor="ctr">
-            <a:noAutofit/>
-          </a:bodyPr>
-          <a:lstStyle/>
-          <a:p>
-            <a:pPr algn="l">
-              <a:lnSpc>
-                <a:spcPct val="110000"/>
-              </a:lnSpc>
-              <a:buNone/>
-              <a:defRPr sz="1400" b="0">
-                <a:solidFill>
-                  <a:srgbClr val="303437"/>
-                </a:solidFill>
-                <a:latin typeface="Noto Sans"/>
-              </a:defRPr>
-            </a:pPr>
-            <a:r>
-              <a:rPr sz="1400" b="1" lang="ja-JP" altLang="en-US">
-                <a:solidFill>
-                  <a:srgbClr val="FFFEF8"/>
-                </a:solidFill>
-                <a:latin typeface="Noto Sans"/>
-                <a:ea typeface="Noto Sans CJK JP"/>
-                <a:cs typeface="Noto Sans"/>
-              </a:rPr>
-              <a:t>3. HELMの評価条件と結果</a:t>
-            </a:r>
-          </a:p>
-        </p:txBody>
-      </p:sp>
-      <p:sp>
-        <p:nvSpPr>
-          <p:cNvPr id="4" name="TextBox 3"/>
-          <p:cNvSpPr txBox="1"/>
-          <p:nvPr/>
-        </p:nvSpPr>
-        <p:spPr>
-          <a:xfrm>
-            <a:off x="594360" y="1463040"/>
-            <a:ext cx="7955279" cy="680466"/>
-          </a:xfrm>
-          <a:prstGeom prst="rect">
-            <a:avLst/>
-          </a:prstGeom>
-          <a:noFill/>
-        </p:spPr>
-        <p:txBody>
-          <a:bodyPr wrap="square" lIns="0" rIns="0" tIns="0" bIns="0">
-            <a:noAutofit/>
-          </a:bodyPr>
-          <a:lstStyle/>
-          <a:p>
-            <a:pPr algn="l">
-              <a:lnSpc>
-                <a:spcPts val="2499"/>
-              </a:lnSpc>
-              <a:spcBef>
-                <a:spcPts val="0"/>
-              </a:spcBef>
-              <a:spcAft>
-                <a:spcPts val="0"/>
-              </a:spcAft>
-              <a:buNone/>
-              <a:defRPr sz="2100" b="0">
-                <a:solidFill>
-                  <a:srgbClr val="303437"/>
-                </a:solidFill>
-                <a:latin typeface="Noto Sans"/>
-              </a:defRPr>
-            </a:pPr>
-            <a:r>
-              <a:rPr sz="2100" b="0" lang="ja-JP" altLang="en-US">
-                <a:solidFill>
-                  <a:srgbClr val="303437"/>
-                </a:solidFill>
-                <a:latin typeface="Noto Sans"/>
-                <a:ea typeface="Noto Sans CJK JP"/>
-                <a:cs typeface="Noto Sans"/>
-              </a:rPr>
-              <a:t>byte数で正規化した予測の難しさは、両モデルともAA抽出条件の投稿で大きかった。</a:t>
-            </a:r>
-          </a:p>
-        </p:txBody>
-      </p:sp>
-      <p:sp>
-        <p:nvSpPr>
-          <p:cNvPr id="5" name="TextBox 4"/>
-          <p:cNvSpPr txBox="1"/>
-          <p:nvPr/>
-        </p:nvSpPr>
-        <p:spPr>
-          <a:xfrm>
-            <a:off x="594360" y="2308098"/>
-            <a:ext cx="7955279" cy="680466"/>
-          </a:xfrm>
-          <a:prstGeom prst="rect">
-            <a:avLst/>
-          </a:prstGeom>
-          <a:noFill/>
-        </p:spPr>
-        <p:txBody>
-          <a:bodyPr wrap="square" lIns="0" rIns="0" tIns="0" bIns="0">
-            <a:noAutofit/>
-          </a:bodyPr>
-          <a:lstStyle/>
-          <a:p>
-            <a:pPr algn="l">
-              <a:lnSpc>
-                <a:spcPts val="2499"/>
-              </a:lnSpc>
-              <a:spcBef>
-                <a:spcPts val="0"/>
-              </a:spcBef>
-              <a:spcAft>
-                <a:spcPts val="0"/>
-              </a:spcAft>
-              <a:buNone/>
-              <a:defRPr sz="2100" b="0">
-                <a:solidFill>
-                  <a:srgbClr val="303437"/>
-                </a:solidFill>
-                <a:latin typeface="Noto Sans"/>
-              </a:defRPr>
-            </a:pPr>
-            <a:r>
-              <a:rPr sz="2100" b="0" lang="ja-JP" altLang="en-US">
-                <a:solidFill>
-                  <a:srgbClr val="303437"/>
-                </a:solidFill>
-                <a:latin typeface="Noto Sans"/>
-                <a:ea typeface="Noto Sans CJK JP"/>
-                <a:cs typeface="Noto Sans"/>
-              </a:rPr>
-              <a:t>二つの集合には、つづり・話題・長さ・会話の形式などの違いがある。得点差には、こうした内容や表現の違いが含まれる。</a:t>
-            </a:r>
-          </a:p>
-        </p:txBody>
-      </p:sp>
-      <p:sp>
-        <p:nvSpPr>
-          <p:cNvPr id="7" name="sources"/>
-          <p:cNvSpPr txBox="1"/>
-          <p:nvPr/>
-        </p:nvSpPr>
-        <p:spPr>
-          <a:xfrm>
-            <a:off x="502920" y="4700016"/>
-            <a:ext cx="8183879" cy="530352"/>
-          </a:xfrm>
-          <a:prstGeom prst="rect">
-            <a:avLst/>
-          </a:prstGeom>
-          <a:noFill/>
-        </p:spPr>
-        <p:txBody>
-          <a:bodyPr wrap="square" lIns="0" rIns="0" tIns="0" bIns="0">
-            <a:noAutofit/>
-          </a:bodyPr>
-          <a:lstStyle/>
-          <a:p>
-            <a:pPr algn="l">
-              <a:lnSpc>
-                <a:spcPts val="940"/>
-              </a:lnSpc>
-              <a:spcBef>
-                <a:spcPts val="0"/>
-              </a:spcBef>
-              <a:spcAft>
-                <a:spcPts val="140"/>
-              </a:spcAft>
-              <a:buNone/>
-              <a:defRPr sz="810" b="0">
-                <a:solidFill>
-                  <a:srgbClr val="303437"/>
-                </a:solidFill>
-                <a:latin typeface="Noto Sans"/>
-              </a:defRPr>
-            </a:pPr>
-            <a:r>
-              <a:rPr sz="810" b="0" lang="ja-JP" altLang="en-US">
-                <a:solidFill>
-                  <a:srgbClr val="626669"/>
-                </a:solidFill>
-                <a:latin typeface="Noto Sans"/>
-                <a:ea typeface="Noto Sans CJK JP"/>
-                <a:cs typeface="Noto Sans"/>
-              </a:rPr>
-              <a:t>[1] Stanford CRFM. HELM Classic v0.4.0 — TwitterAAE.  </a:t>
-            </a:r>
-            <a:r>
-              <a:rPr sz="810" b="0" lang="ja-JP" altLang="en-US">
-                <a:solidFill>
-                  <a:srgbClr val="626669"/>
-                </a:solidFill>
-                <a:latin typeface="Noto Sans"/>
-                <a:ea typeface="Noto Sans CJK JP"/>
-                <a:cs typeface="Noto Sans"/>
-                <a:hlinkClick r:id="rId2"/>
-              </a:rPr>
-              <a:t>https://crfm.stanford.edu/helm/classic/v0.4.0/#/groups/twitter_aae</a:t>
             </a:r>
           </a:p>
         </p:txBody>
@@ -12469,7 +10161,7 @@
                 <a:ea typeface="Noto Sans CJK JP"/>
                 <a:cs typeface="Noto Sans"/>
               </a:rPr>
-              <a:t>3. HELMの評価条件と結果</a:t>
+              <a:t>2. 人口統計と言語を結ぶ構築方法</a:t>
             </a:r>
           </a:p>
         </p:txBody>
@@ -12777,7 +10469,7 @@
                 <a:ea typeface="Noto Sans CJK JP"/>
                 <a:cs typeface="Noto Sans"/>
               </a:rPr>
-              <a:t>利用の変化と公開範囲</a:t>
+              <a:t>公開データと解析への利用</a:t>
             </a:r>
           </a:p>
         </p:txBody>
@@ -12825,7 +10517,7 @@
                 <a:ea typeface="Noto Sans CJK JP"/>
                 <a:cs typeface="Noto Sans"/>
               </a:rPr>
-              <a:t>4. 利用の変化と公開範囲</a:t>
+              <a:t>3. 公開データと解析への利用</a:t>
             </a:r>
           </a:p>
         </p:txBody>
@@ -12891,7 +10583,7 @@
                 <a:ea typeface="Noto Sans CJK JP"/>
                 <a:cs typeface="Noto Sans"/>
               </a:rPr>
-              <a:t>会話の解析から、言語モデルの格差測定へ</a:t>
+              <a:t>構文解析のための注釈も公開されている</a:t>
             </a:r>
           </a:p>
         </p:txBody>
@@ -12939,7 +10631,7 @@
                 <a:ea typeface="Noto Sans CJK JP"/>
                 <a:cs typeface="Noto Sans"/>
               </a:rPr>
-              <a:t>4. 利用の変化と公開範囲</a:t>
+              <a:t>3. 公開データと解析への利用</a:t>
             </a:r>
           </a:p>
         </p:txBody>
@@ -13101,7 +10793,7 @@
                 <a:ea typeface="Noto Sans CJK JP"/>
                 <a:cs typeface="Noto Sans"/>
               </a:rPr>
-              <a:t>HELM Classicでは、同じ元コーパスから投稿を別途抽出し、言語モデルの予測しやすさを比べる評価へ広がった。</a:t>
+              <a:t/>
             </a:r>
           </a:p>
         </p:txBody>
@@ -13155,7 +10847,7 @@
                 <a:ea typeface="Noto Sans CJK JP"/>
                 <a:cs typeface="Noto Sans"/>
               </a:rPr>
-              <a:t>[1] Blodgett, Wei &amp; O’Connor (2018), Twitter Universal Dependency Parsing for African-American and Mainstream American English. ACL, 1415–1425.</a:t>
+              <a:t>[1] Blodgett, Wei &amp; O’Connor (2018). Twitter Universal Dependency Parsing for African-American and Mainstream American English. ACL, 1415–1425.</a:t>
             </a:r>
           </a:p>
           <a:p>
@@ -13179,85 +10871,9 @@
                 <a:latin typeface="Noto Sans"/>
                 <a:ea typeface="Noto Sans CJK JP"/>
                 <a:cs typeface="Noto Sans"/>
-              </a:rPr>
-              <a:t/>
-            </a:r>
-            <a:r>
-              <a:rPr sz="810" b="0" lang="ja-JP" altLang="en-US">
-                <a:solidFill>
-                  <a:srgbClr val="626669"/>
-                </a:solidFill>
-                <a:latin typeface="Noto Sans"/>
-                <a:ea typeface="Noto Sans CJK JP"/>
-                <a:cs typeface="Noto Sans"/>
                 <a:hlinkClick r:id="rId2"/>
               </a:rPr>
               <a:t>https://aclanthology.org/P18-1131/</a:t>
-            </a:r>
-          </a:p>
-          <a:p>
-            <a:pPr>
-              <a:lnSpc>
-                <a:spcPts val="940"/>
-              </a:lnSpc>
-              <a:spcAft>
-                <a:spcPts val="140"/>
-              </a:spcAft>
-              <a:buNone/>
-              <a:defRPr sz="810" b="0">
-                <a:solidFill>
-                  <a:srgbClr val="303437"/>
-                </a:solidFill>
-                <a:latin typeface="Noto Sans"/>
-              </a:defRPr>
-            </a:pPr>
-            <a:r>
-              <a:rPr sz="810" b="0" lang="ja-JP" altLang="en-US">
-                <a:solidFill>
-                  <a:srgbClr val="626669"/>
-                </a:solidFill>
-                <a:latin typeface="Noto Sans"/>
-                <a:ea typeface="Noto Sans CJK JP"/>
-                <a:cs typeface="Noto Sans"/>
-              </a:rPr>
-              <a:t>[2] Stanford CRFM, HELM TwitterAAEScenario. </a:t>
-            </a:r>
-          </a:p>
-          <a:p>
-            <a:pPr>
-              <a:lnSpc>
-                <a:spcPts val="940"/>
-              </a:lnSpc>
-              <a:buNone/>
-              <a:defRPr sz="810" b="0">
-                <a:solidFill>
-                  <a:srgbClr val="303437"/>
-                </a:solidFill>
-                <a:latin typeface="Noto Sans"/>
-              </a:defRPr>
-            </a:pPr>
-            <a:r>
-              <a:rPr sz="810" b="0" lang="ja-JP" altLang="en-US">
-                <a:solidFill>
-                  <a:srgbClr val="626669"/>
-                </a:solidFill>
-                <a:latin typeface="Noto Sans"/>
-                <a:ea typeface="Noto Sans CJK JP"/>
-                <a:cs typeface="Noto Sans"/>
-              </a:rPr>
-              <a:t/>
-            </a:r>
-            <a:r>
-              <a:rPr sz="810" b="0" lang="ja-JP" altLang="en-US">
-                <a:solidFill>
-                  <a:srgbClr val="626669"/>
-                </a:solidFill>
-                <a:latin typeface="Noto Sans"/>
-                <a:ea typeface="Noto Sans CJK JP"/>
-                <a:cs typeface="Noto Sans"/>
-                <a:hlinkClick r:id="rId3"/>
-              </a:rPr>
-              <a:t>https://github.com/stanford-crfm/helm/blob/main/src/helm/benchmark/scenarios/twitter_aae_scenario.py</a:t>
             </a:r>
           </a:p>
         </p:txBody>
@@ -13323,7 +10939,7 @@
                 <a:ea typeface="Noto Sans CJK JP"/>
                 <a:cs typeface="Noto Sans"/>
               </a:rPr>
-              <a:t>研究用コーパスと評価結果を公式サイトで入手する</a:t>
+              <a:t>公式サイトで、コーパスと解析用資源を入手する</a:t>
             </a:r>
           </a:p>
         </p:txBody>
@@ -13371,7 +10987,7 @@
                 <a:ea typeface="Noto Sans CJK JP"/>
                 <a:cs typeface="Noto Sans"/>
               </a:rPr>
-              <a:t>4. 利用の変化と公開範囲</a:t>
+              <a:t>3. 公開データと解析への利用</a:t>
             </a:r>
           </a:p>
         </p:txBody>
@@ -13479,7 +11095,7 @@
                 <a:ea typeface="Noto Sans CJK JP"/>
                 <a:cs typeface="Noto Sans"/>
               </a:rPr>
-              <a:t>HELMはAA・white各5万投稿のCSVを案内し、Classicの評価ページで、実際に使った投稿とモデルの得点を公開している。</a:t>
+              <a:t>言語混合比の推定モデルと、2018年の構文解析用注釈も、公式ページから入手できる。</a:t>
             </a:r>
           </a:p>
         </p:txBody>
@@ -13713,7 +11329,7 @@
                 <a:ea typeface="Noto Sans CJK JP"/>
                 <a:cs typeface="Noto Sans"/>
               </a:rPr>
-              <a:t>4. 利用の変化と公開範囲</a:t>
+              <a:t>3. 公開データと解析への利用</a:t>
             </a:r>
           </a:p>
         </p:txBody>
@@ -13821,7 +11437,7 @@
                 <a:ea typeface="Noto Sans CJK JP"/>
                 <a:cs typeface="Noto Sans"/>
               </a:rPr>
-              <a:t>HELMは、同じコーパスから言語的特徴で選んだ二つの投稿集合を作り、それぞれの投稿に対するBPBを比べる。</a:t>
+              <a:t>2016年の研究は、既知のAAEの文法との対応や、言語同定・構文解析ツールによる扱いの差を調べた。</a:t>
             </a:r>
           </a:p>
         </p:txBody>
@@ -13875,7 +11491,7 @@
                 <a:ea typeface="Noto Sans CJK JP"/>
                 <a:cs typeface="Noto Sans"/>
               </a:rPr>
-              <a:t>言語モデルの予測しやすさと、言語同定による取りこぼしを調べることで、NLPが扱える会話の範囲を見直せる。</a:t>
+              <a:t>方言を含む意見や会話も扱えるNLPのために、言語的な多様性を研究する資源となる。</a:t>
             </a:r>
           </a:p>
         </p:txBody>
@@ -13929,8 +11545,28 @@
                 <a:ea typeface="Noto Sans CJK JP"/>
                 <a:cs typeface="Noto Sans"/>
               </a:rPr>
-              <a:t>[1] Liang et al. (2023), Holistic Evaluation of Language Models. TMLR.</a:t>
-            </a:r>
+              <a:t>[1] Blodgett, Green &amp; O’Connor (2016). Demographic Dialectal Variation in Social Media: A Case Study of African-American English. EMNLP, 1119–1130.</a:t>
+            </a:r>
+          </a:p>
+          <a:p>
+            <a:pPr algn="l">
+              <a:lnSpc>
+                <a:spcPts val="940"/>
+              </a:lnSpc>
+              <a:spcBef>
+                <a:spcPts val="0"/>
+              </a:spcBef>
+              <a:spcAft>
+                <a:spcPts val="140"/>
+              </a:spcAft>
+              <a:buNone/>
+              <a:defRPr sz="810" b="0">
+                <a:solidFill>
+                  <a:srgbClr val="303437"/>
+                </a:solidFill>
+                <a:latin typeface="Noto Sans"/>
+              </a:defRPr>
+            </a:pPr>
             <a:r>
               <a:rPr sz="810" b="0" lang="ja-JP" altLang="en-US">
                 <a:solidFill>
@@ -13939,20 +11575,9 @@
                 <a:latin typeface="Noto Sans"/>
                 <a:ea typeface="Noto Sans CJK JP"/>
                 <a:cs typeface="Noto Sans"/>
-              </a:rPr>
-              <a:t>  </a:t>
-            </a:r>
-            <a:r>
-              <a:rPr sz="810" b="0" lang="ja-JP" altLang="en-US">
-                <a:solidFill>
-                  <a:srgbClr val="626669"/>
-                </a:solidFill>
-                <a:latin typeface="Noto Sans"/>
-                <a:ea typeface="Noto Sans CJK JP"/>
-                <a:cs typeface="Noto Sans"/>
-                <a:hlinkClick r:id="rId2"/>
-              </a:rPr>
-              <a:t>https://arxiv.org/abs/2211.09110</a:t>
+                <a:hlinkClick r:id="rId3"/>
+              </a:rPr>
+              <a:t>https://aclanthology.org/D16-1120/</a:t>
             </a:r>
           </a:p>
         </p:txBody>
@@ -14215,36 +11840,6 @@
                 <a:ea typeface="Noto Sans CJK JP"/>
                 <a:cs typeface="Noto Sans"/>
               </a:rPr>
-              <a:t>入力と指標の補足</a:t>
-            </a:r>
-          </a:p>
-          <a:p>
-            <a:pPr marL="457200" indent="-457200">
-              <a:lnSpc>
-                <a:spcPts val="3660"/>
-              </a:lnSpc>
-              <a:spcAft>
-                <a:spcPts val="0"/>
-              </a:spcAft>
-              <a:buSzPct val="100000"/>
-              <a:buFont typeface="Noto Sans CJK JP"/>
-              <a:buAutoNum type="arabicPeriod" startAt="3"/>
-              <a:defRPr sz="3000" b="1">
-                <a:solidFill>
-                  <a:srgbClr val="303437"/>
-                </a:solidFill>
-                <a:latin typeface="Noto Sans"/>
-              </a:defRPr>
-            </a:pPr>
-            <a:r>
-              <a:rPr sz="3000" b="1" lang="ja-JP" altLang="en-US">
-                <a:solidFill>
-                  <a:srgbClr val="303437"/>
-                </a:solidFill>
-                <a:latin typeface="Noto Sans"/>
-                <a:ea typeface="Noto Sans CJK JP"/>
-                <a:cs typeface="Noto Sans"/>
-              </a:rPr>
               <a:t>研究と参考文献</a:t>
             </a:r>
           </a:p>
@@ -14575,7 +12170,7 @@
                 <a:ea typeface="Noto Sans CJK JP"/>
                 <a:cs typeface="Noto Sans"/>
               </a:rPr>
-              <a:t>HELM test / aa抽出条件・投稿全文</a:t>
+              <a:t>投稿全文 / aa群（言語的特徴で抽出）</a:t>
             </a:r>
           </a:p>
         </p:txBody>
@@ -14996,7 +12591,7 @@
                 <a:ea typeface="Noto Sans CJK JP"/>
                 <a:cs typeface="Noto Sans"/>
               </a:rPr>
-              <a:t>投稿の実例と言語モデルの課題</a:t>
+              <a:t>投稿の実例と言語的特徴</a:t>
             </a:r>
           </a:p>
           <a:p>
@@ -15056,37 +12651,7 @@
                 <a:ea typeface="Noto Sans CJK JP"/>
                 <a:cs typeface="Noto Sans"/>
               </a:rPr>
-              <a:t>HELMの評価条件と結果</a:t>
-            </a:r>
-          </a:p>
-          <a:p>
-            <a:pPr marL="457200" indent="-457200">
-              <a:lnSpc>
-                <a:spcPts val="3660"/>
-              </a:lnSpc>
-              <a:spcAft>
-                <a:spcPts val="0"/>
-              </a:spcAft>
-              <a:buSzPct val="100000"/>
-              <a:buFont typeface="Noto Sans CJK JP"/>
-              <a:buAutoNum type="arabicPeriod" startAt="4"/>
-              <a:defRPr sz="3000" b="1">
-                <a:solidFill>
-                  <a:srgbClr val="303437"/>
-                </a:solidFill>
-                <a:latin typeface="Noto Sans"/>
-              </a:defRPr>
-            </a:pPr>
-            <a:r>
-              <a:rPr sz="3000" b="1" lang="ja-JP" altLang="en-US">
-                <a:solidFill>
-                  <a:srgbClr val="303437"/>
-                </a:solidFill>
-                <a:latin typeface="Noto Sans"/>
-                <a:ea typeface="Noto Sans CJK JP"/>
-                <a:cs typeface="Noto Sans"/>
-              </a:rPr>
-              <a:t>利用の変化と公開範囲</a:t>
+              <a:t>公開データと解析への利用</a:t>
             </a:r>
           </a:p>
         </p:txBody>
@@ -15302,7 +12867,7 @@
                 <a:ea typeface="Noto Sans CJK JP"/>
                 <a:cs typeface="Noto Sans"/>
               </a:rPr>
-              <a:t>HELM test / aa抽出条件・投稿全文</a:t>
+              <a:t>投稿全文 / aa群（言語的特徴で抽出）</a:t>
             </a:r>
           </a:p>
         </p:txBody>
@@ -15772,7 +13337,7 @@
                 <a:ea typeface="Noto Sans CJK JP"/>
                 <a:cs typeface="Noto Sans"/>
               </a:rPr>
-              <a:t>HELM test / aa抽出条件・投稿全文</a:t>
+              <a:t>投稿全文 / aa群（言語的特徴で抽出）</a:t>
             </a:r>
           </a:p>
         </p:txBody>
@@ -16242,7 +13807,7 @@
                 <a:ea typeface="Noto Sans CJK JP"/>
                 <a:cs typeface="Noto Sans"/>
               </a:rPr>
-              <a:t>HELM test / aa抽出条件・投稿全文</a:t>
+              <a:t>投稿全文 / aa群（言語的特徴で抽出）</a:t>
             </a:r>
           </a:p>
         </p:txBody>
@@ -16712,7 +14277,7 @@
                 <a:ea typeface="Noto Sans CJK JP"/>
                 <a:cs typeface="Noto Sans"/>
               </a:rPr>
-              <a:t>HELM test / aa抽出条件・投稿全文</a:t>
+              <a:t>投稿全文 / aa群（言語的特徴で抽出）</a:t>
             </a:r>
           </a:p>
         </p:txBody>
@@ -17182,7 +14747,7 @@
                 <a:ea typeface="Noto Sans CJK JP"/>
                 <a:cs typeface="Noto Sans"/>
               </a:rPr>
-              <a:t>HELM test / white抽出条件・投稿全文</a:t>
+              <a:t>投稿全文 / white群（言語的特徴で抽出）</a:t>
             </a:r>
           </a:p>
         </p:txBody>
@@ -17652,7 +15217,7 @@
                 <a:ea typeface="Noto Sans CJK JP"/>
                 <a:cs typeface="Noto Sans"/>
               </a:rPr>
-              <a:t>HELM test / white抽出条件・投稿全文</a:t>
+              <a:t>投稿全文 / white群（言語的特徴で抽出）</a:t>
             </a:r>
           </a:p>
         </p:txBody>
@@ -18122,7 +15687,7 @@
                 <a:ea typeface="Noto Sans CJK JP"/>
                 <a:cs typeface="Noto Sans"/>
               </a:rPr>
-              <a:t>HELM test / white抽出条件・投稿全文</a:t>
+              <a:t>投稿全文 / white群（言語的特徴で抽出）</a:t>
             </a:r>
           </a:p>
         </p:txBody>
@@ -18592,7 +16157,7 @@
                 <a:ea typeface="Noto Sans CJK JP"/>
                 <a:cs typeface="Noto Sans"/>
               </a:rPr>
-              <a:t>HELM test / white抽出条件・投稿全文</a:t>
+              <a:t>投稿全文 / white群（言語的特徴で抽出）</a:t>
             </a:r>
           </a:p>
         </p:txBody>
@@ -19062,7 +16627,7 @@
                 <a:ea typeface="Noto Sans CJK JP"/>
                 <a:cs typeface="Noto Sans"/>
               </a:rPr>
-              <a:t>HELM test / white抽出条件・投稿全文</a:t>
+              <a:t>投稿全文 / white群（言語的特徴で抽出）</a:t>
             </a:r>
           </a:p>
         </p:txBody>
@@ -19365,120 +16930,6 @@
                 <a:hlinkClick r:id="rId2"/>
               </a:rPr>
               <a:t>https://crfm.stanford.edu/helm/classic/v0.4.0/#/groups/twitter_aae</a:t>
-            </a:r>
-          </a:p>
-        </p:txBody>
-      </p:sp>
-    </p:spTree>
-  </p:cSld>
-  <p:clrMapOvr>
-    <a:masterClrMapping/>
-  </p:clrMapOvr>
-</p:sld>
-</file>
-
-<file path=ppt/slides/slide39.xml><?xml version="1.0" encoding="utf-8"?>
-<p:sld xmlns:a="http://schemas.openxmlformats.org/drawingml/2006/main" xmlns:p="http://schemas.openxmlformats.org/presentationml/2006/main" xmlns:r="http://schemas.openxmlformats.org/officeDocument/2006/relationships">
-  <p:cSld>
-    <p:spTree>
-      <p:nvGrpSpPr>
-        <p:cNvPr id="1" name=""/>
-        <p:cNvGrpSpPr/>
-        <p:nvPr/>
-      </p:nvGrpSpPr>
-      <p:grpSpPr/>
-      <p:sp>
-        <p:nvSpPr>
-          <p:cNvPr id="2" name="Title 1"/>
-          <p:cNvSpPr>
-            <a:spLocks noGrp="1"/>
-          </p:cNvSpPr>
-          <p:nvPr>
-            <p:ph type="title"/>
-          </p:nvPr>
-        </p:nvSpPr>
-        <p:spPr>
-          <a:xfrm>
-            <a:off x="548640" y="2506875"/>
-            <a:ext cx="8046720" cy="585216"/>
-          </a:xfrm>
-        </p:spPr>
-        <p:txBody>
-          <a:bodyPr wrap="square" lIns="0" rIns="0" tIns="0" bIns="0" anchor="ctr">
-            <a:noAutofit/>
-          </a:bodyPr>
-          <a:lstStyle/>
-          <a:p>
-            <a:pPr algn="ctr">
-              <a:lnSpc>
-                <a:spcPct val="110000"/>
-              </a:lnSpc>
-              <a:buNone/>
-              <a:defRPr sz="3600" b="0">
-                <a:solidFill>
-                  <a:srgbClr val="303437"/>
-                </a:solidFill>
-                <a:latin typeface="Noto Sans"/>
-              </a:defRPr>
-            </a:pPr>
-            <a:r>
-              <a:rPr sz="3600" b="1" lang="ja-JP" altLang="en-US">
-                <a:solidFill>
-                  <a:srgbClr val="303437"/>
-                </a:solidFill>
-                <a:latin typeface="Noto Sans"/>
-                <a:ea typeface="Noto Sans CJK JP"/>
-                <a:cs typeface="Noto Sans"/>
-              </a:rPr>
-              <a:t>入力と指標の補足</a:t>
-            </a:r>
-          </a:p>
-        </p:txBody>
-      </p:sp>
-      <p:sp>
-        <p:nvSpPr>
-          <p:cNvPr id="3" name="Title 2"/>
-          <p:cNvSpPr>
-            <a:spLocks noGrp="1"/>
-          </p:cNvSpPr>
-          <p:nvPr>
-            <p:ph type="title" idx="2"/>
-          </p:nvPr>
-        </p:nvSpPr>
-        <p:spPr>
-          <a:xfrm>
-            <a:off x="75895" y="0"/>
-            <a:ext cx="8115300" cy="480060"/>
-          </a:xfrm>
-        </p:spPr>
-        <p:txBody>
-          <a:bodyPr wrap="square" lIns="0" rIns="0" tIns="0" bIns="0" anchor="ctr">
-            <a:noAutofit/>
-          </a:bodyPr>
-          <a:lstStyle/>
-          <a:p>
-            <a:pPr algn="l">
-              <a:lnSpc>
-                <a:spcPct val="110000"/>
-              </a:lnSpc>
-              <a:buNone/>
-              <a:defRPr sz="1400" b="0">
-                <a:solidFill>
-                  <a:srgbClr val="303437"/>
-                </a:solidFill>
-                <a:latin typeface="Noto Sans"/>
-              </a:defRPr>
-            </a:pPr>
-            <a:r>
-              <a:rPr sz="1400" b="1" lang="ja-JP" altLang="en-US">
-                <a:solidFill>
-                  <a:srgbClr val="FFFEF8"/>
-                </a:solidFill>
-                <a:latin typeface="Noto Sans"/>
-                <a:ea typeface="Noto Sans CJK JP"/>
-                <a:cs typeface="Noto Sans"/>
-              </a:rPr>
-              <a:t>Appendix: 2. 入力と指標の補足</a:t>
             </a:r>
           </a:p>
         </p:txBody>
@@ -19544,7 +16995,7 @@
                 <a:ea typeface="Noto Sans CJK JP"/>
                 <a:cs typeface="Noto Sans"/>
               </a:rPr>
-              <a:t>投稿の実例と言語モデルの課題</a:t>
+              <a:t>投稿の実例と言語的特徴</a:t>
             </a:r>
           </a:p>
         </p:txBody>
@@ -19592,7 +17043,7 @@
                 <a:ea typeface="Noto Sans CJK JP"/>
                 <a:cs typeface="Noto Sans"/>
               </a:rPr>
-              <a:t>1. 投稿の実例と言語モデルの課題</a:t>
+              <a:t>1. 投稿の実例と言語的特徴</a:t>
             </a:r>
           </a:p>
         </p:txBody>
@@ -19605,7 +17056,7 @@
 </p:sld>
 </file>
 
-<file path=ppt/slides/slide40.xml><?xml version="1.0" encoding="utf-8"?>
+<file path=ppt/slides/slide45.xml><?xml version="1.0" encoding="utf-8"?>
 <p:sld xmlns:a="http://schemas.openxmlformats.org/drawingml/2006/main" xmlns:p="http://schemas.openxmlformats.org/presentationml/2006/main" xmlns:r="http://schemas.openxmlformats.org/officeDocument/2006/relationships">
   <p:cSld>
     <p:spTree>
@@ -19627,38 +17078,38 @@
         </p:nvSpPr>
         <p:spPr>
           <a:xfrm>
-            <a:off x="468172" y="650138"/>
-            <a:ext cx="8206740" cy="616305"/>
-          </a:xfrm>
-        </p:spPr>
-        <p:txBody>
-          <a:bodyPr wrap="square" lIns="0" rIns="0" tIns="0" bIns="0">
-            <a:noAutofit/>
-          </a:bodyPr>
-          <a:lstStyle/>
-          <a:p>
-            <a:pPr algn="l">
+            <a:off x="548640" y="2506875"/>
+            <a:ext cx="8046720" cy="585216"/>
+          </a:xfrm>
+        </p:spPr>
+        <p:txBody>
+          <a:bodyPr wrap="square" lIns="0" rIns="0" tIns="0" bIns="0" anchor="ctr">
+            <a:noAutofit/>
+          </a:bodyPr>
+          <a:lstStyle/>
+          <a:p>
+            <a:pPr algn="ctr">
               <a:lnSpc>
                 <a:spcPct val="110000"/>
               </a:lnSpc>
               <a:buNone/>
-              <a:defRPr sz="2800" b="0">
-                <a:solidFill>
-                  <a:srgbClr val="303437"/>
-                </a:solidFill>
-                <a:latin typeface="Noto Sans"/>
-              </a:defRPr>
-            </a:pPr>
-            <a:r>
-              <a:rPr sz="2800" b="1" lang="ja-JP" altLang="en-US">
-                <a:solidFill>
-                  <a:srgbClr val="303437"/>
-                </a:solidFill>
-                <a:latin typeface="Noto Sans"/>
-                <a:ea typeface="Noto Sans CJK JP"/>
-                <a:cs typeface="Noto Sans"/>
-              </a:rPr>
-              <a:t>HELMの投稿は、AA側が平均約40文字</a:t>
+              <a:defRPr sz="3600" b="0">
+                <a:solidFill>
+                  <a:srgbClr val="303437"/>
+                </a:solidFill>
+                <a:latin typeface="Noto Sans"/>
+              </a:defRPr>
+            </a:pPr>
+            <a:r>
+              <a:rPr sz="3600" b="1" lang="ja-JP" altLang="en-US">
+                <a:solidFill>
+                  <a:srgbClr val="303437"/>
+                </a:solidFill>
+                <a:latin typeface="Noto Sans"/>
+                <a:ea typeface="Noto Sans CJK JP"/>
+                <a:cs typeface="Noto Sans"/>
+              </a:rPr>
+              <a:t>研究と参考文献</a:t>
             </a:r>
           </a:p>
         </p:txBody>
@@ -19706,2571 +17157,7 @@
                 <a:ea typeface="Noto Sans CJK JP"/>
                 <a:cs typeface="Noto Sans"/>
               </a:rPr>
-              <a:t>Appendix: 2. 入力と指標の補足</a:t>
-            </a:r>
-          </a:p>
-        </p:txBody>
-      </p:sp>
-      <p:graphicFrame>
-        <p:nvGraphicFramePr>
-          <p:cNvPr id="4" name="Table 3"/>
-          <p:cNvGraphicFramePr>
-            <a:graphicFrameLocks noGrp="1"/>
-          </p:cNvGraphicFramePr>
-          <p:nvPr/>
-        </p:nvGraphicFramePr>
-        <p:xfrm>
-          <a:off x="548640" y="1508760"/>
-          <a:ext cx="8046720" cy="1828800"/>
-        </p:xfrm>
-        <a:graphic>
-          <a:graphicData uri="http://schemas.openxmlformats.org/drawingml/2006/table">
-            <a:tbl>
-              <a:tblPr firstRow="0" bandRow="0"/>
-              <a:tblGrid>
-                <a:gridCol w="4023360"/>
-                <a:gridCol w="2011680"/>
-                <a:gridCol w="2011680"/>
-              </a:tblGrid>
-              <a:tr h="457200">
-                <a:tc>
-                  <a:txBody>
-                    <a:bodyPr wrap="square">
-                      <a:noAutofit/>
-                    </a:bodyPr>
-                    <a:lstStyle/>
-                    <a:p>
-                      <a:pPr algn="l">
-                        <a:lnSpc>
-                          <a:spcPts val="2415"/>
-                        </a:lnSpc>
-                        <a:buNone/>
-                        <a:defRPr sz="2100" b="0">
-                          <a:solidFill>
-                            <a:srgbClr val="303437"/>
-                          </a:solidFill>
-                          <a:latin typeface="Noto Sans"/>
-                        </a:defRPr>
-                      </a:pPr>
-                      <a:r>
-                        <a:rPr sz="2100" b="0" lang="ja-JP" altLang="en-US">
-                          <a:solidFill>
-                            <a:srgbClr val="303437"/>
-                          </a:solidFill>
-                          <a:latin typeface="Noto Sans"/>
-                          <a:ea typeface="Noto Sans CJK JP"/>
-                          <a:cs typeface="Noto Sans"/>
-                        </a:rPr>
-                        <a:t>1,000投稿ずつの文字数</a:t>
-                      </a:r>
-                    </a:p>
-                  </a:txBody>
-                  <a:tcPr marL="63500" marR="63500" marT="38100" marB="38100" anchor="ctr">
-                    <a:lnL w="7620">
-                      <a:noFill/>
-                    </a:lnL>
-                    <a:lnR w="7620">
-                      <a:noFill/>
-                    </a:lnR>
-                    <a:lnT w="15240">
-                      <a:solidFill>
-                        <a:srgbClr val="626669"/>
-                      </a:solidFill>
-                      <a:prstDash val="solid"/>
-                    </a:lnT>
-                    <a:lnB w="7620">
-                      <a:solidFill>
-                        <a:srgbClr val="626669"/>
-                      </a:solidFill>
-                      <a:prstDash val="solid"/>
-                    </a:lnB>
-                    <a:solidFill>
-                      <a:srgbClr val="FFFEF8"/>
-                    </a:solidFill>
-                  </a:tcPr>
-                </a:tc>
-                <a:tc>
-                  <a:txBody>
-                    <a:bodyPr wrap="square">
-                      <a:noAutofit/>
-                    </a:bodyPr>
-                    <a:lstStyle/>
-                    <a:p>
-                      <a:pPr algn="l">
-                        <a:lnSpc>
-                          <a:spcPts val="2415"/>
-                        </a:lnSpc>
-                        <a:buNone/>
-                        <a:defRPr sz="2100" b="0">
-                          <a:solidFill>
-                            <a:srgbClr val="303437"/>
-                          </a:solidFill>
-                          <a:latin typeface="Noto Sans"/>
-                        </a:defRPr>
-                      </a:pPr>
-                      <a:r>
-                        <a:rPr sz="2100" b="0" lang="ja-JP" altLang="en-US">
-                          <a:solidFill>
-                            <a:srgbClr val="303437"/>
-                          </a:solidFill>
-                          <a:latin typeface="Noto Sans"/>
-                          <a:ea typeface="Noto Sans CJK JP"/>
-                          <a:cs typeface="Noto Sans"/>
-                        </a:rPr>
-                        <a:t>AA</a:t>
-                      </a:r>
-                    </a:p>
-                  </a:txBody>
-                  <a:tcPr marL="63500" marR="63500" marT="38100" marB="38100" anchor="ctr">
-                    <a:lnL w="7620">
-                      <a:noFill/>
-                    </a:lnL>
-                    <a:lnR w="7620">
-                      <a:noFill/>
-                    </a:lnR>
-                    <a:lnT w="15240">
-                      <a:solidFill>
-                        <a:srgbClr val="626669"/>
-                      </a:solidFill>
-                      <a:prstDash val="solid"/>
-                    </a:lnT>
-                    <a:lnB w="7620">
-                      <a:solidFill>
-                        <a:srgbClr val="626669"/>
-                      </a:solidFill>
-                      <a:prstDash val="solid"/>
-                    </a:lnB>
-                    <a:solidFill>
-                      <a:srgbClr val="FFFEF8"/>
-                    </a:solidFill>
-                  </a:tcPr>
-                </a:tc>
-                <a:tc>
-                  <a:txBody>
-                    <a:bodyPr wrap="square">
-                      <a:noAutofit/>
-                    </a:bodyPr>
-                    <a:lstStyle/>
-                    <a:p>
-                      <a:pPr algn="l">
-                        <a:lnSpc>
-                          <a:spcPts val="2415"/>
-                        </a:lnSpc>
-                        <a:buNone/>
-                        <a:defRPr sz="2100" b="0">
-                          <a:solidFill>
-                            <a:srgbClr val="303437"/>
-                          </a:solidFill>
-                          <a:latin typeface="Noto Sans"/>
-                        </a:defRPr>
-                      </a:pPr>
-                      <a:r>
-                        <a:rPr sz="2100" b="0" lang="ja-JP" altLang="en-US">
-                          <a:solidFill>
-                            <a:srgbClr val="303437"/>
-                          </a:solidFill>
-                          <a:latin typeface="Noto Sans"/>
-                          <a:ea typeface="Noto Sans CJK JP"/>
-                          <a:cs typeface="Noto Sans"/>
-                        </a:rPr>
-                        <a:t>white</a:t>
-                      </a:r>
-                    </a:p>
-                  </a:txBody>
-                  <a:tcPr marL="63500" marR="63500" marT="38100" marB="38100" anchor="ctr">
-                    <a:lnL w="7620">
-                      <a:noFill/>
-                    </a:lnL>
-                    <a:lnR w="7620">
-                      <a:noFill/>
-                    </a:lnR>
-                    <a:lnT w="15240">
-                      <a:solidFill>
-                        <a:srgbClr val="626669"/>
-                      </a:solidFill>
-                      <a:prstDash val="solid"/>
-                    </a:lnT>
-                    <a:lnB w="7620">
-                      <a:solidFill>
-                        <a:srgbClr val="626669"/>
-                      </a:solidFill>
-                      <a:prstDash val="solid"/>
-                    </a:lnB>
-                    <a:solidFill>
-                      <a:srgbClr val="FFFEF8"/>
-                    </a:solidFill>
-                  </a:tcPr>
-                </a:tc>
-              </a:tr>
-              <a:tr h="457200">
-                <a:tc>
-                  <a:txBody>
-                    <a:bodyPr wrap="square">
-                      <a:noAutofit/>
-                    </a:bodyPr>
-                    <a:lstStyle/>
-                    <a:p>
-                      <a:pPr algn="l">
-                        <a:lnSpc>
-                          <a:spcPts val="2415"/>
-                        </a:lnSpc>
-                        <a:buNone/>
-                        <a:defRPr sz="2100" b="0">
-                          <a:solidFill>
-                            <a:srgbClr val="303437"/>
-                          </a:solidFill>
-                          <a:latin typeface="Noto Sans"/>
-                        </a:defRPr>
-                      </a:pPr>
-                      <a:r>
-                        <a:rPr sz="2100" b="0" lang="ja-JP" altLang="en-US">
-                          <a:solidFill>
-                            <a:srgbClr val="303437"/>
-                          </a:solidFill>
-                          <a:latin typeface="Noto Sans"/>
-                          <a:ea typeface="Noto Sans CJK JP"/>
-                          <a:cs typeface="Noto Sans"/>
-                        </a:rPr>
-                        <a:t>平均</a:t>
-                      </a:r>
-                    </a:p>
-                  </a:txBody>
-                  <a:tcPr marL="63500" marR="63500" marT="38100" marB="38100" anchor="ctr">
-                    <a:lnL w="7620">
-                      <a:noFill/>
-                    </a:lnL>
-                    <a:lnR w="7620">
-                      <a:noFill/>
-                    </a:lnR>
-                    <a:lnT w="7620">
-                      <a:solidFill>
-                        <a:srgbClr val="626669"/>
-                      </a:solidFill>
-                      <a:prstDash val="solid"/>
-                    </a:lnT>
-                    <a:lnB w="7620">
-                      <a:noFill/>
-                    </a:lnB>
-                    <a:solidFill>
-                      <a:srgbClr val="FFFEF8"/>
-                    </a:solidFill>
-                  </a:tcPr>
-                </a:tc>
-                <a:tc>
-                  <a:txBody>
-                    <a:bodyPr wrap="square">
-                      <a:noAutofit/>
-                    </a:bodyPr>
-                    <a:lstStyle/>
-                    <a:p>
-                      <a:pPr algn="l">
-                        <a:lnSpc>
-                          <a:spcPts val="2415"/>
-                        </a:lnSpc>
-                        <a:buNone/>
-                        <a:defRPr sz="2100" b="0">
-                          <a:solidFill>
-                            <a:srgbClr val="303437"/>
-                          </a:solidFill>
-                          <a:latin typeface="Noto Sans"/>
-                        </a:defRPr>
-                      </a:pPr>
-                      <a:r>
-                        <a:rPr sz="2100" b="0" lang="ja-JP" altLang="en-US">
-                          <a:solidFill>
-                            <a:srgbClr val="303437"/>
-                          </a:solidFill>
-                          <a:latin typeface="Noto Sans"/>
-                          <a:ea typeface="Noto Sans CJK JP"/>
-                          <a:cs typeface="Noto Sans"/>
-                        </a:rPr>
-                        <a:t>39.85</a:t>
-                      </a:r>
-                    </a:p>
-                  </a:txBody>
-                  <a:tcPr marL="63500" marR="63500" marT="38100" marB="38100" anchor="ctr">
-                    <a:lnL w="7620">
-                      <a:noFill/>
-                    </a:lnL>
-                    <a:lnR w="7620">
-                      <a:noFill/>
-                    </a:lnR>
-                    <a:lnT w="7620">
-                      <a:solidFill>
-                        <a:srgbClr val="626669"/>
-                      </a:solidFill>
-                      <a:prstDash val="solid"/>
-                    </a:lnT>
-                    <a:lnB w="7620">
-                      <a:noFill/>
-                    </a:lnB>
-                    <a:solidFill>
-                      <a:srgbClr val="FFFEF8"/>
-                    </a:solidFill>
-                  </a:tcPr>
-                </a:tc>
-                <a:tc>
-                  <a:txBody>
-                    <a:bodyPr wrap="square">
-                      <a:noAutofit/>
-                    </a:bodyPr>
-                    <a:lstStyle/>
-                    <a:p>
-                      <a:pPr algn="l">
-                        <a:lnSpc>
-                          <a:spcPts val="2415"/>
-                        </a:lnSpc>
-                        <a:buNone/>
-                        <a:defRPr sz="2100" b="0">
-                          <a:solidFill>
-                            <a:srgbClr val="303437"/>
-                          </a:solidFill>
-                          <a:latin typeface="Noto Sans"/>
-                        </a:defRPr>
-                      </a:pPr>
-                      <a:r>
-                        <a:rPr sz="2100" b="0" lang="ja-JP" altLang="en-US">
-                          <a:solidFill>
-                            <a:srgbClr val="303437"/>
-                          </a:solidFill>
-                          <a:latin typeface="Noto Sans"/>
-                          <a:ea typeface="Noto Sans CJK JP"/>
-                          <a:cs typeface="Noto Sans"/>
-                        </a:rPr>
-                        <a:t>57.17</a:t>
-                      </a:r>
-                    </a:p>
-                  </a:txBody>
-                  <a:tcPr marL="63500" marR="63500" marT="38100" marB="38100" anchor="ctr">
-                    <a:lnL w="7620">
-                      <a:noFill/>
-                    </a:lnL>
-                    <a:lnR w="7620">
-                      <a:noFill/>
-                    </a:lnR>
-                    <a:lnT w="7620">
-                      <a:solidFill>
-                        <a:srgbClr val="626669"/>
-                      </a:solidFill>
-                      <a:prstDash val="solid"/>
-                    </a:lnT>
-                    <a:lnB w="7620">
-                      <a:noFill/>
-                    </a:lnB>
-                    <a:solidFill>
-                      <a:srgbClr val="FFFEF8"/>
-                    </a:solidFill>
-                  </a:tcPr>
-                </a:tc>
-              </a:tr>
-              <a:tr h="457200">
-                <a:tc>
-                  <a:txBody>
-                    <a:bodyPr wrap="square">
-                      <a:noAutofit/>
-                    </a:bodyPr>
-                    <a:lstStyle/>
-                    <a:p>
-                      <a:pPr algn="l">
-                        <a:lnSpc>
-                          <a:spcPts val="2415"/>
-                        </a:lnSpc>
-                        <a:buNone/>
-                        <a:defRPr sz="2100" b="0">
-                          <a:solidFill>
-                            <a:srgbClr val="303437"/>
-                          </a:solidFill>
-                          <a:latin typeface="Noto Sans"/>
-                        </a:defRPr>
-                      </a:pPr>
-                      <a:r>
-                        <a:rPr sz="2100" b="0" lang="ja-JP" altLang="en-US">
-                          <a:solidFill>
-                            <a:srgbClr val="303437"/>
-                          </a:solidFill>
-                          <a:latin typeface="Noto Sans"/>
-                          <a:ea typeface="Noto Sans CJK JP"/>
-                          <a:cs typeface="Noto Sans"/>
-                        </a:rPr>
-                        <a:t>中央値</a:t>
-                      </a:r>
-                    </a:p>
-                  </a:txBody>
-                  <a:tcPr marL="63500" marR="63500" marT="38100" marB="38100" anchor="ctr">
-                    <a:lnL w="7620">
-                      <a:noFill/>
-                    </a:lnL>
-                    <a:lnR w="7620">
-                      <a:noFill/>
-                    </a:lnR>
-                    <a:lnT w="7620">
-                      <a:noFill/>
-                    </a:lnT>
-                    <a:lnB w="7620">
-                      <a:noFill/>
-                    </a:lnB>
-                    <a:solidFill>
-                      <a:srgbClr val="FFFEF8"/>
-                    </a:solidFill>
-                  </a:tcPr>
-                </a:tc>
-                <a:tc>
-                  <a:txBody>
-                    <a:bodyPr wrap="square">
-                      <a:noAutofit/>
-                    </a:bodyPr>
-                    <a:lstStyle/>
-                    <a:p>
-                      <a:pPr algn="l">
-                        <a:lnSpc>
-                          <a:spcPts val="2415"/>
-                        </a:lnSpc>
-                        <a:buNone/>
-                        <a:defRPr sz="2100" b="0">
-                          <a:solidFill>
-                            <a:srgbClr val="303437"/>
-                          </a:solidFill>
-                          <a:latin typeface="Noto Sans"/>
-                        </a:defRPr>
-                      </a:pPr>
-                      <a:r>
-                        <a:rPr sz="2100" b="0" lang="ja-JP" altLang="en-US">
-                          <a:solidFill>
-                            <a:srgbClr val="303437"/>
-                          </a:solidFill>
-                          <a:latin typeface="Noto Sans"/>
-                          <a:ea typeface="Noto Sans CJK JP"/>
-                          <a:cs typeface="Noto Sans"/>
-                        </a:rPr>
-                        <a:t>33</a:t>
-                      </a:r>
-                    </a:p>
-                  </a:txBody>
-                  <a:tcPr marL="63500" marR="63500" marT="38100" marB="38100" anchor="ctr">
-                    <a:lnL w="7620">
-                      <a:noFill/>
-                    </a:lnL>
-                    <a:lnR w="7620">
-                      <a:noFill/>
-                    </a:lnR>
-                    <a:lnT w="7620">
-                      <a:noFill/>
-                    </a:lnT>
-                    <a:lnB w="7620">
-                      <a:noFill/>
-                    </a:lnB>
-                    <a:solidFill>
-                      <a:srgbClr val="FFFEF8"/>
-                    </a:solidFill>
-                  </a:tcPr>
-                </a:tc>
-                <a:tc>
-                  <a:txBody>
-                    <a:bodyPr wrap="square">
-                      <a:noAutofit/>
-                    </a:bodyPr>
-                    <a:lstStyle/>
-                    <a:p>
-                      <a:pPr algn="l">
-                        <a:lnSpc>
-                          <a:spcPts val="2415"/>
-                        </a:lnSpc>
-                        <a:buNone/>
-                        <a:defRPr sz="2100" b="0">
-                          <a:solidFill>
-                            <a:srgbClr val="303437"/>
-                          </a:solidFill>
-                          <a:latin typeface="Noto Sans"/>
-                        </a:defRPr>
-                      </a:pPr>
-                      <a:r>
-                        <a:rPr sz="2100" b="0" lang="ja-JP" altLang="en-US">
-                          <a:solidFill>
-                            <a:srgbClr val="303437"/>
-                          </a:solidFill>
-                          <a:latin typeface="Noto Sans"/>
-                          <a:ea typeface="Noto Sans CJK JP"/>
-                          <a:cs typeface="Noto Sans"/>
-                        </a:rPr>
-                        <a:t>48</a:t>
-                      </a:r>
-                    </a:p>
-                  </a:txBody>
-                  <a:tcPr marL="63500" marR="63500" marT="38100" marB="38100" anchor="ctr">
-                    <a:lnL w="7620">
-                      <a:noFill/>
-                    </a:lnL>
-                    <a:lnR w="7620">
-                      <a:noFill/>
-                    </a:lnR>
-                    <a:lnT w="7620">
-                      <a:noFill/>
-                    </a:lnT>
-                    <a:lnB w="7620">
-                      <a:noFill/>
-                    </a:lnB>
-                    <a:solidFill>
-                      <a:srgbClr val="FFFEF8"/>
-                    </a:solidFill>
-                  </a:tcPr>
-                </a:tc>
-              </a:tr>
-              <a:tr h="457200">
-                <a:tc>
-                  <a:txBody>
-                    <a:bodyPr wrap="square">
-                      <a:noAutofit/>
-                    </a:bodyPr>
-                    <a:lstStyle/>
-                    <a:p>
-                      <a:pPr algn="l">
-                        <a:lnSpc>
-                          <a:spcPts val="2415"/>
-                        </a:lnSpc>
-                        <a:buNone/>
-                        <a:defRPr sz="2100" b="0">
-                          <a:solidFill>
-                            <a:srgbClr val="303437"/>
-                          </a:solidFill>
-                          <a:latin typeface="Noto Sans"/>
-                        </a:defRPr>
-                      </a:pPr>
-                      <a:r>
-                        <a:rPr sz="2100" b="0" lang="ja-JP" altLang="en-US">
-                          <a:solidFill>
-                            <a:srgbClr val="303437"/>
-                          </a:solidFill>
-                          <a:latin typeface="Noto Sans"/>
-                          <a:ea typeface="Noto Sans CJK JP"/>
-                          <a:cs typeface="Noto Sans"/>
-                        </a:rPr>
-                        <a:t>最小／最大</a:t>
-                      </a:r>
-                    </a:p>
-                  </a:txBody>
-                  <a:tcPr marL="63500" marR="63500" marT="38100" marB="38100" anchor="ctr">
-                    <a:lnL w="7620">
-                      <a:noFill/>
-                    </a:lnL>
-                    <a:lnR w="7620">
-                      <a:noFill/>
-                    </a:lnR>
-                    <a:lnT w="7620">
-                      <a:noFill/>
-                    </a:lnT>
-                    <a:lnB w="15240">
-                      <a:solidFill>
-                        <a:srgbClr val="626669"/>
-                      </a:solidFill>
-                      <a:prstDash val="solid"/>
-                    </a:lnB>
-                    <a:solidFill>
-                      <a:srgbClr val="FFFEF8"/>
-                    </a:solidFill>
-                  </a:tcPr>
-                </a:tc>
-                <a:tc>
-                  <a:txBody>
-                    <a:bodyPr wrap="square">
-                      <a:noAutofit/>
-                    </a:bodyPr>
-                    <a:lstStyle/>
-                    <a:p>
-                      <a:pPr algn="l">
-                        <a:lnSpc>
-                          <a:spcPts val="2415"/>
-                        </a:lnSpc>
-                        <a:buNone/>
-                        <a:defRPr sz="2100" b="0">
-                          <a:solidFill>
-                            <a:srgbClr val="303437"/>
-                          </a:solidFill>
-                          <a:latin typeface="Noto Sans"/>
-                        </a:defRPr>
-                      </a:pPr>
-                      <a:r>
-                        <a:rPr sz="2100" b="0" lang="ja-JP" altLang="en-US">
-                          <a:solidFill>
-                            <a:srgbClr val="303437"/>
-                          </a:solidFill>
-                          <a:latin typeface="Noto Sans"/>
-                          <a:ea typeface="Noto Sans CJK JP"/>
-                          <a:cs typeface="Noto Sans"/>
-                        </a:rPr>
-                        <a:t>2／261</a:t>
-                      </a:r>
-                    </a:p>
-                  </a:txBody>
-                  <a:tcPr marL="63500" marR="63500" marT="38100" marB="38100" anchor="ctr">
-                    <a:lnL w="7620">
-                      <a:noFill/>
-                    </a:lnL>
-                    <a:lnR w="7620">
-                      <a:noFill/>
-                    </a:lnR>
-                    <a:lnT w="7620">
-                      <a:noFill/>
-                    </a:lnT>
-                    <a:lnB w="15240">
-                      <a:solidFill>
-                        <a:srgbClr val="626669"/>
-                      </a:solidFill>
-                      <a:prstDash val="solid"/>
-                    </a:lnB>
-                    <a:solidFill>
-                      <a:srgbClr val="FFFEF8"/>
-                    </a:solidFill>
-                  </a:tcPr>
-                </a:tc>
-                <a:tc>
-                  <a:txBody>
-                    <a:bodyPr wrap="square">
-                      <a:noAutofit/>
-                    </a:bodyPr>
-                    <a:lstStyle/>
-                    <a:p>
-                      <a:pPr algn="l">
-                        <a:lnSpc>
-                          <a:spcPts val="2415"/>
-                        </a:lnSpc>
-                        <a:buNone/>
-                        <a:defRPr sz="2100" b="0">
-                          <a:solidFill>
-                            <a:srgbClr val="303437"/>
-                          </a:solidFill>
-                          <a:latin typeface="Noto Sans"/>
-                        </a:defRPr>
-                      </a:pPr>
-                      <a:r>
-                        <a:rPr sz="2100" b="0" lang="ja-JP" altLang="en-US">
-                          <a:solidFill>
-                            <a:srgbClr val="303437"/>
-                          </a:solidFill>
-                          <a:latin typeface="Noto Sans"/>
-                          <a:ea typeface="Noto Sans CJK JP"/>
-                          <a:cs typeface="Noto Sans"/>
-                        </a:rPr>
-                        <a:t>2／422</a:t>
-                      </a:r>
-                    </a:p>
-                  </a:txBody>
-                  <a:tcPr marL="63500" marR="63500" marT="38100" marB="38100" anchor="ctr">
-                    <a:lnL w="7620">
-                      <a:noFill/>
-                    </a:lnL>
-                    <a:lnR w="7620">
-                      <a:noFill/>
-                    </a:lnR>
-                    <a:lnT w="7620">
-                      <a:noFill/>
-                    </a:lnT>
-                    <a:lnB w="15240">
-                      <a:solidFill>
-                        <a:srgbClr val="626669"/>
-                      </a:solidFill>
-                      <a:prstDash val="solid"/>
-                    </a:lnB>
-                    <a:solidFill>
-                      <a:srgbClr val="FFFEF8"/>
-                    </a:solidFill>
-                  </a:tcPr>
-                </a:tc>
-              </a:tr>
-            </a:tbl>
-          </a:graphicData>
-        </a:graphic>
-      </p:graphicFrame>
-      <p:sp>
-        <p:nvSpPr>
-          <p:cNvPr id="5" name="TextBox 4"/>
-          <p:cNvSpPr txBox="1"/>
-          <p:nvPr/>
-        </p:nvSpPr>
-        <p:spPr>
-          <a:xfrm>
-            <a:off x="594360" y="3538728"/>
-            <a:ext cx="7955279" cy="658368"/>
-          </a:xfrm>
-          <a:prstGeom prst="rect">
-            <a:avLst/>
-          </a:prstGeom>
-          <a:noFill/>
-        </p:spPr>
-        <p:txBody>
-          <a:bodyPr wrap="square" lIns="0" rIns="0" tIns="0" bIns="0">
-            <a:noAutofit/>
-          </a:bodyPr>
-          <a:lstStyle/>
-          <a:p>
-            <a:pPr algn="l">
-              <a:lnSpc>
-                <a:spcPts val="2047"/>
-              </a:lnSpc>
-              <a:spcBef>
-                <a:spcPts val="0"/>
-              </a:spcBef>
-              <a:spcAft>
-                <a:spcPts val="0"/>
-              </a:spcAft>
-              <a:buNone/>
-              <a:defRPr sz="1750" b="0">
-                <a:solidFill>
-                  <a:srgbClr val="303437"/>
-                </a:solidFill>
-                <a:latin typeface="Noto Sans"/>
-              </a:defRPr>
-            </a:pPr>
-            <a:r>
-              <a:rPr sz="1750" b="0" lang="ja-JP" altLang="en-US">
-                <a:solidFill>
-                  <a:srgbClr val="303437"/>
-                </a:solidFill>
-                <a:latin typeface="Noto Sans"/>
-                <a:ea typeface="Noto Sans CJK JP"/>
-                <a:cs typeface="Noto Sans"/>
-              </a:rPr>
-              <a:t>HELMで使われた各1,000投稿の文字数。Unicodeの文字単位で、エスケープ表現も入力のつづりどおり数えた。</a:t>
-            </a:r>
-          </a:p>
-        </p:txBody>
-      </p:sp>
-      <p:sp>
-        <p:nvSpPr>
-          <p:cNvPr id="6" name="sources"/>
-          <p:cNvSpPr txBox="1"/>
-          <p:nvPr/>
-        </p:nvSpPr>
-        <p:spPr>
-          <a:xfrm>
-            <a:off x="502920" y="4700016"/>
-            <a:ext cx="8183879" cy="530352"/>
-          </a:xfrm>
-          <a:prstGeom prst="rect">
-            <a:avLst/>
-          </a:prstGeom>
-          <a:noFill/>
-        </p:spPr>
-        <p:txBody>
-          <a:bodyPr wrap="square" lIns="0" rIns="0" tIns="0" bIns="0">
-            <a:noAutofit/>
-          </a:bodyPr>
-          <a:lstStyle/>
-          <a:p>
-            <a:pPr algn="l">
-              <a:lnSpc>
-                <a:spcPts val="940"/>
-              </a:lnSpc>
-              <a:spcBef>
-                <a:spcPts val="0"/>
-              </a:spcBef>
-              <a:spcAft>
-                <a:spcPts val="140"/>
-              </a:spcAft>
-              <a:buNone/>
-              <a:defRPr sz="810" b="0">
-                <a:solidFill>
-                  <a:srgbClr val="303437"/>
-                </a:solidFill>
-                <a:latin typeface="Noto Sans"/>
-              </a:defRPr>
-            </a:pPr>
-            <a:r>
-              <a:rPr sz="810" b="0" lang="ja-JP" altLang="en-US">
-                <a:solidFill>
-                  <a:srgbClr val="626669"/>
-                </a:solidFill>
-                <a:latin typeface="Noto Sans"/>
-                <a:ea typeface="Noto Sans CJK JP"/>
-                <a:cs typeface="Noto Sans"/>
-              </a:rPr>
-              <a:t>[1] Stanford CRFM. HELM Classic v0.4.0 — TwitterAAE.  </a:t>
-            </a:r>
-            <a:r>
-              <a:rPr sz="810" b="0" lang="ja-JP" altLang="en-US">
-                <a:solidFill>
-                  <a:srgbClr val="626669"/>
-                </a:solidFill>
-                <a:latin typeface="Noto Sans"/>
-                <a:ea typeface="Noto Sans CJK JP"/>
-                <a:cs typeface="Noto Sans"/>
-                <a:hlinkClick r:id="rId2"/>
-              </a:rPr>
-              <a:t>https://crfm.stanford.edu/helm/classic/v0.4.0/#/groups/twitter_aae</a:t>
-            </a:r>
-          </a:p>
-        </p:txBody>
-      </p:sp>
-    </p:spTree>
-  </p:cSld>
-  <p:clrMapOvr>
-    <a:masterClrMapping/>
-  </p:clrMapOvr>
-</p:sld>
-</file>
-
-<file path=ppt/slides/slide41.xml><?xml version="1.0" encoding="utf-8"?>
-<p:sld xmlns:a="http://schemas.openxmlformats.org/drawingml/2006/main" xmlns:p="http://schemas.openxmlformats.org/presentationml/2006/main" xmlns:r="http://schemas.openxmlformats.org/officeDocument/2006/relationships">
-  <p:cSld>
-    <p:spTree>
-      <p:nvGrpSpPr>
-        <p:cNvPr id="1" name=""/>
-        <p:cNvGrpSpPr/>
-        <p:nvPr/>
-      </p:nvGrpSpPr>
-      <p:grpSpPr/>
-      <p:sp>
-        <p:nvSpPr>
-          <p:cNvPr id="2" name="Title 1"/>
-          <p:cNvSpPr>
-            <a:spLocks noGrp="1"/>
-          </p:cNvSpPr>
-          <p:nvPr>
-            <p:ph type="title"/>
-          </p:nvPr>
-        </p:nvSpPr>
-        <p:spPr>
-          <a:xfrm>
-            <a:off x="468172" y="650138"/>
-            <a:ext cx="8206740" cy="616305"/>
-          </a:xfrm>
-        </p:spPr>
-        <p:txBody>
-          <a:bodyPr wrap="square" lIns="0" rIns="0" tIns="0" bIns="0">
-            <a:noAutofit/>
-          </a:bodyPr>
-          <a:lstStyle/>
-          <a:p>
-            <a:pPr algn="l">
-              <a:lnSpc>
-                <a:spcPct val="110000"/>
-              </a:lnSpc>
-              <a:buNone/>
-              <a:defRPr sz="2800" b="0">
-                <a:solidFill>
-                  <a:srgbClr val="303437"/>
-                </a:solidFill>
-                <a:latin typeface="Noto Sans"/>
-              </a:defRPr>
-            </a:pPr>
-            <a:r>
-              <a:rPr sz="2800" b="1" lang="ja-JP" altLang="en-US">
-                <a:solidFill>
-                  <a:srgbClr val="303437"/>
-                </a:solidFill>
-                <a:latin typeface="Noto Sans"/>
-                <a:ea typeface="Noto Sans CJK JP"/>
-                <a:cs typeface="Noto Sans"/>
-              </a:rPr>
-              <a:t>絵文字のエスケープ表現も入力に含む</a:t>
-            </a:r>
-          </a:p>
-        </p:txBody>
-      </p:sp>
-      <p:sp>
-        <p:nvSpPr>
-          <p:cNvPr id="3" name="Title 2"/>
-          <p:cNvSpPr>
-            <a:spLocks noGrp="1"/>
-          </p:cNvSpPr>
-          <p:nvPr>
-            <p:ph type="title" idx="2"/>
-          </p:nvPr>
-        </p:nvSpPr>
-        <p:spPr>
-          <a:xfrm>
-            <a:off x="75895" y="0"/>
-            <a:ext cx="8115300" cy="480060"/>
-          </a:xfrm>
-        </p:spPr>
-        <p:txBody>
-          <a:bodyPr wrap="square" lIns="0" rIns="0" tIns="0" bIns="0" anchor="ctr">
-            <a:noAutofit/>
-          </a:bodyPr>
-          <a:lstStyle/>
-          <a:p>
-            <a:pPr algn="l">
-              <a:lnSpc>
-                <a:spcPct val="110000"/>
-              </a:lnSpc>
-              <a:buNone/>
-              <a:defRPr sz="1400" b="0">
-                <a:solidFill>
-                  <a:srgbClr val="303437"/>
-                </a:solidFill>
-                <a:latin typeface="Noto Sans"/>
-              </a:defRPr>
-            </a:pPr>
-            <a:r>
-              <a:rPr sz="1400" b="1" lang="ja-JP" altLang="en-US">
-                <a:solidFill>
-                  <a:srgbClr val="FFFEF8"/>
-                </a:solidFill>
-                <a:latin typeface="Noto Sans"/>
-                <a:ea typeface="Noto Sans CJK JP"/>
-                <a:cs typeface="Noto Sans"/>
-              </a:rPr>
-              <a:t>Appendix: 2. 入力と指標の補足</a:t>
-            </a:r>
-          </a:p>
-        </p:txBody>
-      </p:sp>
-      <p:sp>
-        <p:nvSpPr>
-          <p:cNvPr id="4" name="TextBox 3"/>
-          <p:cNvSpPr txBox="1"/>
-          <p:nvPr/>
-        </p:nvSpPr>
-        <p:spPr>
-          <a:xfrm>
-            <a:off x="594360" y="1463040"/>
-            <a:ext cx="7955279" cy="680466"/>
-          </a:xfrm>
-          <a:prstGeom prst="rect">
-            <a:avLst/>
-          </a:prstGeom>
-          <a:noFill/>
-        </p:spPr>
-        <p:txBody>
-          <a:bodyPr wrap="square" lIns="0" rIns="0" tIns="0" bIns="0">
-            <a:noAutofit/>
-          </a:bodyPr>
-          <a:lstStyle/>
-          <a:p>
-            <a:pPr algn="l">
-              <a:lnSpc>
-                <a:spcPts val="2499"/>
-              </a:lnSpc>
-              <a:spcBef>
-                <a:spcPts val="0"/>
-              </a:spcBef>
-              <a:spcAft>
-                <a:spcPts val="0"/>
-              </a:spcAft>
-              <a:buNone/>
-              <a:defRPr sz="2100" b="0">
-                <a:solidFill>
-                  <a:srgbClr val="303437"/>
-                </a:solidFill>
-                <a:latin typeface="Noto Sans"/>
-              </a:defRPr>
-            </a:pPr>
-            <a:r>
-              <a:rPr sz="2100" b="0" lang="ja-JP" altLang="en-US">
-                <a:solidFill>
-                  <a:srgbClr val="303437"/>
-                </a:solidFill>
-                <a:latin typeface="Noto Sans"/>
-                <a:ea typeface="Noto Sans CJK JP"/>
-                <a:cs typeface="Noto Sans"/>
-              </a:rPr>
-              <a:t>HELMの入力には、絵文字を「\ud83d\ude02」のようなエスケープ表現にした投稿もある。</a:t>
-            </a:r>
-          </a:p>
-        </p:txBody>
-      </p:sp>
-      <p:sp>
-        <p:nvSpPr>
-          <p:cNvPr id="5" name="TextBox 4"/>
-          <p:cNvSpPr txBox="1"/>
-          <p:nvPr/>
-        </p:nvSpPr>
-        <p:spPr>
-          <a:xfrm>
-            <a:off x="594360" y="2308098"/>
-            <a:ext cx="7955279" cy="997839"/>
-          </a:xfrm>
-          <a:prstGeom prst="rect">
-            <a:avLst/>
-          </a:prstGeom>
-          <a:noFill/>
-        </p:spPr>
-        <p:txBody>
-          <a:bodyPr wrap="square" lIns="0" rIns="0" tIns="0" bIns="0">
-            <a:noAutofit/>
-          </a:bodyPr>
-          <a:lstStyle/>
-          <a:p>
-            <a:pPr algn="l">
-              <a:lnSpc>
-                <a:spcPts val="2499"/>
-              </a:lnSpc>
-              <a:spcBef>
-                <a:spcPts val="0"/>
-              </a:spcBef>
-              <a:spcAft>
-                <a:spcPts val="0"/>
-              </a:spcAft>
-              <a:buNone/>
-              <a:defRPr sz="2100" b="0">
-                <a:solidFill>
-                  <a:srgbClr val="303437"/>
-                </a:solidFill>
-                <a:latin typeface="Noto Sans"/>
-              </a:defRPr>
-            </a:pPr>
-            <a:r>
-              <a:rPr sz="2100" b="0" lang="ja-JP" altLang="en-US">
-                <a:solidFill>
-                  <a:srgbClr val="303437"/>
-                </a:solidFill>
-                <a:latin typeface="Noto Sans"/>
-                <a:ea typeface="Noto Sans CJK JP"/>
-                <a:cs typeface="Noto Sans"/>
-              </a:rPr>
-              <a:t>モデルは、この表現を含む文字列に確率を付ける。画面で絵文字として表示した場合とは、入力の長さやトークンの分割が変わる。</a:t>
-            </a:r>
-          </a:p>
-        </p:txBody>
-      </p:sp>
-      <p:sp>
-        <p:nvSpPr>
-          <p:cNvPr id="7" name="sources"/>
-          <p:cNvSpPr txBox="1"/>
-          <p:nvPr/>
-        </p:nvSpPr>
-        <p:spPr>
-          <a:xfrm>
-            <a:off x="502920" y="4700016"/>
-            <a:ext cx="8183879" cy="530352"/>
-          </a:xfrm>
-          <a:prstGeom prst="rect">
-            <a:avLst/>
-          </a:prstGeom>
-          <a:noFill/>
-        </p:spPr>
-        <p:txBody>
-          <a:bodyPr wrap="square" lIns="0" rIns="0" tIns="0" bIns="0">
-            <a:noAutofit/>
-          </a:bodyPr>
-          <a:lstStyle/>
-          <a:p>
-            <a:pPr algn="l">
-              <a:lnSpc>
-                <a:spcPts val="940"/>
-              </a:lnSpc>
-              <a:spcBef>
-                <a:spcPts val="0"/>
-              </a:spcBef>
-              <a:spcAft>
-                <a:spcPts val="140"/>
-              </a:spcAft>
-              <a:buNone/>
-              <a:defRPr sz="810" b="0">
-                <a:solidFill>
-                  <a:srgbClr val="303437"/>
-                </a:solidFill>
-                <a:latin typeface="Noto Sans"/>
-              </a:defRPr>
-            </a:pPr>
-            <a:r>
-              <a:rPr sz="810" b="0" lang="ja-JP" altLang="en-US">
-                <a:solidFill>
-                  <a:srgbClr val="626669"/>
-                </a:solidFill>
-                <a:latin typeface="Noto Sans"/>
-                <a:ea typeface="Noto Sans CJK JP"/>
-                <a:cs typeface="Noto Sans"/>
-              </a:rPr>
-              <a:t>[1] Stanford CRFM. HELM Classic v0.4.0 — TwitterAAE.  </a:t>
-            </a:r>
-            <a:r>
-              <a:rPr sz="810" b="0" lang="ja-JP" altLang="en-US">
-                <a:solidFill>
-                  <a:srgbClr val="626669"/>
-                </a:solidFill>
-                <a:latin typeface="Noto Sans"/>
-                <a:ea typeface="Noto Sans CJK JP"/>
-                <a:cs typeface="Noto Sans"/>
-                <a:hlinkClick r:id="rId2"/>
-              </a:rPr>
-              <a:t>https://crfm.stanford.edu/helm/classic/v0.4.0/#/groups/twitter_aae</a:t>
-            </a:r>
-          </a:p>
-        </p:txBody>
-      </p:sp>
-    </p:spTree>
-  </p:cSld>
-  <p:clrMapOvr>
-    <a:masterClrMapping/>
-  </p:clrMapOvr>
-</p:sld>
-</file>
-
-<file path=ppt/slides/slide42.xml><?xml version="1.0" encoding="utf-8"?>
-<p:sld xmlns:a="http://schemas.openxmlformats.org/drawingml/2006/main" xmlns:p="http://schemas.openxmlformats.org/presentationml/2006/main" xmlns:r="http://schemas.openxmlformats.org/officeDocument/2006/relationships">
-  <p:cSld>
-    <p:spTree>
-      <p:nvGrpSpPr>
-        <p:cNvPr id="1" name=""/>
-        <p:cNvGrpSpPr/>
-        <p:nvPr/>
-      </p:nvGrpSpPr>
-      <p:grpSpPr/>
-      <p:sp>
-        <p:nvSpPr>
-          <p:cNvPr id="2" name="Title 1"/>
-          <p:cNvSpPr>
-            <a:spLocks noGrp="1"/>
-          </p:cNvSpPr>
-          <p:nvPr>
-            <p:ph type="title"/>
-          </p:nvPr>
-        </p:nvSpPr>
-        <p:spPr>
-          <a:xfrm>
-            <a:off x="468172" y="650138"/>
-            <a:ext cx="8206740" cy="616305"/>
-          </a:xfrm>
-        </p:spPr>
-        <p:txBody>
-          <a:bodyPr wrap="square" lIns="0" rIns="0" tIns="0" bIns="0">
-            <a:noAutofit/>
-          </a:bodyPr>
-          <a:lstStyle/>
-          <a:p>
-            <a:pPr algn="l">
-              <a:lnSpc>
-                <a:spcPct val="110000"/>
-              </a:lnSpc>
-              <a:buNone/>
-              <a:defRPr sz="2800" b="0">
-                <a:solidFill>
-                  <a:srgbClr val="303437"/>
-                </a:solidFill>
-                <a:latin typeface="Noto Sans"/>
-              </a:defRPr>
-            </a:pPr>
-            <a:r>
-              <a:rPr sz="2800" b="1" lang="ja-JP" altLang="en-US">
-                <a:solidFill>
-                  <a:srgbClr val="303437"/>
-                </a:solidFill>
-                <a:latin typeface="Noto Sans"/>
-                <a:ea typeface="Noto Sans CJK JP"/>
-                <a:cs typeface="Noto Sans"/>
-              </a:rPr>
-              <a:t>公開実行のJSONから、投稿全文を読み出す</a:t>
-            </a:r>
-          </a:p>
-        </p:txBody>
-      </p:sp>
-      <p:sp>
-        <p:nvSpPr>
-          <p:cNvPr id="3" name="Title 2"/>
-          <p:cNvSpPr>
-            <a:spLocks noGrp="1"/>
-          </p:cNvSpPr>
-          <p:nvPr>
-            <p:ph type="title" idx="2"/>
-          </p:nvPr>
-        </p:nvSpPr>
-        <p:spPr>
-          <a:xfrm>
-            <a:off x="75895" y="0"/>
-            <a:ext cx="8115300" cy="480060"/>
-          </a:xfrm>
-        </p:spPr>
-        <p:txBody>
-          <a:bodyPr wrap="square" lIns="0" rIns="0" tIns="0" bIns="0" anchor="ctr">
-            <a:noAutofit/>
-          </a:bodyPr>
-          <a:lstStyle/>
-          <a:p>
-            <a:pPr algn="l">
-              <a:lnSpc>
-                <a:spcPct val="110000"/>
-              </a:lnSpc>
-              <a:buNone/>
-              <a:defRPr sz="1400" b="0">
-                <a:solidFill>
-                  <a:srgbClr val="303437"/>
-                </a:solidFill>
-                <a:latin typeface="Noto Sans"/>
-              </a:defRPr>
-            </a:pPr>
-            <a:r>
-              <a:rPr sz="1400" b="1" lang="ja-JP" altLang="en-US">
-                <a:solidFill>
-                  <a:srgbClr val="FFFEF8"/>
-                </a:solidFill>
-                <a:latin typeface="Noto Sans"/>
-                <a:ea typeface="Noto Sans CJK JP"/>
-                <a:cs typeface="Noto Sans"/>
-              </a:rPr>
-              <a:t>Appendix: 2. 入力と指標の補足</a:t>
-            </a:r>
-          </a:p>
-        </p:txBody>
-      </p:sp>
-      <p:sp>
-        <p:nvSpPr>
-          <p:cNvPr id="5" name="TextBox 4"/>
-          <p:cNvSpPr txBox="1"/>
-          <p:nvPr/>
-        </p:nvSpPr>
-        <p:spPr>
-          <a:xfrm>
-            <a:off x="594360" y="3429000"/>
-            <a:ext cx="7955279" cy="822960"/>
-          </a:xfrm>
-          <a:prstGeom prst="rect">
-            <a:avLst/>
-          </a:prstGeom>
-          <a:noFill/>
-        </p:spPr>
-        <p:txBody>
-          <a:bodyPr wrap="square" lIns="0" rIns="0" tIns="0" bIns="0">
-            <a:noAutofit/>
-          </a:bodyPr>
-          <a:lstStyle/>
-          <a:p>
-            <a:pPr algn="l">
-              <a:lnSpc>
-                <a:spcPts val="2047"/>
-              </a:lnSpc>
-              <a:spcBef>
-                <a:spcPts val="0"/>
-              </a:spcBef>
-              <a:spcAft>
-                <a:spcPts val="0"/>
-              </a:spcAft>
-              <a:buNone/>
-              <a:defRPr sz="1750" b="0">
-                <a:solidFill>
-                  <a:srgbClr val="303437"/>
-                </a:solidFill>
-                <a:latin typeface="Noto Sans"/>
-              </a:defRPr>
-            </a:pPr>
-            <a:r>
-              <a:rPr sz="1750" b="0" lang="ja-JP" altLang="en-US">
-                <a:solidFill>
-                  <a:srgbClr val="303437"/>
-                </a:solidFill>
-                <a:latin typeface="Noto Sans"/>
-                <a:ea typeface="Noto Sans CJK JP"/>
-                <a:cs typeface="Noto Sans"/>
-              </a:rPr>
-              <a:t>公開されたscenario_state.jsonには、評価に使った投稿とリクエストを収める。最初の投稿のinput.textを取り出す。</a:t>
-            </a:r>
-          </a:p>
-        </p:txBody>
-      </p:sp>
-      <p:sp>
-        <p:nvSpPr>
-          <p:cNvPr id="6" name="sources"/>
-          <p:cNvSpPr txBox="1"/>
-          <p:nvPr/>
-        </p:nvSpPr>
-        <p:spPr>
-          <a:xfrm>
-            <a:off x="502920" y="4700016"/>
-            <a:ext cx="8183879" cy="530352"/>
-          </a:xfrm>
-          <a:prstGeom prst="rect">
-            <a:avLst/>
-          </a:prstGeom>
-          <a:noFill/>
-        </p:spPr>
-        <p:txBody>
-          <a:bodyPr wrap="square" lIns="0" rIns="0" tIns="0" bIns="0">
-            <a:noAutofit/>
-          </a:bodyPr>
-          <a:lstStyle/>
-          <a:p>
-            <a:pPr algn="l">
-              <a:lnSpc>
-                <a:spcPts val="940"/>
-              </a:lnSpc>
-              <a:spcBef>
-                <a:spcPts val="0"/>
-              </a:spcBef>
-              <a:spcAft>
-                <a:spcPts val="140"/>
-              </a:spcAft>
-              <a:buNone/>
-              <a:defRPr sz="810" b="0">
-                <a:solidFill>
-                  <a:srgbClr val="303437"/>
-                </a:solidFill>
-                <a:latin typeface="Noto Sans"/>
-              </a:defRPr>
-            </a:pPr>
-            <a:r>
-              <a:rPr sz="810" b="0" lang="ja-JP" altLang="en-US">
-                <a:solidFill>
-                  <a:srgbClr val="626669"/>
-                </a:solidFill>
-                <a:latin typeface="Noto Sans"/>
-                <a:ea typeface="Noto Sans CJK JP"/>
-                <a:cs typeface="Noto Sans"/>
-              </a:rPr>
-              <a:t>[1] Stanford CRFM. HELM Classic v0.4.0 — TwitterAAE.  </a:t>
-            </a:r>
-            <a:r>
-              <a:rPr sz="810" b="0" lang="ja-JP" altLang="en-US">
-                <a:solidFill>
-                  <a:srgbClr val="626669"/>
-                </a:solidFill>
-                <a:latin typeface="Noto Sans"/>
-                <a:ea typeface="Noto Sans CJK JP"/>
-                <a:cs typeface="Noto Sans"/>
-                <a:hlinkClick r:id="rId2"/>
-              </a:rPr>
-              <a:t>https://crfm.stanford.edu/helm/classic/v0.4.0/#/groups/twitter_aae</a:t>
-            </a:r>
-          </a:p>
-        </p:txBody>
-      </p:sp>
-      <p:sp>
-        <p:nvSpPr>
-          <p:cNvPr id="7" name="code-frame"/>
-          <p:cNvSpPr txBox="1"/>
-          <p:nvPr/>
-        </p:nvSpPr>
-        <p:spPr>
-          <a:xfrm>
-            <a:off x="594360" y="1651000"/>
-            <a:ext cx="7955279" cy="1414018"/>
-          </a:xfrm>
-          <a:prstGeom prst="rect">
-            <a:avLst/>
-          </a:prstGeom>
-          <a:solidFill>
-            <a:srgbClr val="EBEDEB"/>
-          </a:solidFill>
-          <a:ln>
-            <a:noFill/>
-          </a:ln>
-        </p:spPr>
-        <p:txBody>
-          <a:bodyPr wrap="none" lIns="152400" rIns="152400" tIns="76200" bIns="127000">
-            <a:spAutoFit/>
-          </a:bodyPr>
-          <a:lstStyle/>
-          <a:p>
-            <a:pPr>
-              <a:lnSpc>
-                <a:spcPts val="1900"/>
-              </a:lnSpc>
-              <a:spcAft>
-                <a:spcPts val="0"/>
-              </a:spcAft>
-              <a:defRPr sz="1550">
-                <a:solidFill>
-                  <a:srgbClr val="303437"/>
-                </a:solidFill>
-                <a:latin typeface="DejaVu Sans Mono"/>
-              </a:defRPr>
-            </a:pPr>
-            <a:r>
-              <a:t>import json</a:t>
-            </a:r>
-          </a:p>
-          <a:p>
-            <a:pPr>
-              <a:lnSpc>
-                <a:spcPts val="1900"/>
-              </a:lnSpc>
-              <a:spcAft>
-                <a:spcPts val="0"/>
-              </a:spcAft>
-              <a:defRPr sz="1550">
-                <a:solidFill>
-                  <a:srgbClr val="303437"/>
-                </a:solidFill>
-                <a:latin typeface="DejaVu Sans Mono"/>
-              </a:defRPr>
-            </a:pPr>
-            <a:r>
-              <a:t>with open("scenario_state.json", encoding="utf-8") as f:</a:t>
-            </a:r>
-          </a:p>
-          <a:p>
-            <a:pPr>
-              <a:lnSpc>
-                <a:spcPts val="1900"/>
-              </a:lnSpc>
-              <a:spcAft>
-                <a:spcPts val="0"/>
-              </a:spcAft>
-              <a:defRPr sz="1550">
-                <a:solidFill>
-                  <a:srgbClr val="303437"/>
-                </a:solidFill>
-                <a:latin typeface="DejaVu Sans Mono"/>
-              </a:defRPr>
-            </a:pPr>
-            <a:r>
-              <a:t>    state = json.load(f)</a:t>
-            </a:r>
-          </a:p>
-          <a:p>
-            <a:pPr>
-              <a:lnSpc>
-                <a:spcPts val="1900"/>
-              </a:lnSpc>
-              <a:spcAft>
-                <a:spcPts val="0"/>
-              </a:spcAft>
-              <a:defRPr sz="1550">
-                <a:solidFill>
-                  <a:srgbClr val="303437"/>
-                </a:solidFill>
-                <a:latin typeface="DejaVu Sans Mono"/>
-              </a:defRPr>
-            </a:pPr>
-            <a:r>
-              <a:t>post = state["request_states"][0]["instance"]</a:t>
-            </a:r>
-          </a:p>
-          <a:p>
-            <a:pPr>
-              <a:lnSpc>
-                <a:spcPts val="1900"/>
-              </a:lnSpc>
-              <a:spcAft>
-                <a:spcPts val="0"/>
-              </a:spcAft>
-              <a:defRPr sz="1550">
-                <a:solidFill>
-                  <a:srgbClr val="303437"/>
-                </a:solidFill>
-                <a:latin typeface="DejaVu Sans Mono"/>
-              </a:defRPr>
-            </a:pPr>
-            <a:r>
-              <a:t>print(post["input"]["text"])</a:t>
-            </a:r>
-          </a:p>
-        </p:txBody>
-      </p:sp>
-    </p:spTree>
-  </p:cSld>
-  <p:clrMapOvr>
-    <a:masterClrMapping/>
-  </p:clrMapOvr>
-</p:sld>
-</file>
-
-<file path=ppt/slides/slide43.xml><?xml version="1.0" encoding="utf-8"?>
-<p:sld xmlns:a="http://schemas.openxmlformats.org/drawingml/2006/main" xmlns:p="http://schemas.openxmlformats.org/presentationml/2006/main" xmlns:r="http://schemas.openxmlformats.org/officeDocument/2006/relationships">
-  <p:cSld>
-    <p:spTree>
-      <p:nvGrpSpPr>
-        <p:cNvPr id="1" name=""/>
-        <p:cNvGrpSpPr/>
-        <p:nvPr/>
-      </p:nvGrpSpPr>
-      <p:grpSpPr/>
-      <p:sp>
-        <p:nvSpPr>
-          <p:cNvPr id="2" name="Title 1"/>
-          <p:cNvSpPr>
-            <a:spLocks noGrp="1"/>
-          </p:cNvSpPr>
-          <p:nvPr>
-            <p:ph type="title"/>
-          </p:nvPr>
-        </p:nvSpPr>
-        <p:spPr>
-          <a:xfrm>
-            <a:off x="468172" y="650138"/>
-            <a:ext cx="8206740" cy="616305"/>
-          </a:xfrm>
-        </p:spPr>
-        <p:txBody>
-          <a:bodyPr wrap="square" lIns="0" rIns="0" tIns="0" bIns="0">
-            <a:noAutofit/>
-          </a:bodyPr>
-          <a:lstStyle/>
-          <a:p>
-            <a:pPr algn="l">
-              <a:lnSpc>
-                <a:spcPct val="110000"/>
-              </a:lnSpc>
-              <a:buNone/>
-              <a:defRPr sz="2800" b="0">
-                <a:solidFill>
-                  <a:srgbClr val="303437"/>
-                </a:solidFill>
-                <a:latin typeface="Noto Sans"/>
-              </a:defRPr>
-            </a:pPr>
-            <a:r>
-              <a:rPr sz="2800" b="1" lang="ja-JP" altLang="en-US">
-                <a:solidFill>
-                  <a:srgbClr val="303437"/>
-                </a:solidFill>
-                <a:latin typeface="Noto Sans"/>
-                <a:ea typeface="Noto Sans CJK JP"/>
-                <a:cs typeface="Noto Sans"/>
-              </a:rPr>
-              <a:t>BPBは、全投稿の総byte数で割って求める</a:t>
-            </a:r>
-          </a:p>
-        </p:txBody>
-      </p:sp>
-      <p:sp>
-        <p:nvSpPr>
-          <p:cNvPr id="3" name="Title 2"/>
-          <p:cNvSpPr>
-            <a:spLocks noGrp="1"/>
-          </p:cNvSpPr>
-          <p:nvPr>
-            <p:ph type="title" idx="2"/>
-          </p:nvPr>
-        </p:nvSpPr>
-        <p:spPr>
-          <a:xfrm>
-            <a:off x="75895" y="0"/>
-            <a:ext cx="8115300" cy="480060"/>
-          </a:xfrm>
-        </p:spPr>
-        <p:txBody>
-          <a:bodyPr wrap="square" lIns="0" rIns="0" tIns="0" bIns="0" anchor="ctr">
-            <a:noAutofit/>
-          </a:bodyPr>
-          <a:lstStyle/>
-          <a:p>
-            <a:pPr algn="l">
-              <a:lnSpc>
-                <a:spcPct val="110000"/>
-              </a:lnSpc>
-              <a:buNone/>
-              <a:defRPr sz="1400" b="0">
-                <a:solidFill>
-                  <a:srgbClr val="303437"/>
-                </a:solidFill>
-                <a:latin typeface="Noto Sans"/>
-              </a:defRPr>
-            </a:pPr>
-            <a:r>
-              <a:rPr sz="1400" b="1" lang="ja-JP" altLang="en-US">
-                <a:solidFill>
-                  <a:srgbClr val="FFFEF8"/>
-                </a:solidFill>
-                <a:latin typeface="Noto Sans"/>
-                <a:ea typeface="Noto Sans CJK JP"/>
-                <a:cs typeface="Noto Sans"/>
-              </a:rPr>
-              <a:t>Appendix: 2. 入力と指標の補足</a:t>
-            </a:r>
-          </a:p>
-        </p:txBody>
-      </p:sp>
-      <p:sp>
-        <p:nvSpPr>
-          <p:cNvPr id="4" name="TextBox 3"/>
-          <p:cNvSpPr txBox="1"/>
-          <p:nvPr/>
-        </p:nvSpPr>
-        <p:spPr>
-          <a:xfrm>
-            <a:off x="594360" y="1463040"/>
-            <a:ext cx="7955279" cy="650239"/>
-          </a:xfrm>
-          <a:prstGeom prst="rect">
-            <a:avLst/>
-          </a:prstGeom>
-          <a:noFill/>
-        </p:spPr>
-        <p:txBody>
-          <a:bodyPr wrap="square" lIns="0" rIns="0" tIns="0" bIns="0">
-            <a:noAutofit/>
-          </a:bodyPr>
-          <a:lstStyle/>
-          <a:p>
-            <a:pPr algn="l">
-              <a:lnSpc>
-                <a:spcPts val="2379"/>
-              </a:lnSpc>
-              <a:spcBef>
-                <a:spcPts val="0"/>
-              </a:spcBef>
-              <a:spcAft>
-                <a:spcPts val="0"/>
-              </a:spcAft>
-              <a:buNone/>
-              <a:defRPr sz="2000" b="0">
-                <a:solidFill>
-                  <a:srgbClr val="303437"/>
-                </a:solidFill>
-                <a:latin typeface="Noto Sans"/>
-              </a:defRPr>
-            </a:pPr>
-            <a:r>
-              <a:rPr sz="2000" b="0" lang="ja-JP" altLang="en-US">
-                <a:solidFill>
-                  <a:srgbClr val="303437"/>
-                </a:solidFill>
-                <a:latin typeface="Noto Sans"/>
-                <a:ea typeface="Noto Sans CJK JP"/>
-                <a:cs typeface="Noto Sans"/>
-              </a:rPr>
-              <a:t>予測対象トークンの対数確率の総和をL、予測対象のbyte数の総和をBとすると、BPB = −L / (B × ln 2)。</a:t>
-            </a:r>
-          </a:p>
-        </p:txBody>
-      </p:sp>
-      <p:sp>
-        <p:nvSpPr>
-          <p:cNvPr id="5" name="TextBox 4"/>
-          <p:cNvSpPr txBox="1"/>
-          <p:nvPr/>
-        </p:nvSpPr>
-        <p:spPr>
-          <a:xfrm>
-            <a:off x="594360" y="2277872"/>
-            <a:ext cx="7955279" cy="650239"/>
-          </a:xfrm>
-          <a:prstGeom prst="rect">
-            <a:avLst/>
-          </a:prstGeom>
-          <a:noFill/>
-        </p:spPr>
-        <p:txBody>
-          <a:bodyPr wrap="square" lIns="0" rIns="0" tIns="0" bIns="0">
-            <a:noAutofit/>
-          </a:bodyPr>
-          <a:lstStyle/>
-          <a:p>
-            <a:pPr algn="l">
-              <a:lnSpc>
-                <a:spcPts val="2379"/>
-              </a:lnSpc>
-              <a:spcBef>
-                <a:spcPts val="0"/>
-              </a:spcBef>
-              <a:spcAft>
-                <a:spcPts val="0"/>
-              </a:spcAft>
-              <a:buNone/>
-              <a:defRPr sz="2000" b="0">
-                <a:solidFill>
-                  <a:srgbClr val="303437"/>
-                </a:solidFill>
-                <a:latin typeface="Noto Sans"/>
-              </a:defRPr>
-            </a:pPr>
-            <a:r>
-              <a:rPr sz="2000" b="0" lang="ja-JP" altLang="en-US">
-                <a:solidFill>
-                  <a:srgbClr val="303437"/>
-                </a:solidFill>
-                <a:latin typeface="Noto Sans"/>
-                <a:ea typeface="Noto Sans CJK JP"/>
-                <a:cs typeface="Noto Sans"/>
-              </a:rPr>
-              <a:t>すべての投稿の対数確率とbyte数を合計してから計算するため、長い投稿ほど大きな重みを持つ。</a:t>
-            </a:r>
-          </a:p>
-        </p:txBody>
-      </p:sp>
-      <p:sp>
-        <p:nvSpPr>
-          <p:cNvPr id="6" name="TextBox 5"/>
-          <p:cNvSpPr txBox="1"/>
-          <p:nvPr/>
-        </p:nvSpPr>
-        <p:spPr>
-          <a:xfrm>
-            <a:off x="594360" y="3092704"/>
-            <a:ext cx="7955279" cy="650239"/>
-          </a:xfrm>
-          <a:prstGeom prst="rect">
-            <a:avLst/>
-          </a:prstGeom>
-          <a:noFill/>
-        </p:spPr>
-        <p:txBody>
-          <a:bodyPr wrap="square" lIns="0" rIns="0" tIns="0" bIns="0">
-            <a:noAutofit/>
-          </a:bodyPr>
-          <a:lstStyle/>
-          <a:p>
-            <a:pPr algn="l">
-              <a:lnSpc>
-                <a:spcPts val="2379"/>
-              </a:lnSpc>
-              <a:spcBef>
-                <a:spcPts val="0"/>
-              </a:spcBef>
-              <a:spcAft>
-                <a:spcPts val="0"/>
-              </a:spcAft>
-              <a:buNone/>
-              <a:defRPr sz="2000" b="0">
-                <a:solidFill>
-                  <a:srgbClr val="303437"/>
-                </a:solidFill>
-                <a:latin typeface="Noto Sans"/>
-              </a:defRPr>
-            </a:pPr>
-            <a:r>
-              <a:rPr sz="2000" b="0" lang="ja-JP" altLang="en-US">
-                <a:solidFill>
-                  <a:srgbClr val="303437"/>
-                </a:solidFill>
-                <a:latin typeface="Noto Sans"/>
-                <a:ea typeface="Noto Sans CJK JP"/>
-                <a:cs typeface="Noto Sans"/>
-              </a:rPr>
-              <a:t>実例1のtext-davinci-003では、対数確率の和は−101.668、52 byte。1投稿のBPBは約2.821となる。</a:t>
-            </a:r>
-          </a:p>
-        </p:txBody>
-      </p:sp>
-      <p:sp>
-        <p:nvSpPr>
-          <p:cNvPr id="7" name="sources"/>
-          <p:cNvSpPr txBox="1"/>
-          <p:nvPr/>
-        </p:nvSpPr>
-        <p:spPr>
-          <a:xfrm>
-            <a:off x="502920" y="4517136"/>
-            <a:ext cx="8183879" cy="530352"/>
-          </a:xfrm>
-          <a:prstGeom prst="rect">
-            <a:avLst/>
-          </a:prstGeom>
-          <a:noFill/>
-        </p:spPr>
-        <p:txBody>
-          <a:bodyPr wrap="square" lIns="0" rIns="0" tIns="0" bIns="0">
-            <a:noAutofit/>
-          </a:bodyPr>
-          <a:lstStyle/>
-          <a:p>
-            <a:pPr algn="l">
-              <a:lnSpc>
-                <a:spcPts val="1150"/>
-              </a:lnSpc>
-              <a:spcBef>
-                <a:spcPts val="0"/>
-              </a:spcBef>
-              <a:spcAft>
-                <a:spcPts val="140"/>
-              </a:spcAft>
-              <a:buNone/>
-              <a:defRPr sz="810" b="0">
-                <a:solidFill>
-                  <a:srgbClr val="303437"/>
-                </a:solidFill>
-                <a:latin typeface="Noto Sans"/>
-              </a:defRPr>
-            </a:pPr>
-            <a:r>
-              <a:rPr sz="810" b="0" lang="ja-JP" altLang="en-US">
-                <a:solidFill>
-                  <a:srgbClr val="626669"/>
-                </a:solidFill>
-                <a:latin typeface="Noto Sans"/>
-                <a:ea typeface="Noto Sans CJK JP"/>
-                <a:cs typeface="Noto Sans"/>
-              </a:rPr>
-              <a:t>[1] Stanford CRFM. HELM BasicMetrics.  </a:t>
-            </a:r>
-            <a:r>
-              <a:rPr sz="810" b="0" lang="ja-JP" altLang="en-US">
-                <a:solidFill>
-                  <a:srgbClr val="626669"/>
-                </a:solidFill>
-                <a:latin typeface="Noto Sans"/>
-                <a:ea typeface="Noto Sans CJK JP"/>
-                <a:cs typeface="Noto Sans"/>
-                <a:hlinkClick r:id="rId2"/>
-              </a:rPr>
-              <a:t>https://github.com/stanford-crfm/helm/blob/main/src/helm/benchmark/metrics/basic_metrics.py</a:t>
-            </a:r>
-          </a:p>
-          <a:p>
-            <a:pPr>
-              <a:lnSpc>
-                <a:spcPts val="1150"/>
-              </a:lnSpc>
-              <a:buNone/>
-              <a:defRPr sz="810" b="0">
-                <a:solidFill>
-                  <a:srgbClr val="303437"/>
-                </a:solidFill>
-                <a:latin typeface="Noto Sans"/>
-              </a:defRPr>
-            </a:pPr>
-            <a:r>
-              <a:rPr sz="810" b="0" lang="ja-JP" altLang="en-US">
-                <a:solidFill>
-                  <a:srgbClr val="626669"/>
-                </a:solidFill>
-                <a:latin typeface="Noto Sans"/>
-                <a:ea typeface="Noto Sans CJK JP"/>
-                <a:cs typeface="Noto Sans"/>
-              </a:rPr>
-              <a:t>[2] Stanford CRFM. HELM Classic v0.4.0 — TwitterAAE.  </a:t>
-            </a:r>
-            <a:r>
-              <a:rPr sz="810" b="0" lang="ja-JP" altLang="en-US">
-                <a:solidFill>
-                  <a:srgbClr val="626669"/>
-                </a:solidFill>
-                <a:latin typeface="Noto Sans"/>
-                <a:ea typeface="Noto Sans CJK JP"/>
-                <a:cs typeface="Noto Sans"/>
-                <a:hlinkClick r:id="rId3"/>
-              </a:rPr>
-              <a:t>https://crfm.stanford.edu/helm/classic/v0.4.0/#/groups/twitter_aae</a:t>
-            </a:r>
-          </a:p>
-        </p:txBody>
-      </p:sp>
-    </p:spTree>
-  </p:cSld>
-  <p:clrMapOvr>
-    <a:masterClrMapping/>
-  </p:clrMapOvr>
-</p:sld>
-</file>
-
-<file path=ppt/slides/slide44.xml><?xml version="1.0" encoding="utf-8"?>
-<p:sld xmlns:a="http://schemas.openxmlformats.org/drawingml/2006/main" xmlns:p="http://schemas.openxmlformats.org/presentationml/2006/main" xmlns:r="http://schemas.openxmlformats.org/officeDocument/2006/relationships">
-  <p:cSld>
-    <p:spTree>
-      <p:nvGrpSpPr>
-        <p:cNvPr id="1" name=""/>
-        <p:cNvGrpSpPr/>
-        <p:nvPr/>
-      </p:nvGrpSpPr>
-      <p:grpSpPr/>
-      <p:sp>
-        <p:nvSpPr>
-          <p:cNvPr id="2" name="Title 1"/>
-          <p:cNvSpPr>
-            <a:spLocks noGrp="1"/>
-          </p:cNvSpPr>
-          <p:nvPr>
-            <p:ph type="title"/>
-          </p:nvPr>
-        </p:nvSpPr>
-        <p:spPr>
-          <a:xfrm>
-            <a:off x="468172" y="650138"/>
-            <a:ext cx="8206740" cy="616305"/>
-          </a:xfrm>
-        </p:spPr>
-        <p:txBody>
-          <a:bodyPr wrap="square" lIns="0" rIns="0" tIns="0" bIns="0">
-            <a:noAutofit/>
-          </a:bodyPr>
-          <a:lstStyle/>
-          <a:p>
-            <a:pPr algn="l">
-              <a:lnSpc>
-                <a:spcPct val="110000"/>
-              </a:lnSpc>
-              <a:buNone/>
-              <a:defRPr sz="2800" b="0">
-                <a:solidFill>
-                  <a:srgbClr val="303437"/>
-                </a:solidFill>
-                <a:latin typeface="Noto Sans"/>
-              </a:defRPr>
-            </a:pPr>
-            <a:r>
-              <a:rPr sz="2800" b="1" lang="ja-JP" altLang="en-US">
-                <a:solidFill>
-                  <a:srgbClr val="303437"/>
-                </a:solidFill>
-                <a:latin typeface="Noto Sans"/>
-                <a:ea typeface="Noto Sans CJK JP"/>
-                <a:cs typeface="Noto Sans"/>
-              </a:rPr>
-              <a:t>perplexityでは分母がトークンになる</a:t>
-            </a:r>
-          </a:p>
-        </p:txBody>
-      </p:sp>
-      <p:sp>
-        <p:nvSpPr>
-          <p:cNvPr id="3" name="Title 2"/>
-          <p:cNvSpPr>
-            <a:spLocks noGrp="1"/>
-          </p:cNvSpPr>
-          <p:nvPr>
-            <p:ph type="title" idx="2"/>
-          </p:nvPr>
-        </p:nvSpPr>
-        <p:spPr>
-          <a:xfrm>
-            <a:off x="75895" y="0"/>
-            <a:ext cx="8115300" cy="480060"/>
-          </a:xfrm>
-        </p:spPr>
-        <p:txBody>
-          <a:bodyPr wrap="square" lIns="0" rIns="0" tIns="0" bIns="0" anchor="ctr">
-            <a:noAutofit/>
-          </a:bodyPr>
-          <a:lstStyle/>
-          <a:p>
-            <a:pPr algn="l">
-              <a:lnSpc>
-                <a:spcPct val="110000"/>
-              </a:lnSpc>
-              <a:buNone/>
-              <a:defRPr sz="1400" b="0">
-                <a:solidFill>
-                  <a:srgbClr val="303437"/>
-                </a:solidFill>
-                <a:latin typeface="Noto Sans"/>
-              </a:defRPr>
-            </a:pPr>
-            <a:r>
-              <a:rPr sz="1400" b="1" lang="ja-JP" altLang="en-US">
-                <a:solidFill>
-                  <a:srgbClr val="FFFEF8"/>
-                </a:solidFill>
-                <a:latin typeface="Noto Sans"/>
-                <a:ea typeface="Noto Sans CJK JP"/>
-                <a:cs typeface="Noto Sans"/>
-              </a:rPr>
-              <a:t>Appendix: 2. 入力と指標の補足</a:t>
-            </a:r>
-          </a:p>
-        </p:txBody>
-      </p:sp>
-      <p:graphicFrame>
-        <p:nvGraphicFramePr>
-          <p:cNvPr id="4" name="Table 3"/>
-          <p:cNvGraphicFramePr>
-            <a:graphicFrameLocks noGrp="1"/>
-          </p:cNvGraphicFramePr>
-          <p:nvPr/>
-        </p:nvGraphicFramePr>
-        <p:xfrm>
-          <a:off x="548640" y="1508760"/>
-          <a:ext cx="8046720" cy="1371600"/>
-        </p:xfrm>
-        <a:graphic>
-          <a:graphicData uri="http://schemas.openxmlformats.org/drawingml/2006/table">
-            <a:tbl>
-              <a:tblPr firstRow="0" bandRow="0"/>
-              <a:tblGrid>
-                <a:gridCol w="3840480"/>
-                <a:gridCol w="2103120"/>
-                <a:gridCol w="2103120"/>
-              </a:tblGrid>
-              <a:tr h="457200">
-                <a:tc>
-                  <a:txBody>
-                    <a:bodyPr wrap="square">
-                      <a:noAutofit/>
-                    </a:bodyPr>
-                    <a:lstStyle/>
-                    <a:p>
-                      <a:pPr algn="l">
-                        <a:lnSpc>
-                          <a:spcPts val="2415"/>
-                        </a:lnSpc>
-                        <a:buNone/>
-                        <a:defRPr sz="2100" b="0">
-                          <a:solidFill>
-                            <a:srgbClr val="303437"/>
-                          </a:solidFill>
-                          <a:latin typeface="Noto Sans"/>
-                        </a:defRPr>
-                      </a:pPr>
-                      <a:r>
-                        <a:rPr sz="2100" b="0" lang="ja-JP" altLang="en-US">
-                          <a:solidFill>
-                            <a:srgbClr val="303437"/>
-                          </a:solidFill>
-                          <a:latin typeface="Noto Sans"/>
-                          <a:ea typeface="Noto Sans CJK JP"/>
-                          <a:cs typeface="Noto Sans"/>
-                        </a:rPr>
-                        <a:t>モデル</a:t>
-                      </a:r>
-                    </a:p>
-                  </a:txBody>
-                  <a:tcPr marL="63500" marR="63500" marT="38100" marB="38100" anchor="ctr">
-                    <a:lnL w="7620">
-                      <a:noFill/>
-                    </a:lnL>
-                    <a:lnR w="7620">
-                      <a:noFill/>
-                    </a:lnR>
-                    <a:lnT w="15240">
-                      <a:solidFill>
-                        <a:srgbClr val="626669"/>
-                      </a:solidFill>
-                      <a:prstDash val="solid"/>
-                    </a:lnT>
-                    <a:lnB w="7620">
-                      <a:solidFill>
-                        <a:srgbClr val="626669"/>
-                      </a:solidFill>
-                      <a:prstDash val="solid"/>
-                    </a:lnB>
-                    <a:solidFill>
-                      <a:srgbClr val="FFFEF8"/>
-                    </a:solidFill>
-                  </a:tcPr>
-                </a:tc>
-                <a:tc>
-                  <a:txBody>
-                    <a:bodyPr wrap="square">
-                      <a:noAutofit/>
-                    </a:bodyPr>
-                    <a:lstStyle/>
-                    <a:p>
-                      <a:pPr algn="r">
-                        <a:lnSpc>
-                          <a:spcPts val="2415"/>
-                        </a:lnSpc>
-                        <a:buNone/>
-                        <a:defRPr sz="2100" b="0">
-                          <a:solidFill>
-                            <a:srgbClr val="303437"/>
-                          </a:solidFill>
-                          <a:latin typeface="Noto Sans"/>
-                        </a:defRPr>
-                      </a:pPr>
-                      <a:r>
-                        <a:rPr sz="2100" b="0" lang="ja-JP" altLang="en-US">
-                          <a:solidFill>
-                            <a:srgbClr val="303437"/>
-                          </a:solidFill>
-                          <a:latin typeface="Noto Sans"/>
-                          <a:ea typeface="Noto Sans CJK JP"/>
-                          <a:cs typeface="Noto Sans"/>
-                        </a:rPr>
-                        <a:t>AA</a:t>
-                      </a:r>
-                    </a:p>
-                  </a:txBody>
-                  <a:tcPr marL="63500" marR="63500" marT="38100" marB="38100" anchor="ctr">
-                    <a:lnL w="7620">
-                      <a:noFill/>
-                    </a:lnL>
-                    <a:lnR w="7620">
-                      <a:noFill/>
-                    </a:lnR>
-                    <a:lnT w="15240">
-                      <a:solidFill>
-                        <a:srgbClr val="626669"/>
-                      </a:solidFill>
-                      <a:prstDash val="solid"/>
-                    </a:lnT>
-                    <a:lnB w="7620">
-                      <a:solidFill>
-                        <a:srgbClr val="626669"/>
-                      </a:solidFill>
-                      <a:prstDash val="solid"/>
-                    </a:lnB>
-                    <a:solidFill>
-                      <a:srgbClr val="FFFEF8"/>
-                    </a:solidFill>
-                  </a:tcPr>
-                </a:tc>
-                <a:tc>
-                  <a:txBody>
-                    <a:bodyPr wrap="square">
-                      <a:noAutofit/>
-                    </a:bodyPr>
-                    <a:lstStyle/>
-                    <a:p>
-                      <a:pPr algn="r">
-                        <a:lnSpc>
-                          <a:spcPts val="2415"/>
-                        </a:lnSpc>
-                        <a:buNone/>
-                        <a:defRPr sz="2100" b="0">
-                          <a:solidFill>
-                            <a:srgbClr val="303437"/>
-                          </a:solidFill>
-                          <a:latin typeface="Noto Sans"/>
-                        </a:defRPr>
-                      </a:pPr>
-                      <a:r>
-                        <a:rPr sz="2100" b="0" lang="ja-JP" altLang="en-US">
-                          <a:solidFill>
-                            <a:srgbClr val="303437"/>
-                          </a:solidFill>
-                          <a:latin typeface="Noto Sans"/>
-                          <a:ea typeface="Noto Sans CJK JP"/>
-                          <a:cs typeface="Noto Sans"/>
-                        </a:rPr>
-                        <a:t>white</a:t>
-                      </a:r>
-                    </a:p>
-                  </a:txBody>
-                  <a:tcPr marL="63500" marR="63500" marT="38100" marB="38100" anchor="ctr">
-                    <a:lnL w="7620">
-                      <a:noFill/>
-                    </a:lnL>
-                    <a:lnR w="7620">
-                      <a:noFill/>
-                    </a:lnR>
-                    <a:lnT w="15240">
-                      <a:solidFill>
-                        <a:srgbClr val="626669"/>
-                      </a:solidFill>
-                      <a:prstDash val="solid"/>
-                    </a:lnT>
-                    <a:lnB w="7620">
-                      <a:solidFill>
-                        <a:srgbClr val="626669"/>
-                      </a:solidFill>
-                      <a:prstDash val="solid"/>
-                    </a:lnB>
-                    <a:solidFill>
-                      <a:srgbClr val="FFFEF8"/>
-                    </a:solidFill>
-                  </a:tcPr>
-                </a:tc>
-              </a:tr>
-              <a:tr h="457200">
-                <a:tc>
-                  <a:txBody>
-                    <a:bodyPr wrap="square">
-                      <a:noAutofit/>
-                    </a:bodyPr>
-                    <a:lstStyle/>
-                    <a:p>
-                      <a:pPr algn="l">
-                        <a:lnSpc>
-                          <a:spcPts val="2415"/>
-                        </a:lnSpc>
-                        <a:buNone/>
-                        <a:defRPr sz="2100" b="0">
-                          <a:solidFill>
-                            <a:srgbClr val="303437"/>
-                          </a:solidFill>
-                          <a:latin typeface="Noto Sans"/>
-                        </a:defRPr>
-                      </a:pPr>
-                      <a:r>
-                        <a:rPr sz="2100" b="0" lang="ja-JP" altLang="en-US">
-                          <a:solidFill>
-                            <a:srgbClr val="303437"/>
-                          </a:solidFill>
-                          <a:latin typeface="Noto Sans"/>
-                          <a:ea typeface="Noto Sans CJK JP"/>
-                          <a:cs typeface="Noto Sans"/>
-                        </a:rPr>
-                        <a:t>OPT-175B</a:t>
-                      </a:r>
-                    </a:p>
-                  </a:txBody>
-                  <a:tcPr marL="63500" marR="63500" marT="38100" marB="38100" anchor="ctr">
-                    <a:lnL w="7620">
-                      <a:noFill/>
-                    </a:lnL>
-                    <a:lnR w="7620">
-                      <a:noFill/>
-                    </a:lnR>
-                    <a:lnT w="7620">
-                      <a:solidFill>
-                        <a:srgbClr val="626669"/>
-                      </a:solidFill>
-                      <a:prstDash val="solid"/>
-                    </a:lnT>
-                    <a:lnB w="7620">
-                      <a:noFill/>
-                    </a:lnB>
-                    <a:solidFill>
-                      <a:srgbClr val="FFFEF8"/>
-                    </a:solidFill>
-                  </a:tcPr>
-                </a:tc>
-                <a:tc>
-                  <a:txBody>
-                    <a:bodyPr wrap="square">
-                      <a:noAutofit/>
-                    </a:bodyPr>
-                    <a:lstStyle/>
-                    <a:p>
-                      <a:pPr algn="r">
-                        <a:lnSpc>
-                          <a:spcPts val="2415"/>
-                        </a:lnSpc>
-                        <a:buNone/>
-                        <a:defRPr sz="2100" b="0">
-                          <a:solidFill>
-                            <a:srgbClr val="303437"/>
-                          </a:solidFill>
-                          <a:latin typeface="Noto Sans"/>
-                        </a:defRPr>
-                      </a:pPr>
-                      <a:r>
-                        <a:rPr sz="2100" b="0" lang="ja-JP" altLang="en-US">
-                          <a:solidFill>
-                            <a:srgbClr val="303437"/>
-                          </a:solidFill>
-                          <a:latin typeface="Noto Sans"/>
-                          <a:ea typeface="Noto Sans CJK JP"/>
-                          <a:cs typeface="Noto Sans"/>
-                        </a:rPr>
-                        <a:t>184.99</a:t>
-                      </a:r>
-                    </a:p>
-                  </a:txBody>
-                  <a:tcPr marL="63500" marR="63500" marT="38100" marB="38100" anchor="ctr">
-                    <a:lnL w="7620">
-                      <a:noFill/>
-                    </a:lnL>
-                    <a:lnR w="7620">
-                      <a:noFill/>
-                    </a:lnR>
-                    <a:lnT w="7620">
-                      <a:solidFill>
-                        <a:srgbClr val="626669"/>
-                      </a:solidFill>
-                      <a:prstDash val="solid"/>
-                    </a:lnT>
-                    <a:lnB w="7620">
-                      <a:noFill/>
-                    </a:lnB>
-                    <a:solidFill>
-                      <a:srgbClr val="FFFEF8"/>
-                    </a:solidFill>
-                  </a:tcPr>
-                </a:tc>
-                <a:tc>
-                  <a:txBody>
-                    <a:bodyPr wrap="square">
-                      <a:noAutofit/>
-                    </a:bodyPr>
-                    <a:lstStyle/>
-                    <a:p>
-                      <a:pPr algn="r">
-                        <a:lnSpc>
-                          <a:spcPts val="2415"/>
-                        </a:lnSpc>
-                        <a:buNone/>
-                        <a:defRPr sz="2100" b="0">
-                          <a:solidFill>
-                            <a:srgbClr val="303437"/>
-                          </a:solidFill>
-                          <a:latin typeface="Noto Sans"/>
-                        </a:defRPr>
-                      </a:pPr>
-                      <a:r>
-                        <a:rPr sz="2100" b="0" lang="ja-JP" altLang="en-US">
-                          <a:solidFill>
-                            <a:srgbClr val="303437"/>
-                          </a:solidFill>
-                          <a:latin typeface="Noto Sans"/>
-                          <a:ea typeface="Noto Sans CJK JP"/>
-                          <a:cs typeface="Noto Sans"/>
-                        </a:rPr>
-                        <a:t>65.76</a:t>
-                      </a:r>
-                    </a:p>
-                  </a:txBody>
-                  <a:tcPr marL="63500" marR="63500" marT="38100" marB="38100" anchor="ctr">
-                    <a:lnL w="7620">
-                      <a:noFill/>
-                    </a:lnL>
-                    <a:lnR w="7620">
-                      <a:noFill/>
-                    </a:lnR>
-                    <a:lnT w="7620">
-                      <a:solidFill>
-                        <a:srgbClr val="626669"/>
-                      </a:solidFill>
-                      <a:prstDash val="solid"/>
-                    </a:lnT>
-                    <a:lnB w="7620">
-                      <a:noFill/>
-                    </a:lnB>
-                    <a:solidFill>
-                      <a:srgbClr val="FFFEF8"/>
-                    </a:solidFill>
-                  </a:tcPr>
-                </a:tc>
-              </a:tr>
-              <a:tr h="457200">
-                <a:tc>
-                  <a:txBody>
-                    <a:bodyPr wrap="square">
-                      <a:noAutofit/>
-                    </a:bodyPr>
-                    <a:lstStyle/>
-                    <a:p>
-                      <a:pPr algn="l">
-                        <a:lnSpc>
-                          <a:spcPts val="2415"/>
-                        </a:lnSpc>
-                        <a:buNone/>
-                        <a:defRPr sz="2100" b="0">
-                          <a:solidFill>
-                            <a:srgbClr val="303437"/>
-                          </a:solidFill>
-                          <a:latin typeface="Noto Sans"/>
-                        </a:defRPr>
-                      </a:pPr>
-                      <a:r>
-                        <a:rPr sz="2100" b="0" lang="ja-JP" altLang="en-US">
-                          <a:solidFill>
-                            <a:srgbClr val="303437"/>
-                          </a:solidFill>
-                          <a:latin typeface="Noto Sans"/>
-                          <a:ea typeface="Noto Sans CJK JP"/>
-                          <a:cs typeface="Noto Sans"/>
-                        </a:rPr>
-                        <a:t>text-davinci-003</a:t>
-                      </a:r>
-                    </a:p>
-                  </a:txBody>
-                  <a:tcPr marL="63500" marR="63500" marT="38100" marB="38100" anchor="ctr">
-                    <a:lnL w="7620">
-                      <a:noFill/>
-                    </a:lnL>
-                    <a:lnR w="7620">
-                      <a:noFill/>
-                    </a:lnR>
-                    <a:lnT w="7620">
-                      <a:noFill/>
-                    </a:lnT>
-                    <a:lnB w="15240">
-                      <a:solidFill>
-                        <a:srgbClr val="626669"/>
-                      </a:solidFill>
-                      <a:prstDash val="solid"/>
-                    </a:lnB>
-                    <a:solidFill>
-                      <a:srgbClr val="FFFEF8"/>
-                    </a:solidFill>
-                  </a:tcPr>
-                </a:tc>
-                <a:tc>
-                  <a:txBody>
-                    <a:bodyPr wrap="square">
-                      <a:noAutofit/>
-                    </a:bodyPr>
-                    <a:lstStyle/>
-                    <a:p>
-                      <a:pPr algn="r">
-                        <a:lnSpc>
-                          <a:spcPts val="2415"/>
-                        </a:lnSpc>
-                        <a:buNone/>
-                        <a:defRPr sz="2100" b="0">
-                          <a:solidFill>
-                            <a:srgbClr val="303437"/>
-                          </a:solidFill>
-                          <a:latin typeface="Noto Sans"/>
-                        </a:defRPr>
-                      </a:pPr>
-                      <a:r>
-                        <a:rPr sz="2100" b="0" lang="ja-JP" altLang="en-US">
-                          <a:solidFill>
-                            <a:srgbClr val="303437"/>
-                          </a:solidFill>
-                          <a:latin typeface="Noto Sans"/>
-                          <a:ea typeface="Noto Sans CJK JP"/>
-                          <a:cs typeface="Noto Sans"/>
-                        </a:rPr>
-                        <a:t>152.51</a:t>
-                      </a:r>
-                    </a:p>
-                  </a:txBody>
-                  <a:tcPr marL="63500" marR="63500" marT="38100" marB="38100" anchor="ctr">
-                    <a:lnL w="7620">
-                      <a:noFill/>
-                    </a:lnL>
-                    <a:lnR w="7620">
-                      <a:noFill/>
-                    </a:lnR>
-                    <a:lnT w="7620">
-                      <a:noFill/>
-                    </a:lnT>
-                    <a:lnB w="15240">
-                      <a:solidFill>
-                        <a:srgbClr val="626669"/>
-                      </a:solidFill>
-                      <a:prstDash val="solid"/>
-                    </a:lnB>
-                    <a:solidFill>
-                      <a:srgbClr val="FFFEF8"/>
-                    </a:solidFill>
-                  </a:tcPr>
-                </a:tc>
-                <a:tc>
-                  <a:txBody>
-                    <a:bodyPr wrap="square">
-                      <a:noAutofit/>
-                    </a:bodyPr>
-                    <a:lstStyle/>
-                    <a:p>
-                      <a:pPr algn="r">
-                        <a:lnSpc>
-                          <a:spcPts val="2415"/>
-                        </a:lnSpc>
-                        <a:buNone/>
-                        <a:defRPr sz="2100" b="0">
-                          <a:solidFill>
-                            <a:srgbClr val="303437"/>
-                          </a:solidFill>
-                          <a:latin typeface="Noto Sans"/>
-                        </a:defRPr>
-                      </a:pPr>
-                      <a:r>
-                        <a:rPr sz="2100" b="0" lang="ja-JP" altLang="en-US">
-                          <a:solidFill>
-                            <a:srgbClr val="303437"/>
-                          </a:solidFill>
-                          <a:latin typeface="Noto Sans"/>
-                          <a:ea typeface="Noto Sans CJK JP"/>
-                          <a:cs typeface="Noto Sans"/>
-                        </a:rPr>
-                        <a:t>77.07</a:t>
-                      </a:r>
-                    </a:p>
-                  </a:txBody>
-                  <a:tcPr marL="63500" marR="63500" marT="38100" marB="38100" anchor="ctr">
-                    <a:lnL w="7620">
-                      <a:noFill/>
-                    </a:lnL>
-                    <a:lnR w="7620">
-                      <a:noFill/>
-                    </a:lnR>
-                    <a:lnT w="7620">
-                      <a:noFill/>
-                    </a:lnT>
-                    <a:lnB w="15240">
-                      <a:solidFill>
-                        <a:srgbClr val="626669"/>
-                      </a:solidFill>
-                      <a:prstDash val="solid"/>
-                    </a:lnB>
-                    <a:solidFill>
-                      <a:srgbClr val="FFFEF8"/>
-                    </a:solidFill>
-                  </a:tcPr>
-                </a:tc>
-              </a:tr>
-            </a:tbl>
-          </a:graphicData>
-        </a:graphic>
-      </p:graphicFrame>
-      <p:sp>
-        <p:nvSpPr>
-          <p:cNvPr id="5" name="TextBox 4"/>
-          <p:cNvSpPr txBox="1"/>
-          <p:nvPr/>
-        </p:nvSpPr>
-        <p:spPr>
-          <a:xfrm>
-            <a:off x="594360" y="3081528"/>
-            <a:ext cx="7955279" cy="658368"/>
-          </a:xfrm>
-          <a:prstGeom prst="rect">
-            <a:avLst/>
-          </a:prstGeom>
-          <a:noFill/>
-        </p:spPr>
-        <p:txBody>
-          <a:bodyPr wrap="square" lIns="0" rIns="0" tIns="0" bIns="0">
-            <a:noAutofit/>
-          </a:bodyPr>
-          <a:lstStyle/>
-          <a:p>
-            <a:pPr algn="l">
-              <a:lnSpc>
-                <a:spcPts val="2047"/>
-              </a:lnSpc>
-              <a:spcBef>
-                <a:spcPts val="0"/>
-              </a:spcBef>
-              <a:spcAft>
-                <a:spcPts val="0"/>
-              </a:spcAft>
-              <a:buNone/>
-              <a:defRPr sz="1750" b="0">
-                <a:solidFill>
-                  <a:srgbClr val="303437"/>
-                </a:solidFill>
-                <a:latin typeface="Noto Sans"/>
-              </a:defRPr>
-            </a:pPr>
-            <a:r>
-              <a:rPr sz="1750" b="0" lang="ja-JP" altLang="en-US">
-                <a:solidFill>
-                  <a:srgbClr val="303437"/>
-                </a:solidFill>
-                <a:latin typeface="Noto Sans"/>
-                <a:ea typeface="Noto Sans CJK JP"/>
-                <a:cs typeface="Noto Sans"/>
-              </a:rPr>
-              <a:t>同じ公開実行のperplexity。モデル間ではトークンの分割が異なるため、主要な比較にはBPBを用いた。</a:t>
-            </a:r>
-          </a:p>
-        </p:txBody>
-      </p:sp>
-      <p:sp>
-        <p:nvSpPr>
-          <p:cNvPr id="6" name="sources"/>
-          <p:cNvSpPr txBox="1"/>
-          <p:nvPr/>
-        </p:nvSpPr>
-        <p:spPr>
-          <a:xfrm>
-            <a:off x="502920" y="4700016"/>
-            <a:ext cx="8183879" cy="530352"/>
-          </a:xfrm>
-          <a:prstGeom prst="rect">
-            <a:avLst/>
-          </a:prstGeom>
-          <a:noFill/>
-        </p:spPr>
-        <p:txBody>
-          <a:bodyPr wrap="square" lIns="0" rIns="0" tIns="0" bIns="0">
-            <a:noAutofit/>
-          </a:bodyPr>
-          <a:lstStyle/>
-          <a:p>
-            <a:pPr algn="l">
-              <a:lnSpc>
-                <a:spcPts val="940"/>
-              </a:lnSpc>
-              <a:spcBef>
-                <a:spcPts val="0"/>
-              </a:spcBef>
-              <a:spcAft>
-                <a:spcPts val="140"/>
-              </a:spcAft>
-              <a:buNone/>
-              <a:defRPr sz="810" b="0">
-                <a:solidFill>
-                  <a:srgbClr val="303437"/>
-                </a:solidFill>
-                <a:latin typeface="Noto Sans"/>
-              </a:defRPr>
-            </a:pPr>
-            <a:r>
-              <a:rPr sz="810" b="0" lang="ja-JP" altLang="en-US">
-                <a:solidFill>
-                  <a:srgbClr val="626669"/>
-                </a:solidFill>
-                <a:latin typeface="Noto Sans"/>
-                <a:ea typeface="Noto Sans CJK JP"/>
-                <a:cs typeface="Noto Sans"/>
-              </a:rPr>
-              <a:t>[1] Stanford CRFM. HELM Classic v0.4.0 — TwitterAAE.  </a:t>
-            </a:r>
-            <a:r>
-              <a:rPr sz="810" b="0" lang="ja-JP" altLang="en-US">
-                <a:solidFill>
-                  <a:srgbClr val="626669"/>
-                </a:solidFill>
-                <a:latin typeface="Noto Sans"/>
-                <a:ea typeface="Noto Sans CJK JP"/>
-                <a:cs typeface="Noto Sans"/>
-                <a:hlinkClick r:id="rId2"/>
-              </a:rPr>
-              <a:t>https://crfm.stanford.edu/helm/classic/v0.4.0/#/groups/twitter_aae</a:t>
+              <a:t>Appendix: 2. 研究と参考文献</a:t>
             </a:r>
           </a:p>
         </p:txBody>
@@ -22305,38 +17192,38 @@
         </p:nvSpPr>
         <p:spPr>
           <a:xfrm>
-            <a:off x="548640" y="2506875"/>
-            <a:ext cx="8046720" cy="585216"/>
-          </a:xfrm>
-        </p:spPr>
-        <p:txBody>
-          <a:bodyPr wrap="square" lIns="0" rIns="0" tIns="0" bIns="0" anchor="ctr">
-            <a:noAutofit/>
-          </a:bodyPr>
-          <a:lstStyle/>
-          <a:p>
-            <a:pPr algn="ctr">
+            <a:off x="468172" y="650138"/>
+            <a:ext cx="8206740" cy="616305"/>
+          </a:xfrm>
+        </p:spPr>
+        <p:txBody>
+          <a:bodyPr wrap="square" lIns="0" rIns="0" tIns="0" bIns="0">
+            <a:noAutofit/>
+          </a:bodyPr>
+          <a:lstStyle/>
+          <a:p>
+            <a:pPr algn="l">
               <a:lnSpc>
                 <a:spcPct val="110000"/>
               </a:lnSpc>
               <a:buNone/>
-              <a:defRPr sz="3600" b="0">
-                <a:solidFill>
-                  <a:srgbClr val="303437"/>
-                </a:solidFill>
-                <a:latin typeface="Noto Sans"/>
-              </a:defRPr>
-            </a:pPr>
-            <a:r>
-              <a:rPr sz="3600" b="1" lang="ja-JP" altLang="en-US">
-                <a:solidFill>
-                  <a:srgbClr val="303437"/>
-                </a:solidFill>
-                <a:latin typeface="Noto Sans"/>
-                <a:ea typeface="Noto Sans CJK JP"/>
-                <a:cs typeface="Noto Sans"/>
-              </a:rPr>
-              <a:t>研究と参考文献</a:t>
+              <a:defRPr sz="2800" b="0">
+                <a:solidFill>
+                  <a:srgbClr val="303437"/>
+                </a:solidFill>
+                <a:latin typeface="Noto Sans"/>
+              </a:defRPr>
+            </a:pPr>
+            <a:r>
+              <a:rPr sz="2800" b="1" lang="ja-JP" altLang="en-US">
+                <a:solidFill>
+                  <a:srgbClr val="303437"/>
+                </a:solidFill>
+                <a:latin typeface="Noto Sans"/>
+                <a:ea typeface="Noto Sans CJK JP"/>
+                <a:cs typeface="Noto Sans"/>
+              </a:rPr>
+              <a:t>言語学とNLPをつないだ研究</a:t>
             </a:r>
           </a:p>
         </p:txBody>
@@ -22384,7 +17271,303 @@
                 <a:ea typeface="Noto Sans CJK JP"/>
                 <a:cs typeface="Noto Sans"/>
               </a:rPr>
-              <a:t>Appendix: 3. 研究と参考文献</a:t>
+              <a:t>Appendix: 2. 研究と参考文献</a:t>
+            </a:r>
+          </a:p>
+        </p:txBody>
+      </p:sp>
+      <p:sp>
+        <p:nvSpPr>
+          <p:cNvPr id="4" name="TextBox 3"/>
+          <p:cNvSpPr txBox="1"/>
+          <p:nvPr/>
+        </p:nvSpPr>
+        <p:spPr>
+          <a:xfrm>
+            <a:off x="594360" y="1463040"/>
+            <a:ext cx="7955279" cy="997839"/>
+          </a:xfrm>
+          <a:prstGeom prst="rect">
+            <a:avLst/>
+          </a:prstGeom>
+          <a:noFill/>
+        </p:spPr>
+        <p:txBody>
+          <a:bodyPr wrap="square" lIns="0" rIns="0" tIns="0" bIns="0">
+            <a:noAutofit/>
+          </a:bodyPr>
+          <a:lstStyle/>
+          <a:p>
+            <a:pPr algn="l">
+              <a:lnSpc>
+                <a:spcPts val="2499"/>
+              </a:lnSpc>
+              <a:spcBef>
+                <a:spcPts val="0"/>
+              </a:spcBef>
+              <a:spcAft>
+                <a:spcPts val="0"/>
+              </a:spcAft>
+              <a:buNone/>
+              <a:defRPr sz="2100" b="0">
+                <a:solidFill>
+                  <a:srgbClr val="303437"/>
+                </a:solidFill>
+                <a:latin typeface="Noto Sans"/>
+              </a:defRPr>
+            </a:pPr>
+            <a:r>
+              <a:rPr sz="2100" b="0" lang="ja-JP" altLang="en-US">
+                <a:solidFill>
+                  <a:srgbClr val="303437"/>
+                </a:solidFill>
+                <a:latin typeface="Noto Sans"/>
+                <a:ea typeface="Noto Sans CJK JP"/>
+                <a:cs typeface="Noto Sans"/>
+              </a:rPr>
+              <a:t>Su Lin Blodgett、Lisa Green、Brendan O’Connorによる2016年EMNLP論文。UMass Amherstの計算機科学と言語学の研究として発表された。</a:t>
+            </a:r>
+          </a:p>
+        </p:txBody>
+      </p:sp>
+      <p:sp>
+        <p:nvSpPr>
+          <p:cNvPr id="5" name="TextBox 4"/>
+          <p:cNvSpPr txBox="1"/>
+          <p:nvPr/>
+        </p:nvSpPr>
+        <p:spPr>
+          <a:xfrm>
+            <a:off x="594360" y="2625471"/>
+            <a:ext cx="7955279" cy="680466"/>
+          </a:xfrm>
+          <a:prstGeom prst="rect">
+            <a:avLst/>
+          </a:prstGeom>
+          <a:noFill/>
+        </p:spPr>
+        <p:txBody>
+          <a:bodyPr wrap="square" lIns="0" rIns="0" tIns="0" bIns="0">
+            <a:noAutofit/>
+          </a:bodyPr>
+          <a:lstStyle/>
+          <a:p>
+            <a:pPr algn="l">
+              <a:lnSpc>
+                <a:spcPts val="2499"/>
+              </a:lnSpc>
+              <a:spcBef>
+                <a:spcPts val="0"/>
+              </a:spcBef>
+              <a:spcAft>
+                <a:spcPts val="0"/>
+              </a:spcAft>
+              <a:buNone/>
+              <a:defRPr sz="2100" b="0">
+                <a:solidFill>
+                  <a:srgbClr val="303437"/>
+                </a:solidFill>
+                <a:latin typeface="Noto Sans"/>
+              </a:defRPr>
+            </a:pPr>
+            <a:r>
+              <a:rPr sz="2100" b="0" lang="ja-JP" altLang="en-US">
+                <a:solidFill>
+                  <a:srgbClr val="303437"/>
+                </a:solidFill>
+                <a:latin typeface="Noto Sans"/>
+                <a:ea typeface="Noto Sans CJK JP"/>
+                <a:cs typeface="Noto Sans"/>
+              </a:rPr>
+              <a:t>既知のAAEの発音・文法上の特徴との対応を検証し、大規模な統計モデルの抽出結果を言語学的分析へ結び付けた。</a:t>
+            </a:r>
+          </a:p>
+        </p:txBody>
+      </p:sp>
+      <p:sp>
+        <p:nvSpPr>
+          <p:cNvPr id="6" name="TextBox 5"/>
+          <p:cNvSpPr txBox="1"/>
+          <p:nvPr/>
+        </p:nvSpPr>
+        <p:spPr>
+          <a:xfrm>
+            <a:off x="594360" y="3470528"/>
+            <a:ext cx="7955279" cy="680466"/>
+          </a:xfrm>
+          <a:prstGeom prst="rect">
+            <a:avLst/>
+          </a:prstGeom>
+          <a:noFill/>
+        </p:spPr>
+        <p:txBody>
+          <a:bodyPr wrap="square" lIns="0" rIns="0" tIns="0" bIns="0">
+            <a:noAutofit/>
+          </a:bodyPr>
+          <a:lstStyle/>
+          <a:p>
+            <a:pPr algn="l">
+              <a:lnSpc>
+                <a:spcPts val="2499"/>
+              </a:lnSpc>
+              <a:spcBef>
+                <a:spcPts val="0"/>
+              </a:spcBef>
+              <a:spcAft>
+                <a:spcPts val="0"/>
+              </a:spcAft>
+              <a:buNone/>
+              <a:defRPr sz="2100" b="0">
+                <a:solidFill>
+                  <a:srgbClr val="303437"/>
+                </a:solidFill>
+                <a:latin typeface="Noto Sans"/>
+              </a:defRPr>
+            </a:pPr>
+            <a:r>
+              <a:rPr sz="2100" b="0" lang="ja-JP" altLang="en-US">
+                <a:solidFill>
+                  <a:srgbClr val="303437"/>
+                </a:solidFill>
+                <a:latin typeface="Noto Sans"/>
+                <a:ea typeface="Noto Sans CJK JP"/>
+                <a:cs typeface="Noto Sans"/>
+              </a:rPr>
+              <a:t>2018年の構文解析研究ではJohnny Tian-Zheng Weiが加わり、AAEと主流米国英語のUD注釈を整えた。</a:t>
+            </a:r>
+          </a:p>
+        </p:txBody>
+      </p:sp>
+      <p:sp>
+        <p:nvSpPr>
+          <p:cNvPr id="7" name="sources"/>
+          <p:cNvSpPr txBox="1"/>
+          <p:nvPr/>
+        </p:nvSpPr>
+        <p:spPr>
+          <a:xfrm>
+            <a:off x="502920" y="4517136"/>
+            <a:ext cx="8183879" cy="530352"/>
+          </a:xfrm>
+          <a:prstGeom prst="rect">
+            <a:avLst/>
+          </a:prstGeom>
+          <a:noFill/>
+        </p:spPr>
+        <p:txBody>
+          <a:bodyPr wrap="square" lIns="0" rIns="0" tIns="0" bIns="0">
+            <a:noAutofit/>
+          </a:bodyPr>
+          <a:lstStyle/>
+          <a:p>
+            <a:pPr algn="l">
+              <a:lnSpc>
+                <a:spcPts val="940"/>
+              </a:lnSpc>
+              <a:spcBef>
+                <a:spcPts val="0"/>
+              </a:spcBef>
+              <a:spcAft>
+                <a:spcPts val="140"/>
+              </a:spcAft>
+              <a:buNone/>
+              <a:defRPr sz="810" b="0">
+                <a:solidFill>
+                  <a:srgbClr val="303437"/>
+                </a:solidFill>
+                <a:latin typeface="Noto Sans"/>
+              </a:defRPr>
+            </a:pPr>
+            <a:r>
+              <a:rPr sz="810" b="0" lang="ja-JP" altLang="en-US">
+                <a:solidFill>
+                  <a:srgbClr val="626669"/>
+                </a:solidFill>
+                <a:latin typeface="Noto Sans"/>
+                <a:ea typeface="Noto Sans CJK JP"/>
+                <a:cs typeface="Noto Sans"/>
+              </a:rPr>
+              <a:t>[1] Blodgett, Green &amp; O’Connor (2016), Demographic Dialectal Variation in Social Media: A Case Study of African-American English. EMNLP, 1119–1130.</a:t>
+            </a:r>
+          </a:p>
+          <a:p>
+            <a:pPr>
+              <a:lnSpc>
+                <a:spcPts val="940"/>
+              </a:lnSpc>
+              <a:buNone/>
+              <a:defRPr sz="810" b="0">
+                <a:solidFill>
+                  <a:srgbClr val="303437"/>
+                </a:solidFill>
+                <a:latin typeface="Noto Sans"/>
+              </a:defRPr>
+            </a:pPr>
+            <a:r>
+              <a:rPr sz="810" b="0" lang="ja-JP" altLang="en-US">
+                <a:solidFill>
+                  <a:srgbClr val="626669"/>
+                </a:solidFill>
+                <a:latin typeface="Noto Sans"/>
+                <a:ea typeface="Noto Sans CJK JP"/>
+                <a:cs typeface="Noto Sans"/>
+                <a:hlinkClick r:id="rId2"/>
+              </a:rPr>
+              <a:t>https://aclanthology.org/D16-1120/</a:t>
+            </a:r>
+          </a:p>
+          <a:p>
+            <a:pPr>
+              <a:lnSpc>
+                <a:spcPts val="940"/>
+              </a:lnSpc>
+              <a:spcAft>
+                <a:spcPts val="140"/>
+              </a:spcAft>
+              <a:buNone/>
+              <a:defRPr sz="810" b="0">
+                <a:solidFill>
+                  <a:srgbClr val="303437"/>
+                </a:solidFill>
+                <a:latin typeface="Noto Sans"/>
+              </a:defRPr>
+            </a:pPr>
+            <a:r>
+              <a:rPr sz="810" b="0" lang="ja-JP" altLang="en-US">
+                <a:solidFill>
+                  <a:srgbClr val="626669"/>
+                </a:solidFill>
+                <a:latin typeface="Noto Sans"/>
+                <a:ea typeface="Noto Sans CJK JP"/>
+                <a:cs typeface="Noto Sans"/>
+              </a:rPr>
+              <a:t>[2] Blodgett, Wei &amp; O’Connor (2018), Twitter Universal Dependency Parsing for African-American and Mainstream American English. ACL, 1415–1425.</a:t>
+            </a:r>
+          </a:p>
+          <a:p>
+            <a:pPr>
+              <a:lnSpc>
+                <a:spcPts val="940"/>
+              </a:lnSpc>
+              <a:buNone/>
+              <a:defRPr sz="810" b="0">
+                <a:solidFill>
+                  <a:srgbClr val="303437"/>
+                </a:solidFill>
+                <a:latin typeface="Noto Sans"/>
+              </a:defRPr>
+            </a:pPr>
+            <a:r>
+              <a:rPr sz="810" b="0" lang="ja-JP" altLang="en-US">
+                <a:solidFill>
+                  <a:srgbClr val="626669"/>
+                </a:solidFill>
+                <a:latin typeface="Noto Sans"/>
+                <a:ea typeface="Noto Sans CJK JP"/>
+                <a:cs typeface="Noto Sans"/>
+                <a:hlinkClick r:id="rId3"/>
+              </a:rPr>
+              <a:t>https://aclanthology.org/P18-1131/</a:t>
             </a:r>
           </a:p>
         </p:txBody>
@@ -22450,7 +17633,7 @@
                 <a:ea typeface="Noto Sans CJK JP"/>
                 <a:cs typeface="Noto Sans"/>
               </a:rPr>
-              <a:t>言語学とNLPをつないだ研究</a:t>
+              <a:t>参考文献</a:t>
             </a:r>
           </a:p>
         </p:txBody>
@@ -22498,21 +17681,21 @@
                 <a:ea typeface="Noto Sans CJK JP"/>
                 <a:cs typeface="Noto Sans"/>
               </a:rPr>
-              <a:t>Appendix: 3. 研究と参考文献</a:t>
-            </a:r>
-          </a:p>
-        </p:txBody>
-      </p:sp>
-      <p:sp>
-        <p:nvSpPr>
-          <p:cNvPr id="4" name="TextBox 3"/>
+              <a:t>Appendix: 2. 研究と参考文献</a:t>
+            </a:r>
+          </a:p>
+        </p:txBody>
+      </p:sp>
+      <p:sp>
+        <p:nvSpPr>
+          <p:cNvPr id="4" name="文献 1: Demographic Dialectal Variation in Social Media: A Case Study of African-American English"/>
           <p:cNvSpPr txBox="1"/>
           <p:nvPr/>
         </p:nvSpPr>
         <p:spPr>
           <a:xfrm>
-            <a:off x="594360" y="1463040"/>
-            <a:ext cx="7955279" cy="997839"/>
+            <a:off x="548640" y="1463040"/>
+            <a:ext cx="8046720" cy="1856740"/>
           </a:xfrm>
           <a:prstGeom prst="rect">
             <a:avLst/>
@@ -22527,46 +17710,140 @@
           <a:p>
             <a:pPr algn="l">
               <a:lnSpc>
-                <a:spcPts val="2499"/>
-              </a:lnSpc>
-              <a:spcBef>
-                <a:spcPts val="0"/>
-              </a:spcBef>
-              <a:spcAft>
-                <a:spcPts val="0"/>
-              </a:spcAft>
-              <a:buNone/>
-              <a:defRPr sz="2100" b="0">
-                <a:solidFill>
-                  <a:srgbClr val="303437"/>
-                </a:solidFill>
-                <a:latin typeface="Noto Sans"/>
-              </a:defRPr>
-            </a:pPr>
-            <a:r>
-              <a:rPr sz="2100" b="0" lang="ja-JP" altLang="en-US">
-                <a:solidFill>
-                  <a:srgbClr val="303437"/>
-                </a:solidFill>
-                <a:latin typeface="Noto Sans"/>
-                <a:ea typeface="Noto Sans CJK JP"/>
-                <a:cs typeface="Noto Sans"/>
-              </a:rPr>
-              <a:t>Su Lin Blodgett、Lisa Green、Brendan O’Connorによる2016年EMNLP論文。UMass Amherstの計算機科学と言語学の研究として発表された。</a:t>
-            </a:r>
-          </a:p>
-        </p:txBody>
-      </p:sp>
-      <p:sp>
-        <p:nvSpPr>
-          <p:cNvPr id="5" name="TextBox 4"/>
+                <a:spcPct val="114000"/>
+              </a:lnSpc>
+              <a:spcBef>
+                <a:spcPts val="0"/>
+              </a:spcBef>
+              <a:spcAft>
+                <a:spcPts val="400"/>
+              </a:spcAft>
+              <a:buNone/>
+              <a:defRPr sz="1850" b="0">
+                <a:solidFill>
+                  <a:srgbClr val="303437"/>
+                </a:solidFill>
+                <a:latin typeface="Noto Sans"/>
+              </a:defRPr>
+            </a:pPr>
+            <a:r>
+              <a:rPr sz="1850" b="1" lang="ja-JP" altLang="en-US">
+                <a:solidFill>
+                  <a:srgbClr val="303437"/>
+                </a:solidFill>
+                <a:latin typeface="Noto Sans"/>
+                <a:ea typeface="Noto Sans CJK JP"/>
+                <a:cs typeface="Noto Sans"/>
+              </a:rPr>
+              <a:t>Demographic Dialectal Variation in Social Media: A Case Study of African-American English</a:t>
+            </a:r>
+          </a:p>
+          <a:p>
+            <a:pPr algn="l">
+              <a:lnSpc>
+                <a:spcPct val="114000"/>
+              </a:lnSpc>
+              <a:spcBef>
+                <a:spcPts val="0"/>
+              </a:spcBef>
+              <a:spcAft>
+                <a:spcPts val="500"/>
+              </a:spcAft>
+              <a:buNone/>
+              <a:defRPr sz="1250" b="0">
+                <a:solidFill>
+                  <a:srgbClr val="303437"/>
+                </a:solidFill>
+                <a:latin typeface="Noto Sans"/>
+              </a:defRPr>
+            </a:pPr>
+            <a:r>
+              <a:rPr sz="1250" b="0" lang="ja-JP" altLang="en-US">
+                <a:solidFill>
+                  <a:srgbClr val="626669"/>
+                </a:solidFill>
+                <a:latin typeface="Noto Sans"/>
+                <a:ea typeface="Noto Sans CJK JP"/>
+                <a:cs typeface="Noto Sans"/>
+              </a:rPr>
+              <a:t>Su Lin Blodgett, Lisa Green, Brendan O’Connor · 2016 · EMNLP, 1119–1130</a:t>
+            </a:r>
+          </a:p>
+          <a:p>
+            <a:pPr algn="l">
+              <a:lnSpc>
+                <a:spcPct val="114000"/>
+              </a:lnSpc>
+              <a:spcBef>
+                <a:spcPts val="0"/>
+              </a:spcBef>
+              <a:spcAft>
+                <a:spcPts val="400"/>
+              </a:spcAft>
+              <a:buNone/>
+              <a:defRPr sz="1750" b="0">
+                <a:solidFill>
+                  <a:srgbClr val="303437"/>
+                </a:solidFill>
+                <a:latin typeface="Noto Sans"/>
+              </a:defRPr>
+            </a:pPr>
+            <a:r>
+              <a:rPr sz="1750" b="0" lang="ja-JP" altLang="en-US">
+                <a:solidFill>
+                  <a:srgbClr val="303437"/>
+                </a:solidFill>
+                <a:latin typeface="Noto Sans"/>
+                <a:ea typeface="Noto Sans CJK JP"/>
+                <a:cs typeface="Noto Sans"/>
+              </a:rPr>
+              <a:t>地域人口統計を用いた言語混合モデルと、AAEに対する言語同定・構文解析の差を示す。</a:t>
+            </a:r>
+          </a:p>
+          <a:p>
+            <a:pPr algn="l">
+              <a:lnSpc>
+                <a:spcPct val="114000"/>
+              </a:lnSpc>
+              <a:spcBef>
+                <a:spcPts val="0"/>
+              </a:spcBef>
+              <a:spcAft>
+                <a:spcPts val="0"/>
+              </a:spcAft>
+              <a:buNone/>
+              <a:defRPr sz="1150" b="0">
+                <a:solidFill>
+                  <a:srgbClr val="303437"/>
+                </a:solidFill>
+                <a:latin typeface="Noto Sans"/>
+              </a:defRPr>
+            </a:pPr>
+            <a:r>
+              <a:rPr sz="1150" b="0" lang="ja-JP" altLang="en-US">
+                <a:solidFill>
+                  <a:srgbClr val="626669"/>
+                </a:solidFill>
+                <a:latin typeface="Noto Sans"/>
+                <a:ea typeface="Noto Sans CJK JP"/>
+                <a:cs typeface="Noto Sans"/>
+                <a:hlinkClick r:id="rId2"/>
+              </a:rPr>
+              <a:t>https://aclanthology.org/D16-1120/</a:t>
+            </a:r>
+          </a:p>
+        </p:txBody>
+      </p:sp>
+      <p:sp>
+        <p:nvSpPr>
+          <p:cNvPr id="5" name="文献 2: Twitter Universal Dependency Parsing for African-American and Mainstream American English"/>
           <p:cNvSpPr txBox="1"/>
           <p:nvPr/>
         </p:nvSpPr>
         <p:spPr>
           <a:xfrm>
-            <a:off x="594360" y="2625471"/>
-            <a:ext cx="7955279" cy="680466"/>
+            <a:off x="548640" y="3322828"/>
+            <a:ext cx="8046720" cy="1603375"/>
           </a:xfrm>
           <a:prstGeom prst="rect">
             <a:avLst/>
@@ -22581,211 +17858,117 @@
           <a:p>
             <a:pPr algn="l">
               <a:lnSpc>
-                <a:spcPts val="2499"/>
-              </a:lnSpc>
-              <a:spcBef>
-                <a:spcPts val="0"/>
-              </a:spcBef>
-              <a:spcAft>
-                <a:spcPts val="0"/>
-              </a:spcAft>
-              <a:buNone/>
-              <a:defRPr sz="2100" b="0">
-                <a:solidFill>
-                  <a:srgbClr val="303437"/>
-                </a:solidFill>
-                <a:latin typeface="Noto Sans"/>
-              </a:defRPr>
-            </a:pPr>
-            <a:r>
-              <a:rPr sz="2100" b="0" lang="ja-JP" altLang="en-US">
-                <a:solidFill>
-                  <a:srgbClr val="303437"/>
-                </a:solidFill>
-                <a:latin typeface="Noto Sans"/>
-                <a:ea typeface="Noto Sans CJK JP"/>
-                <a:cs typeface="Noto Sans"/>
-              </a:rPr>
-              <a:t>既知のAAEの発音・文法上の特徴との対応を検証し、大規模な統計モデルの抽出結果を言語学的分析へ結び付けた。</a:t>
-            </a:r>
-          </a:p>
-        </p:txBody>
-      </p:sp>
-      <p:sp>
-        <p:nvSpPr>
-          <p:cNvPr id="6" name="TextBox 5"/>
-          <p:cNvSpPr txBox="1"/>
-          <p:nvPr/>
-        </p:nvSpPr>
-        <p:spPr>
-          <a:xfrm>
-            <a:off x="594360" y="3470528"/>
-            <a:ext cx="7955279" cy="680466"/>
-          </a:xfrm>
-          <a:prstGeom prst="rect">
-            <a:avLst/>
-          </a:prstGeom>
-          <a:noFill/>
-        </p:spPr>
-        <p:txBody>
-          <a:bodyPr wrap="square" lIns="0" rIns="0" tIns="0" bIns="0">
-            <a:noAutofit/>
-          </a:bodyPr>
-          <a:lstStyle/>
+                <a:spcPct val="114000"/>
+              </a:lnSpc>
+              <a:spcBef>
+                <a:spcPts val="0"/>
+              </a:spcBef>
+              <a:spcAft>
+                <a:spcPts val="400"/>
+              </a:spcAft>
+              <a:buNone/>
+              <a:defRPr sz="1850" b="0">
+                <a:solidFill>
+                  <a:srgbClr val="303437"/>
+                </a:solidFill>
+                <a:latin typeface="Noto Sans"/>
+              </a:defRPr>
+            </a:pPr>
+            <a:r>
+              <a:rPr sz="1850" b="1" lang="ja-JP" altLang="en-US">
+                <a:solidFill>
+                  <a:srgbClr val="303437"/>
+                </a:solidFill>
+                <a:latin typeface="Noto Sans"/>
+                <a:ea typeface="Noto Sans CJK JP"/>
+                <a:cs typeface="Noto Sans"/>
+              </a:rPr>
+              <a:t>Twitter Universal Dependency Parsing for African-American and Mainstream American English</a:t>
+            </a:r>
+          </a:p>
           <a:p>
             <a:pPr algn="l">
               <a:lnSpc>
-                <a:spcPts val="2499"/>
-              </a:lnSpc>
-              <a:spcBef>
-                <a:spcPts val="0"/>
-              </a:spcBef>
-              <a:spcAft>
-                <a:spcPts val="0"/>
-              </a:spcAft>
-              <a:buNone/>
-              <a:defRPr sz="2100" b="0">
-                <a:solidFill>
-                  <a:srgbClr val="303437"/>
-                </a:solidFill>
-                <a:latin typeface="Noto Sans"/>
-              </a:defRPr>
-            </a:pPr>
-            <a:r>
-              <a:rPr sz="2100" b="0" lang="ja-JP" altLang="en-US">
-                <a:solidFill>
-                  <a:srgbClr val="303437"/>
-                </a:solidFill>
-                <a:latin typeface="Noto Sans"/>
-                <a:ea typeface="Noto Sans CJK JP"/>
-                <a:cs typeface="Noto Sans"/>
-              </a:rPr>
-              <a:t>2018年の構文解析研究ではJohnny Tian-Zheng Weiが加わり、AAEと主流米国英語のUD注釈を整えた。</a:t>
-            </a:r>
-          </a:p>
-        </p:txBody>
-      </p:sp>
-      <p:sp>
-        <p:nvSpPr>
-          <p:cNvPr id="7" name="sources"/>
-          <p:cNvSpPr txBox="1"/>
-          <p:nvPr/>
-        </p:nvSpPr>
-        <p:spPr>
-          <a:xfrm>
-            <a:off x="502920" y="4517136"/>
-            <a:ext cx="8183879" cy="530352"/>
-          </a:xfrm>
-          <a:prstGeom prst="rect">
-            <a:avLst/>
-          </a:prstGeom>
-          <a:noFill/>
-        </p:spPr>
-        <p:txBody>
-          <a:bodyPr wrap="square" lIns="0" rIns="0" tIns="0" bIns="0">
-            <a:noAutofit/>
-          </a:bodyPr>
-          <a:lstStyle/>
+                <a:spcPct val="114000"/>
+              </a:lnSpc>
+              <a:spcBef>
+                <a:spcPts val="0"/>
+              </a:spcBef>
+              <a:spcAft>
+                <a:spcPts val="500"/>
+              </a:spcAft>
+              <a:buNone/>
+              <a:defRPr sz="1250" b="0">
+                <a:solidFill>
+                  <a:srgbClr val="303437"/>
+                </a:solidFill>
+                <a:latin typeface="Noto Sans"/>
+              </a:defRPr>
+            </a:pPr>
+            <a:r>
+              <a:rPr sz="1250" b="0" lang="ja-JP" altLang="en-US">
+                <a:solidFill>
+                  <a:srgbClr val="626669"/>
+                </a:solidFill>
+                <a:latin typeface="Noto Sans"/>
+                <a:ea typeface="Noto Sans CJK JP"/>
+                <a:cs typeface="Noto Sans"/>
+              </a:rPr>
+              <a:t>Su Lin Blodgett, Johnny Tian-Zheng Wei, Brendan O’Connor · 2018 · ACL, 1415–1425</a:t>
+            </a:r>
+          </a:p>
           <a:p>
             <a:pPr algn="l">
               <a:lnSpc>
-                <a:spcPts val="940"/>
-              </a:lnSpc>
-              <a:spcBef>
-                <a:spcPts val="0"/>
-              </a:spcBef>
-              <a:spcAft>
-                <a:spcPts val="140"/>
-              </a:spcAft>
-              <a:buNone/>
-              <a:defRPr sz="810" b="0">
-                <a:solidFill>
-                  <a:srgbClr val="303437"/>
-                </a:solidFill>
-                <a:latin typeface="Noto Sans"/>
-              </a:defRPr>
-            </a:pPr>
-            <a:r>
-              <a:rPr sz="810" b="0" lang="ja-JP" altLang="en-US">
-                <a:solidFill>
-                  <a:srgbClr val="626669"/>
-                </a:solidFill>
-                <a:latin typeface="Noto Sans"/>
-                <a:ea typeface="Noto Sans CJK JP"/>
-                <a:cs typeface="Noto Sans"/>
-              </a:rPr>
-              <a:t>[1] Blodgett, Green &amp; O’Connor (2016), Demographic Dialectal Variation in Social Media: A Case Study of African-American English. EMNLP, 1119–1130.</a:t>
-            </a:r>
-          </a:p>
-          <a:p>
-            <a:pPr>
-              <a:lnSpc>
-                <a:spcPts val="940"/>
-              </a:lnSpc>
-              <a:buNone/>
-              <a:defRPr sz="810" b="0">
-                <a:solidFill>
-                  <a:srgbClr val="303437"/>
-                </a:solidFill>
-                <a:latin typeface="Noto Sans"/>
-              </a:defRPr>
-            </a:pPr>
-            <a:r>
-              <a:rPr sz="810" b="0" lang="ja-JP" altLang="en-US">
-                <a:solidFill>
-                  <a:srgbClr val="626669"/>
-                </a:solidFill>
-                <a:latin typeface="Noto Sans"/>
-                <a:ea typeface="Noto Sans CJK JP"/>
-                <a:cs typeface="Noto Sans"/>
-                <a:hlinkClick r:id="rId2"/>
-              </a:rPr>
-              <a:t>https://aclanthology.org/D16-1120/</a:t>
-            </a:r>
-          </a:p>
-          <a:p>
-            <a:pPr>
-              <a:lnSpc>
-                <a:spcPts val="940"/>
-              </a:lnSpc>
-              <a:spcAft>
-                <a:spcPts val="140"/>
-              </a:spcAft>
-              <a:buNone/>
-              <a:defRPr sz="810" b="0">
-                <a:solidFill>
-                  <a:srgbClr val="303437"/>
-                </a:solidFill>
-                <a:latin typeface="Noto Sans"/>
-              </a:defRPr>
-            </a:pPr>
-            <a:r>
-              <a:rPr sz="810" b="0" lang="ja-JP" altLang="en-US">
-                <a:solidFill>
-                  <a:srgbClr val="626669"/>
-                </a:solidFill>
-                <a:latin typeface="Noto Sans"/>
-                <a:ea typeface="Noto Sans CJK JP"/>
-                <a:cs typeface="Noto Sans"/>
-              </a:rPr>
-              <a:t>[2] Blodgett, Wei &amp; O’Connor (2018), Twitter Universal Dependency Parsing for African-American and Mainstream American English. ACL, 1415–1425.</a:t>
-            </a:r>
-          </a:p>
-          <a:p>
-            <a:pPr>
-              <a:lnSpc>
-                <a:spcPts val="940"/>
-              </a:lnSpc>
-              <a:buNone/>
-              <a:defRPr sz="810" b="0">
-                <a:solidFill>
-                  <a:srgbClr val="303437"/>
-                </a:solidFill>
-                <a:latin typeface="Noto Sans"/>
-              </a:defRPr>
-            </a:pPr>
-            <a:r>
-              <a:rPr sz="810" b="0" lang="ja-JP" altLang="en-US">
+                <a:spcPct val="114000"/>
+              </a:lnSpc>
+              <a:spcBef>
+                <a:spcPts val="0"/>
+              </a:spcBef>
+              <a:spcAft>
+                <a:spcPts val="400"/>
+              </a:spcAft>
+              <a:buNone/>
+              <a:defRPr sz="1750" b="0">
+                <a:solidFill>
+                  <a:srgbClr val="303437"/>
+                </a:solidFill>
+                <a:latin typeface="Noto Sans"/>
+              </a:defRPr>
+            </a:pPr>
+            <a:r>
+              <a:rPr sz="1750" b="0" lang="ja-JP" altLang="en-US">
+                <a:solidFill>
+                  <a:srgbClr val="303437"/>
+                </a:solidFill>
+                <a:latin typeface="Noto Sans"/>
+                <a:ea typeface="Noto Sans CJK JP"/>
+                <a:cs typeface="Noto Sans"/>
+              </a:rPr>
+              <a:t>二つの英語変種のツイートにUD注釈を付け、構文解析モデルを比較する。</a:t>
+            </a:r>
+          </a:p>
+          <a:p>
+            <a:pPr algn="l">
+              <a:lnSpc>
+                <a:spcPct val="114000"/>
+              </a:lnSpc>
+              <a:spcBef>
+                <a:spcPts val="0"/>
+              </a:spcBef>
+              <a:spcAft>
+                <a:spcPts val="0"/>
+              </a:spcAft>
+              <a:buNone/>
+              <a:defRPr sz="1150" b="0">
+                <a:solidFill>
+                  <a:srgbClr val="303437"/>
+                </a:solidFill>
+                <a:latin typeface="Noto Sans"/>
+              </a:defRPr>
+            </a:pPr>
+            <a:r>
+              <a:rPr sz="1150" b="0" lang="ja-JP" altLang="en-US">
                 <a:solidFill>
                   <a:srgbClr val="626669"/>
                 </a:solidFill>
@@ -22908,565 +18091,7 @@
                 <a:ea typeface="Noto Sans CJK JP"/>
                 <a:cs typeface="Noto Sans"/>
               </a:rPr>
-              <a:t>Appendix: 3. 研究と参考文献</a:t>
-            </a:r>
-          </a:p>
-        </p:txBody>
-      </p:sp>
-      <p:sp>
-        <p:nvSpPr>
-          <p:cNvPr id="4" name="文献 1: Demographic Dialectal Variation in Social Media: A Case Study of African-American English"/>
-          <p:cNvSpPr txBox="1"/>
-          <p:nvPr/>
-        </p:nvSpPr>
-        <p:spPr>
-          <a:xfrm>
-            <a:off x="548640" y="1463040"/>
-            <a:ext cx="8046720" cy="1856740"/>
-          </a:xfrm>
-          <a:prstGeom prst="rect">
-            <a:avLst/>
-          </a:prstGeom>
-          <a:noFill/>
-        </p:spPr>
-        <p:txBody>
-          <a:bodyPr wrap="square" lIns="0" rIns="0" tIns="0" bIns="0">
-            <a:noAutofit/>
-          </a:bodyPr>
-          <a:lstStyle/>
-          <a:p>
-            <a:pPr algn="l">
-              <a:lnSpc>
-                <a:spcPct val="114000"/>
-              </a:lnSpc>
-              <a:spcBef>
-                <a:spcPts val="0"/>
-              </a:spcBef>
-              <a:spcAft>
-                <a:spcPts val="400"/>
-              </a:spcAft>
-              <a:buNone/>
-              <a:defRPr sz="1850" b="0">
-                <a:solidFill>
-                  <a:srgbClr val="303437"/>
-                </a:solidFill>
-                <a:latin typeface="Noto Sans"/>
-              </a:defRPr>
-            </a:pPr>
-            <a:r>
-              <a:rPr sz="1850" b="1" lang="ja-JP" altLang="en-US">
-                <a:solidFill>
-                  <a:srgbClr val="303437"/>
-                </a:solidFill>
-                <a:latin typeface="Noto Sans"/>
-                <a:ea typeface="Noto Sans CJK JP"/>
-                <a:cs typeface="Noto Sans"/>
-              </a:rPr>
-              <a:t>Demographic Dialectal Variation in Social Media: A Case Study of African-American English</a:t>
-            </a:r>
-          </a:p>
-          <a:p>
-            <a:pPr algn="l">
-              <a:lnSpc>
-                <a:spcPct val="114000"/>
-              </a:lnSpc>
-              <a:spcBef>
-                <a:spcPts val="0"/>
-              </a:spcBef>
-              <a:spcAft>
-                <a:spcPts val="500"/>
-              </a:spcAft>
-              <a:buNone/>
-              <a:defRPr sz="1250" b="0">
-                <a:solidFill>
-                  <a:srgbClr val="303437"/>
-                </a:solidFill>
-                <a:latin typeface="Noto Sans"/>
-              </a:defRPr>
-            </a:pPr>
-            <a:r>
-              <a:rPr sz="1250" b="0" lang="ja-JP" altLang="en-US">
-                <a:solidFill>
-                  <a:srgbClr val="626669"/>
-                </a:solidFill>
-                <a:latin typeface="Noto Sans"/>
-                <a:ea typeface="Noto Sans CJK JP"/>
-                <a:cs typeface="Noto Sans"/>
-              </a:rPr>
-              <a:t>Su Lin Blodgett, Lisa Green, Brendan O’Connor · 2016 · EMNLP, 1119–1130</a:t>
-            </a:r>
-          </a:p>
-          <a:p>
-            <a:pPr algn="l">
-              <a:lnSpc>
-                <a:spcPct val="114000"/>
-              </a:lnSpc>
-              <a:spcBef>
-                <a:spcPts val="0"/>
-              </a:spcBef>
-              <a:spcAft>
-                <a:spcPts val="400"/>
-              </a:spcAft>
-              <a:buNone/>
-              <a:defRPr sz="1750" b="0">
-                <a:solidFill>
-                  <a:srgbClr val="303437"/>
-                </a:solidFill>
-                <a:latin typeface="Noto Sans"/>
-              </a:defRPr>
-            </a:pPr>
-            <a:r>
-              <a:rPr sz="1750" b="0" lang="ja-JP" altLang="en-US">
-                <a:solidFill>
-                  <a:srgbClr val="303437"/>
-                </a:solidFill>
-                <a:latin typeface="Noto Sans"/>
-                <a:ea typeface="Noto Sans CJK JP"/>
-                <a:cs typeface="Noto Sans"/>
-              </a:rPr>
-              <a:t>地域人口統計を用いた言語混合モデルと、AAEに対する言語同定・構文解析の差を示す。</a:t>
-            </a:r>
-          </a:p>
-          <a:p>
-            <a:pPr algn="l">
-              <a:lnSpc>
-                <a:spcPct val="114000"/>
-              </a:lnSpc>
-              <a:spcBef>
-                <a:spcPts val="0"/>
-              </a:spcBef>
-              <a:spcAft>
-                <a:spcPts val="0"/>
-              </a:spcAft>
-              <a:buNone/>
-              <a:defRPr sz="1150" b="0">
-                <a:solidFill>
-                  <a:srgbClr val="303437"/>
-                </a:solidFill>
-                <a:latin typeface="Noto Sans"/>
-              </a:defRPr>
-            </a:pPr>
-            <a:r>
-              <a:rPr sz="1150" b="0" lang="ja-JP" altLang="en-US">
-                <a:solidFill>
-                  <a:srgbClr val="626669"/>
-                </a:solidFill>
-                <a:latin typeface="Noto Sans"/>
-                <a:ea typeface="Noto Sans CJK JP"/>
-                <a:cs typeface="Noto Sans"/>
-                <a:hlinkClick r:id="rId2"/>
-              </a:rPr>
-              <a:t>https://aclanthology.org/D16-1120/</a:t>
-            </a:r>
-          </a:p>
-        </p:txBody>
-      </p:sp>
-      <p:sp>
-        <p:nvSpPr>
-          <p:cNvPr id="5" name="文献 2: Twitter Universal Dependency Parsing for African-American and Mainstream American English"/>
-          <p:cNvSpPr txBox="1"/>
-          <p:nvPr/>
-        </p:nvSpPr>
-        <p:spPr>
-          <a:xfrm>
-            <a:off x="548640" y="3322828"/>
-            <a:ext cx="8046720" cy="1603375"/>
-          </a:xfrm>
-          <a:prstGeom prst="rect">
-            <a:avLst/>
-          </a:prstGeom>
-          <a:noFill/>
-        </p:spPr>
-        <p:txBody>
-          <a:bodyPr wrap="square" lIns="0" rIns="0" tIns="0" bIns="0">
-            <a:noAutofit/>
-          </a:bodyPr>
-          <a:lstStyle/>
-          <a:p>
-            <a:pPr algn="l">
-              <a:lnSpc>
-                <a:spcPct val="114000"/>
-              </a:lnSpc>
-              <a:spcBef>
-                <a:spcPts val="0"/>
-              </a:spcBef>
-              <a:spcAft>
-                <a:spcPts val="400"/>
-              </a:spcAft>
-              <a:buNone/>
-              <a:defRPr sz="1850" b="0">
-                <a:solidFill>
-                  <a:srgbClr val="303437"/>
-                </a:solidFill>
-                <a:latin typeface="Noto Sans"/>
-              </a:defRPr>
-            </a:pPr>
-            <a:r>
-              <a:rPr sz="1850" b="1" lang="ja-JP" altLang="en-US">
-                <a:solidFill>
-                  <a:srgbClr val="303437"/>
-                </a:solidFill>
-                <a:latin typeface="Noto Sans"/>
-                <a:ea typeface="Noto Sans CJK JP"/>
-                <a:cs typeface="Noto Sans"/>
-              </a:rPr>
-              <a:t>Twitter Universal Dependency Parsing for African-American and Mainstream American English</a:t>
-            </a:r>
-          </a:p>
-          <a:p>
-            <a:pPr algn="l">
-              <a:lnSpc>
-                <a:spcPct val="114000"/>
-              </a:lnSpc>
-              <a:spcBef>
-                <a:spcPts val="0"/>
-              </a:spcBef>
-              <a:spcAft>
-                <a:spcPts val="500"/>
-              </a:spcAft>
-              <a:buNone/>
-              <a:defRPr sz="1250" b="0">
-                <a:solidFill>
-                  <a:srgbClr val="303437"/>
-                </a:solidFill>
-                <a:latin typeface="Noto Sans"/>
-              </a:defRPr>
-            </a:pPr>
-            <a:r>
-              <a:rPr sz="1250" b="0" lang="ja-JP" altLang="en-US">
-                <a:solidFill>
-                  <a:srgbClr val="626669"/>
-                </a:solidFill>
-                <a:latin typeface="Noto Sans"/>
-                <a:ea typeface="Noto Sans CJK JP"/>
-                <a:cs typeface="Noto Sans"/>
-              </a:rPr>
-              <a:t>Su Lin Blodgett, Johnny Tian-Zheng Wei, Brendan O’Connor · 2018 · ACL, 1415–1425</a:t>
-            </a:r>
-          </a:p>
-          <a:p>
-            <a:pPr algn="l">
-              <a:lnSpc>
-                <a:spcPct val="114000"/>
-              </a:lnSpc>
-              <a:spcBef>
-                <a:spcPts val="0"/>
-              </a:spcBef>
-              <a:spcAft>
-                <a:spcPts val="400"/>
-              </a:spcAft>
-              <a:buNone/>
-              <a:defRPr sz="1750" b="0">
-                <a:solidFill>
-                  <a:srgbClr val="303437"/>
-                </a:solidFill>
-                <a:latin typeface="Noto Sans"/>
-              </a:defRPr>
-            </a:pPr>
-            <a:r>
-              <a:rPr sz="1750" b="0" lang="ja-JP" altLang="en-US">
-                <a:solidFill>
-                  <a:srgbClr val="303437"/>
-                </a:solidFill>
-                <a:latin typeface="Noto Sans"/>
-                <a:ea typeface="Noto Sans CJK JP"/>
-                <a:cs typeface="Noto Sans"/>
-              </a:rPr>
-              <a:t>二つの英語変種のツイートにUD注釈を付け、構文解析モデルを比較する。</a:t>
-            </a:r>
-          </a:p>
-          <a:p>
-            <a:pPr algn="l">
-              <a:lnSpc>
-                <a:spcPct val="114000"/>
-              </a:lnSpc>
-              <a:spcBef>
-                <a:spcPts val="0"/>
-              </a:spcBef>
-              <a:spcAft>
-                <a:spcPts val="0"/>
-              </a:spcAft>
-              <a:buNone/>
-              <a:defRPr sz="1150" b="0">
-                <a:solidFill>
-                  <a:srgbClr val="303437"/>
-                </a:solidFill>
-                <a:latin typeface="Noto Sans"/>
-              </a:defRPr>
-            </a:pPr>
-            <a:r>
-              <a:rPr sz="1150" b="0" lang="ja-JP" altLang="en-US">
-                <a:solidFill>
-                  <a:srgbClr val="626669"/>
-                </a:solidFill>
-                <a:latin typeface="Noto Sans"/>
-                <a:ea typeface="Noto Sans CJK JP"/>
-                <a:cs typeface="Noto Sans"/>
-                <a:hlinkClick r:id="rId3"/>
-              </a:rPr>
-              <a:t>https://aclanthology.org/P18-1131/</a:t>
-            </a:r>
-          </a:p>
-        </p:txBody>
-      </p:sp>
-    </p:spTree>
-  </p:cSld>
-  <p:clrMapOvr>
-    <a:masterClrMapping/>
-  </p:clrMapOvr>
-</p:sld>
-</file>
-
-<file path=ppt/slides/slide49.xml><?xml version="1.0" encoding="utf-8"?>
-<p:sld xmlns:a="http://schemas.openxmlformats.org/drawingml/2006/main" xmlns:p="http://schemas.openxmlformats.org/presentationml/2006/main" xmlns:r="http://schemas.openxmlformats.org/officeDocument/2006/relationships">
-  <p:cSld>
-    <p:spTree>
-      <p:nvGrpSpPr>
-        <p:cNvPr id="1" name=""/>
-        <p:cNvGrpSpPr/>
-        <p:nvPr/>
-      </p:nvGrpSpPr>
-      <p:grpSpPr/>
-      <p:sp>
-        <p:nvSpPr>
-          <p:cNvPr id="2" name="Title 1"/>
-          <p:cNvSpPr>
-            <a:spLocks noGrp="1"/>
-          </p:cNvSpPr>
-          <p:nvPr>
-            <p:ph type="title"/>
-          </p:nvPr>
-        </p:nvSpPr>
-        <p:spPr>
-          <a:xfrm>
-            <a:off x="468172" y="650138"/>
-            <a:ext cx="8206740" cy="616305"/>
-          </a:xfrm>
-        </p:spPr>
-        <p:txBody>
-          <a:bodyPr wrap="square" lIns="0" rIns="0" tIns="0" bIns="0">
-            <a:noAutofit/>
-          </a:bodyPr>
-          <a:lstStyle/>
-          <a:p>
-            <a:pPr algn="l">
-              <a:lnSpc>
-                <a:spcPct val="110000"/>
-              </a:lnSpc>
-              <a:buNone/>
-              <a:defRPr sz="2800" b="0">
-                <a:solidFill>
-                  <a:srgbClr val="303437"/>
-                </a:solidFill>
-                <a:latin typeface="Noto Sans"/>
-              </a:defRPr>
-            </a:pPr>
-            <a:r>
-              <a:rPr sz="2800" b="1" lang="ja-JP" altLang="en-US">
-                <a:solidFill>
-                  <a:srgbClr val="303437"/>
-                </a:solidFill>
-                <a:latin typeface="Noto Sans"/>
-                <a:ea typeface="Noto Sans CJK JP"/>
-                <a:cs typeface="Noto Sans"/>
-              </a:rPr>
-              <a:t>参考文献</a:t>
-            </a:r>
-          </a:p>
-        </p:txBody>
-      </p:sp>
-      <p:sp>
-        <p:nvSpPr>
-          <p:cNvPr id="3" name="Title 2"/>
-          <p:cNvSpPr>
-            <a:spLocks noGrp="1"/>
-          </p:cNvSpPr>
-          <p:nvPr>
-            <p:ph type="title" idx="2"/>
-          </p:nvPr>
-        </p:nvSpPr>
-        <p:spPr>
-          <a:xfrm>
-            <a:off x="75895" y="0"/>
-            <a:ext cx="8115300" cy="480060"/>
-          </a:xfrm>
-        </p:spPr>
-        <p:txBody>
-          <a:bodyPr wrap="square" lIns="0" rIns="0" tIns="0" bIns="0" anchor="ctr">
-            <a:noAutofit/>
-          </a:bodyPr>
-          <a:lstStyle/>
-          <a:p>
-            <a:pPr algn="l">
-              <a:lnSpc>
-                <a:spcPct val="110000"/>
-              </a:lnSpc>
-              <a:buNone/>
-              <a:defRPr sz="1400" b="0">
-                <a:solidFill>
-                  <a:srgbClr val="303437"/>
-                </a:solidFill>
-                <a:latin typeface="Noto Sans"/>
-              </a:defRPr>
-            </a:pPr>
-            <a:r>
-              <a:rPr sz="1400" b="1" lang="ja-JP" altLang="en-US">
-                <a:solidFill>
-                  <a:srgbClr val="FFFEF8"/>
-                </a:solidFill>
-                <a:latin typeface="Noto Sans"/>
-                <a:ea typeface="Noto Sans CJK JP"/>
-                <a:cs typeface="Noto Sans"/>
-              </a:rPr>
-              <a:t>Appendix: 3. 研究と参考文献</a:t>
-            </a:r>
-          </a:p>
-        </p:txBody>
-      </p:sp>
-      <p:sp>
-        <p:nvSpPr>
-          <p:cNvPr id="4" name="文献 1: Holistic Evaluation of Language Models"/>
-          <p:cNvSpPr txBox="1"/>
-          <p:nvPr/>
-        </p:nvSpPr>
-        <p:spPr>
-          <a:xfrm>
-            <a:off x="548640" y="1463040"/>
-            <a:ext cx="8046720" cy="1588897"/>
-          </a:xfrm>
-          <a:prstGeom prst="rect">
-            <a:avLst/>
-          </a:prstGeom>
-          <a:noFill/>
-        </p:spPr>
-        <p:txBody>
-          <a:bodyPr wrap="square" lIns="0" rIns="0" tIns="0" bIns="0">
-            <a:noAutofit/>
-          </a:bodyPr>
-          <a:lstStyle/>
-          <a:p>
-            <a:pPr algn="l">
-              <a:lnSpc>
-                <a:spcPct val="114000"/>
-              </a:lnSpc>
-              <a:spcBef>
-                <a:spcPts val="0"/>
-              </a:spcBef>
-              <a:spcAft>
-                <a:spcPts val="400"/>
-              </a:spcAft>
-              <a:buNone/>
-              <a:defRPr sz="1850" b="0">
-                <a:solidFill>
-                  <a:srgbClr val="303437"/>
-                </a:solidFill>
-                <a:latin typeface="Noto Sans"/>
-              </a:defRPr>
-            </a:pPr>
-            <a:r>
-              <a:rPr sz="1850" b="1" lang="ja-JP" altLang="en-US">
-                <a:solidFill>
-                  <a:srgbClr val="303437"/>
-                </a:solidFill>
-                <a:latin typeface="Noto Sans"/>
-                <a:ea typeface="Noto Sans CJK JP"/>
-                <a:cs typeface="Noto Sans"/>
-              </a:rPr>
-              <a:t>Holistic Evaluation of Language Models</a:t>
-            </a:r>
-          </a:p>
-          <a:p>
-            <a:pPr algn="l">
-              <a:lnSpc>
-                <a:spcPct val="114000"/>
-              </a:lnSpc>
-              <a:spcBef>
-                <a:spcPts val="0"/>
-              </a:spcBef>
-              <a:spcAft>
-                <a:spcPts val="500"/>
-              </a:spcAft>
-              <a:buNone/>
-              <a:defRPr sz="1250" b="0">
-                <a:solidFill>
-                  <a:srgbClr val="303437"/>
-                </a:solidFill>
-                <a:latin typeface="Noto Sans"/>
-              </a:defRPr>
-            </a:pPr>
-            <a:r>
-              <a:rPr sz="1250" b="0" lang="ja-JP" altLang="en-US">
-                <a:solidFill>
-                  <a:srgbClr val="626669"/>
-                </a:solidFill>
-                <a:latin typeface="Noto Sans"/>
-                <a:ea typeface="Noto Sans CJK JP"/>
-                <a:cs typeface="Noto Sans"/>
-              </a:rPr>
-              <a:t>Percy Liang et al. · 2023 · Transactions on Machine Learning Research</a:t>
-            </a:r>
-          </a:p>
-          <a:p>
-            <a:pPr algn="l">
-              <a:lnSpc>
-                <a:spcPct val="114000"/>
-              </a:lnSpc>
-              <a:spcBef>
-                <a:spcPts val="0"/>
-              </a:spcBef>
-              <a:spcAft>
-                <a:spcPts val="400"/>
-              </a:spcAft>
-              <a:buNone/>
-              <a:defRPr sz="1750" b="0">
-                <a:solidFill>
-                  <a:srgbClr val="303437"/>
-                </a:solidFill>
-                <a:latin typeface="Noto Sans"/>
-              </a:defRPr>
-            </a:pPr>
-            <a:r>
-              <a:rPr sz="1750" b="0" lang="ja-JP" altLang="en-US">
-                <a:solidFill>
-                  <a:srgbClr val="303437"/>
-                </a:solidFill>
-                <a:latin typeface="Noto Sans"/>
-                <a:ea typeface="Noto Sans CJK JP"/>
-                <a:cs typeface="Noto Sans"/>
-              </a:rPr>
-              <a:t>多様なシナリオと指標をそろえ、言語モデルの能力と格差を測るHELMの評価設計。</a:t>
-            </a:r>
-          </a:p>
-          <a:p>
-            <a:pPr algn="l">
-              <a:lnSpc>
-                <a:spcPct val="114000"/>
-              </a:lnSpc>
-              <a:spcBef>
-                <a:spcPts val="0"/>
-              </a:spcBef>
-              <a:spcAft>
-                <a:spcPts val="0"/>
-              </a:spcAft>
-              <a:buNone/>
-              <a:defRPr sz="1150" b="0">
-                <a:solidFill>
-                  <a:srgbClr val="303437"/>
-                </a:solidFill>
-                <a:latin typeface="Noto Sans"/>
-              </a:defRPr>
-            </a:pPr>
-            <a:r>
-              <a:rPr sz="1150" b="0" lang="ja-JP" altLang="en-US">
-                <a:solidFill>
-                  <a:srgbClr val="626669"/>
-                </a:solidFill>
-                <a:latin typeface="Noto Sans"/>
-                <a:ea typeface="Noto Sans CJK JP"/>
-                <a:cs typeface="Noto Sans"/>
-                <a:hlinkClick r:id="rId2"/>
-              </a:rPr>
-              <a:t>https://arxiv.org/abs/2211.09110</a:t>
+              <a:t>Appendix: 2. 研究と参考文献</a:t>
             </a:r>
           </a:p>
         </p:txBody>
@@ -23728,7 +18353,7 @@
                 <a:ea typeface="Noto Sans CJK JP"/>
                 <a:cs typeface="Noto Sans"/>
               </a:rPr>
-              <a:t>1. 投稿の実例と言語モデルの課題</a:t>
+              <a:t>1. 投稿の実例と言語的特徴</a:t>
             </a:r>
           </a:p>
         </p:txBody>
@@ -23782,7 +18407,7 @@
                 <a:ea typeface="Noto Sans CJK JP"/>
                 <a:cs typeface="Noto Sans"/>
               </a:rPr>
-              <a:t>TwitterAAEは、Twitter上のアフリカ系米国人英語（AAE）に関連する表現を調べる言語資源。投稿の位置に対応する地域の人口構成と、使われる言葉の関係から分析する。</a:t>
+              <a:t>TwitterAAEは、Twitter上のアフリカ系米国人英語（AAE）に関連する表現を調べる言語資源。投稿位置に対応する地域の人口構成と言葉の使い方を結び付けて構築した。</a:t>
             </a:r>
           </a:p>
         </p:txBody>
@@ -23917,319 +18542,6 @@
                 <a:hlinkClick r:id="rId2"/>
               </a:rPr>
               <a:t>https://aclanthology.org/D16-1120/</a:t>
-            </a:r>
-          </a:p>
-        </p:txBody>
-      </p:sp>
-    </p:spTree>
-  </p:cSld>
-  <p:clrMapOvr>
-    <a:masterClrMapping/>
-  </p:clrMapOvr>
-</p:sld>
-</file>
-
-<file path=ppt/slides/slide6.xml><?xml version="1.0" encoding="utf-8"?>
-<p:sld xmlns:a="http://schemas.openxmlformats.org/drawingml/2006/main" xmlns:p="http://schemas.openxmlformats.org/presentationml/2006/main" xmlns:r="http://schemas.openxmlformats.org/officeDocument/2006/relationships">
-  <p:cSld>
-    <p:spTree>
-      <p:nvGrpSpPr>
-        <p:cNvPr id="1" name=""/>
-        <p:cNvGrpSpPr/>
-        <p:nvPr/>
-      </p:nvGrpSpPr>
-      <p:grpSpPr/>
-      <p:sp>
-        <p:nvSpPr>
-          <p:cNvPr id="2" name="Title 1"/>
-          <p:cNvSpPr>
-            <a:spLocks noGrp="1"/>
-          </p:cNvSpPr>
-          <p:nvPr>
-            <p:ph type="title"/>
-          </p:nvPr>
-        </p:nvSpPr>
-        <p:spPr>
-          <a:xfrm>
-            <a:off x="468172" y="650138"/>
-            <a:ext cx="8206740" cy="616305"/>
-          </a:xfrm>
-        </p:spPr>
-        <p:txBody>
-          <a:bodyPr wrap="square" lIns="0" rIns="0" tIns="0" bIns="0">
-            <a:noAutofit/>
-          </a:bodyPr>
-          <a:lstStyle/>
-          <a:p>
-            <a:pPr algn="l">
-              <a:lnSpc>
-                <a:spcPct val="110000"/>
-              </a:lnSpc>
-              <a:buNone/>
-              <a:defRPr sz="2800" b="0">
-                <a:solidFill>
-                  <a:srgbClr val="303437"/>
-                </a:solidFill>
-                <a:latin typeface="Noto Sans"/>
-              </a:defRPr>
-            </a:pPr>
-            <a:r>
-              <a:rPr sz="2800" b="1" lang="ja-JP" altLang="en-US">
-                <a:solidFill>
-                  <a:srgbClr val="303437"/>
-                </a:solidFill>
-                <a:latin typeface="Noto Sans"/>
-                <a:ea typeface="Noto Sans CJK JP"/>
-                <a:cs typeface="Noto Sans"/>
-              </a:rPr>
-              <a:t>HELMでは、投稿の予測しやすさを比べる</a:t>
-            </a:r>
-          </a:p>
-        </p:txBody>
-      </p:sp>
-      <p:sp>
-        <p:nvSpPr>
-          <p:cNvPr id="3" name="Title 2"/>
-          <p:cNvSpPr>
-            <a:spLocks noGrp="1"/>
-          </p:cNvSpPr>
-          <p:nvPr>
-            <p:ph type="title" idx="2"/>
-          </p:nvPr>
-        </p:nvSpPr>
-        <p:spPr>
-          <a:xfrm>
-            <a:off x="75895" y="0"/>
-            <a:ext cx="8115300" cy="480060"/>
-          </a:xfrm>
-        </p:spPr>
-        <p:txBody>
-          <a:bodyPr wrap="square" lIns="0" rIns="0" tIns="0" bIns="0" anchor="ctr">
-            <a:noAutofit/>
-          </a:bodyPr>
-          <a:lstStyle/>
-          <a:p>
-            <a:pPr algn="l">
-              <a:lnSpc>
-                <a:spcPct val="110000"/>
-              </a:lnSpc>
-              <a:buNone/>
-              <a:defRPr sz="1400" b="0">
-                <a:solidFill>
-                  <a:srgbClr val="303437"/>
-                </a:solidFill>
-                <a:latin typeface="Noto Sans"/>
-              </a:defRPr>
-            </a:pPr>
-            <a:r>
-              <a:rPr sz="1400" b="1" lang="ja-JP" altLang="en-US">
-                <a:solidFill>
-                  <a:srgbClr val="FFFEF8"/>
-                </a:solidFill>
-                <a:latin typeface="Noto Sans"/>
-                <a:ea typeface="Noto Sans CJK JP"/>
-                <a:cs typeface="Noto Sans"/>
-              </a:rPr>
-              <a:t>1. 投稿の実例と言語モデルの課題</a:t>
-            </a:r>
-          </a:p>
-        </p:txBody>
-      </p:sp>
-      <p:sp>
-        <p:nvSpPr>
-          <p:cNvPr id="4" name="TextBox 3"/>
-          <p:cNvSpPr txBox="1"/>
-          <p:nvPr/>
-        </p:nvSpPr>
-        <p:spPr>
-          <a:xfrm>
-            <a:off x="594360" y="1463040"/>
-            <a:ext cx="7955279" cy="710692"/>
-          </a:xfrm>
-          <a:prstGeom prst="rect">
-            <a:avLst/>
-          </a:prstGeom>
-          <a:noFill/>
-        </p:spPr>
-        <p:txBody>
-          <a:bodyPr wrap="square" lIns="0" rIns="0" tIns="0" bIns="0">
-            <a:noAutofit/>
-          </a:bodyPr>
-          <a:lstStyle/>
-          <a:p>
-            <a:pPr algn="l">
-              <a:lnSpc>
-                <a:spcPts val="2618"/>
-              </a:lnSpc>
-              <a:spcBef>
-                <a:spcPts val="0"/>
-              </a:spcBef>
-              <a:spcAft>
-                <a:spcPts val="0"/>
-              </a:spcAft>
-              <a:buNone/>
-              <a:defRPr sz="2200" b="0">
-                <a:solidFill>
-                  <a:srgbClr val="303437"/>
-                </a:solidFill>
-                <a:latin typeface="Noto Sans"/>
-              </a:defRPr>
-            </a:pPr>
-            <a:r>
-              <a:rPr sz="2200" b="0" lang="ja-JP" altLang="en-US">
-                <a:solidFill>
-                  <a:srgbClr val="303437"/>
-                </a:solidFill>
-                <a:latin typeface="Noto Sans"/>
-                <a:ea typeface="Noto Sans CJK JP"/>
-                <a:cs typeface="Noto Sans"/>
-              </a:rPr>
-              <a:t>HELMでは、AA系・white系の言語的特徴が多い投稿をそれぞれ集め、言語モデルがどれだけ予測できるかを比べる。</a:t>
-            </a:r>
-          </a:p>
-        </p:txBody>
-      </p:sp>
-      <p:sp>
-        <p:nvSpPr>
-          <p:cNvPr id="5" name="TextBox 4"/>
-          <p:cNvSpPr txBox="1"/>
-          <p:nvPr/>
-        </p:nvSpPr>
-        <p:spPr>
-          <a:xfrm>
-            <a:off x="594360" y="2338324"/>
-            <a:ext cx="7955279" cy="1043178"/>
-          </a:xfrm>
-          <a:prstGeom prst="rect">
-            <a:avLst/>
-          </a:prstGeom>
-          <a:noFill/>
-        </p:spPr>
-        <p:txBody>
-          <a:bodyPr wrap="square" lIns="0" rIns="0" tIns="0" bIns="0">
-            <a:noAutofit/>
-          </a:bodyPr>
-          <a:lstStyle/>
-          <a:p>
-            <a:pPr algn="l">
-              <a:lnSpc>
-                <a:spcPts val="2618"/>
-              </a:lnSpc>
-              <a:spcBef>
-                <a:spcPts val="0"/>
-              </a:spcBef>
-              <a:spcAft>
-                <a:spcPts val="0"/>
-              </a:spcAft>
-              <a:buNone/>
-              <a:defRPr sz="2200" b="0">
-                <a:solidFill>
-                  <a:srgbClr val="303437"/>
-                </a:solidFill>
-                <a:latin typeface="Noto Sans"/>
-              </a:defRPr>
-            </a:pPr>
-            <a:r>
-              <a:rPr sz="2200" b="0" lang="ja-JP" altLang="en-US">
-                <a:solidFill>
-                  <a:srgbClr val="303437"/>
-                </a:solidFill>
-                <a:latin typeface="Noto Sans"/>
-                <a:ea typeface="Noto Sans CJK JP"/>
-                <a:cs typeface="Noto Sans"/>
-              </a:rPr>
-              <a:t>入力は投稿全文で、直前までの文字列から次のトークンを予測する。参照回答の代わりに、実際に書かれた文字列の確率を評価する。</a:t>
-            </a:r>
-          </a:p>
-        </p:txBody>
-      </p:sp>
-      <p:sp>
-        <p:nvSpPr>
-          <p:cNvPr id="6" name="sources"/>
-          <p:cNvSpPr txBox="1"/>
-          <p:nvPr/>
-        </p:nvSpPr>
-        <p:spPr>
-          <a:xfrm>
-            <a:off x="502920" y="4700016"/>
-            <a:ext cx="8183879" cy="530352"/>
-          </a:xfrm>
-          <a:prstGeom prst="rect">
-            <a:avLst/>
-          </a:prstGeom>
-          <a:noFill/>
-        </p:spPr>
-        <p:txBody>
-          <a:bodyPr wrap="square" lIns="0" rIns="0" tIns="0" bIns="0">
-            <a:noAutofit/>
-          </a:bodyPr>
-          <a:lstStyle/>
-          <a:p>
-            <a:pPr algn="l">
-              <a:lnSpc>
-                <a:spcPts val="940"/>
-              </a:lnSpc>
-              <a:spcBef>
-                <a:spcPts val="0"/>
-              </a:spcBef>
-              <a:spcAft>
-                <a:spcPts val="140"/>
-              </a:spcAft>
-              <a:buNone/>
-              <a:defRPr sz="810" b="0">
-                <a:solidFill>
-                  <a:srgbClr val="303437"/>
-                </a:solidFill>
-                <a:latin typeface="Noto Sans"/>
-              </a:defRPr>
-            </a:pPr>
-            <a:r>
-              <a:rPr sz="810" b="0" lang="ja-JP" altLang="en-US">
-                <a:solidFill>
-                  <a:srgbClr val="626669"/>
-                </a:solidFill>
-                <a:latin typeface="Noto Sans"/>
-                <a:ea typeface="Noto Sans CJK JP"/>
-                <a:cs typeface="Noto Sans"/>
-              </a:rPr>
-              <a:t>[1] Stanford CRFM, HELM TwitterAAEScenario. </a:t>
-            </a:r>
-          </a:p>
-          <a:p>
-            <a:pPr>
-              <a:lnSpc>
-                <a:spcPts val="940"/>
-              </a:lnSpc>
-              <a:buNone/>
-              <a:defRPr sz="810" b="0">
-                <a:solidFill>
-                  <a:srgbClr val="303437"/>
-                </a:solidFill>
-                <a:latin typeface="Noto Sans"/>
-              </a:defRPr>
-            </a:pPr>
-            <a:r>
-              <a:rPr sz="810" b="0" lang="ja-JP" altLang="en-US">
-                <a:solidFill>
-                  <a:srgbClr val="626669"/>
-                </a:solidFill>
-                <a:latin typeface="Noto Sans"/>
-                <a:ea typeface="Noto Sans CJK JP"/>
-                <a:cs typeface="Noto Sans"/>
-              </a:rPr>
-              <a:t/>
-            </a:r>
-            <a:r>
-              <a:rPr sz="810" b="0" lang="ja-JP" altLang="en-US">
-                <a:solidFill>
-                  <a:srgbClr val="626669"/>
-                </a:solidFill>
-                <a:latin typeface="Noto Sans"/>
-                <a:ea typeface="Noto Sans CJK JP"/>
-                <a:cs typeface="Noto Sans"/>
-                <a:hlinkClick r:id="rId2"/>
-              </a:rPr>
-              <a:t>https://github.com/stanford-crfm/helm/blob/main/src/helm/benchmark/scenarios/twitter_aae_scenario.py</a:t>
             </a:r>
           </a:p>
         </p:txBody>
@@ -24295,7 +18607,7 @@
                 <a:ea typeface="Noto Sans CJK JP"/>
                 <a:cs typeface="Noto Sans"/>
               </a:rPr>
-              <a:t>AA・whiteは、言語の特徴に基づく抽出条件</a:t>
+              <a:t>AA・whiteは、言語的特徴に基づく名前</a:t>
             </a:r>
           </a:p>
         </p:txBody>
@@ -24343,7 +18655,7 @@
                 <a:ea typeface="Noto Sans CJK JP"/>
                 <a:cs typeface="Noto Sans"/>
               </a:rPr>
-              <a:t>1. 投稿の実例と言語モデルの課題</a:t>
+              <a:t>1. 投稿の実例と言語的特徴</a:t>
             </a:r>
           </a:p>
         </p:txBody>
@@ -24397,7 +18709,7 @@
                 <a:ea typeface="Noto Sans CJK JP"/>
                 <a:cs typeface="Noto Sans"/>
               </a:rPr>
-              <a:t>本編3例と追加10例は、HELMの公開評価に使われた13件の投稿全文。大文字や独自のつづり、句読点にも会話の特徴が現れる。</a:t>
+              <a:t>本編3例と追加10例では、異なる13件の投稿全文を示す。大文字や独自のつづり、句読点にも会話の特徴が現れる。</a:t>
             </a:r>
           </a:p>
         </p:txBody>
@@ -24451,7 +18763,7 @@
                 <a:ea typeface="Noto Sans CJK JP"/>
                 <a:cs typeface="Noto Sans"/>
               </a:rPr>
-              <a:t>aa／whiteは抽出条件の名前。地域の人口構成に関連する言語の混合比を使っており、投稿者の自己申告による人種を表すラベルではない。</a:t>
+              <a:t>aa／whiteは、地域の人口構成に関連する言語の混合比に基づく名前。投稿者の自己申告による人種を表すラベルではない。</a:t>
             </a:r>
           </a:p>
         </p:txBody>
@@ -24631,7 +18943,7 @@
                 <a:ea typeface="Noto Sans CJK JP"/>
                 <a:cs typeface="Noto Sans"/>
               </a:rPr>
-              <a:t>1. 投稿の実例と言語モデルの課題</a:t>
+              <a:t>1. 投稿の実例と言語的特徴</a:t>
             </a:r>
           </a:p>
         </p:txBody>
@@ -24685,7 +18997,7 @@
                 <a:ea typeface="Noto Sans CJK JP"/>
                 <a:cs typeface="Noto Sans"/>
               </a:rPr>
-              <a:t>HELM test / aa抽出条件・投稿全文</a:t>
+              <a:t>投稿全文 / aa群（言語的特徴で抽出）</a:t>
             </a:r>
           </a:p>
         </p:txBody>
@@ -25101,7 +19413,7 @@
                 <a:ea typeface="Noto Sans CJK JP"/>
                 <a:cs typeface="Noto Sans"/>
               </a:rPr>
-              <a:t>1. 投稿の実例と言語モデルの課題</a:t>
+              <a:t>1. 投稿の実例と言語的特徴</a:t>
             </a:r>
           </a:p>
         </p:txBody>
@@ -25155,7 +19467,7 @@
                 <a:ea typeface="Noto Sans CJK JP"/>
                 <a:cs typeface="Noto Sans"/>
               </a:rPr>
-              <a:t>HELM test / aa抽出条件・投稿全文</a:t>
+              <a:t>投稿全文 / aa群（言語的特徴で抽出）</a:t>
             </a:r>
           </a:p>
         </p:txBody>
